--- a/ADG/15장/15장_V뷰기반모니터링과문제해결.pptx
+++ b/ADG/15장/15장_V뷰기반모니터링과문제해결.pptx
@@ -43,6 +43,12 @@
     <p:sldId id="291" r:id="rId43"/>
     <p:sldId id="292" r:id="rId44"/>
     <p:sldId id="293" r:id="rId45"/>
+    <p:sldId id="294" r:id="rId46"/>
+    <p:sldId id="295" r:id="rId47"/>
+    <p:sldId id="296" r:id="rId48"/>
+    <p:sldId id="297" r:id="rId49"/>
+    <p:sldId id="298" r:id="rId50"/>
+    <p:sldId id="299" r:id="rId51"/>
   </p:sldIdLst>
   <p:sldSz cx="12191695" cy="6858000" type="screen4x3"/>
   <p:notesSz cx="6858000" cy="9144000"/>
@@ -539,7 +545,7 @@
           <a:lstStyle/>
           <a:p>
             <a:r>
-              <a:t>7장에서 배운 주의사항이 여기서도 그대로 적용됩니다. RECOVERY_MODE 는 목적지가 BAD PARAM 이면 실제로 적용 중이어도 IDLE 로 나옵니다. 그래서 두 열을 함께 조회해야 합니다. OPEN_MODE 의 WITH APPLY 라는 꼬리표는 MRP0 의 존재를 그대로 반영하므로, 이 한 문자열만으로도 적용 여부를 알 수 있습니다. 반대로 MRP 를 멈추면 READ ONLY 로 바뀝니다. 이 장에서 다룰 모든 기능이 이 상태를 전제로 합니다.</a:t>
+              <a:t>13·14장에서 Broker 는 편리한 도구였다. 한 줄로 구성 전체를 볼 수 있었다. 그런데 전송이 완전히 끊긴 상태에서 SUCCESS 가 나왔다. Intended State 라는 개념 때문이며 논리적으로는 맞는 판정이다. 그러나 감시의 목적에서 보면 그 화면만으로는 부족하다. 이 장은 요약되기 전의 원자료를 직접 읽는다. 새로운 뷰는 없고 4장부터 써 온 것들을 하나의 진단 체계로 묶는다.</a:t>
             </a:r>
           </a:p>
         </p:txBody>
@@ -609,7 +615,7 @@
           <a:lstStyle/>
           <a:p>
             <a:r>
-              <a:t>이 기준의 가치는 새로운 상황도 판단할 수 있다는 것입니다. 표를 외우는 대신 "이 작업이 영구 파일이나 딕셔너리를 바꾸는가"를 물으면 됩니다. 예를 들어 DBMS_STATS 는 딕셔너리를 바꾸니 안 되고, PLAN_TABLE 은 GTT 니까 됩니다. 시퀀스는 애매해 보이지만 메모리에서만 관리하는 방식으로 우회했다는 것을 알면 이해됩니다. 읽기 분산 설계에서 조회를 분류할 때 이 기준이 그대로 판단 근거가 됩니다.</a:t>
+              <a:t>값의 종류는 YES, WRONG VALID_TYPE, WRONG VALID_ROLE, INACTIVE, UNKNOWN 다섯이다. 막 바꾼 직후와 아예 쓰지 않는 목적지가 같은 값으로 보인다는 것이 함정이다. 감시에 쓸 실용적인 조건은 WHERE destination IS NOT NULL AND valid_now &lt;&gt; 'YES' 다. 쓰는 목적지 중 유효하지 않은 것만 걸러진다.</a:t>
             </a:r>
           </a:p>
         </p:txBody>
@@ -679,7 +685,7 @@
           <a:lstStyle/>
           <a:p>
             <a:r>
-              <a:t>동작 방식은 이렇습니다. Standby 가 Primary 로 새 연결을 만들어 현재 세션의 사용자로 인증한 뒤 그 문장을 실행합니다. 커밋 후 그 변경이 리두를 통해 Standby 로 돌아옵니다. 즉 실제로 실행된 곳은 Primary 이고 Standby 는 중계 역할만 합니다. 목적은 편의성입니다. 조회는 Standby 로 보내고 싶은데 애플리케이션이 가끔 작은 갱신을 한다면 그 한두 문장 때문에 접속을 나누는 것이 번거롭죠. 리다이렉션이 그 간격을 메웁니다.</a:t>
+              <a:t>RFS 는 클라이언트별로 여럿 뜬다. LGWR 는 실시간 리두를, Archival 은 아카이브 파일을 받는다. UNKNOWN 은 아직 배정되지 않은 예비다. MRP0 는 SRL 을 읽어 적용하고 ARCH 는 Standby 에서 SRL 을 아카이브한다. DGRD 는 13장에서 Broker 를 켠 뒤에 생긴 통신용 프로세스다. 블록 단위 비교는 apply lag 보다 정밀한 지표다.</a:t>
             </a:r>
           </a:p>
         </p:txBody>
@@ -749,7 +755,7 @@
           <a:lstStyle/>
           <a:p>
             <a:r>
-              <a:t>실습에서도 처음에 SYS 로 시도해 이 오류를 만났고 일반 사용자로 바꾸자 바로 동작했습니다. 오류 메시지가 원인을 알려 주지 않는다는 점도 문제입니다. "리다이렉션이 실패했다"고만 말할 뿐 왜인지는 말하지 않습니다. 접속 계정, Primary 접근 가능 여부, 대상 객체의 존재를 차례로 확인해야 합니다. 기능 검증은 실제 애플리케이션이 쓰는 계정과 같은 종류로 해야 한다는 교훈이 여기서 나옵니다.</a:t>
+              <a:t>조건을 빼면 항상 절반이 NO 로 나오고, 이것을 보고 절반이 적용되지 않았다고 읽는 것이 흔한 오해다. 조건을 넣으면 실측에서 70~73번 모두 YES 였다. 부수적으로 같은 시퀀스의 로컬·원격 COMPLETION_TIME 차이도 읽는다. 70번이 로컬 19:55:38, 원격 19:56:30 으로 약 52초였다. 그것이 전송에 걸린 시간이며 평소 값을 알아 두면 느려졌을 때 알아볼 수 있다.</a:t>
             </a:r>
           </a:p>
         </p:txBody>
@@ -819,7 +825,7 @@
           <a:lstStyle/>
           <a:p>
             <a:r>
-              <a:t>이 구분이 진단의 출발점입니다. DDL 에서 ORA-16397 이 아니라 ORA-16000 이 나오는 것이 특히 중요합니다. 리다이렉션을 켰는데도 아예 시도되지 않았다는 뜻이니까요. 이름 그대로 DML 리다이렉션이며 DDL 은 포함하지 않습니다. 점검 순서는 문장 종류 → 설정 → 계정 → 경로 → 객체입니다. 네 번째 단계는 3장의 진단이 그대로 쓰입니다. Standby 에서 Primary 로 tnsping 이 되는지 확인하는 것이죠.</a:t>
+              <a:t>이 값을 감시 지표로 쓰면 상시 경보가 뜬다. 9장에서 실시간 적용을 켠 순간부터 계속 0 이었을 것이다. 대신 apply lag, MRP0 의 SEQUENCE#, SRL 의 ACTIVE 그룹을 본다. 역설적인 확인도 있다. MRP0 가 74번을 적용 중인데 ARCHIVED_SEQ# 는 73이다. 아카이브되기 전의 리두를 이미 적용하고 있다는 뜻이며 실시간 적용이 정상 동작한다는 가장 분명한 증거다.</a:t>
             </a:r>
           </a:p>
         </p:txBody>
@@ -889,7 +895,7 @@
           <a:lstStyle/>
           <a:p>
             <a:r>
-              <a:t>리다이렉션의 가치는 부하 분산이 아니라 접속 단순화에 있습니다. 이 점을 오해하면 기대한 효과를 얻지 못합니다. 수십만 행을 갱신하는 배치를 리다이렉션으로 돌리면 Standby 가 중계기 노릇을 하며 지연만 늘어납니다. 그런 작업은 처음부터 Primary 에 접속해 실행해야 합니다. 적합한 용도는 마지막 접속 시각 기록이나 조회 이력 한 줄 남기기 정도입니다. 그리고 트랜잭션이 Primary 에 존재하므로 Standby 세션이 문제를 겪는 동안 Primary 에 잠금이 남을 수 있습니다.</a:t>
+              <a:t>두 실습의 대비가 이 장의 설계다. 같은 결과(전송 없음)를 서로 다른 원인으로 만들어 놓고 각 층이 어떻게 다르게 답하는지 본다. boston 데이터베이스 자체는 살아 있고 접속만 안 되는 상태다. 실제 운영에서 네트워크 문제나 리스너 장애로 흔히 생기는 상황이며 데이터에는 영향이 없으므로 실습으로 만들기 안전하다. 복구에 시간이 걸리므로 실습 시간을 넉넉히 잡아야 한다는 점도 미리 일러 둔다.</a:t>
             </a:r>
           </a:p>
         </p:txBody>
@@ -959,7 +965,7 @@
           <a:lstStyle/>
           <a:p>
             <a:r>
-              <a:t>0은 "지연이 전혀 없어야 한다"는 뜻인데 비동기 전송에서는 사실상 항상 위반됩니다. LGWR 이 쓴 리두와 Standby 에 도착한 리두 사이에 아무리 짧아도 시차가 있으니까요. 0을 쓰려면 동기 전송이어야 합니다. 값은 정상 상태의 지연을 관찰해 정합니다. 실측에서 정상 상태는 0초였고 히스토그램의 대부분이 0초 구간이었으므로, 5초나 10초로 잡으면 평상시에는 거의 걸리지 않고 실제 문제가 있을 때만 걸립니다.</a:t>
+              <a:t>ERROR 열에 실제 원인이 그대로 들어 있다는 것이 이 뷰의 값어치다. 그리고 파라미터가 ENABLE 그대로라는 점이 진단의 열쇠다. 14장에서 Broker 로 껐을 때는 RESET 이었다. ENABLE 인데 STATUS 가 ERROR 이면 장애, RESET 이면 Broker 가 껐고, DEFER 면 사람이 SQL 로 껐다. 두 열의 조합만으로 장애인가 설정인가가 갈린다.</a:t>
             </a:r>
           </a:p>
         </p:txBody>
@@ -1029,7 +1035,7 @@
           <a:lstStyle/>
           <a:p>
             <a:r>
-              <a:t>이 구조의 장점은 Standby 가 정상일 때는 부하를 나누고 뒤처졌을 때만 Primary 로 간다는 것입니다. 평상시 대부분의 조회가 Standby 에서 처리되고 문제가 있을 때만 Primary 가 받습니다. 그리고 이 오류는 장애가 아니라 "지금 이 Standby 로는 요건을 못 맞춘다"는 통보이므로 재시도가 자연스러운 처리입니다. 실패 경로는 반드시 실제로 실패시켜 검증해야 합니다. 적용을 잠시 멈춰 지연을 만들고 재시도가 동작하는지 확인하십시오.</a:t>
+              <a:t>접속 문자열이 나오므로 tnsnames 설정 오류라면 여기서 드러난다. 트레이스 파일 이름은 다음 층으로 내려가는 고리가 된다. 마지막 줄이 중요하다. Standby 로 보내지 못해도 Primary 는 멈추지 않는다. MaxPerformance 이기 때문이며 MaxProtection 이었다면 멈췄을 것이다. 8장에서 배운 보호 모드의 차이가 여기서 실제로 드러난다.</a:t>
             </a:r>
           </a:p>
         </p:txBody>
@@ -1099,7 +1105,7 @@
           <a:lstStyle/>
           <a:p>
             <a:r>
-              <a:t>이 장에서 SYS 로 시험해 오판할 뻔한 기능이 두 개나 나왔습니다. DML 리다이렉션과 지연 한도입니다. 둘 다 일반 사용자로 바꾸자 바로 동작했습니다. 여기서 일반화할 수 있습니다. ADG 의 세션 기능들은 대체로 일반 사용자를 전제로 설계되어 있습니다. 기능 검증은 실제 애플리케이션 계정과 같은 종류로 해야 합니다. 그리고 설정만 거부되고 세션은 그대로 쓸 수 있다는 점도 기억해 두십시오.</a:t>
+              <a:t>두 방향의 반례를 모두 봤다는 것이 중요하다. 한쪽만 봤다면 Warning 을 무시하거나 반대로 전부 확인하는 규칙을 만들었을 것이다. 오라클이 조치까지 알려 주는 행이 Warning 으로 분류되어 있다는 점도 인상적이다. 감시 SQL 은 ERROR_CODE &lt;&gt; 0 과 시간 조건을 함께 넣는다. 이 뷰는 재기동 전까지 과거 기록을 그대로 들고 있기 때문이다.</a:t>
             </a:r>
           </a:p>
         </p:txBody>
@@ -1169,7 +1175,7 @@
           <a:lstStyle/>
           <a:p>
             <a:r>
-              <a:t>2장에서 보호 모드를 성능과 보호의 교환으로 설명했습니다. 그때는 주로 평상시 성능과 Primary 정지 위험의 교환으로 다뤘죠. 그런데 8장에서는 사고 시 복구 가능성을 결정했고, 이 장에서는 조회 신선도 보장 장치의 사용 가능 여부를 결정합니다. 보호 모드는 한 가지가 아니라 여러 기능의 전제 조건입니다. 그러므로 보호 모드 선택은 성능 문제가 아니라 얼마만큼의 손실과 제약을 감수할 것인가의 문제입니다.</a:t>
+              <a:t>오지 않으니 늦지도 않는다. 14장에서 확인한 성질이 실제 장애에서도 그대로다. 그러므로 Standby 쪽 판정은 지연이 아니라 프로세스를 본다. RFS(LGWR) 가 사라진 것이 연결이 끊겼다는 가장 직접적인 증거다. 그리고 Standby 는 전송이 꺼졌다는 사실을 모른다. 안 온다와 안 보낸다를 받는 쪽에서는 구별할 수 없으므로 양쪽을 다 봐야 한다. 지연만 보는 감시는 이 상황을 끝내 잡지 못한다.</a:t>
             </a:r>
           </a:p>
         </p:txBody>
@@ -1239,7 +1245,7 @@
           <a:lstStyle/>
           <a:p>
             <a:r>
-              <a:t>표본이 대략 2초에 한 번 수집되므로 59회는 약 2분에 해당합니다. 3초부터 59초까지 구간마다 1~2회씩 있는 것은 적용을 재개해 따라잡는 동안 지연이 점진적으로 줄어든 흔적입니다. 59초에서 3초로 내려오면서 각 구간을 한두 번씩 스친 것이죠. 참고로 이 뷰가 기록하는 항목은 apply lag 하나뿐입니다. transport lag 히스토그램은 없으므로 전송 쪽 추세가 필요하면 별도로 수집해야 합니다.</a:t>
+              <a:t>층을 내려갈수록 구체적이 된다. 이 사례는 2층에서 끝났다. 원인이 분명했기 때문이다. 4층인 트레이스까지 내려가는 것은 오류는 없는데 느리다 같은 경우다. Broker 가 ORA-16857 로 경보한 것은 TransportDisconnectedThreshold 라는 임계값이 있기 때문이며, 14장에서 정리한 규칙 그대로다. 임계값이 있는 항목만 경보한다.</a:t>
             </a:r>
           </a:p>
         </p:txBody>
@@ -1309,7 +1315,7 @@
           <a:lstStyle/>
           <a:p>
             <a:r>
-              <a:t>DBA_ 뷰는 현재 컨테이너만 보여 줍니다. SYS 로 접속하면 CDB$ROOT 이므로 루트의 통계만 조회되죠. 1장에서 겪은 것과 같은 상황입니다. 더 중요한 것은 값이 0이라는 사실입니다. 지금 이 순간 ADG 로 조회하고 있는데도 0입니다. 이 통계는 주기적으로 수집되고 Standby 에서는 갱신이 제한적이기 때문입니다. 따라서 이 값을 근거로 "쓰지 않았다"고 말할 수 없습니다. MOUNTED 로만 두면 옵션이 필요 없고, READ ONLY 로 여는 순간부터 옵션의 영역이라는 점을 절차서에 명시해 두십시오.</a:t>
+              <a:t>세 번째가 이 장 전체를 관통한다. 리스너를 내렸을 때 Broker 는 member disconnected 라고만 말했다. 같은 시점에 V$ARCHIVE_DEST 의 ERROR 열에는 ORA-12541: TNS:no listener 가 그대로 들어 있었다. 원인은 아래층에 있다. 네 번째 이유도 있다. 조치를 마친 직후 SHOW 는 ERROR 였는데 SQL 뷰는 이미 VALID 였다. 아래층이 먼저 회복되고 요약이 나중에 따라온다.</a:t>
             </a:r>
           </a:p>
         </p:txBody>
@@ -1379,7 +1385,7 @@
           <a:lstStyle/>
           <a:p>
             <a:r>
-              <a:t>안정성을 한 숫자로 요약할 수 있다는 것이 이 지표의 가치입니다. 다만 누적값이라는 점을 반드시 기억해야 합니다. 한 번의 조회로는 "지금까지 전체가 어땠는가"만 알 수 있고 "최근 한 시간이 어땠는가"는 알 수 없습니다. 정기적으로 스냅샷을 떠 두고 비교하십시오. 그리고 재기동 직후의 낮은 값은 안정성의 증거가 아니라 표본이 적다는 뜻일 뿐입니다. 실측의 9.3 퍼센트도 실습 때문에 올라간 값이므로 기준으로 삼으면 안 됩니다.</a:t>
+              <a:t>갭 뷰가 비어 있다고 갭이 없는 것이 아니다. 이 뷰는 Standby 가 받아야 하는데 못 받은 구간을 인식했을 때 채워지는데, 지금은 연락 자체를 못 받고 있다. 8장에서 개념으로 배운 갭을 여기서는 시퀀스 번호의 변화로 확인했다. 행이 없는 것은 조회로 볼 수 없으므로 Primary 의 최대 시퀀스와 비교하는 방법을 함께 써야 한다. 조회로 볼 수 없는 것을 다루는 요령이기도 하다.</a:t>
             </a:r>
           </a:p>
         </p:txBody>
@@ -1449,7 +1455,7 @@
           <a:lstStyle/>
           <a:p>
             <a:r>
-              <a:t>7장에서 배운 함정이 여기서도 적용됩니다. 적용이 멈추면 두 지연이 0으로 보이므로, 지연 값만 감시하는 모니터링은 이 상태를 정상으로 보고합니다. 그래서 MRP0 의 존재를 먼저 확인해야 합니다. 세 뷰를 조합하면 "적용이 도는데 뒤처져 있고 최근에도 그랬다" 같은 판단을 할 수 있습니다. 하나만으로는 불가능한 판단이죠. 7장의 통합 점검 조회에 히스토그램 비율을 더하면 이 세 관점이 한 화면에 들어옵니다.</a:t>
+              <a:t>이유는 ReopenSecs 다. 13장의 속성 목록에서 실측값이 300 이었다. 실패한 목적지를 즉시 다시 시도하지 않고 그만큼 기다린다. 죽은 목적지에 계속 접속하면 아카이버가 붙잡히기 때문이다. 급하면 재촉할 수 있다. Broker 환경이라면 LogShipping 을 OFF 로 했다가 ON 으로 준다. Broker 가 없다면 DEFER 후 ENABLE 인데, Broker 환경에서 그 SQL 을 쓰면 안 된다.</a:t>
             </a:r>
           </a:p>
         </p:txBody>
@@ -1519,7 +1525,7 @@
           <a:lstStyle/>
           <a:p>
             <a:r>
-              <a:t>실무에서 부딪히는 것은 대개 "순수한 조회가 아닌 조회"입니다. 조회할 때마다 로그 테이블에 한 줄 넣는 구조라면 그 한 줄 때문에 전체가 Standby 에서 실패합니다. 중간 결과를 일반 테이블에 넣는 방식이라면 GTT 로 바꾸는 것이 선행 작업이 됩니다. 그래서 읽기 분산은 접속만 바꾸면 되는 일이 아니라, 어떤 조회를 옮길 수 있는지 먼저 분류하는 작업이 필요합니다. 9.4절의 기준이 그 분류의 근거가 됩니다.</a:t>
+              <a:t>status updated 58 seconds ago 가 그 증거다. Broker 상태는 주기적으로 다시 계산되며 그 출력은 문제가 있던 구간을 반영한 것이다. 고친 직후의 화면을 결론으로 삼지 않는다. 조치 완료는 아래층부터 확인한다. V$ARCHIVE_DEST 가 VALID 인가, 끊긴 동안의 데이터가 따라왔는가, MRP0 와 RFS 가 돌아왔는가. 그다음에 Broker 를 본다.</a:t>
             </a:r>
           </a:p>
         </p:txBody>
@@ -1589,7 +1595,7 @@
           <a:lstStyle/>
           <a:p>
             <a:r>
-              <a:t>세 습관 모두 이 장의 실측에서 검증됐습니다. 첫 번째는 DML 리다이렉션과 지연 한도에서 각각 ORA-16397 과 ORA-03174 를 만난 경험입니다. 둘 다 일반 사용자로 바꾸자 바로 동작했습니다. 두 번째는 읽기 일관성 측정에서 SQL*Plus 의 암묵적 커밋 때문에 잘못된 결론에 이를 뻔한 경험입니다. 세 번째는 같은 상황에서도 오류 번호가 다르면 처리 경로가 다르다는 것입니다. 기술적으로 어려운 내용은 없지만 습관이 되어 있어야 급할 때 제대로 판단할 수 있습니다.</a:t>
+              <a:t>SCOPE=BOTH 가 자동으로 붙는다는 것이 중요하다. 다음 기동에도 유지되므로 반드시 되돌려야 하며, 재기동으로도 꺼지지 않는다. ORA-02017: integer value required 는 음수에도 나온다. 이 파라미터가 부호 없는 정수를 받기 때문이며, 오류 메시지가 원인을 정확히 설명하지 않는 예다. 이런 경우가 드물지 않으므로 메시지를 그대로 믿기보다 문서에서 유효 범위를 확인한다.</a:t>
             </a:r>
           </a:p>
         </p:txBody>
@@ -1659,7 +1665,7 @@
           <a:lstStyle/>
           <a:p>
             <a:r>
-              <a:t>재해 복구 능력은 조금도 줄지 않는다. USING CURRENT LOGFILE 도 그대로 쓸 수 있어 실시간 적용이며, 줄어드는 것은 조회뿐이다. ORA-01219 는 열려 있지 않다는 뜻이고 ORA-16000 은 읽기 전용이라 쓸 수 없다는 뜻이다. 오류 번호가 상태를 가른다. 고정 뷰는 조회되므로 Standby 에 SYSDBA 로 붙기만 하면 두 지연을 그대로 잴 수 있다. PDB 서비스는 사라져 그 서비스로 접속하면 ORA-12514 다. 리스너는 살아 있고 등록된 서비스만 사라진 것이다.</a:t>
+              <a:t>알림 로그에서 본 chicago_arc1_2482.trc 가 이 목록에 있다. 알림 로그가 트레이스 파일 이름을 알려 준다는 것이 두 로그를 잇는 고리다. 우리 환경은 실시간 전송이므로 TT04 가 계속 일하고, 그래서 파일이 가장 크며 평소 진단에서 볼 것도 이 파일이다. 알림 로그에도 TT04 (PID:7487): SRL selected 가 나오므로 같은 프로세스임을 확인할 수 있다.</a:t>
             </a:r>
           </a:p>
         </p:txBody>
@@ -1729,7 +1735,287 @@
           <a:lstStyle/>
           <a:p>
             <a:r>
-              <a:t>9.2.1 에서 정리한 표식 둘에 하나가 더 붙는 셈이고 이것은 Primary 에서 보이는 표식이다. WITH QUERY 가 있으면 그 Standby 는 열려 있고 곧 옵션을 쓰고 있다는 뜻이다. ARCHIVED_SEQ# 와 APPLIED_SEQ# 의 차이가 밀린 양이다. Broker 의 Real Time Query 도 ON 에서 OFF 로 바뀌지만 구성 상태는 양쪽 모두 SUCCESS 다. 닫는 것은 장애가 아니다. V$ARCHIVED_LOG 의 최댓값을 쓰면 RESETLOGS 이전 인큐네이션의 번호를 집는다. 실측에서 94 가 나왔는데 그때 현재 시퀀스는 12 였다.</a:t>
+              <a:t>정상일 때의 모습을 알아 두는 것이 이 파일을 쓰는 방법이다. 문제가 있으면 같은 자리에 오류나 재시도가 나타난다. 켤 때의 원칙도 정리해 둔다. 필요한 수준만 켠다, 시간을 정해 둔다, 켜기 전에 공간을 확인한다, 끈 뒤 V$PARAMETER 로 0인지 확인한다, 오래된 트레이스는 adrci 의 purge 로 정리한다. 실무에서 가장 흔한 사고는 켜 둔 것을 잊는 것이다.</a:t>
+            </a:r>
+          </a:p>
+        </p:txBody>
+      </p:sp>
+      <p:sp>
+        <p:nvSpPr>
+          <p:cNvPr id="4" name="Slide Number Placeholder 3"/>
+          <p:cNvSpPr>
+            <a:spLocks noGrp="1"/>
+          </p:cNvSpPr>
+          <p:nvPr>
+            <p:ph type="sldNum" idx="5" sz="quarter"/>
+          </p:nvPr>
+        </p:nvSpPr>
+        <p:spPr/>
+      </p:sp>
+    </p:spTree>
+  </p:cSld>
+  <p:clrMapOvr>
+    <a:masterClrMapping/>
+  </p:clrMapOvr>
+</p:notes>
+</file>
+
+<file path=ppt/notesSlides/notesSlide26.xml><?xml version="1.0" encoding="utf-8"?>
+<p:notes xmlns:a="http://schemas.openxmlformats.org/drawingml/2006/main" xmlns:p="http://schemas.openxmlformats.org/presentationml/2006/main" xmlns:r="http://schemas.openxmlformats.org/officeDocument/2006/relationships">
+  <p:cSld>
+    <p:spTree>
+      <p:nvGrpSpPr>
+        <p:cNvPr id="1" name=""/>
+        <p:cNvGrpSpPr/>
+        <p:nvPr/>
+      </p:nvGrpSpPr>
+      <p:grpSpPr>
+        <a:xfrm>
+          <a:off x="0" y="0"/>
+          <a:ext cx="0" cy="0"/>
+          <a:chOff x="0" y="0"/>
+          <a:chExt cx="0" cy="0"/>
+        </a:xfrm>
+      </p:grpSpPr>
+      <p:sp>
+        <p:nvSpPr>
+          <p:cNvPr id="2" name="Slide Image Placeholder 1"/>
+          <p:cNvSpPr>
+            <a:spLocks noGrp="1"/>
+          </p:cNvSpPr>
+          <p:nvPr>
+            <p:ph type="sldImg" idx="2"/>
+          </p:nvPr>
+        </p:nvSpPr>
+        <p:spPr/>
+      </p:sp>
+      <p:sp>
+        <p:nvSpPr>
+          <p:cNvPr id="3" name="Notes Placeholder 2"/>
+          <p:cNvSpPr>
+            <a:spLocks noGrp="1"/>
+          </p:cNvSpPr>
+          <p:nvPr>
+            <p:ph type="body" idx="3" sz="quarter"/>
+          </p:nvPr>
+        </p:nvSpPr>
+        <p:spPr/>
+        <p:txBody>
+          <a:bodyPr/>
+          <a:lstStyle/>
+          <a:p>
+            <a:r>
+              <a:t>15.2.2 절에서 뷰가 조회된다고 값이 있는 것은 아니라고 했는데 여기서는 한 걸음 더 나간다. 역할이 Logical 이 되면 뷰가 통째로 빈다. 감시 스크립트를 역할과 무관하게 돌리면 지연을 못 읽은 것을 장애로 오인한다. 판정은 STATE 한 값으로 한다. IDLE 이 정상, APPLYING 이 적용 중, SQL APPLY NOT ON 이면 멈춘 것이다. 진행은 DBA_LOGSTDBY_PROGRESS 의 세 SCN 으로 본다. 실측은 APPLIED 2988122 / READ 2988125 / NEWEST 2988129 로 거의 같았고 이것이 따라잡았다는 뜻이다.</a:t>
+            </a:r>
+          </a:p>
+        </p:txBody>
+      </p:sp>
+      <p:sp>
+        <p:nvSpPr>
+          <p:cNvPr id="4" name="Slide Number Placeholder 3"/>
+          <p:cNvSpPr>
+            <a:spLocks noGrp="1"/>
+          </p:cNvSpPr>
+          <p:nvPr>
+            <p:ph type="sldNum" idx="5" sz="quarter"/>
+          </p:nvPr>
+        </p:nvSpPr>
+        <p:spPr/>
+      </p:sp>
+    </p:spTree>
+  </p:cSld>
+  <p:clrMapOvr>
+    <a:masterClrMapping/>
+  </p:clrMapOvr>
+</p:notes>
+</file>
+
+<file path=ppt/notesSlides/notesSlide27.xml><?xml version="1.0" encoding="utf-8"?>
+<p:notes xmlns:a="http://schemas.openxmlformats.org/drawingml/2006/main" xmlns:p="http://schemas.openxmlformats.org/presentationml/2006/main" xmlns:r="http://schemas.openxmlformats.org/officeDocument/2006/relationships">
+  <p:cSld>
+    <p:spTree>
+      <p:nvGrpSpPr>
+        <p:cNvPr id="1" name=""/>
+        <p:cNvGrpSpPr/>
+        <p:nvPr/>
+      </p:nvGrpSpPr>
+      <p:grpSpPr>
+        <a:xfrm>
+          <a:off x="0" y="0"/>
+          <a:ext cx="0" cy="0"/>
+          <a:chOff x="0" y="0"/>
+          <a:chExt cx="0" cy="0"/>
+        </a:xfrm>
+      </p:grpSpPr>
+      <p:sp>
+        <p:nvSpPr>
+          <p:cNvPr id="2" name="Slide Image Placeholder 1"/>
+          <p:cNvSpPr>
+            <a:spLocks noGrp="1"/>
+          </p:cNvSpPr>
+          <p:nvPr>
+            <p:ph type="sldImg" idx="2"/>
+          </p:nvPr>
+        </p:nvSpPr>
+        <p:spPr/>
+      </p:sp>
+      <p:sp>
+        <p:nvSpPr>
+          <p:cNvPr id="3" name="Notes Placeholder 2"/>
+          <p:cNvSpPr>
+            <a:spLocks noGrp="1"/>
+          </p:cNvSpPr>
+          <p:nvPr>
+            <p:ph type="body" idx="3" sz="quarter"/>
+          </p:nvPr>
+        </p:nvSpPr>
+        <p:spPr/>
+        <p:txBody>
+          <a:bodyPr/>
+          <a:lstStyle/>
+          <a:p>
+            <a:r>
+              <a:t>200 만 행을 한 트랜잭션으로 넣고 2초 간격으로 조회하면 행이 잡힌다. PRIMARY_ 가 붙는 이유는 이 XID 가 Standby 의 것이 아니라 Primary 에서 그 트랜잭션이 받았던 번호이기 때문이다. 그래야 Primary 의 V$TRANSACTION 과 대조할 수 있다. PRIMARY_START_TIME 과 지금 시각의 차이가 그 트랜잭션이 붙잡고 있는 시간이며 실측 52초였다. 적용이 느릴 때 원인을 트랜잭션 단위로 설명할 수 있는 유일한 뷰다.</a:t>
+            </a:r>
+          </a:p>
+        </p:txBody>
+      </p:sp>
+      <p:sp>
+        <p:nvSpPr>
+          <p:cNvPr id="4" name="Slide Number Placeholder 3"/>
+          <p:cNvSpPr>
+            <a:spLocks noGrp="1"/>
+          </p:cNvSpPr>
+          <p:nvPr>
+            <p:ph type="sldNum" idx="5" sz="quarter"/>
+          </p:nvPr>
+        </p:nvSpPr>
+        <p:spPr/>
+      </p:sp>
+    </p:spTree>
+  </p:cSld>
+  <p:clrMapOvr>
+    <a:masterClrMapping/>
+  </p:clrMapOvr>
+</p:notes>
+</file>
+
+<file path=ppt/notesSlides/notesSlide28.xml><?xml version="1.0" encoding="utf-8"?>
+<p:notes xmlns:a="http://schemas.openxmlformats.org/drawingml/2006/main" xmlns:p="http://schemas.openxmlformats.org/presentationml/2006/main" xmlns:r="http://schemas.openxmlformats.org/officeDocument/2006/relationships">
+  <p:cSld>
+    <p:spTree>
+      <p:nvGrpSpPr>
+        <p:cNvPr id="1" name=""/>
+        <p:cNvGrpSpPr/>
+        <p:nvPr/>
+      </p:nvGrpSpPr>
+      <p:grpSpPr>
+        <a:xfrm>
+          <a:off x="0" y="0"/>
+          <a:ext cx="0" cy="0"/>
+          <a:chOff x="0" y="0"/>
+          <a:chExt cx="0" cy="0"/>
+        </a:xfrm>
+      </p:grpSpPr>
+      <p:sp>
+        <p:nvSpPr>
+          <p:cNvPr id="2" name="Slide Image Placeholder 1"/>
+          <p:cNvSpPr>
+            <a:spLocks noGrp="1"/>
+          </p:cNvSpPr>
+          <p:nvPr>
+            <p:ph type="sldImg" idx="2"/>
+          </p:nvPr>
+        </p:nvSpPr>
+        <p:spPr/>
+      </p:sp>
+      <p:sp>
+        <p:nvSpPr>
+          <p:cNvPr id="3" name="Notes Placeholder 2"/>
+          <p:cNvSpPr>
+            <a:spLocks noGrp="1"/>
+          </p:cNvSpPr>
+          <p:nvPr>
+            <p:ph type="body" idx="3" sz="quarter"/>
+          </p:nvPr>
+        </p:nvSpPr>
+        <p:spPr/>
+        <p:txBody>
+          <a:bodyPr/>
+          <a:lstStyle/>
+          <a:p>
+            <a:r>
+              <a:t>Standby 에서 SYS 로 복제 대상 행을 지운 뒤 Primary 에서 그 행을 고치면 적용이 멈춘다. STATE 는 SQL APPLY NOT ON 이 되고 DBA_LOGSTDBY_EVENTS 에 ORA-26787 이 표 이름과 키 값까지 함께 남는다. ORA-16222 는 자동 재시도다. 건너뛰기가 거부되면 원인을 없애는 편이 낫다. 지운 행을 되돌려 놓고 적용을 다시 시작하면 밀려 있던 UPDATE 가 정상 적용된다. 건너뛰었다면 그 변경은 영원히 반영되지 않는다.</a:t>
+            </a:r>
+          </a:p>
+        </p:txBody>
+      </p:sp>
+      <p:sp>
+        <p:nvSpPr>
+          <p:cNvPr id="4" name="Slide Number Placeholder 3"/>
+          <p:cNvSpPr>
+            <a:spLocks noGrp="1"/>
+          </p:cNvSpPr>
+          <p:nvPr>
+            <p:ph type="sldNum" idx="5" sz="quarter"/>
+          </p:nvPr>
+        </p:nvSpPr>
+        <p:spPr/>
+      </p:sp>
+    </p:spTree>
+  </p:cSld>
+  <p:clrMapOvr>
+    <a:masterClrMapping/>
+  </p:clrMapOvr>
+</p:notes>
+</file>
+
+<file path=ppt/notesSlides/notesSlide29.xml><?xml version="1.0" encoding="utf-8"?>
+<p:notes xmlns:a="http://schemas.openxmlformats.org/drawingml/2006/main" xmlns:p="http://schemas.openxmlformats.org/presentationml/2006/main" xmlns:r="http://schemas.openxmlformats.org/officeDocument/2006/relationships">
+  <p:cSld>
+    <p:spTree>
+      <p:nvGrpSpPr>
+        <p:cNvPr id="1" name=""/>
+        <p:cNvGrpSpPr/>
+        <p:nvPr/>
+      </p:nvGrpSpPr>
+      <p:grpSpPr>
+        <a:xfrm>
+          <a:off x="0" y="0"/>
+          <a:ext cx="0" cy="0"/>
+          <a:chOff x="0" y="0"/>
+          <a:chExt cx="0" cy="0"/>
+        </a:xfrm>
+      </p:grpSpPr>
+      <p:sp>
+        <p:nvSpPr>
+          <p:cNvPr id="2" name="Slide Image Placeholder 1"/>
+          <p:cNvSpPr>
+            <a:spLocks noGrp="1"/>
+          </p:cNvSpPr>
+          <p:nvPr>
+            <p:ph type="sldImg" idx="2"/>
+          </p:nvPr>
+        </p:nvSpPr>
+        <p:spPr/>
+      </p:sp>
+      <p:sp>
+        <p:nvSpPr>
+          <p:cNvPr id="3" name="Notes Placeholder 2"/>
+          <p:cNvSpPr>
+            <a:spLocks noGrp="1"/>
+          </p:cNvSpPr>
+          <p:nvPr>
+            <p:ph type="body" idx="3" sz="quarter"/>
+          </p:nvPr>
+        </p:nvSpPr>
+        <p:spPr/>
+        <p:txBody>
+          <a:bodyPr/>
+          <a:lstStyle/>
+          <a:p>
+            <a:r>
+              <a:t>첫 번째가 가장 중요하다. V$DATAGUARD_STATS 는 Primary 에서 no rows 이고, V$STANDBY_LOG 는 Primary 에서 전부 UNASSIGNED 다. 둘 다 오류가 나지 않으므로 같은 스크립트를 양쪽에 돌리면 Primary 에서 조용히 오판한다. V$DATABASE 로 역할을 먼저 판정하고 분기하는 구조여야 하며, 빈 결과와 오류도 구별해 처리해야 한다.</a:t>
             </a:r>
           </a:p>
         </p:txBody>
@@ -1799,7 +2085,217 @@
           <a:lstStyle/>
           <a:p>
             <a:r>
-              <a:t>읽기를 분산하면 세션이 어느 쪽에 붙었는지 헷갈리는 일이 생깁니다. 접속 문자열만 믿지 말고 세션 스스로 확인하게 하는 편이 안전합니다. 특히 역할 전환이 있는 환경에서는 접속 대상이 그대로인데 역할이 바뀔 수 있으므로 이름이 아니라 역할을 기준으로 삼아야 합니다. 실측에서 boston 의 chicago_pdb1 서비스가 리스너에 status READY 로 등록되어 있었습니다. 8장에서 새 PDB 를 열어야 한다고 강조한 이유가 여기서도 확인됩니다. 열지 않으면 서비스가 없고 접속할 수 없습니다.</a:t>
+              <a:t>STATUS 에 값이 들어가는 경우는 INVALID, STALE, DELETED 셋뿐이다. 비어 있는 것이 정상이라는 성질은 감시 스크립트에 쓰기 좋다. WHERE status IS NOT NULL 인 행이 하나라도 나오면 확인 대상이라는 조건 하나로 끝난다. ACTIVE 이면서 아카이브되지 않은 그룹이 쌓이는 것은 방치하면 로그 전환 자체가 멈추는 문제로 이어진다.</a:t>
+            </a:r>
+          </a:p>
+        </p:txBody>
+      </p:sp>
+      <p:sp>
+        <p:nvSpPr>
+          <p:cNvPr id="4" name="Slide Number Placeholder 3"/>
+          <p:cNvSpPr>
+            <a:spLocks noGrp="1"/>
+          </p:cNvSpPr>
+          <p:nvPr>
+            <p:ph type="sldNum" idx="5" sz="quarter"/>
+          </p:nvPr>
+        </p:nvSpPr>
+        <p:spPr/>
+      </p:sp>
+    </p:spTree>
+  </p:cSld>
+  <p:clrMapOvr>
+    <a:masterClrMapping/>
+  </p:clrMapOvr>
+</p:notes>
+</file>
+
+<file path=ppt/notesSlides/notesSlide30.xml><?xml version="1.0" encoding="utf-8"?>
+<p:notes xmlns:a="http://schemas.openxmlformats.org/drawingml/2006/main" xmlns:p="http://schemas.openxmlformats.org/presentationml/2006/main" xmlns:r="http://schemas.openxmlformats.org/officeDocument/2006/relationships">
+  <p:cSld>
+    <p:spTree>
+      <p:nvGrpSpPr>
+        <p:cNvPr id="1" name=""/>
+        <p:cNvGrpSpPr/>
+        <p:nvPr/>
+      </p:nvGrpSpPr>
+      <p:grpSpPr>
+        <a:xfrm>
+          <a:off x="0" y="0"/>
+          <a:ext cx="0" cy="0"/>
+          <a:chOff x="0" y="0"/>
+          <a:chExt cx="0" cy="0"/>
+        </a:xfrm>
+      </p:grpSpPr>
+      <p:sp>
+        <p:nvSpPr>
+          <p:cNvPr id="2" name="Slide Image Placeholder 1"/>
+          <p:cNvSpPr>
+            <a:spLocks noGrp="1"/>
+          </p:cNvSpPr>
+          <p:nvPr>
+            <p:ph type="sldImg" idx="2"/>
+          </p:nvPr>
+        </p:nvSpPr>
+        <p:spPr/>
+      </p:sp>
+      <p:sp>
+        <p:nvSpPr>
+          <p:cNvPr id="3" name="Notes Placeholder 2"/>
+          <p:cNvSpPr>
+            <a:spLocks noGrp="1"/>
+          </p:cNvSpPr>
+          <p:nvPr>
+            <p:ph type="body" idx="3" sz="quarter"/>
+          </p:nvPr>
+        </p:nvSpPr>
+        <p:spPr/>
+        <p:txBody>
+          <a:bodyPr/>
+          <a:lstStyle/>
+          <a:p>
+            <a:r>
+              <a:t>boston 의 DG_ERR 가 0 인 것이 의미가 있다. 실습 03 의 오류는 Primary 쪽에만 기록됐다. 보내는 쪽이 실패를 알고 받는 쪽은 모르기 때문이며, 양쪽을 다 봐야 하는 이유가 여기 있다. DG_ERR 에는 시간 조건이 들어 있으므로 한 시간이 지나면 자동으로 0 이 된다. 이 값 하나가 지금 봐야 할 일이 있는가에 답한다. 나머지 항목의 기댓값도 미리 정해 두어야 스크립트가 판정할 수 있다.</a:t>
+            </a:r>
+          </a:p>
+        </p:txBody>
+      </p:sp>
+      <p:sp>
+        <p:nvSpPr>
+          <p:cNvPr id="4" name="Slide Number Placeholder 3"/>
+          <p:cNvSpPr>
+            <a:spLocks noGrp="1"/>
+          </p:cNvSpPr>
+          <p:nvPr>
+            <p:ph type="sldNum" idx="5" sz="quarter"/>
+          </p:nvPr>
+        </p:nvSpPr>
+        <p:spPr/>
+      </p:sp>
+    </p:spTree>
+  </p:cSld>
+  <p:clrMapOvr>
+    <a:masterClrMapping/>
+  </p:clrMapOvr>
+</p:notes>
+</file>
+
+<file path=ppt/notesSlides/notesSlide31.xml><?xml version="1.0" encoding="utf-8"?>
+<p:notes xmlns:a="http://schemas.openxmlformats.org/drawingml/2006/main" xmlns:p="http://schemas.openxmlformats.org/presentationml/2006/main" xmlns:r="http://schemas.openxmlformats.org/officeDocument/2006/relationships">
+  <p:cSld>
+    <p:spTree>
+      <p:nvGrpSpPr>
+        <p:cNvPr id="1" name=""/>
+        <p:cNvGrpSpPr/>
+        <p:nvPr/>
+      </p:nvGrpSpPr>
+      <p:grpSpPr>
+        <a:xfrm>
+          <a:off x="0" y="0"/>
+          <a:ext cx="0" cy="0"/>
+          <a:chOff x="0" y="0"/>
+          <a:chExt cx="0" cy="0"/>
+        </a:xfrm>
+      </p:grpSpPr>
+      <p:sp>
+        <p:nvSpPr>
+          <p:cNvPr id="2" name="Slide Image Placeholder 1"/>
+          <p:cNvSpPr>
+            <a:spLocks noGrp="1"/>
+          </p:cNvSpPr>
+          <p:nvPr>
+            <p:ph type="sldImg" idx="2"/>
+          </p:nvPr>
+        </p:nvSpPr>
+        <p:spPr/>
+      </p:sp>
+      <p:sp>
+        <p:nvSpPr>
+          <p:cNvPr id="3" name="Notes Placeholder 2"/>
+          <p:cNvSpPr>
+            <a:spLocks noGrp="1"/>
+          </p:cNvSpPr>
+          <p:nvPr>
+            <p:ph type="body" idx="3" sz="quarter"/>
+          </p:nvPr>
+        </p:nvSpPr>
+        <p:spPr/>
+        <p:txBody>
+          <a:bodyPr/>
+          <a:lstStyle/>
+          <a:p>
+            <a:r>
+              <a:t>SRL_ACTIVE 가 이 점검표의 핵심이다. 지연이 0 으로 보이는 두 상황 모두에서 ACTIVE 인 SRL 이 사라지므로 이 값 하나가 두 사례를 모두 잡는다. 지연을 버리라는 뜻은 아니다. 흐르고는 있는데 느린 상황은 지연만이 잡는다. 두 종류를 함께 두어야 끊겼다와 느리다를 구별할 수 있고, 그래야 대응의 시급성도 달라진다. 대응의 시급성이 달라지므로 이 구분이 실무에서 중요하다.</a:t>
+            </a:r>
+          </a:p>
+        </p:txBody>
+      </p:sp>
+      <p:sp>
+        <p:nvSpPr>
+          <p:cNvPr id="4" name="Slide Number Placeholder 3"/>
+          <p:cNvSpPr>
+            <a:spLocks noGrp="1"/>
+          </p:cNvSpPr>
+          <p:nvPr>
+            <p:ph type="sldNum" idx="5" sz="quarter"/>
+          </p:nvPr>
+        </p:nvSpPr>
+        <p:spPr/>
+      </p:sp>
+    </p:spTree>
+  </p:cSld>
+  <p:clrMapOvr>
+    <a:masterClrMapping/>
+  </p:clrMapOvr>
+</p:notes>
+</file>
+
+<file path=ppt/notesSlides/notesSlide32.xml><?xml version="1.0" encoding="utf-8"?>
+<p:notes xmlns:a="http://schemas.openxmlformats.org/drawingml/2006/main" xmlns:p="http://schemas.openxmlformats.org/presentationml/2006/main" xmlns:r="http://schemas.openxmlformats.org/officeDocument/2006/relationships">
+  <p:cSld>
+    <p:spTree>
+      <p:nvGrpSpPr>
+        <p:cNvPr id="1" name=""/>
+        <p:cNvGrpSpPr/>
+        <p:nvPr/>
+      </p:nvGrpSpPr>
+      <p:grpSpPr>
+        <a:xfrm>
+          <a:off x="0" y="0"/>
+          <a:ext cx="0" cy="0"/>
+          <a:chOff x="0" y="0"/>
+          <a:chExt cx="0" cy="0"/>
+        </a:xfrm>
+      </p:grpSpPr>
+      <p:sp>
+        <p:nvSpPr>
+          <p:cNvPr id="2" name="Slide Image Placeholder 1"/>
+          <p:cNvSpPr>
+            <a:spLocks noGrp="1"/>
+          </p:cNvSpPr>
+          <p:nvPr>
+            <p:ph type="sldImg" idx="2"/>
+          </p:nvPr>
+        </p:nvSpPr>
+        <p:spPr/>
+      </p:sp>
+      <p:sp>
+        <p:nvSpPr>
+          <p:cNvPr id="3" name="Notes Placeholder 2"/>
+          <p:cNvSpPr>
+            <a:spLocks noGrp="1"/>
+          </p:cNvSpPr>
+          <p:nvPr>
+            <p:ph type="body" idx="3" sz="quarter"/>
+          </p:nvPr>
+        </p:nvSpPr>
+        <p:spPr/>
+        <p:txBody>
+          <a:bodyPr/>
+          <a:lstStyle/>
+          <a:p>
+            <a:r>
+              <a:t>모든 이상을 같은 무게로 알리면 아무도 보지 않는다. 14장에서 임계값을 다루며 확인한 것과 같은 원칙이다. 심각은 즉시 사람을 부르고 경고는 근무 시간에 확인하며 주의는 추세만 기록한다. 자동화는 1~3층이 쉽고 14장의 VALIDATE 는 파싱이 번거로워 자주 빠진다. 최소한 Ready for Switchover 한 줄만이라도 grep 으로 뽑아 둔다.</a:t>
             </a:r>
           </a:p>
         </p:txBody>
@@ -1869,7 +2365,7 @@
           <a:lstStyle/>
           <a:p>
             <a:r>
-              <a:t>리두는 커밋 전에도 전송되고 적용됩니다. 그러므로 Standby 의 데이터 블록에는 커밋되지 않은 변경이 이미 반영되어 있을 수 있습니다. 그럼에도 조회 결과가 깨끗한 것은 UNDO 정보 역시 함께 적용되기 때문입니다. Primary 에서와 같은 읽기 일관성 규칙이 그대로 적용됩니다. 측정의 핵심은 세션을 살려 두는 것이었습니다. DBMS_SESSION.SLEEP 으로 40초를 붙잡아 두고 그 사이에 조회했습니다.</a:t>
+              <a:t>14장에서 본 boston Online Redo Log Files: Not Cleared 도 같은 맥락이다. 쓰이지 않았으니 정리할 것도 없다. 여기서 오해가 자주 생긴다. Standby 의 CURRENT 시퀀스가 0인데 괜찮으냐는 질문이다. 괜찮다. 이 뷰가 아니라 V$STANDBY_LOG 를 봐야 한다. 뷰를 잘못 골라 정상을 이상으로 읽는 것이 이 장에서 반복해 다루는 함정이다.</a:t>
             </a:r>
           </a:p>
         </p:txBody>
@@ -1939,7 +2435,7 @@
           <a:lstStyle/>
           <a:p>
             <a:r>
-              <a:t>이 사례가 주는 교훈은 Data Guard 지식이 아니라 측정 방법에 관한 것입니다. 도구가 세션을 닫으면서 무엇을 하는지 알아야 합니다. 커밋·롤백·잠금 해제 같은 동작이 조용히 일어납니다. 상태를 유지해야 하는 시험은 그 상태를 만든 세션 안에서 처리해야 합니다. 실무에서도 같은 일이 일어납니다. "운영에서는 되는데 테스트에서는 안 된다"는 보고의 상당수가 테스트 방법의 차이에서 나옵니다.</a:t>
+              <a:t>chicago 는 손으로 만들었고 boston 은 OMF 가 만들었다. 동작에는 지장이 없지만 알아 두어야 한다. 전환하면 boston 이 Primary 가 되고 그때는 온라인 리두가 이중화된 상태로 운영된다. 반대로 chicago 는 단일 멤버다. 13장에서 손으로 관리하던 시절의 표기 불일치를 본 것과 같은 종류의 관찰이며, 구성의 이력이 파일 목록에 남는다.</a:t>
             </a:r>
           </a:p>
         </p:txBody>
@@ -2009,7 +2505,7 @@
           <a:lstStyle/>
           <a:p>
             <a:r>
-              <a:t>원인도 같습니다. 읽기 전용으로 열려 있기 때문입니다. STANDBY_FILE_MANAGEMENT 값과는 무관합니다. 그 파라미터는 리두를 적용하다 파일 추가 지시를 만났을 때의 동작을 정하는 것이고, 여기는 사람이 직접 쓰기를 시도한 경우입니다. 이 둘을 혼동하면 "AUTO 인데 왜 안 되지" 하는 잘못된 질문에 갇히게 됩니다. Standby 의 파일과 데이터는 오직 리두를 통해서만 바뀝니다.</a:t>
+              <a:t>ACTIVE 인 그룹의 SEQUENCE# 74 가 Primary 의 CURRENT 시퀀스와 같다. 두 값을 비교하는 것이 판정의 핵심이다. USED 8,977KB 는 200MB 중 약 9MB 를 썼다는 뜻이며 14장의 SendQEntries 가 보여 준 SIZE 6911KB 와 같은 성격의 값이다. 이 뷰가 이 장에서 가장 중요한 지표가 되는 이유는 실습 03 에서 드러난다.</a:t>
             </a:r>
           </a:p>
         </p:txBody>
@@ -2079,7 +2575,7 @@
           <a:lstStyle/>
           <a:p>
             <a:r>
-              <a:t>정렬이 된다는 것이 ADG 활용의 핵심 근거입니다. 보고서와 집계처럼 정렬과 해시 조인이 많은 조회를 Standby 로 옮길 수 있습니다. 실측에서 임시 테이블스페이스가 실제로 쓰인 것을 V$TEMP_SPACE_HEADER 로 확인했습니다. GTT 에 대한 INSERT 가 되는 것도 같은 이유입니다. 데이터가 임시 테이블스페이스에 있고 영구 데이터 파일을 건드리지 않으니까요. 읽기 전용 데이터베이스에서 INSERT 가 성공하는 것이 처음에는 의아하지만 원리를 알면 자연스럽습니다.</a:t>
+              <a:t>이것이 이 장에서 반복되는 함정의 첫 사례다. 오류가 나지 않는다. 뷰도 있고 권한도 있으며 행도 나온다. 그런데 값의 의미가 다르다. 감시 스크립트가 SRL_ACTIVE=0 을 받고 심각으로 판정하면 Primary 에서 상시 오경보가 난다. 스크립트는 V$DATABASE 로 역할을 먼저 판정하고 분기해야 한다. 실습 06 에서 이 함정을 실제로 재현한다.</a:t>
             </a:r>
           </a:p>
         </p:txBody>
@@ -2149,7 +2645,7 @@
           <a:lstStyle/>
           <a:p>
             <a:r>
-              <a:t>시퀀스는 값을 주려면 어딘가에 "여기까지 썼다"를 기록해야 하는데 Standby 는 딕셔너리를 갱신할 수 없습니다. 그래서 Primary 가 쓰지 않을 범위를 통째로 떼어 메모리에서만 관리합니다. 실무적으로 중요한 결론이 나옵니다. 채번을 두 노드에서 나눠 하면 값에 큰 구멍이 생깁니다. 전표 번호처럼 연속성이 감사 요건이라면 문제가 되고, 단순히 유일한 값이 필요할 뿐이라면 괜찮습니다. 연속성이 요건인가 유일성이 요건인가를 구분하는 것이 판단의 출발점입니다.</a:t>
+              <a:t>둘 다 STATUS 열을 가지고 있어 혼동하기 쉽다. VALID_NOW 가 있으면 V$ARCHIVE_DEST 다. 로컬 목적지의 RECOVERY_MODE 가 IDLE 인 것도 읽어 둔다. 로컬에는 적용이라는 개념이 없기 때문이며 TYPE 도 LOCAL 이다. 원격인 2번만 PHYSICAL 이고 MANAGED REAL TIME APPLY 다. 같은 목적지를 두 뷰가 다르게 표현한다는 점도 기억한다.</a:t>
             </a:r>
           </a:p>
         </p:txBody>
@@ -2219,7 +2715,7 @@
           <a:lstStyle/>
           <a:p>
             <a:r>
-              <a:t>긴 스택을 읽는 요령이 있습니다. ORA-06512 는 PL/SQL 호출 스택으로 어디를 지났는지만 알려 줍니다. 그것을 건너뛰고 그것이 아닌 번호를 찾으면 됩니다. 실측 스택에서는 맨 위 ORA-00604 가 형식이고 중간의 ORA-16000 이 내용이었습니다. AWR 은 대조적입니다. 전용 오류 번호가 있고 스택도 짧습니다. ORA-16000 까지 내려가기 전에 패키지가 먼저 상태를 확인하고 거부했기 때문입니다. 오류 번호와 스택 길이가 그 기능이 상태를 얼마나 일찍 점검하는지 보여 줍니다.</a:t>
+              <a:t>7장에서 VALID_FOR=(online_logfiles, all_roles) 로 한 덩어리로 쓴 것이 뷰에서는 두 열로 나뉜다. 13장에서 Broker 가 인수하며 만든 설정이 그대로 보인다. 1번이 SYNCHRONOUS 인 것에 놀라지 않는다. 로컬 디스크 쓰기이므로 네트워크 전송이 아니며 여기서의 동기는 프로세스가 기다린다는 뜻일 뿐이다. 보호 모드와 연결되는 열은 AFFIRM 이며 실측은 NO 였다.</a:t>
             </a:r>
           </a:p>
         </p:txBody>
@@ -5430,7 +5926,7 @@
                 </a:solidFill>
                 <a:latin typeface="맑은 고딕"/>
               </a:rPr>
-              <a:t>Active Data Guard ①</a:t>
+              <a:t>V$ 뷰 기반 모니터링과 문제 해결</a:t>
             </a:r>
           </a:p>
         </p:txBody>
@@ -5469,7 +5965,7 @@
                 </a:solidFill>
                 <a:latin typeface="맑은 고딕"/>
               </a:rPr>
-              <a:t>실시간 조회와 DML 리다이렉션</a:t>
+              <a:t>요약 아래층으로 내려간다</a:t>
             </a:r>
           </a:p>
         </p:txBody>
@@ -5508,7 +6004,7 @@
                 </a:solidFill>
                 <a:latin typeface="맑은 고딕"/>
               </a:rPr>
-              <a:t>되는 것·안 되는 것·그리고 SYS 라는 함정</a:t>
+              <a:t>원자료를 직접 읽는 자리</a:t>
             </a:r>
           </a:p>
         </p:txBody>
@@ -5609,7 +6105,7 @@
                 </a:solidFill>
                 <a:latin typeface="맑은 고딕"/>
               </a:rPr>
-              <a:t>첫 측정은 틀렸다</a:t>
+              <a:t>양쪽 구성이 다르다</a:t>
             </a:r>
           </a:p>
         </p:txBody>
@@ -5648,7 +6144,7 @@
                 </a:solidFill>
                 <a:latin typeface="맑은 고딕"/>
               </a:rPr>
-              <a:t>SQL*Plus 의 암묵적 커밋</a:t>
+              <a:t>OMF 의 흔적</a:t>
             </a:r>
           </a:p>
         </p:txBody>
@@ -5687,7 +6183,7 @@
                 </a:solidFill>
                 <a:latin typeface="맑은 고딕"/>
               </a:rPr>
-              <a:t>•  `INSERT` 후 `COMMIT` 없이 `EXIT` → Standby 에서 **보였다**</a:t>
+              <a:t>•  boston `V$LOGFILE` — **14행** (그룹당 멤버 둘)</a:t>
             </a:r>
           </a:p>
           <a:p>
@@ -5703,7 +6199,7 @@
                 </a:solidFill>
                 <a:latin typeface="맑은 고딕"/>
               </a:rPr>
-              <a:t>•  원인은 Data Guard 가 아니라 **SQL*Plus**</a:t>
+              <a:t>•  chicago — **7행** (그룹당 하나)</a:t>
             </a:r>
           </a:p>
           <a:p>
@@ -5719,7 +6215,7 @@
                 </a:solidFill>
                 <a:latin typeface="맑은 고딕"/>
               </a:rPr>
-              <a:t>•  정상 종료 시 암묵적으로 커밋한다 (비정상 종료는 롤백)</a:t>
+              <a:t>•  6장에서 `DB_CREATE_ONLINE_LOG_DEST_1`·`_2` 를 지정한 결과</a:t>
             </a:r>
           </a:p>
           <a:p>
@@ -5735,7 +6231,7 @@
                 </a:solidFill>
                 <a:latin typeface="맑은 고딕"/>
               </a:rPr>
-              <a:t>•  **"제품이 이상하다"보다 "내 측정이 이상하다"를 먼저 의심한다**</a:t>
+              <a:t>•  **역할이 바뀌면 다중화 수준도 바뀐다**</a:t>
             </a:r>
           </a:p>
         </p:txBody>
@@ -5767,7 +6263,7 @@
         <p:spPr>
           <a:xfrm>
             <a:off x="0" y="0"/>
-            <a:ext cx="12191695" cy="6858000"/>
+            <a:ext cx="12191695" cy="1005840"/>
           </a:xfrm>
           <a:prstGeom prst="rect">
             <a:avLst/>
@@ -5810,8 +6306,8 @@
         </p:nvSpPr>
         <p:spPr>
           <a:xfrm>
-            <a:off x="822960" y="2011680"/>
-            <a:ext cx="10515600" cy="1097280"/>
+            <a:off x="548640" y="91440"/>
+            <a:ext cx="10972800" cy="777240"/>
           </a:xfrm>
           <a:prstGeom prst="rect">
             <a:avLst/>
@@ -5830,13 +6326,13 @@
               </a:spcAft>
             </a:pPr>
             <a:r>
-              <a:rPr sz="4000" b="1">
+              <a:rPr sz="2600" b="1">
                 <a:solidFill>
                   <a:srgbClr val="FFFFFF"/>
                 </a:solidFill>
                 <a:latin typeface="맑은 고딕"/>
               </a:rPr>
-              <a:t>9.4</a:t>
+              <a:t>SRL 이 진짜 정보다</a:t>
             </a:r>
           </a:p>
         </p:txBody>
@@ -5849,8 +6345,8 @@
         </p:nvSpPr>
         <p:spPr>
           <a:xfrm>
-            <a:off x="822960" y="3017520"/>
-            <a:ext cx="10515600" cy="914400"/>
+            <a:off x="640080" y="1078992"/>
+            <a:ext cx="10881360" cy="457200"/>
           </a:xfrm>
           <a:prstGeom prst="rect">
             <a:avLst/>
@@ -5869,71 +6365,27 @@
               </a:spcAft>
             </a:pPr>
             <a:r>
-              <a:rPr sz="2800" b="1">
-                <a:solidFill>
-                  <a:srgbClr val="FFFFFF"/>
-                </a:solidFill>
-                <a:latin typeface="맑은 고딕"/>
-              </a:rPr>
-              <a:t>되는 것과 안 되는 것</a:t>
-            </a:r>
-          </a:p>
-        </p:txBody>
-      </p:sp>
-      <p:sp>
-        <p:nvSpPr>
-          <p:cNvPr id="5" name="Rectangle 4"/>
-          <p:cNvSpPr/>
-          <p:nvPr/>
-        </p:nvSpPr>
-        <p:spPr>
-          <a:xfrm>
-            <a:off x="822960" y="4114800"/>
-            <a:ext cx="5486400" cy="54864"/>
-          </a:xfrm>
-          <a:prstGeom prst="rect">
-            <a:avLst/>
-          </a:prstGeom>
-          <a:solidFill>
-            <a:srgbClr val="FFFFFF"/>
-          </a:solidFill>
-          <a:ln>
-            <a:noFill/>
-          </a:ln>
-          <a:effectLst/>
-        </p:spPr>
-        <p:style>
-          <a:lnRef idx="1">
-            <a:schemeClr val="accent1"/>
-          </a:lnRef>
-          <a:fillRef idx="3">
-            <a:schemeClr val="accent1"/>
-          </a:fillRef>
-          <a:effectRef idx="2">
-            <a:schemeClr val="accent1"/>
-          </a:effectRef>
-          <a:fontRef idx="minor">
-            <a:schemeClr val="lt1"/>
-          </a:fontRef>
-        </p:style>
-        <p:txBody>
-          <a:bodyPr rtlCol="0" anchor="ctr"/>
-          <a:lstStyle/>
-          <a:p>
-            <a:pPr algn="ctr"/>
-          </a:p>
-        </p:txBody>
-      </p:sp>
-      <p:sp>
-        <p:nvSpPr>
-          <p:cNvPr id="6" name="TextBox 5"/>
+              <a:rPr sz="1500" b="0">
+                <a:solidFill>
+                  <a:srgbClr val="5A6672"/>
+                </a:solidFill>
+                <a:latin typeface="맑은 고딕"/>
+              </a:rPr>
+              <a:t>하나만 ACTIVE</a:t>
+            </a:r>
+          </a:p>
+        </p:txBody>
+      </p:sp>
+      <p:sp>
+        <p:nvSpPr>
+          <p:cNvPr id="5" name="TextBox 4"/>
           <p:cNvSpPr txBox="1"/>
           <p:nvPr/>
         </p:nvSpPr>
         <p:spPr>
           <a:xfrm>
-            <a:off x="822960" y="4297680"/>
-            <a:ext cx="10058400" cy="2011680"/>
+            <a:off x="640080" y="1737360"/>
+            <a:ext cx="10881360" cy="4754880"/>
           </a:xfrm>
           <a:prstGeom prst="rect">
             <a:avLst/>
@@ -5948,49 +6400,65 @@
           <a:p>
             <a:pPr algn="l">
               <a:spcAft>
-                <a:spcPts val="800"/>
-              </a:spcAft>
-            </a:pPr>
-            <a:r>
-              <a:rPr sz="1600" b="0">
-                <a:solidFill>
-                  <a:srgbClr val="FFFFFF"/>
-                </a:solidFill>
-                <a:latin typeface="맑은 고딕"/>
-              </a:rPr>
-              <a:t>•  쓰기는 막힌다</a:t>
-            </a:r>
-          </a:p>
-          <a:p>
-            <a:pPr algn="l">
-              <a:spcAft>
-                <a:spcPts val="800"/>
-              </a:spcAft>
-            </a:pPr>
-            <a:r>
-              <a:rPr sz="1600" b="0">
-                <a:solidFill>
-                  <a:srgbClr val="FFFFFF"/>
-                </a:solidFill>
-                <a:latin typeface="맑은 고딕"/>
-              </a:rPr>
-              <a:t>•  그런데 되는 것들</a:t>
-            </a:r>
-          </a:p>
-          <a:p>
-            <a:pPr algn="l">
-              <a:spcAft>
-                <a:spcPts val="800"/>
-              </a:spcAft>
-            </a:pPr>
-            <a:r>
-              <a:rPr sz="1600" b="0">
-                <a:solidFill>
-                  <a:srgbClr val="FFFFFF"/>
-                </a:solidFill>
-                <a:latin typeface="맑은 고딕"/>
-              </a:rPr>
-              <a:t>•  하나의 기준</a:t>
+                <a:spcPts val="1000"/>
+              </a:spcAft>
+            </a:pPr>
+            <a:r>
+              <a:rPr sz="1700" b="0">
+                <a:solidFill>
+                  <a:srgbClr val="222222"/>
+                </a:solidFill>
+                <a:latin typeface="맑은 고딕"/>
+              </a:rPr>
+              <a:t>•  실측 — 그룹 4가 `ACTIVE`, 시퀀스 **74**, `USED` **8,977KB**</a:t>
+            </a:r>
+          </a:p>
+          <a:p>
+            <a:pPr algn="l">
+              <a:spcAft>
+                <a:spcPts val="1000"/>
+              </a:spcAft>
+            </a:pPr>
+            <a:r>
+              <a:rPr sz="1700" b="0">
+                <a:solidFill>
+                  <a:srgbClr val="222222"/>
+                </a:solidFill>
+                <a:latin typeface="맑은 고딕"/>
+              </a:rPr>
+              <a:t>•  나머지 셋은 `UNASSIGNED`</a:t>
+            </a:r>
+          </a:p>
+          <a:p>
+            <a:pPr algn="l">
+              <a:spcAft>
+                <a:spcPts val="1000"/>
+              </a:spcAft>
+            </a:pPr>
+            <a:r>
+              <a:rPr sz="1700" b="0">
+                <a:solidFill>
+                  <a:srgbClr val="222222"/>
+                </a:solidFill>
+                <a:latin typeface="맑은 고딕"/>
+              </a:rPr>
+              <a:t>•  **`ACTIVE` 가 정확히 하나**여야 한다</a:t>
+            </a:r>
+          </a:p>
+          <a:p>
+            <a:pPr algn="l">
+              <a:spcAft>
+                <a:spcPts val="1000"/>
+              </a:spcAft>
+            </a:pPr>
+            <a:r>
+              <a:rPr sz="1700" b="0">
+                <a:solidFill>
+                  <a:srgbClr val="222222"/>
+                </a:solidFill>
+                <a:latin typeface="맑은 고딕"/>
+              </a:rPr>
+              <a:t>•  0개면 리두가 오지 않는다. 2개 이상이면 아카이버 확인</a:t>
             </a:r>
           </a:p>
         </p:txBody>
@@ -6091,7 +6559,7 @@
                 </a:solidFill>
                 <a:latin typeface="맑은 고딕"/>
               </a:rPr>
-              <a:t>쓰기는 모두 ORA-16000</a:t>
+              <a:t>Primary 의 SRL</a:t>
             </a:r>
           </a:p>
         </p:txBody>
@@ -6130,7 +6598,7 @@
                 </a:solidFill>
                 <a:latin typeface="맑은 고딕"/>
               </a:rPr>
-              <a:t>세 형태가 같은 오류</a:t>
+              <a:t>조회는 되지만 값이 없다</a:t>
             </a:r>
           </a:p>
         </p:txBody>
@@ -6169,7 +6637,7 @@
                 </a:solidFill>
                 <a:latin typeface="맑은 고딕"/>
               </a:rPr>
-              <a:t>•  `INSERT` → ORA-16000</a:t>
+              <a:t>•  넷 다 `UNASSIGNED`, `SEQUENCE# 0`</a:t>
             </a:r>
           </a:p>
           <a:p>
@@ -6185,7 +6653,7 @@
                 </a:solidFill>
                 <a:latin typeface="맑은 고딕"/>
               </a:rPr>
-              <a:t>•  `UPDATE` → ORA-16000</a:t>
+              <a:t>•  Primary 는 SRL 을 쓰지 않는다 — 전환 후를 위해 있다</a:t>
             </a:r>
           </a:p>
           <a:p>
@@ -6201,7 +6669,7 @@
                 </a:solidFill>
                 <a:latin typeface="맑은 고딕"/>
               </a:rPr>
-              <a:t>•  `CREATE TABLE` → ORA-16000</a:t>
+              <a:t>•  **뷰가 조회된다는 것과 값이 있다는 것은 다르다**</a:t>
             </a:r>
           </a:p>
           <a:p>
@@ -6217,7 +6685,7 @@
                 </a:solidFill>
                 <a:latin typeface="맑은 고딕"/>
               </a:rPr>
-              <a:t>•  8장에서 테이블스페이스를 만들려다 만난 것과 같다</a:t>
+              <a:t>•  감시가 전부 `UNASSIGNED` 를 받았다면 **조회한 쪽**을 먼저 의심</a:t>
             </a:r>
           </a:p>
         </p:txBody>
@@ -6249,7 +6717,7 @@
         <p:spPr>
           <a:xfrm>
             <a:off x="0" y="0"/>
-            <a:ext cx="12191695" cy="1005840"/>
+            <a:ext cx="12191695" cy="6858000"/>
           </a:xfrm>
           <a:prstGeom prst="rect">
             <a:avLst/>
@@ -6292,8 +6760,8 @@
         </p:nvSpPr>
         <p:spPr>
           <a:xfrm>
-            <a:off x="548640" y="91440"/>
-            <a:ext cx="10972800" cy="777240"/>
+            <a:off x="822960" y="2011680"/>
+            <a:ext cx="10515600" cy="1097280"/>
           </a:xfrm>
           <a:prstGeom prst="rect">
             <a:avLst/>
@@ -6312,13 +6780,13 @@
               </a:spcAft>
             </a:pPr>
             <a:r>
-              <a:rPr sz="2600" b="1">
+              <a:rPr sz="4000" b="1">
                 <a:solidFill>
                   <a:srgbClr val="FFFFFF"/>
                 </a:solidFill>
                 <a:latin typeface="맑은 고딕"/>
               </a:rPr>
-              <a:t>그런데 이런 것들은 된다</a:t>
+              <a:t>15.3</a:t>
             </a:r>
           </a:p>
         </p:txBody>
@@ -6331,8 +6799,8 @@
         </p:nvSpPr>
         <p:spPr>
           <a:xfrm>
-            <a:off x="640080" y="1078992"/>
-            <a:ext cx="10881360" cy="457200"/>
+            <a:off x="822960" y="3017520"/>
+            <a:ext cx="10515600" cy="914400"/>
           </a:xfrm>
           <a:prstGeom prst="rect">
             <a:avLst/>
@@ -6351,27 +6819,71 @@
               </a:spcAft>
             </a:pPr>
             <a:r>
-              <a:rPr sz="1500" b="0">
-                <a:solidFill>
-                  <a:srgbClr val="5A6672"/>
-                </a:solidFill>
-                <a:latin typeface="맑은 고딕"/>
-              </a:rPr>
-              <a:t>네 가지</a:t>
-            </a:r>
-          </a:p>
-        </p:txBody>
-      </p:sp>
-      <p:sp>
-        <p:nvSpPr>
-          <p:cNvPr id="5" name="TextBox 4"/>
+              <a:rPr sz="2800" b="1">
+                <a:solidFill>
+                  <a:srgbClr val="FFFFFF"/>
+                </a:solidFill>
+                <a:latin typeface="맑은 고딕"/>
+              </a:rPr>
+              <a:t>아카이브 목적지</a:t>
+            </a:r>
+          </a:p>
+        </p:txBody>
+      </p:sp>
+      <p:sp>
+        <p:nvSpPr>
+          <p:cNvPr id="5" name="Rectangle 4"/>
+          <p:cNvSpPr/>
+          <p:nvPr/>
+        </p:nvSpPr>
+        <p:spPr>
+          <a:xfrm>
+            <a:off x="822960" y="4114800"/>
+            <a:ext cx="5486400" cy="54864"/>
+          </a:xfrm>
+          <a:prstGeom prst="rect">
+            <a:avLst/>
+          </a:prstGeom>
+          <a:solidFill>
+            <a:srgbClr val="FFFFFF"/>
+          </a:solidFill>
+          <a:ln>
+            <a:noFill/>
+          </a:ln>
+          <a:effectLst/>
+        </p:spPr>
+        <p:style>
+          <a:lnRef idx="1">
+            <a:schemeClr val="accent1"/>
+          </a:lnRef>
+          <a:fillRef idx="3">
+            <a:schemeClr val="accent1"/>
+          </a:fillRef>
+          <a:effectRef idx="2">
+            <a:schemeClr val="accent1"/>
+          </a:effectRef>
+          <a:fontRef idx="minor">
+            <a:schemeClr val="lt1"/>
+          </a:fontRef>
+        </p:style>
+        <p:txBody>
+          <a:bodyPr rtlCol="0" anchor="ctr"/>
+          <a:lstStyle/>
+          <a:p>
+            <a:pPr algn="ctr"/>
+          </a:p>
+        </p:txBody>
+      </p:sp>
+      <p:sp>
+        <p:nvSpPr>
+          <p:cNvPr id="6" name="TextBox 5"/>
           <p:cNvSpPr txBox="1"/>
           <p:nvPr/>
         </p:nvSpPr>
         <p:spPr>
           <a:xfrm>
-            <a:off x="640080" y="1737360"/>
-            <a:ext cx="10881360" cy="4754880"/>
+            <a:off x="822960" y="4297680"/>
+            <a:ext cx="10058400" cy="2011680"/>
           </a:xfrm>
           <a:prstGeom prst="rect">
             <a:avLst/>
@@ -6386,65 +6898,49 @@
           <a:p>
             <a:pPr algn="l">
               <a:spcAft>
-                <a:spcPts val="1000"/>
-              </a:spcAft>
-            </a:pPr>
-            <a:r>
-              <a:rPr sz="1700" b="0">
-                <a:solidFill>
-                  <a:srgbClr val="222222"/>
-                </a:solidFill>
-                <a:latin typeface="맑은 고딕"/>
-              </a:rPr>
-              <a:t>•  **정렬** — 7만 행 정렬 성공, TEMP 3MB씩 사용</a:t>
-            </a:r>
-          </a:p>
-          <a:p>
-            <a:pPr algn="l">
-              <a:spcAft>
-                <a:spcPts val="1000"/>
-              </a:spcAft>
-            </a:pPr>
-            <a:r>
-              <a:rPr sz="1700" b="0">
-                <a:solidFill>
-                  <a:srgbClr val="222222"/>
-                </a:solidFill>
-                <a:latin typeface="맑은 고딕"/>
-              </a:rPr>
-              <a:t>•  **`EXPLAIN PLAN`** — `PLAN_TABLE` 이 GTT 다</a:t>
-            </a:r>
-          </a:p>
-          <a:p>
-            <a:pPr algn="l">
-              <a:spcAft>
-                <a:spcPts val="1000"/>
-              </a:spcAft>
-            </a:pPr>
-            <a:r>
-              <a:rPr sz="1700" b="0">
-                <a:solidFill>
-                  <a:srgbClr val="222222"/>
-                </a:solidFill>
-                <a:latin typeface="맑은 고딕"/>
-              </a:rPr>
-              <a:t>•  **GTT `INSERT`** — `TEMP_UNDO_ENABLED=FALSE` 인데도 동작</a:t>
-            </a:r>
-          </a:p>
-          <a:p>
-            <a:pPr algn="l">
-              <a:spcAft>
-                <a:spcPts val="1000"/>
-              </a:spcAft>
-            </a:pPr>
-            <a:r>
-              <a:rPr sz="1700" b="0">
-                <a:solidFill>
-                  <a:srgbClr val="222222"/>
-                </a:solidFill>
-                <a:latin typeface="맑은 고딕"/>
-              </a:rPr>
-              <a:t>•  **시퀀스 `NEXTVAL`** — 되지만 값이 뛴다</a:t>
+                <a:spcPts val="800"/>
+              </a:spcAft>
+            </a:pPr>
+            <a:r>
+              <a:rPr sz="1600" b="0">
+                <a:solidFill>
+                  <a:srgbClr val="FFFFFF"/>
+                </a:solidFill>
+                <a:latin typeface="맑은 고딕"/>
+              </a:rPr>
+              <a:t>•  이름이 비슷한 두 뷰</a:t>
+            </a:r>
+          </a:p>
+          <a:p>
+            <a:pPr algn="l">
+              <a:spcAft>
+                <a:spcPts val="800"/>
+              </a:spcAft>
+            </a:pPr>
+            <a:r>
+              <a:rPr sz="1600" b="0">
+                <a:solidFill>
+                  <a:srgbClr val="FFFFFF"/>
+                </a:solidFill>
+                <a:latin typeface="맑은 고딕"/>
+              </a:rPr>
+              <a:t>•  VALID_NOW 읽기</a:t>
+            </a:r>
+          </a:p>
+          <a:p>
+            <a:pPr algn="l">
+              <a:spcAft>
+                <a:spcPts val="800"/>
+              </a:spcAft>
+            </a:pPr>
+            <a:r>
+              <a:rPr sz="1600" b="0">
+                <a:solidFill>
+                  <a:srgbClr val="FFFFFF"/>
+                </a:solidFill>
+                <a:latin typeface="맑은 고딕"/>
+              </a:rPr>
+              <a:t>•  APPLIED 의 함정</a:t>
             </a:r>
           </a:p>
         </p:txBody>
@@ -6545,7 +7041,7 @@
                 </a:solidFill>
                 <a:latin typeface="맑은 고딕"/>
               </a:rPr>
-              <a:t>시퀀스는 값이 뛴다</a:t>
+              <a:t>두 뷰, 다른 관점</a:t>
             </a:r>
           </a:p>
         </p:txBody>
@@ -6584,7 +7080,7 @@
                 </a:solidFill>
                 <a:latin typeface="맑은 고딕"/>
               </a:rPr>
-              <a:t>1 다음이 21</a:t>
+              <a:t>구별하는 법</a:t>
             </a:r>
           </a:p>
         </p:txBody>
@@ -6623,7 +7119,7 @@
                 </a:solidFill>
                 <a:latin typeface="맑은 고딕"/>
               </a:rPr>
-              <a:t>•  Primary 에서 `NEXTVAL` → **1**</a:t>
+              <a:t>•  `V$ARCHIVE_DEST` — **설정**이 어떻게 되어 있는가</a:t>
             </a:r>
           </a:p>
           <a:p>
@@ -6639,7 +7135,7 @@
                 </a:solidFill>
                 <a:latin typeface="맑은 고딕"/>
               </a:rPr>
-              <a:t>•  같은 시퀀스를 Standby 에서 → **21**</a:t>
+              <a:t>•  `V$ARCHIVE_DEST_STATUS` — **지금** 어떤 상태인가</a:t>
             </a:r>
           </a:p>
           <a:p>
@@ -6655,7 +7151,7 @@
                 </a:solidFill>
                 <a:latin typeface="맑은 고딕"/>
               </a:rPr>
-              <a:t>•  딕셔너리를 못 쓰므로 별도 범위를 메모리에서 관리한다</a:t>
+              <a:t>•  구별법 — `RECOVERY_MODE` 가 있으면 `_STATUS`</a:t>
             </a:r>
           </a:p>
           <a:p>
@@ -6671,7 +7167,7 @@
                 </a:solidFill>
                 <a:latin typeface="맑은 고딕"/>
               </a:rPr>
-              <a:t>•  **연속성이 요건이면 Standby 에서 쓰지 않는다**</a:t>
+              <a:t>•  실측 `dest_id=1` 의 `RECOVERY_MODE` = **IDLE**</a:t>
             </a:r>
           </a:p>
         </p:txBody>
@@ -6772,7 +7268,7 @@
                 </a:solidFill>
                 <a:latin typeface="맑은 고딕"/>
               </a:rPr>
-              <a:t>관리 작업은 막힌다</a:t>
+              <a:t>VALID_FOR 가 열로 분해된다</a:t>
             </a:r>
           </a:p>
         </p:txBody>
@@ -6811,7 +7307,7 @@
                 </a:solidFill>
                 <a:latin typeface="맑은 고딕"/>
               </a:rPr>
-              <a:t>오류 번호가 다르다</a:t>
+              <a:t>7장의 그것</a:t>
             </a:r>
           </a:p>
         </p:txBody>
@@ -6850,7 +7346,7 @@
                 </a:solidFill>
                 <a:latin typeface="맑은 고딕"/>
               </a:rPr>
-              <a:t>•  `DBMS_STATS` → 열 줄 넘는 스택, 안쪽에 **ORA-16000**</a:t>
+              <a:t>•  `TARGET` — 1번 `PRIMARY`(로컬), 2번 `STANDBY`(원격)</a:t>
             </a:r>
           </a:p>
           <a:p>
@@ -6866,7 +7362,7 @@
                 </a:solidFill>
                 <a:latin typeface="맑은 고딕"/>
               </a:rPr>
-              <a:t>•  AWR 스냅샷 → 전용 오류 **ORA-13516**, 스택이 짧다</a:t>
+              <a:t>•  `VALID_TYPE` — 2번은 `ONLINE_LOGFILE`</a:t>
             </a:r>
           </a:p>
           <a:p>
@@ -6882,7 +7378,7 @@
                 </a:solidFill>
                 <a:latin typeface="맑은 고딕"/>
               </a:rPr>
-              <a:t>•  `V$` 뷰 조회 → 문제없다</a:t>
+              <a:t>•  `VALID_ROLE` — 둘 다 `ALL_ROLES`</a:t>
             </a:r>
           </a:p>
           <a:p>
@@ -6898,7 +7394,7 @@
                 </a:solidFill>
                 <a:latin typeface="맑은 고딕"/>
               </a:rPr>
-              <a:t>•  **"보는 것은 되고 남기는 것은 안 된다"**</a:t>
+              <a:t>•  `AFFIRM` **NO** / 1번 `TRANSMIT_MODE` **SYNCHRONOUS**</a:t>
             </a:r>
           </a:p>
         </p:txBody>
@@ -6999,7 +7495,7 @@
                 </a:solidFill>
                 <a:latin typeface="맑은 고딕"/>
               </a:rPr>
-              <a:t>경계를 가르는 하나의 기준</a:t>
+              <a:t>VALID_NOW 읽기</a:t>
             </a:r>
           </a:p>
         </p:txBody>
@@ -7038,7 +7534,7 @@
                 </a:solidFill>
                 <a:latin typeface="맑은 고딕"/>
               </a:rPr>
-              <a:t>표를 외우지 않는다</a:t>
+              <a:t>UNKNOWN 이 29개</a:t>
             </a:r>
           </a:p>
         </p:txBody>
@@ -7077,7 +7573,7 @@
                 </a:solidFill>
                 <a:latin typeface="맑은 고딕"/>
               </a:rPr>
-              <a:t>•  **영구 데이터 파일이나 딕셔너리를 바꾸는가**</a:t>
+              <a:t>•  이 뷰는 목적지 **31개를 전부** 보여 준다</a:t>
             </a:r>
           </a:p>
           <a:p>
@@ -7093,7 +7589,7 @@
                 </a:solidFill>
                 <a:latin typeface="맑은 고딕"/>
               </a:rPr>
-              <a:t>•  임시 세그먼트에서 끝나면 → 된다</a:t>
+              <a:t>•  쓰지 않는 목적지는 설정이 비어 `UNKNOWN`</a:t>
             </a:r>
           </a:p>
           <a:p>
@@ -7109,7 +7605,7 @@
                 </a:solidFill>
                 <a:latin typeface="맑은 고딕"/>
               </a:rPr>
-              <a:t>•  블록·UNDO·리두를 만들면 → ORA-16000</a:t>
+              <a:t>•  10장 Far Sync 설정 직후에도 `UNKNOWN` 이었다</a:t>
             </a:r>
           </a:p>
           <a:p>
@@ -7125,7 +7621,7 @@
                 </a:solidFill>
                 <a:latin typeface="맑은 고딕"/>
               </a:rPr>
-              <a:t>•  딕셔너리까지 바꾸면 → ORA-16000 (DDL·통계)</a:t>
+              <a:t>•  **`DESTINATION` 이 비었는지 먼저 확인한다**</a:t>
             </a:r>
           </a:p>
         </p:txBody>
@@ -7157,7 +7653,7 @@
         <p:spPr>
           <a:xfrm>
             <a:off x="0" y="0"/>
-            <a:ext cx="12191695" cy="6858000"/>
+            <a:ext cx="12191695" cy="1005840"/>
           </a:xfrm>
           <a:prstGeom prst="rect">
             <a:avLst/>
@@ -7200,8 +7696,8 @@
         </p:nvSpPr>
         <p:spPr>
           <a:xfrm>
-            <a:off x="822960" y="2011680"/>
-            <a:ext cx="10515600" cy="1097280"/>
+            <a:off x="548640" y="91440"/>
+            <a:ext cx="10972800" cy="777240"/>
           </a:xfrm>
           <a:prstGeom prst="rect">
             <a:avLst/>
@@ -7220,13 +7716,13 @@
               </a:spcAft>
             </a:pPr>
             <a:r>
-              <a:rPr sz="4000" b="1">
+              <a:rPr sz="2600" b="1">
                 <a:solidFill>
                   <a:srgbClr val="FFFFFF"/>
                 </a:solidFill>
                 <a:latin typeface="맑은 고딕"/>
               </a:rPr>
-              <a:t>9.5</a:t>
+              <a:t>프로세스를 읽는다</a:t>
             </a:r>
           </a:p>
         </p:txBody>
@@ -7239,8 +7735,8 @@
         </p:nvSpPr>
         <p:spPr>
           <a:xfrm>
-            <a:off x="822960" y="3017520"/>
-            <a:ext cx="10515600" cy="914400"/>
+            <a:off x="640080" y="1078992"/>
+            <a:ext cx="10881360" cy="457200"/>
           </a:xfrm>
           <a:prstGeom prst="rect">
             <a:avLst/>
@@ -7259,71 +7755,27 @@
               </a:spcAft>
             </a:pPr>
             <a:r>
-              <a:rPr sz="2800" b="1">
-                <a:solidFill>
-                  <a:srgbClr val="FFFFFF"/>
-                </a:solidFill>
-                <a:latin typeface="맑은 고딕"/>
-              </a:rPr>
-              <a:t>DML 리다이렉션</a:t>
-            </a:r>
-          </a:p>
-        </p:txBody>
-      </p:sp>
-      <p:sp>
-        <p:nvSpPr>
-          <p:cNvPr id="5" name="Rectangle 4"/>
-          <p:cNvSpPr/>
-          <p:nvPr/>
-        </p:nvSpPr>
-        <p:spPr>
-          <a:xfrm>
-            <a:off x="822960" y="4114800"/>
-            <a:ext cx="5486400" cy="54864"/>
-          </a:xfrm>
-          <a:prstGeom prst="rect">
-            <a:avLst/>
-          </a:prstGeom>
-          <a:solidFill>
-            <a:srgbClr val="FFFFFF"/>
-          </a:solidFill>
-          <a:ln>
-            <a:noFill/>
-          </a:ln>
-          <a:effectLst/>
-        </p:spPr>
-        <p:style>
-          <a:lnRef idx="1">
-            <a:schemeClr val="accent1"/>
-          </a:lnRef>
-          <a:fillRef idx="3">
-            <a:schemeClr val="accent1"/>
-          </a:fillRef>
-          <a:effectRef idx="2">
-            <a:schemeClr val="accent1"/>
-          </a:effectRef>
-          <a:fontRef idx="minor">
-            <a:schemeClr val="lt1"/>
-          </a:fontRef>
-        </p:style>
-        <p:txBody>
-          <a:bodyPr rtlCol="0" anchor="ctr"/>
-          <a:lstStyle/>
-          <a:p>
-            <a:pPr algn="ctr"/>
-          </a:p>
-        </p:txBody>
-      </p:sp>
-      <p:sp>
-        <p:nvSpPr>
-          <p:cNvPr id="6" name="TextBox 5"/>
+              <a:rPr sz="1500" b="0">
+                <a:solidFill>
+                  <a:srgbClr val="5A6672"/>
+                </a:solidFill>
+                <a:latin typeface="맑은 고딕"/>
+              </a:rPr>
+              <a:t>실시간 적용의 모습</a:t>
+            </a:r>
+          </a:p>
+        </p:txBody>
+      </p:sp>
+      <p:sp>
+        <p:nvSpPr>
+          <p:cNvPr id="5" name="TextBox 4"/>
           <p:cNvSpPr txBox="1"/>
           <p:nvPr/>
         </p:nvSpPr>
         <p:spPr>
           <a:xfrm>
-            <a:off x="822960" y="4297680"/>
-            <a:ext cx="10058400" cy="2011680"/>
+            <a:off x="640080" y="1737360"/>
+            <a:ext cx="10881360" cy="4754880"/>
           </a:xfrm>
           <a:prstGeom prst="rect">
             <a:avLst/>
@@ -7338,49 +7790,65 @@
           <a:p>
             <a:pPr algn="l">
               <a:spcAft>
-                <a:spcPts val="800"/>
-              </a:spcAft>
-            </a:pPr>
-            <a:r>
-              <a:rPr sz="1600" b="0">
-                <a:solidFill>
-                  <a:srgbClr val="FFFFFF"/>
-                </a:solidFill>
-                <a:latin typeface="맑은 고딕"/>
-              </a:rPr>
-              <a:t>•  동작 방식</a:t>
-            </a:r>
-          </a:p>
-          <a:p>
-            <a:pPr algn="l">
-              <a:spcAft>
-                <a:spcPts val="800"/>
-              </a:spcAft>
-            </a:pPr>
-            <a:r>
-              <a:rPr sz="1600" b="0">
-                <a:solidFill>
-                  <a:srgbClr val="FFFFFF"/>
-                </a:solidFill>
-                <a:latin typeface="맑은 고딕"/>
-              </a:rPr>
-              <a:t>•  SYS 라는 함정</a:t>
-            </a:r>
-          </a:p>
-          <a:p>
-            <a:pPr algn="l">
-              <a:spcAft>
-                <a:spcPts val="800"/>
-              </a:spcAft>
-            </a:pPr>
-            <a:r>
-              <a:rPr sz="1600" b="0">
-                <a:solidFill>
-                  <a:srgbClr val="FFFFFF"/>
-                </a:solidFill>
-                <a:latin typeface="맑은 고딕"/>
-              </a:rPr>
-              <a:t>•  비용과 용도</a:t>
+                <a:spcPts val="1000"/>
+              </a:spcAft>
+            </a:pPr>
+            <a:r>
+              <a:rPr sz="1700" b="0">
+                <a:solidFill>
+                  <a:srgbClr val="222222"/>
+                </a:solidFill>
+                <a:latin typeface="맑은 고딕"/>
+              </a:rPr>
+              <a:t>•  `RFS`(LGWR) 시퀀스 **74** 블록 **17964**</a:t>
+            </a:r>
+          </a:p>
+          <a:p>
+            <a:pPr algn="l">
+              <a:spcAft>
+                <a:spcPts val="1000"/>
+              </a:spcAft>
+            </a:pPr>
+            <a:r>
+              <a:rPr sz="1700" b="0">
+                <a:solidFill>
+                  <a:srgbClr val="222222"/>
+                </a:solidFill>
+                <a:latin typeface="맑은 고딕"/>
+              </a:rPr>
+              <a:t>•  `MRP0` 시퀀스 **74** 블록 **17964**</a:t>
+            </a:r>
+          </a:p>
+          <a:p>
+            <a:pPr algn="l">
+              <a:spcAft>
+                <a:spcPts val="1000"/>
+              </a:spcAft>
+            </a:pPr>
+            <a:r>
+              <a:rPr sz="1700" b="0">
+                <a:solidFill>
+                  <a:srgbClr val="222222"/>
+                </a:solidFill>
+                <a:latin typeface="맑은 고딕"/>
+              </a:rPr>
+              <a:t>•  **두 값이 같으면 받는 즉시 적용 중**</a:t>
+            </a:r>
+          </a:p>
+          <a:p>
+            <a:pPr algn="l">
+              <a:spcAft>
+                <a:spcPts val="1000"/>
+              </a:spcAft>
+            </a:pPr>
+            <a:r>
+              <a:rPr sz="1700" b="0">
+                <a:solidFill>
+                  <a:srgbClr val="222222"/>
+                </a:solidFill>
+                <a:latin typeface="맑은 고딕"/>
+              </a:rPr>
+              <a:t>•  벌어지면 밀린 것 — **블록 단위로** 볼 수 있다</a:t>
             </a:r>
           </a:p>
         </p:txBody>
@@ -7481,7 +7949,7 @@
                 </a:solidFill>
                 <a:latin typeface="맑은 고딕"/>
               </a:rPr>
-              <a:t>읽기 전용에서 INSERT 가 된다</a:t>
+              <a:t>함정 ①</a:t>
             </a:r>
           </a:p>
         </p:txBody>
@@ -7520,7 +7988,7 @@
                 </a:solidFill>
                 <a:latin typeface="맑은 고딕"/>
               </a:rPr>
-              <a:t>19c 의 기능</a:t>
+              <a:t>APPLIED 열</a:t>
             </a:r>
           </a:p>
         </p:txBody>
@@ -7559,7 +8027,7 @@
                 </a:solidFill>
                 <a:latin typeface="맑은 고딕"/>
               </a:rPr>
-              <a:t>•  `ALTER SESSION ENABLE ADG_REDIRECT_DML`</a:t>
+              <a:t>•  같은 시퀀스가 **두 줄씩** 나온다</a:t>
             </a:r>
           </a:p>
           <a:p>
@@ -7575,7 +8043,7 @@
                 </a:solidFill>
                 <a:latin typeface="맑은 고딕"/>
               </a:rPr>
-              <a:t>•  일반 사용자로 `INSERT` → **1 row created**</a:t>
+              <a:t>•  `dest_id=1` 은 **영원히 NO** — 로컬 아카이브다</a:t>
             </a:r>
           </a:p>
           <a:p>
@@ -7591,7 +8059,7 @@
                 </a:solidFill>
                 <a:latin typeface="맑은 고딕"/>
               </a:rPr>
-              <a:t>•  같은 행이 **Primary 에서도** 조회된다</a:t>
+              <a:t>•  `dest_id=2` 가 실제 적용 여부</a:t>
             </a:r>
           </a:p>
           <a:p>
@@ -7607,7 +8075,7 @@
                 </a:solidFill>
                 <a:latin typeface="맑은 고딕"/>
               </a:rPr>
-              <a:t>•  `UPDATE`·`DELETE` 도 마찬가지</a:t>
+              <a:t>•  **`WHERE dest_id=2` 가 필수**</a:t>
             </a:r>
           </a:p>
         </p:txBody>
@@ -7708,7 +8176,7 @@
                 </a:solidFill>
                 <a:latin typeface="맑은 고딕"/>
               </a:rPr>
-              <a:t>SYS 로는 안 된다</a:t>
+              <a:t>함정 ②</a:t>
             </a:r>
           </a:p>
         </p:txBody>
@@ -7747,7 +8215,7 @@
                 </a:solidFill>
                 <a:latin typeface="맑은 고딕"/>
               </a:rPr>
-              <a:t>ORA-16397</a:t>
+              <a:t>APPLIED_SEQ# 가 0</a:t>
             </a:r>
           </a:p>
         </p:txBody>
@@ -7786,7 +8254,7 @@
                 </a:solidFill>
                 <a:latin typeface="맑은 고딕"/>
               </a:rPr>
-              <a:t>•  세션 설정은 성공 (`Session altered.`)</a:t>
+              <a:t>•  `ARCHIVED_SEQ#` 73 인데 `APPLIED_SEQ#` **0**</a:t>
             </a:r>
           </a:p>
           <a:p>
@@ -7802,7 +8270,7 @@
                 </a:solidFill>
                 <a:latin typeface="맑은 고딕"/>
               </a:rPr>
-              <a:t>•  실행에서 **ORA-16397**</a:t>
+              <a:t>•  적용이 멈춘 것이 **아니다**</a:t>
             </a:r>
           </a:p>
           <a:p>
@@ -7818,7 +8286,7 @@
                 </a:solidFill>
                 <a:latin typeface="맑은 고딕"/>
               </a:rPr>
-              <a:t>•  이유 : SYSDBA 접속은 재인증 경로가 없다</a:t>
+              <a:t>•  **실시간 적용은 SRL 에서 직접 읽는다**</a:t>
             </a:r>
           </a:p>
           <a:p>
@@ -7834,7 +8302,7 @@
                 </a:solidFill>
                 <a:latin typeface="맑은 고딕"/>
               </a:rPr>
-              <a:t>•  **관리자 계정으로 시험하면 기능이 없다고 오판한다**</a:t>
+              <a:t>•  근거 — `RECOVERY_MODE` = `MANAGED REAL TIME APPLY`</a:t>
             </a:r>
           </a:p>
         </p:txBody>
@@ -7974,7 +8442,7 @@
                 </a:solidFill>
                 <a:latin typeface="맑은 고딕"/>
               </a:rPr>
-              <a:t>•  ADG 가 켜져 있음을 두 표식으로 확인하고 사용 기록을 조회한다.</a:t>
+              <a:t>•  `V$LOG` · `V$LOGFILE` · `V$STANDBY_LOG` 의 STATUS 를 역할별로 해석한다.</a:t>
             </a:r>
           </a:p>
           <a:p>
@@ -7990,7 +8458,7 @@
                 </a:solidFill>
                 <a:latin typeface="맑은 고딕"/>
               </a:rPr>
-              <a:t>•  Standby 조회가 커밋된 데이터만 보여 준다는 것을 정확한 방법으로 검증한다.</a:t>
+              <a:t>•  `V$ARCHIVE_DEST` 와 `V$ARCHIVE_DEST_STATUS` 의 관점 차이를 안다.</a:t>
             </a:r>
           </a:p>
           <a:p>
@@ -8006,7 +8474,7 @@
                 </a:solidFill>
                 <a:latin typeface="맑은 고딕"/>
               </a:rPr>
-              <a:t>•  Standby 에서 되는 작업과 안 되는 작업의 경계를 하나의 기준으로 설명한다.</a:t>
+              <a:t>•  `VALID_NOW` · `VALID_TYPE` · `VALID_ROLE` 로 목적지를 판정한다.</a:t>
             </a:r>
           </a:p>
           <a:p>
@@ -8022,7 +8490,7 @@
                 </a:solidFill>
                 <a:latin typeface="맑은 고딕"/>
               </a:rPr>
-              <a:t>•  DML 리다이렉션을 세션 수준에서 켜고 동작 조건과 제약을 설명한다.</a:t>
+              <a:t>•  전송이 끊긴 상황을 만들어 `ERROR` 열을 확인하고 복구를 검증한다.</a:t>
             </a:r>
           </a:p>
           <a:p>
@@ -8038,7 +8506,7 @@
                 </a:solidFill>
                 <a:latin typeface="맑은 고딕"/>
               </a:rPr>
-              <a:t>•  `STANDBY_MAX_DATA_DELAY` 로 허용 지연을 정하고 ORA-03172 를 해석한다.</a:t>
+              <a:t>•  `V$ARCHIVED_LOG` 의 `APPLIED` 가 목적지마다 다른 이유를 설명한다.</a:t>
             </a:r>
           </a:p>
           <a:p>
@@ -8054,7 +8522,7 @@
                 </a:solidFill>
                 <a:latin typeface="맑은 고딕"/>
               </a:rPr>
-              <a:t>•  `SYNC WITH PRIMARY` 가 실패하는 이유를 보호 모드와 연결해 설명한다.</a:t>
+              <a:t>•  `V$MANAGED_STANDBY` 의 프로세스 구성을 읽는다.</a:t>
             </a:r>
           </a:p>
           <a:p>
@@ -8070,7 +8538,7 @@
                 </a:solidFill>
                 <a:latin typeface="맑은 고딕"/>
               </a:rPr>
-              <a:t>•  `V$STANDBY_EVENT_HISTOGRAM` 으로 지연의 분포를 읽는다.</a:t>
+              <a:t>•  `LOG_ARCHIVE_TRACE` 로 추적을 켜고 트레이스 파일을 읽는다.</a:t>
             </a:r>
           </a:p>
           <a:p>
@@ -8086,7 +8554,23 @@
                 </a:solidFill>
                 <a:latin typeface="맑은 고딕"/>
               </a:rPr>
-              <a:t>•  옵션 없이 운영할 때 MOUNTED 로 두고 동기화를 확인하는 방법을 제시한다.</a:t>
+              <a:t>•  Logical Standby 에서 어떤 뷰가 비는지 알고 `V$LOGSTDBY_TRANSACTION` 을 읽는다.</a:t>
+            </a:r>
+          </a:p>
+          <a:p>
+            <a:pPr algn="l">
+              <a:spcAft>
+                <a:spcPts val="1000"/>
+              </a:spcAft>
+            </a:pPr>
+            <a:r>
+              <a:rPr sz="1600" b="0">
+                <a:solidFill>
+                  <a:srgbClr val="222222"/>
+                </a:solidFill>
+                <a:latin typeface="맑은 고딕"/>
+              </a:rPr>
+              <a:t>•  지표를 한 번에 수집하는 상시 점검 스크립트를 만든다.</a:t>
             </a:r>
           </a:p>
         </p:txBody>
@@ -8118,7 +8602,7 @@
         <p:spPr>
           <a:xfrm>
             <a:off x="0" y="0"/>
-            <a:ext cx="12191695" cy="1005840"/>
+            <a:ext cx="12191695" cy="6858000"/>
           </a:xfrm>
           <a:prstGeom prst="rect">
             <a:avLst/>
@@ -8161,8 +8645,8 @@
         </p:nvSpPr>
         <p:spPr>
           <a:xfrm>
-            <a:off x="548640" y="91440"/>
-            <a:ext cx="10972800" cy="777240"/>
+            <a:off x="822960" y="2011680"/>
+            <a:ext cx="10515600" cy="1097280"/>
           </a:xfrm>
           <a:prstGeom prst="rect">
             <a:avLst/>
@@ -8181,13 +8665,13 @@
               </a:spcAft>
             </a:pPr>
             <a:r>
-              <a:rPr sz="2600" b="1">
+              <a:rPr sz="4000" b="1">
                 <a:solidFill>
                   <a:srgbClr val="FFFFFF"/>
                 </a:solidFill>
                 <a:latin typeface="맑은 고딕"/>
               </a:rPr>
-              <a:t>오류 번호가 경로를 알려 준다</a:t>
+              <a:t>15.4</a:t>
             </a:r>
           </a:p>
         </p:txBody>
@@ -8200,8 +8684,8 @@
         </p:nvSpPr>
         <p:spPr>
           <a:xfrm>
-            <a:off x="640080" y="1078992"/>
-            <a:ext cx="10881360" cy="457200"/>
+            <a:off x="822960" y="3017520"/>
+            <a:ext cx="10515600" cy="914400"/>
           </a:xfrm>
           <a:prstGeom prst="rect">
             <a:avLst/>
@@ -8220,27 +8704,71 @@
               </a:spcAft>
             </a:pPr>
             <a:r>
-              <a:rPr sz="1500" b="0">
-                <a:solidFill>
-                  <a:srgbClr val="5A6672"/>
-                </a:solidFill>
-                <a:latin typeface="맑은 고딕"/>
-              </a:rPr>
-              <a:t>16000 대 16397</a:t>
-            </a:r>
-          </a:p>
-        </p:txBody>
-      </p:sp>
-      <p:sp>
-        <p:nvSpPr>
-          <p:cNvPr id="5" name="TextBox 4"/>
+              <a:rPr sz="2800" b="1">
+                <a:solidFill>
+                  <a:srgbClr val="FFFFFF"/>
+                </a:solidFill>
+                <a:latin typeface="맑은 고딕"/>
+              </a:rPr>
+              <a:t>전송이 끊기면</a:t>
+            </a:r>
+          </a:p>
+        </p:txBody>
+      </p:sp>
+      <p:sp>
+        <p:nvSpPr>
+          <p:cNvPr id="5" name="Rectangle 4"/>
+          <p:cNvSpPr/>
+          <p:nvPr/>
+        </p:nvSpPr>
+        <p:spPr>
+          <a:xfrm>
+            <a:off x="822960" y="4114800"/>
+            <a:ext cx="5486400" cy="54864"/>
+          </a:xfrm>
+          <a:prstGeom prst="rect">
+            <a:avLst/>
+          </a:prstGeom>
+          <a:solidFill>
+            <a:srgbClr val="FFFFFF"/>
+          </a:solidFill>
+          <a:ln>
+            <a:noFill/>
+          </a:ln>
+          <a:effectLst/>
+        </p:spPr>
+        <p:style>
+          <a:lnRef idx="1">
+            <a:schemeClr val="accent1"/>
+          </a:lnRef>
+          <a:fillRef idx="3">
+            <a:schemeClr val="accent1"/>
+          </a:fillRef>
+          <a:effectRef idx="2">
+            <a:schemeClr val="accent1"/>
+          </a:effectRef>
+          <a:fontRef idx="minor">
+            <a:schemeClr val="lt1"/>
+          </a:fontRef>
+        </p:style>
+        <p:txBody>
+          <a:bodyPr rtlCol="0" anchor="ctr"/>
+          <a:lstStyle/>
+          <a:p>
+            <a:pPr algn="ctr"/>
+          </a:p>
+        </p:txBody>
+      </p:sp>
+      <p:sp>
+        <p:nvSpPr>
+          <p:cNvPr id="6" name="TextBox 5"/>
           <p:cNvSpPr txBox="1"/>
           <p:nvPr/>
         </p:nvSpPr>
         <p:spPr>
           <a:xfrm>
-            <a:off x="640080" y="1737360"/>
-            <a:ext cx="10881360" cy="4754880"/>
+            <a:off x="822960" y="4297680"/>
+            <a:ext cx="10058400" cy="2011680"/>
           </a:xfrm>
           <a:prstGeom prst="rect">
             <a:avLst/>
@@ -8255,65 +8783,49 @@
           <a:p>
             <a:pPr algn="l">
               <a:spcAft>
-                <a:spcPts val="1000"/>
-              </a:spcAft>
-            </a:pPr>
-            <a:r>
-              <a:rPr sz="1700" b="0">
-                <a:solidFill>
-                  <a:srgbClr val="222222"/>
-                </a:solidFill>
-                <a:latin typeface="맑은 고딕"/>
-              </a:rPr>
-              <a:t>•  리다이렉션 꺼짐 + DML → **ORA-16000** (시도하지 않았다)</a:t>
-            </a:r>
-          </a:p>
-          <a:p>
-            <a:pPr algn="l">
-              <a:spcAft>
-                <a:spcPts val="1000"/>
-              </a:spcAft>
-            </a:pPr>
-            <a:r>
-              <a:rPr sz="1700" b="0">
-                <a:solidFill>
-                  <a:srgbClr val="222222"/>
-                </a:solidFill>
-                <a:latin typeface="맑은 고딕"/>
-              </a:rPr>
-              <a:t>•  리다이렉션 켜짐 + DDL → **ORA-16000** (대상이 아니다)</a:t>
-            </a:r>
-          </a:p>
-          <a:p>
-            <a:pPr algn="l">
-              <a:spcAft>
-                <a:spcPts val="1000"/>
-              </a:spcAft>
-            </a:pPr>
-            <a:r>
-              <a:rPr sz="1700" b="0">
-                <a:solidFill>
-                  <a:srgbClr val="222222"/>
-                </a:solidFill>
-                <a:latin typeface="맑은 고딕"/>
-              </a:rPr>
-              <a:t>•  리다이렉션 켜짐 + DML + SYS → **ORA-16397** (시도했다가 실패)</a:t>
-            </a:r>
-          </a:p>
-          <a:p>
-            <a:pPr algn="l">
-              <a:spcAft>
-                <a:spcPts val="1000"/>
-              </a:spcAft>
-            </a:pPr>
-            <a:r>
-              <a:rPr sz="1700" b="0">
-                <a:solidFill>
-                  <a:srgbClr val="222222"/>
-                </a:solidFill>
-                <a:latin typeface="맑은 고딕"/>
-              </a:rPr>
-              <a:t>•  ORA-16000 이면 설정·대상을, ORA-16397 이면 접속·경로를 본다</a:t>
+                <a:spcPts val="800"/>
+              </a:spcAft>
+            </a:pPr>
+            <a:r>
+              <a:rPr sz="1600" b="0">
+                <a:solidFill>
+                  <a:srgbClr val="FFFFFF"/>
+                </a:solidFill>
+                <a:latin typeface="맑은 고딕"/>
+              </a:rPr>
+              <a:t>•  의도하지 않은 중단을 만든다</a:t>
+            </a:r>
+          </a:p>
+          <a:p>
+            <a:pPr algn="l">
+              <a:spcAft>
+                <a:spcPts val="800"/>
+              </a:spcAft>
+            </a:pPr>
+            <a:r>
+              <a:rPr sz="1600" b="0">
+                <a:solidFill>
+                  <a:srgbClr val="FFFFFF"/>
+                </a:solidFill>
+                <a:latin typeface="맑은 고딕"/>
+              </a:rPr>
+              <a:t>•  층별로 무엇이 보이는가</a:t>
+            </a:r>
+          </a:p>
+          <a:p>
+            <a:pPr algn="l">
+              <a:spcAft>
+                <a:spcPts val="800"/>
+              </a:spcAft>
+            </a:pPr>
+            <a:r>
+              <a:rPr sz="1600" b="0">
+                <a:solidFill>
+                  <a:srgbClr val="FFFFFF"/>
+                </a:solidFill>
+                <a:latin typeface="맑은 고딕"/>
+              </a:rPr>
+              <a:t>•  복구는 즉시 되지 않는다</a:t>
             </a:r>
           </a:p>
         </p:txBody>
@@ -8414,7 +8926,7 @@
                 </a:solidFill>
                 <a:latin typeface="맑은 고딕"/>
               </a:rPr>
-              <a:t>비용을 이해한다</a:t>
+              <a:t>리스너를 내린다</a:t>
             </a:r>
           </a:p>
         </p:txBody>
@@ -8453,7 +8965,7 @@
                 </a:solidFill>
                 <a:latin typeface="맑은 고딕"/>
               </a:rPr>
-              <a:t>부하 분산이 아니다</a:t>
+              <a:t>의도하지 않은 중단</a:t>
             </a:r>
           </a:p>
         </p:txBody>
@@ -8492,7 +9004,7 @@
                 </a:solidFill>
                 <a:latin typeface="맑은 고딕"/>
               </a:rPr>
-              <a:t>•  문장 하나가 **두 번의 네트워크 왕복**</a:t>
+              <a:t>•  14장은 속성으로 껐다 — **의도한 중단**, `SUCCESS`</a:t>
             </a:r>
           </a:p>
           <a:p>
@@ -8508,7 +9020,7 @@
                 </a:solidFill>
                 <a:latin typeface="맑은 고딕"/>
               </a:rPr>
-              <a:t>•  실행은 결국 **Primary** 에서 일어난다 — Primary 부담은 줄지 않는다</a:t>
+              <a:t>•  이번은 `lsnrctl stop` — **장애**</a:t>
             </a:r>
           </a:p>
           <a:p>
@@ -8524,7 +9036,7 @@
                 </a:solidFill>
                 <a:latin typeface="맑은 고딕"/>
               </a:rPr>
-              <a:t>•  트랜잭션도 Primary 에 존재한다. 길게 열어 두지 않는다</a:t>
+              <a:t>•  `TNS-12541` / `Linux Error: 111: Connection refused`</a:t>
             </a:r>
           </a:p>
           <a:p>
@@ -8540,7 +9052,7 @@
                 </a:solidFill>
                 <a:latin typeface="맑은 고딕"/>
               </a:rPr>
-              <a:t>•  적합 : 간헐적이고 작은 갱신 / 부적합 : 대량 DML</a:t>
+              <a:t>•  Primary 에서 변경 후 로그 두 번 전환</a:t>
             </a:r>
           </a:p>
         </p:txBody>
@@ -8572,7 +9084,7 @@
         <p:spPr>
           <a:xfrm>
             <a:off x="0" y="0"/>
-            <a:ext cx="12191695" cy="6858000"/>
+            <a:ext cx="12191695" cy="1005840"/>
           </a:xfrm>
           <a:prstGeom prst="rect">
             <a:avLst/>
@@ -8615,8 +9127,8 @@
         </p:nvSpPr>
         <p:spPr>
           <a:xfrm>
-            <a:off x="822960" y="2011680"/>
-            <a:ext cx="10515600" cy="1097280"/>
+            <a:off x="548640" y="91440"/>
+            <a:ext cx="10972800" cy="777240"/>
           </a:xfrm>
           <a:prstGeom prst="rect">
             <a:avLst/>
@@ -8635,13 +9147,13 @@
               </a:spcAft>
             </a:pPr>
             <a:r>
-              <a:rPr sz="4000" b="1">
+              <a:rPr sz="2600" b="1">
                 <a:solidFill>
                   <a:srgbClr val="FFFFFF"/>
                 </a:solidFill>
                 <a:latin typeface="맑은 고딕"/>
               </a:rPr>
-              <a:t>9.6</a:t>
+              <a:t>Primary 가 보는 것</a:t>
             </a:r>
           </a:p>
         </p:txBody>
@@ -8654,8 +9166,8 @@
         </p:nvSpPr>
         <p:spPr>
           <a:xfrm>
-            <a:off x="822960" y="3017520"/>
-            <a:ext cx="10515600" cy="914400"/>
+            <a:off x="640080" y="1078992"/>
+            <a:ext cx="10881360" cy="457200"/>
           </a:xfrm>
           <a:prstGeom prst="rect">
             <a:avLst/>
@@ -8674,71 +9186,27 @@
               </a:spcAft>
             </a:pPr>
             <a:r>
-              <a:rPr sz="2800" b="1">
-                <a:solidFill>
-                  <a:srgbClr val="FFFFFF"/>
-                </a:solidFill>
-                <a:latin typeface="맑은 고딕"/>
-              </a:rPr>
-              <a:t>세션이 허용할 지연</a:t>
-            </a:r>
-          </a:p>
-        </p:txBody>
-      </p:sp>
-      <p:sp>
-        <p:nvSpPr>
-          <p:cNvPr id="5" name="Rectangle 4"/>
-          <p:cNvSpPr/>
-          <p:nvPr/>
-        </p:nvSpPr>
-        <p:spPr>
-          <a:xfrm>
-            <a:off x="822960" y="4114800"/>
-            <a:ext cx="5486400" cy="54864"/>
-          </a:xfrm>
-          <a:prstGeom prst="rect">
-            <a:avLst/>
-          </a:prstGeom>
-          <a:solidFill>
-            <a:srgbClr val="FFFFFF"/>
-          </a:solidFill>
-          <a:ln>
-            <a:noFill/>
-          </a:ln>
-          <a:effectLst/>
-        </p:spPr>
-        <p:style>
-          <a:lnRef idx="1">
-            <a:schemeClr val="accent1"/>
-          </a:lnRef>
-          <a:fillRef idx="3">
-            <a:schemeClr val="accent1"/>
-          </a:fillRef>
-          <a:effectRef idx="2">
-            <a:schemeClr val="accent1"/>
-          </a:effectRef>
-          <a:fontRef idx="minor">
-            <a:schemeClr val="lt1"/>
-          </a:fontRef>
-        </p:style>
-        <p:txBody>
-          <a:bodyPr rtlCol="0" anchor="ctr"/>
-          <a:lstStyle/>
-          <a:p>
-            <a:pPr algn="ctr"/>
-          </a:p>
-        </p:txBody>
-      </p:sp>
-      <p:sp>
-        <p:nvSpPr>
-          <p:cNvPr id="6" name="TextBox 5"/>
+              <a:rPr sz="1500" b="0">
+                <a:solidFill>
+                  <a:srgbClr val="5A6672"/>
+                </a:solidFill>
+                <a:latin typeface="맑은 고딕"/>
+              </a:rPr>
+              <a:t>세 열이 바뀐다</a:t>
+            </a:r>
+          </a:p>
+        </p:txBody>
+      </p:sp>
+      <p:sp>
+        <p:nvSpPr>
+          <p:cNvPr id="5" name="TextBox 4"/>
           <p:cNvSpPr txBox="1"/>
           <p:nvPr/>
         </p:nvSpPr>
         <p:spPr>
           <a:xfrm>
-            <a:off x="822960" y="4297680"/>
-            <a:ext cx="10058400" cy="2011680"/>
+            <a:off x="640080" y="1737360"/>
+            <a:ext cx="10881360" cy="4754880"/>
           </a:xfrm>
           <a:prstGeom prst="rect">
             <a:avLst/>
@@ -8753,49 +9221,65 @@
           <a:p>
             <a:pPr algn="l">
               <a:spcAft>
-                <a:spcPts val="800"/>
-              </a:spcAft>
-            </a:pPr>
-            <a:r>
-              <a:rPr sz="1600" b="0">
-                <a:solidFill>
-                  <a:srgbClr val="FFFFFF"/>
-                </a:solidFill>
-                <a:latin typeface="맑은 고딕"/>
-              </a:rPr>
-              <a:t>•  STANDBY_MAX_DATA_DELAY</a:t>
-            </a:r>
-          </a:p>
-          <a:p>
-            <a:pPr algn="l">
-              <a:spcAft>
-                <a:spcPts val="800"/>
-              </a:spcAft>
-            </a:pPr>
-            <a:r>
-              <a:rPr sz="1600" b="0">
-                <a:solidFill>
-                  <a:srgbClr val="FFFFFF"/>
-                </a:solidFill>
-                <a:latin typeface="맑은 고딕"/>
-              </a:rPr>
-              <a:t>•  SYNC WITH PRIMARY</a:t>
-            </a:r>
-          </a:p>
-          <a:p>
-            <a:pPr algn="l">
-              <a:spcAft>
-                <a:spcPts val="800"/>
-              </a:spcAft>
-            </a:pPr>
-            <a:r>
-              <a:rPr sz="1600" b="0">
-                <a:solidFill>
-                  <a:srgbClr val="FFFFFF"/>
-                </a:solidFill>
-                <a:latin typeface="맑은 고딕"/>
-              </a:rPr>
-              <a:t>•  보호 모드가 결정한다</a:t>
+                <a:spcPts val="1000"/>
+              </a:spcAft>
+            </a:pPr>
+            <a:r>
+              <a:rPr sz="1700" b="0">
+                <a:solidFill>
+                  <a:srgbClr val="222222"/>
+                </a:solidFill>
+                <a:latin typeface="맑은 고딕"/>
+              </a:rPr>
+              <a:t>•  `STATUS` `VALID` → **`ERROR`**</a:t>
+            </a:r>
+          </a:p>
+          <a:p>
+            <a:pPr algn="l">
+              <a:spcAft>
+                <a:spcPts val="1000"/>
+              </a:spcAft>
+            </a:pPr>
+            <a:r>
+              <a:rPr sz="1700" b="0">
+                <a:solidFill>
+                  <a:srgbClr val="222222"/>
+                </a:solidFill>
+                <a:latin typeface="맑은 고딕"/>
+              </a:rPr>
+              <a:t>•  `VALID_NOW` `YES` → **`INACTIVE`**</a:t>
+            </a:r>
+          </a:p>
+          <a:p>
+            <a:pPr algn="l">
+              <a:spcAft>
+                <a:spcPts val="1000"/>
+              </a:spcAft>
+            </a:pPr>
+            <a:r>
+              <a:rPr sz="1700" b="0">
+                <a:solidFill>
+                  <a:srgbClr val="222222"/>
+                </a:solidFill>
+                <a:latin typeface="맑은 고딕"/>
+              </a:rPr>
+              <a:t>•  `ERROR` (빈값) → **`ORA-12541: TNS:no listener`**</a:t>
+            </a:r>
+          </a:p>
+          <a:p>
+            <a:pPr algn="l">
+              <a:spcAft>
+                <a:spcPts val="1000"/>
+              </a:spcAft>
+            </a:pPr>
+            <a:r>
+              <a:rPr sz="1700" b="0">
+                <a:solidFill>
+                  <a:srgbClr val="222222"/>
+                </a:solidFill>
+                <a:latin typeface="맑은 고딕"/>
+              </a:rPr>
+              <a:t>•  `LOG_ARCHIVE_DEST_STATE_2` 는 **`ENABLE` 그대로**</a:t>
             </a:r>
           </a:p>
         </p:txBody>
@@ -8896,7 +9380,7 @@
                 </a:solidFill>
                 <a:latin typeface="맑은 고딕"/>
               </a:rPr>
-              <a:t>얼마나 오래된 데이터까지 받을 것인가</a:t>
+              <a:t>알림 로그가 더 주는 것</a:t>
             </a:r>
           </a:p>
         </p:txBody>
@@ -8935,7 +9419,7 @@
                 </a:solidFill>
                 <a:latin typeface="맑은 고딕"/>
               </a:rPr>
-              <a:t>ORA-03172</a:t>
+              <a:t>뷰에 없는 정보</a:t>
             </a:r>
           </a:p>
         </p:txBody>
@@ -8974,7 +9458,7 @@
                 </a:solidFill>
                 <a:latin typeface="맑은 고딕"/>
               </a:rPr>
-              <a:t>•  `ALTER SESSION SET standby_max_data_delay=1` (초 단위)</a:t>
+              <a:t>•  **접속 문자열 전체** — `HOST`·`PORT`·`SERVICE_NAME`</a:t>
             </a:r>
           </a:p>
           <a:p>
@@ -8990,7 +9474,7 @@
                 </a:solidFill>
                 <a:latin typeface="맑은 고딕"/>
               </a:rPr>
-              <a:t>•  정상 상태 → 통과</a:t>
+              <a:t>•  **프로세스** — `ARC1 (PID:2482)`</a:t>
             </a:r>
           </a:p>
           <a:p>
@@ -9006,7 +9490,7 @@
                 </a:solidFill>
                 <a:latin typeface="맑은 고딕"/>
               </a:rPr>
-              <a:t>•  `=0` → **ORA-03172 of 0 seconds exceeded** (ASYNC 라 항상)</a:t>
+              <a:t>•  **트레이스 파일 이름** — `chicago_arc1_2482.trc`</a:t>
             </a:r>
           </a:p>
           <a:p>
@@ -9022,7 +9506,7 @@
                 </a:solidFill>
                 <a:latin typeface="맑은 고딕"/>
               </a:rPr>
-              <a:t>•  적용 정지 후 lag 1분 22초 → `=1` 로 **ORA-03172**</a:t>
+              <a:t>•  `ORA-16055` / **`archiver continuing`**</a:t>
             </a:r>
           </a:p>
         </p:txBody>
@@ -9123,7 +9607,7 @@
                 </a:solidFill>
                 <a:latin typeface="맑은 고딕"/>
               </a:rPr>
-              <a:t>한도가 있을 때와 없을 때</a:t>
+              <a:t>SEVERITY 가 아니라 ERROR_CODE</a:t>
             </a:r>
           </a:p>
         </p:txBody>
@@ -9162,7 +9646,7 @@
                 </a:solidFill>
                 <a:latin typeface="맑은 고딕"/>
               </a:rPr>
-              <a:t>이 대비가 요점이다</a:t>
+              <a:t>두 방향의 반례</a:t>
             </a:r>
           </a:p>
         </p:txBody>
@@ -9201,7 +9685,7 @@
                 </a:solidFill>
                 <a:latin typeface="맑은 고딕"/>
               </a:rPr>
-              <a:t>•  한도 없음 → 성공하되 **옛 데이터**를 돌려준다</a:t>
+              <a:t>•  14장 — `SRL selected ...` **Warning 인데 ERROR_CODE 0** (정상)</a:t>
             </a:r>
           </a:p>
           <a:p>
@@ -9217,7 +9701,7 @@
                 </a:solidFill>
                 <a:latin typeface="맑은 고딕"/>
               </a:rPr>
-              <a:t>•  한도 있음 → **거부**한다 (ORA-03172)</a:t>
+              <a:t>•  15장 — `Check whether the listener is up` **Warning 인데 12541**</a:t>
             </a:r>
           </a:p>
           <a:p>
@@ -9233,7 +9717,7 @@
                 </a:solidFill>
                 <a:latin typeface="맑은 고딕"/>
               </a:rPr>
-              <a:t>•  판단을 **애플리케이션이 하게** 해 준다</a:t>
+              <a:t>•  **`Warning` 은 위험도 안전도 뜻하지 않는다**</a:t>
             </a:r>
           </a:p>
           <a:p>
@@ -9249,7 +9733,7 @@
                 </a:solidFill>
                 <a:latin typeface="맑은 고딕"/>
               </a:rPr>
-              <a:t>•  `try { standby } catch (ORA-03172) { primary }`</a:t>
+              <a:t>•  판정 기준은 `ERROR_CODE`</a:t>
             </a:r>
           </a:p>
         </p:txBody>
@@ -9350,7 +9834,7 @@
                 </a:solidFill>
                 <a:latin typeface="맑은 고딕"/>
               </a:rPr>
-              <a:t>SYS 는 또 예외다</a:t>
+              <a:t>Standby 가 보는 것</a:t>
             </a:r>
           </a:p>
         </p:txBody>
@@ -9389,7 +9873,7 @@
                 </a:solidFill>
                 <a:latin typeface="맑은 고딕"/>
               </a:rPr>
-              <a:t>ORA-03174</a:t>
+              <a:t>지연은 또 0이다</a:t>
             </a:r>
           </a:p>
         </p:txBody>
@@ -9428,7 +9912,7 @@
                 </a:solidFill>
                 <a:latin typeface="맑은 고딕"/>
               </a:rPr>
-              <a:t>•  `SYS` 로 설정 → **ORA-03174: does not apply to SYS users**</a:t>
+              <a:t>•  `MRP0` `APPLYING_LOG` → **`WAIT_FOR_LOG`**, 시퀀스 75</a:t>
             </a:r>
           </a:p>
           <a:p>
@@ -9444,7 +9928,7 @@
                 </a:solidFill>
                 <a:latin typeface="맑은 고딕"/>
               </a:rPr>
-              <a:t>•  오류가 나도 **그 뒤의 조회는 정상 수행**된다</a:t>
+              <a:t>•  `RFS`(LGWR) 가 **사라졌다**</a:t>
             </a:r>
           </a:p>
           <a:p>
@@ -9460,7 +9944,7 @@
                 </a:solidFill>
                 <a:latin typeface="맑은 고딕"/>
               </a:rPr>
-              <a:t>•  관리자가 진단 조회를 할 때 막히면 곤란하기 때문으로 보인다</a:t>
+              <a:t>•  `V$STANDBY_LOG` 의 `ACTIVE` **0개**</a:t>
             </a:r>
           </a:p>
           <a:p>
@@ -9476,7 +9960,7 @@
                 </a:solidFill>
                 <a:latin typeface="맑은 고딕"/>
               </a:rPr>
-              <a:t>•  리다이렉션의 ORA-16397 과 **같은 교훈**</a:t>
+              <a:t>•  두 지연은 **0** — 변하지 않는다</a:t>
             </a:r>
           </a:p>
         </p:txBody>
@@ -9577,7 +10061,7 @@
                 </a:solidFill>
                 <a:latin typeface="맑은 고딕"/>
               </a:rPr>
-              <a:t>보호 모드가 또 결정한다</a:t>
+              <a:t>층마다 다른 답</a:t>
             </a:r>
           </a:p>
         </p:txBody>
@@ -9616,7 +10100,7 @@
                 </a:solidFill>
                 <a:latin typeface="맑은 고딕"/>
               </a:rPr>
-              <a:t>ORA-03173</a:t>
+              <a:t>같은 사건, 다른 정보</a:t>
             </a:r>
           </a:p>
         </p:txBody>
@@ -9655,7 +10139,7 @@
                 </a:solidFill>
                 <a:latin typeface="맑은 고딕"/>
               </a:rPr>
-              <a:t>•  `ALTER SESSION SYNC WITH PRIMARY` → **ORA-03173**</a:t>
+              <a:t>•  `SHOW CONFIGURATION` — `WARNING` + ORA-16857 → **문제가 있다**</a:t>
             </a:r>
           </a:p>
           <a:p>
@@ -9671,7 +10155,7 @@
                 </a:solidFill>
                 <a:latin typeface="맑은 고딕"/>
               </a:rPr>
-              <a:t>•  동기 전송이 전제다. ASYNC 에서는 시도 자체가 거부된다</a:t>
+              <a:t>•  `VALIDATE DATABASE` — `Ready for SW: No` → **전환 불가**</a:t>
             </a:r>
           </a:p>
           <a:p>
@@ -9687,7 +10171,7 @@
                 </a:solidFill>
                 <a:latin typeface="맑은 고딕"/>
               </a:rPr>
-              <a:t>•  8장 : 보호 모드가 **복구 가능성**을 결정했다</a:t>
+              <a:t>•  `V$ARCHIVE_DEST` — `ERROR` + **ORA-12541** → **왜**</a:t>
             </a:r>
           </a:p>
           <a:p>
@@ -9703,7 +10187,7 @@
                 </a:solidFill>
                 <a:latin typeface="맑은 고딕"/>
               </a:rPr>
-              <a:t>•  9장 : 보호 모드가 **조회 신선도 보장**을 결정한다</a:t>
+              <a:t>•  알림 로그 — 접속 문자열·프로세스 → **어디를 고칠지**</a:t>
             </a:r>
           </a:p>
         </p:txBody>
@@ -9735,7 +10219,7 @@
         <p:spPr>
           <a:xfrm>
             <a:off x="0" y="0"/>
-            <a:ext cx="12191695" cy="6858000"/>
+            <a:ext cx="12191695" cy="1005840"/>
           </a:xfrm>
           <a:prstGeom prst="rect">
             <a:avLst/>
@@ -9778,8 +10262,8 @@
         </p:nvSpPr>
         <p:spPr>
           <a:xfrm>
-            <a:off x="822960" y="2011680"/>
-            <a:ext cx="10515600" cy="1097280"/>
+            <a:off x="548640" y="91440"/>
+            <a:ext cx="10972800" cy="777240"/>
           </a:xfrm>
           <a:prstGeom prst="rect">
             <a:avLst/>
@@ -9798,13 +10282,13 @@
               </a:spcAft>
             </a:pPr>
             <a:r>
-              <a:rPr sz="4000" b="1">
+              <a:rPr sz="2600" b="1">
                 <a:solidFill>
                   <a:srgbClr val="FFFFFF"/>
                 </a:solidFill>
                 <a:latin typeface="맑은 고딕"/>
               </a:rPr>
-              <a:t>9.7</a:t>
+              <a:t>갭이 만들어지는 과정</a:t>
             </a:r>
           </a:p>
         </p:txBody>
@@ -9817,8 +10301,8 @@
         </p:nvSpPr>
         <p:spPr>
           <a:xfrm>
-            <a:off x="822960" y="3017520"/>
-            <a:ext cx="10515600" cy="914400"/>
+            <a:off x="640080" y="1078992"/>
+            <a:ext cx="10881360" cy="457200"/>
           </a:xfrm>
           <a:prstGeom prst="rect">
             <a:avLst/>
@@ -9837,71 +10321,27 @@
               </a:spcAft>
             </a:pPr>
             <a:r>
-              <a:rPr sz="2800" b="1">
-                <a:solidFill>
-                  <a:srgbClr val="FFFFFF"/>
-                </a:solidFill>
-                <a:latin typeface="맑은 고딕"/>
-              </a:rPr>
-              <a:t>지연의 분포</a:t>
-            </a:r>
-          </a:p>
-        </p:txBody>
-      </p:sp>
-      <p:sp>
-        <p:nvSpPr>
-          <p:cNvPr id="5" name="Rectangle 4"/>
-          <p:cNvSpPr/>
-          <p:nvPr/>
-        </p:nvSpPr>
-        <p:spPr>
-          <a:xfrm>
-            <a:off x="822960" y="4114800"/>
-            <a:ext cx="5486400" cy="54864"/>
-          </a:xfrm>
-          <a:prstGeom prst="rect">
-            <a:avLst/>
-          </a:prstGeom>
-          <a:solidFill>
-            <a:srgbClr val="FFFFFF"/>
-          </a:solidFill>
-          <a:ln>
-            <a:noFill/>
-          </a:ln>
-          <a:effectLst/>
-        </p:spPr>
-        <p:style>
-          <a:lnRef idx="1">
-            <a:schemeClr val="accent1"/>
-          </a:lnRef>
-          <a:fillRef idx="3">
-            <a:schemeClr val="accent1"/>
-          </a:fillRef>
-          <a:effectRef idx="2">
-            <a:schemeClr val="accent1"/>
-          </a:effectRef>
-          <a:fontRef idx="minor">
-            <a:schemeClr val="lt1"/>
-          </a:fontRef>
-        </p:style>
-        <p:txBody>
-          <a:bodyPr rtlCol="0" anchor="ctr"/>
-          <a:lstStyle/>
-          <a:p>
-            <a:pPr algn="ctr"/>
-          </a:p>
-        </p:txBody>
-      </p:sp>
-      <p:sp>
-        <p:nvSpPr>
-          <p:cNvPr id="6" name="TextBox 5"/>
+              <a:rPr sz="1500" b="0">
+                <a:solidFill>
+                  <a:srgbClr val="5A6672"/>
+                </a:solidFill>
+                <a:latin typeface="맑은 고딕"/>
+              </a:rPr>
+              <a:t>시퀀스로 본다</a:t>
+            </a:r>
+          </a:p>
+        </p:txBody>
+      </p:sp>
+      <p:sp>
+        <p:nvSpPr>
+          <p:cNvPr id="5" name="TextBox 4"/>
           <p:cNvSpPr txBox="1"/>
           <p:nvPr/>
         </p:nvSpPr>
         <p:spPr>
           <a:xfrm>
-            <a:off x="822960" y="4297680"/>
-            <a:ext cx="10058400" cy="2011680"/>
+            <a:off x="640080" y="1737360"/>
+            <a:ext cx="10881360" cy="4754880"/>
           </a:xfrm>
           <a:prstGeom prst="rect">
             <a:avLst/>
@@ -9916,33 +10356,65 @@
           <a:p>
             <a:pPr algn="l">
               <a:spcAft>
-                <a:spcPts val="800"/>
-              </a:spcAft>
-            </a:pPr>
-            <a:r>
-              <a:rPr sz="1600" b="0">
-                <a:solidFill>
-                  <a:srgbClr val="FFFFFF"/>
-                </a:solidFill>
-                <a:latin typeface="맑은 고딕"/>
-              </a:rPr>
-              <a:t>•  히스토그램 읽기</a:t>
-            </a:r>
-          </a:p>
-          <a:p>
-            <a:pPr algn="l">
-              <a:spcAft>
-                <a:spcPts val="800"/>
-              </a:spcAft>
-            </a:pPr>
-            <a:r>
-              <a:rPr sz="1600" b="0">
-                <a:solidFill>
-                  <a:srgbClr val="FFFFFF"/>
-                </a:solidFill>
-                <a:latin typeface="맑은 고딕"/>
-              </a:rPr>
-              <a:t>•  모니터링 지표</a:t>
+                <a:spcPts val="1000"/>
+              </a:spcAft>
+            </a:pPr>
+            <a:r>
+              <a:rPr sz="1700" b="0">
+                <a:solidFill>
+                  <a:srgbClr val="222222"/>
+                </a:solidFill>
+                <a:latin typeface="맑은 고딕"/>
+              </a:rPr>
+              <a:t>•  **73번** `dest_id=2` `APPLIED=YES` — 끊기기 전에 갔다</a:t>
+            </a:r>
+          </a:p>
+          <a:p>
+            <a:pPr algn="l">
+              <a:spcAft>
+                <a:spcPts val="1000"/>
+              </a:spcAft>
+            </a:pPr>
+            <a:r>
+              <a:rPr sz="1700" b="0">
+                <a:solidFill>
+                  <a:srgbClr val="222222"/>
+                </a:solidFill>
+                <a:latin typeface="맑은 고딕"/>
+              </a:rPr>
+              <a:t>•  **74번** 행은 있는데 `NO` — 등록됐지만 가지 못했다</a:t>
+            </a:r>
+          </a:p>
+          <a:p>
+            <a:pPr algn="l">
+              <a:spcAft>
+                <a:spcPts val="1000"/>
+              </a:spcAft>
+            </a:pPr>
+            <a:r>
+              <a:rPr sz="1700" b="0">
+                <a:solidFill>
+                  <a:srgbClr val="222222"/>
+                </a:solidFill>
+                <a:latin typeface="맑은 고딕"/>
+              </a:rPr>
+              <a:t>•  **75번** `dest_id=2` **행 자체가 없다**</a:t>
+            </a:r>
+          </a:p>
+          <a:p>
+            <a:pPr algn="l">
+              <a:spcAft>
+                <a:spcPts val="1000"/>
+              </a:spcAft>
+            </a:pPr>
+            <a:r>
+              <a:rPr sz="1700" b="0">
+                <a:solidFill>
+                  <a:srgbClr val="222222"/>
+                </a:solidFill>
+                <a:latin typeface="맑은 고딕"/>
+              </a:rPr>
+              <a:t>•  `V$ARCHIVE_GAP` 은 **비어 있다**</a:t>
             </a:r>
           </a:p>
         </p:txBody>
@@ -10043,7 +10515,7 @@
                 </a:solidFill>
                 <a:latin typeface="맑은 고딕"/>
               </a:rPr>
-              <a:t>V$STANDBY_EVENT_HISTOGRAM</a:t>
+              <a:t>복구는 즉시 되지 않는다</a:t>
             </a:r>
           </a:p>
         </p:txBody>
@@ -10082,7 +10554,7 @@
                 </a:solidFill>
                 <a:latin typeface="맑은 고딕"/>
               </a:rPr>
-              <a:t>누적된 분포</a:t>
+              <a:t>ReopenSecs 300</a:t>
             </a:r>
           </a:p>
         </p:txBody>
@@ -10121,7 +10593,7 @@
                 </a:solidFill>
                 <a:latin typeface="맑은 고딕"/>
               </a:rPr>
-              <a:t>•  `TIME` + `UNIT` 이 구간, `COUNT` 가 표본 수</a:t>
+              <a:t>•  `lsnrctl start` 후 70·120·170·220초 — **계속 ORA-12541**</a:t>
             </a:r>
           </a:p>
           <a:p>
@@ -10137,7 +10609,7 @@
                 </a:solidFill>
                 <a:latin typeface="맑은 고딕"/>
               </a:rPr>
-              <a:t>•  실측 : 0초 854회, 2초 1회, **`2 minutes` 59회**</a:t>
+              <a:t>•  **270초에 `VALID`**</a:t>
             </a:r>
           </a:p>
           <a:p>
@@ -10153,7 +10625,7 @@
                 </a:solidFill>
                 <a:latin typeface="맑은 고딕"/>
               </a:rPr>
-              <a:t>•  2분 정지가 그대로 기록됐다</a:t>
+              <a:t>•  리스너는 이미 살아 있는데도 그렇다</a:t>
             </a:r>
           </a:p>
           <a:p>
@@ -10169,7 +10641,7 @@
                 </a:solidFill>
                 <a:latin typeface="맑은 고딕"/>
               </a:rPr>
-              <a:t>•  따라잡는 과정이 3~59초 구간에 1~2회씩 흔적을 남겼다</a:t>
+              <a:t>•  여기서 **다른 문제라고 오판하기 쉽다**</a:t>
             </a:r>
           </a:p>
         </p:txBody>
@@ -10270,7 +10742,7 @@
                 </a:solidFill>
                 <a:latin typeface="맑은 고딕"/>
               </a:rPr>
-              <a:t>실용 지표 하나</a:t>
+              <a:t>조치 직후의 함정</a:t>
             </a:r>
           </a:p>
         </p:txBody>
@@ -10309,7 +10781,7 @@
                 </a:solidFill>
                 <a:latin typeface="맑은 고딕"/>
               </a:rPr>
-              <a:t>0초가 아닌 구간의 비율</a:t>
+              <a:t>판정 시차</a:t>
             </a:r>
           </a:p>
         </p:txBody>
@@ -10348,7 +10820,7 @@
                 </a:solidFill>
                 <a:latin typeface="맑은 고딕"/>
               </a:rPr>
-              <a:t>•  `ROUND(100*SUM(CASE WHEN time&gt;0 THEN count END)/SUM(count),2)`</a:t>
+              <a:t>•  전송 재개 직후 `SHOW CONFIGURATION` 이 **ERROR**</a:t>
             </a:r>
           </a:p>
           <a:p>
@@ -10364,7 +10836,7 @@
                 </a:solidFill>
                 <a:latin typeface="맑은 고딕"/>
               </a:rPr>
-              <a:t>•  실측 9.3 퍼센트 (표본 1,849 중 0초가 1,677)</a:t>
+              <a:t>•  새로 `ORA-16778` 까지 붙었다</a:t>
             </a:r>
           </a:p>
           <a:p>
@@ -10380,7 +10852,7 @@
                 </a:solidFill>
                 <a:latin typeface="맑은 고딕"/>
               </a:rPr>
-              <a:t>•  **누적값이므로 두 시점의 차이**를 본다</a:t>
+              <a:t>•  같은 시점에 SQL 뷰는 이미 **`VALID`**</a:t>
             </a:r>
           </a:p>
           <a:p>
@@ -10396,7 +10868,7 @@
                 </a:solidFill>
                 <a:latin typeface="맑은 고딕"/>
               </a:rPr>
-              <a:t>•  재기동하면 초기화된다</a:t>
+              <a:t>•  잠시 뒤 다시 조회 → **`SUCCESS`**</a:t>
             </a:r>
           </a:p>
         </p:txBody>
@@ -10536,7 +11008,7 @@
                 </a:solidFill>
                 <a:latin typeface="맑은 고딕"/>
               </a:rPr>
-              <a:t>•  9.2  무엇이 켜져 있는가</a:t>
+              <a:t>•  15.2  로그 파일의 상태를 읽는다</a:t>
             </a:r>
           </a:p>
           <a:p>
@@ -10552,7 +11024,7 @@
                 </a:solidFill>
                 <a:latin typeface="맑은 고딕"/>
               </a:rPr>
-              <a:t>•  9.3  실시간 조회의 일관성</a:t>
+              <a:t>•  15.3  아카이브 목적지를 읽는다</a:t>
             </a:r>
           </a:p>
           <a:p>
@@ -10568,7 +11040,7 @@
                 </a:solidFill>
                 <a:latin typeface="맑은 고딕"/>
               </a:rPr>
-              <a:t>•  9.4  되는 것과 안 되는 것</a:t>
+              <a:t>•  15.4  전송이 끊기면 무엇이 보이는가</a:t>
             </a:r>
           </a:p>
           <a:p>
@@ -10584,7 +11056,7 @@
                 </a:solidFill>
                 <a:latin typeface="맑은 고딕"/>
               </a:rPr>
-              <a:t>•  9.5  DML 리다이렉션</a:t>
+              <a:t>•  15.5  추적을 켠다</a:t>
             </a:r>
           </a:p>
           <a:p>
@@ -10600,7 +11072,7 @@
                 </a:solidFill>
                 <a:latin typeface="맑은 고딕"/>
               </a:rPr>
-              <a:t>•  9.6  세션이 허용할 지연을 정한다</a:t>
+              <a:t>•  15.6  Logical Standby 는 다른 뷰로 본다</a:t>
             </a:r>
           </a:p>
           <a:p>
@@ -10616,23 +11088,7 @@
                 </a:solidFill>
                 <a:latin typeface="맑은 고딕"/>
               </a:rPr>
-              <a:t>•  9.7  지연의 분포 읽기</a:t>
-            </a:r>
-          </a:p>
-          <a:p>
-            <a:pPr algn="l">
-              <a:spcAft>
-                <a:spcPts val="1000"/>
-              </a:spcAft>
-            </a:pPr>
-            <a:r>
-              <a:rPr sz="1600" b="0">
-                <a:solidFill>
-                  <a:srgbClr val="222222"/>
-                </a:solidFill>
-                <a:latin typeface="맑은 고딕"/>
-              </a:rPr>
-              <a:t>•  9.8  옵션이 없다면 — MOUNTED 로 두고 확인한다</a:t>
+              <a:t>•  15.7  상시 점검 스크립트</a:t>
             </a:r>
           </a:p>
         </p:txBody>
@@ -10664,7 +11120,7 @@
         <p:spPr>
           <a:xfrm>
             <a:off x="0" y="0"/>
-            <a:ext cx="12191695" cy="1005840"/>
+            <a:ext cx="12191695" cy="6858000"/>
           </a:xfrm>
           <a:prstGeom prst="rect">
             <a:avLst/>
@@ -10707,8 +11163,8 @@
         </p:nvSpPr>
         <p:spPr>
           <a:xfrm>
-            <a:off x="548640" y="91440"/>
-            <a:ext cx="10972800" cy="777240"/>
+            <a:off x="822960" y="2011680"/>
+            <a:ext cx="10515600" cy="1097280"/>
           </a:xfrm>
           <a:prstGeom prst="rect">
             <a:avLst/>
@@ -10727,13 +11183,13 @@
               </a:spcAft>
             </a:pPr>
             <a:r>
-              <a:rPr sz="2600" b="1">
+              <a:rPr sz="4000" b="1">
                 <a:solidFill>
                   <a:srgbClr val="FFFFFF"/>
                 </a:solidFill>
                 <a:latin typeface="맑은 고딕"/>
               </a:rPr>
-              <a:t>세 뷰가 서로의 한계를 메운다</a:t>
+              <a:t>15.5</a:t>
             </a:r>
           </a:p>
         </p:txBody>
@@ -10746,8 +11202,8 @@
         </p:nvSpPr>
         <p:spPr>
           <a:xfrm>
-            <a:off x="640080" y="1078992"/>
-            <a:ext cx="10881360" cy="457200"/>
+            <a:off x="822960" y="3017520"/>
+            <a:ext cx="10515600" cy="914400"/>
           </a:xfrm>
           <a:prstGeom prst="rect">
             <a:avLst/>
@@ -10766,27 +11222,71 @@
               </a:spcAft>
             </a:pPr>
             <a:r>
-              <a:rPr sz="1500" b="0">
-                <a:solidFill>
-                  <a:srgbClr val="5A6672"/>
-                </a:solidFill>
-                <a:latin typeface="맑은 고딕"/>
-              </a:rPr>
-              <a:t>조합해서 본다</a:t>
-            </a:r>
-          </a:p>
-        </p:txBody>
-      </p:sp>
-      <p:sp>
-        <p:nvSpPr>
-          <p:cNvPr id="5" name="TextBox 4"/>
+              <a:rPr sz="2800" b="1">
+                <a:solidFill>
+                  <a:srgbClr val="FFFFFF"/>
+                </a:solidFill>
+                <a:latin typeface="맑은 고딕"/>
+              </a:rPr>
+              <a:t>추적을 켠다</a:t>
+            </a:r>
+          </a:p>
+        </p:txBody>
+      </p:sp>
+      <p:sp>
+        <p:nvSpPr>
+          <p:cNvPr id="5" name="Rectangle 4"/>
+          <p:cNvSpPr/>
+          <p:nvPr/>
+        </p:nvSpPr>
+        <p:spPr>
+          <a:xfrm>
+            <a:off x="822960" y="4114800"/>
+            <a:ext cx="5486400" cy="54864"/>
+          </a:xfrm>
+          <a:prstGeom prst="rect">
+            <a:avLst/>
+          </a:prstGeom>
+          <a:solidFill>
+            <a:srgbClr val="FFFFFF"/>
+          </a:solidFill>
+          <a:ln>
+            <a:noFill/>
+          </a:ln>
+          <a:effectLst/>
+        </p:spPr>
+        <p:style>
+          <a:lnRef idx="1">
+            <a:schemeClr val="accent1"/>
+          </a:lnRef>
+          <a:fillRef idx="3">
+            <a:schemeClr val="accent1"/>
+          </a:fillRef>
+          <a:effectRef idx="2">
+            <a:schemeClr val="accent1"/>
+          </a:effectRef>
+          <a:fontRef idx="minor">
+            <a:schemeClr val="lt1"/>
+          </a:fontRef>
+        </p:style>
+        <p:txBody>
+          <a:bodyPr rtlCol="0" anchor="ctr"/>
+          <a:lstStyle/>
+          <a:p>
+            <a:pPr algn="ctr"/>
+          </a:p>
+        </p:txBody>
+      </p:sp>
+      <p:sp>
+        <p:nvSpPr>
+          <p:cNvPr id="6" name="TextBox 5"/>
           <p:cNvSpPr txBox="1"/>
           <p:nvPr/>
         </p:nvSpPr>
         <p:spPr>
           <a:xfrm>
-            <a:off x="640080" y="1737360"/>
-            <a:ext cx="10881360" cy="4754880"/>
+            <a:off x="822960" y="4297680"/>
+            <a:ext cx="10058400" cy="2011680"/>
           </a:xfrm>
           <a:prstGeom prst="rect">
             <a:avLst/>
@@ -10801,65 +11301,33 @@
           <a:p>
             <a:pPr algn="l">
               <a:spcAft>
-                <a:spcPts val="1000"/>
-              </a:spcAft>
-            </a:pPr>
-            <a:r>
-              <a:rPr sz="1700" b="0">
-                <a:solidFill>
-                  <a:srgbClr val="222222"/>
-                </a:solidFill>
-                <a:latin typeface="맑은 고딕"/>
-              </a:rPr>
-              <a:t>•  `V$MANAGED_STANDBY` — 적용이 도는가 (지연은 모른다)</a:t>
-            </a:r>
-          </a:p>
-          <a:p>
-            <a:pPr algn="l">
-              <a:spcAft>
-                <a:spcPts val="1000"/>
-              </a:spcAft>
-            </a:pPr>
-            <a:r>
-              <a:rPr sz="1700" b="0">
-                <a:solidFill>
-                  <a:srgbClr val="222222"/>
-                </a:solidFill>
-                <a:latin typeface="맑은 고딕"/>
-              </a:rPr>
-              <a:t>•  `V$DATAGUARD_STATS` — 지금 얼마나 뒤처졌나 (십수 초 전 정보)</a:t>
-            </a:r>
-          </a:p>
-          <a:p>
-            <a:pPr algn="l">
-              <a:spcAft>
-                <a:spcPts val="1000"/>
-              </a:spcAft>
-            </a:pPr>
-            <a:r>
-              <a:rPr sz="1700" b="0">
-                <a:solidFill>
-                  <a:srgbClr val="222222"/>
-                </a:solidFill>
-                <a:latin typeface="맑은 고딕"/>
-              </a:rPr>
-              <a:t>•  `V$STANDBY_EVENT_HISTOGRAM` — 그동안 안정적이었나 (언제인지 모른다)</a:t>
-            </a:r>
-          </a:p>
-          <a:p>
-            <a:pPr algn="l">
-              <a:spcAft>
-                <a:spcPts val="1000"/>
-              </a:spcAft>
-            </a:pPr>
-            <a:r>
-              <a:rPr sz="1700" b="0">
-                <a:solidFill>
-                  <a:srgbClr val="222222"/>
-                </a:solidFill>
-                <a:latin typeface="맑은 고딕"/>
-              </a:rPr>
-              <a:t>•  **MRP0 을 먼저 본다** — 없으면 나머지는 무의미하다</a:t>
+                <a:spcPts val="800"/>
+              </a:spcAft>
+            </a:pPr>
+            <a:r>
+              <a:rPr sz="1600" b="0">
+                <a:solidFill>
+                  <a:srgbClr val="FFFFFF"/>
+                </a:solidFill>
+                <a:latin typeface="맑은 고딕"/>
+              </a:rPr>
+              <a:t>•  비트마스크와 원칙</a:t>
+            </a:r>
+          </a:p>
+          <a:p>
+            <a:pPr algn="l">
+              <a:spcAft>
+                <a:spcPts val="800"/>
+              </a:spcAft>
+            </a:pPr>
+            <a:r>
+              <a:rPr sz="1600" b="0">
+                <a:solidFill>
+                  <a:srgbClr val="FFFFFF"/>
+                </a:solidFill>
+                <a:latin typeface="맑은 고딕"/>
+              </a:rPr>
+              <a:t>•  정상일 때의 모습</a:t>
             </a:r>
           </a:p>
         </p:txBody>
@@ -10960,7 +11428,7 @@
                 </a:solidFill>
                 <a:latin typeface="맑은 고딕"/>
               </a:rPr>
-              <a:t>읽기 분산은 접속만 바꾸는 일이 아니다</a:t>
+              <a:t>LOG_ARCHIVE_TRACE</a:t>
             </a:r>
           </a:p>
         </p:txBody>
@@ -10999,7 +11467,7 @@
                 </a:solidFill>
                 <a:latin typeface="맑은 고딕"/>
               </a:rPr>
-              <a:t>먼저 분류한다</a:t>
+              <a:t>비트마스크다</a:t>
             </a:r>
           </a:p>
         </p:txBody>
@@ -11038,7 +11506,7 @@
                 </a:solidFill>
                 <a:latin typeface="맑은 고딕"/>
               </a:rPr>
-              <a:t>•  조회 이력을 남기는 코드 → 리다이렉션으로 메운다</a:t>
+              <a:t>•  기본 **0**. 값을 더해 조합한다</a:t>
             </a:r>
           </a:p>
           <a:p>
@@ -11054,7 +11522,7 @@
                 </a:solidFill>
                 <a:latin typeface="맑은 고딕"/>
               </a:rPr>
-              <a:t>•  일반 테이블을 임시 저장소로 쓰는 조회 → **GTT 로 바꿔야** 옮길 수 있다</a:t>
+              <a:t>•  `4`(목적지 상태) + `8`(목적지 활동) = **12**</a:t>
             </a:r>
           </a:p>
           <a:p>
@@ -11070,7 +11538,7 @@
                 </a:solidFill>
                 <a:latin typeface="맑은 고딕"/>
               </a:rPr>
-              <a:t>•  시퀀스로 식별자를 만드는 코드 → 값이 뛴다. 요건을 확인한다</a:t>
+              <a:t>•  동적이지만 알림 로그에 **`SCOPE=BOTH`** 로 남는다</a:t>
             </a:r>
           </a:p>
           <a:p>
@@ -11086,7 +11554,7 @@
                 </a:solidFill>
                 <a:latin typeface="맑은 고딕"/>
               </a:rPr>
-              <a:t>•  순수 조회 → 그대로 옮긴다</a:t>
+              <a:t>•  잘못된 값은 음수든 문자열이든 **ORA-02017**</a:t>
             </a:r>
           </a:p>
         </p:txBody>
@@ -11187,7 +11655,7 @@
                 </a:solidFill>
                 <a:latin typeface="맑은 고딕"/>
               </a:rPr>
-              <a:t>이 장이 남기는 습관</a:t>
+              <a:t>어디에 남는가</a:t>
             </a:r>
           </a:p>
         </p:txBody>
@@ -11226,7 +11694,7 @@
                 </a:solidFill>
                 <a:latin typeface="맑은 고딕"/>
               </a:rPr>
-              <a:t>세 가지</a:t>
+              <a:t>프로세스별로 나뉜다</a:t>
             </a:r>
           </a:p>
         </p:txBody>
@@ -11265,7 +11733,7 @@
                 </a:solidFill>
                 <a:latin typeface="맑은 고딕"/>
               </a:rPr>
-              <a:t>•  기능 검증은 **애플리케이션 계정**으로 한다 — SYS 로 두 번 오판할 뻔했다</a:t>
+              <a:t>•  이름 규칙 `&lt;SID&gt;_&lt;프로세스&gt;_&lt;PID&gt;.trc`</a:t>
             </a:r>
           </a:p>
           <a:p>
@@ -11281,7 +11749,7 @@
                 </a:solidFill>
                 <a:latin typeface="맑은 고딕"/>
               </a:rPr>
-              <a:t>•  예상과 다르면 **측정을 먼저 의심**한다 — SQL*Plus 암묵적 커밋</a:t>
+              <a:t>•  위치는 **ADR 의 trace 디렉터리** (14장 EXPORT 와 같은 곳)</a:t>
             </a:r>
           </a:p>
           <a:p>
@@ -11297,7 +11765,23 @@
                 </a:solidFill>
                 <a:latin typeface="맑은 고딕"/>
               </a:rPr>
-              <a:t>•  오류 번호를 **경로 정보**로 읽는다 — 16000 대 16397, 16000 대 13516</a:t>
+              <a:t>•  `ARCn` — 아카이브 전송·FAL / `TTnn` — **실시간 리두 전송**</a:t>
+            </a:r>
+          </a:p>
+          <a:p>
+            <a:pPr algn="l">
+              <a:spcAft>
+                <a:spcPts val="1000"/>
+              </a:spcAft>
+            </a:pPr>
+            <a:r>
+              <a:rPr sz="1700" b="0">
+                <a:solidFill>
+                  <a:srgbClr val="222222"/>
+                </a:solidFill>
+                <a:latin typeface="맑은 고딕"/>
+              </a:rPr>
+              <a:t>•  실측 `chicago_tt04_7487.trc` = **664KB** (arc0 은 30KB)</a:t>
             </a:r>
           </a:p>
         </p:txBody>
@@ -11329,7 +11813,7 @@
         <p:spPr>
           <a:xfrm>
             <a:off x="0" y="0"/>
-            <a:ext cx="12191695" cy="6858000"/>
+            <a:ext cx="12191695" cy="1005840"/>
           </a:xfrm>
           <a:prstGeom prst="rect">
             <a:avLst/>
@@ -11372,8 +11856,8 @@
         </p:nvSpPr>
         <p:spPr>
           <a:xfrm>
-            <a:off x="822960" y="2011680"/>
-            <a:ext cx="10515600" cy="1097280"/>
+            <a:off x="548640" y="91440"/>
+            <a:ext cx="10972800" cy="777240"/>
           </a:xfrm>
           <a:prstGeom prst="rect">
             <a:avLst/>
@@ -11392,13 +11876,13 @@
               </a:spcAft>
             </a:pPr>
             <a:r>
-              <a:rPr sz="4000" b="1">
+              <a:rPr sz="2600" b="1">
                 <a:solidFill>
                   <a:srgbClr val="FFFFFF"/>
                 </a:solidFill>
                 <a:latin typeface="맑은 고딕"/>
               </a:rPr>
-              <a:t>9.8</a:t>
+              <a:t>정상일 때의 모습</a:t>
             </a:r>
           </a:p>
         </p:txBody>
@@ -11411,8 +11895,8 @@
         </p:nvSpPr>
         <p:spPr>
           <a:xfrm>
-            <a:off x="822960" y="3017520"/>
-            <a:ext cx="10515600" cy="914400"/>
+            <a:off x="640080" y="1078992"/>
+            <a:ext cx="10881360" cy="457200"/>
           </a:xfrm>
           <a:prstGeom prst="rect">
             <a:avLst/>
@@ -11431,71 +11915,27 @@
               </a:spcAft>
             </a:pPr>
             <a:r>
-              <a:rPr sz="2800" b="1">
-                <a:solidFill>
-                  <a:srgbClr val="FFFFFF"/>
-                </a:solidFill>
-                <a:latin typeface="맑은 고딕"/>
-              </a:rPr>
-              <a:t>옵션이 없다면</a:t>
-            </a:r>
-          </a:p>
-        </p:txBody>
-      </p:sp>
-      <p:sp>
-        <p:nvSpPr>
-          <p:cNvPr id="5" name="Rectangle 4"/>
-          <p:cNvSpPr/>
-          <p:nvPr/>
-        </p:nvSpPr>
-        <p:spPr>
-          <a:xfrm>
-            <a:off x="822960" y="4114800"/>
-            <a:ext cx="5486400" cy="54864"/>
-          </a:xfrm>
-          <a:prstGeom prst="rect">
-            <a:avLst/>
-          </a:prstGeom>
-          <a:solidFill>
-            <a:srgbClr val="FFFFFF"/>
-          </a:solidFill>
-          <a:ln>
-            <a:noFill/>
-          </a:ln>
-          <a:effectLst/>
-        </p:spPr>
-        <p:style>
-          <a:lnRef idx="1">
-            <a:schemeClr val="accent1"/>
-          </a:lnRef>
-          <a:fillRef idx="3">
-            <a:schemeClr val="accent1"/>
-          </a:fillRef>
-          <a:effectRef idx="2">
-            <a:schemeClr val="accent1"/>
-          </a:effectRef>
-          <a:fontRef idx="minor">
-            <a:schemeClr val="lt1"/>
-          </a:fontRef>
-        </p:style>
-        <p:txBody>
-          <a:bodyPr rtlCol="0" anchor="ctr"/>
-          <a:lstStyle/>
-          <a:p>
-            <a:pPr algn="ctr"/>
-          </a:p>
-        </p:txBody>
-      </p:sp>
-      <p:sp>
-        <p:nvSpPr>
-          <p:cNvPr id="6" name="TextBox 5"/>
+              <a:rPr sz="1500" b="0">
+                <a:solidFill>
+                  <a:srgbClr val="5A6672"/>
+                </a:solidFill>
+                <a:latin typeface="맑은 고딕"/>
+              </a:rPr>
+              <a:t>읽을 수 있는 것만</a:t>
+            </a:r>
+          </a:p>
+        </p:txBody>
+      </p:sp>
+      <p:sp>
+        <p:nvSpPr>
+          <p:cNvPr id="5" name="TextBox 4"/>
           <p:cNvSpPr txBox="1"/>
           <p:nvPr/>
         </p:nvSpPr>
         <p:spPr>
           <a:xfrm>
-            <a:off x="822960" y="4297680"/>
-            <a:ext cx="10058400" cy="2011680"/>
+            <a:off x="640080" y="1737360"/>
+            <a:ext cx="10881360" cy="4754880"/>
           </a:xfrm>
           <a:prstGeom prst="rect">
             <a:avLst/>
@@ -11510,33 +11950,65 @@
           <a:p>
             <a:pPr algn="l">
               <a:spcAft>
-                <a:spcPts val="800"/>
-              </a:spcAft>
-            </a:pPr>
-            <a:r>
-              <a:rPr sz="1600" b="0">
-                <a:solidFill>
-                  <a:srgbClr val="FFFFFF"/>
-                </a:solidFill>
-                <a:latin typeface="맑은 고딕"/>
-              </a:rPr>
-              <a:t>•  MOUNTED 로 두면 적용만 남는다</a:t>
-            </a:r>
-          </a:p>
-          <a:p>
-            <a:pPr algn="l">
-              <a:spcAft>
-                <a:spcPts val="800"/>
-              </a:spcAft>
-            </a:pPr>
-            <a:r>
-              <a:rPr sz="1600" b="0">
-                <a:solidFill>
-                  <a:srgbClr val="FFFFFF"/>
-                </a:solidFill>
-                <a:latin typeface="맑은 고딕"/>
-              </a:rPr>
-              <a:t>•  Primary 에서 읽는 두 열</a:t>
+                <a:spcPts val="1000"/>
+              </a:spcAft>
+            </a:pPr>
+            <a:r>
+              <a:rPr sz="1700" b="0">
+                <a:solidFill>
+                  <a:srgbClr val="222222"/>
+                </a:solidFill>
+                <a:latin typeface="맑은 고딕"/>
+              </a:rPr>
+              <a:t>•  `Acquiring LGWR NS Write latch` — 전송이 일어나고 있다</a:t>
+            </a:r>
+          </a:p>
+          <a:p>
+            <a:pPr algn="l">
+              <a:spcAft>
+                <a:spcPts val="1000"/>
+              </a:spcAft>
+            </a:pPr>
+            <a:r>
+              <a:rPr sz="1700" b="0">
+                <a:solidFill>
+                  <a:srgbClr val="222222"/>
+                </a:solidFill>
+                <a:latin typeface="맑은 고딕"/>
+              </a:rPr>
+              <a:t>•  `Sleeping for 100 centi-second(s)` — **한가하다**</a:t>
+            </a:r>
+          </a:p>
+          <a:p>
+            <a:pPr algn="l">
+              <a:spcAft>
+                <a:spcPts val="1000"/>
+              </a:spcAft>
+            </a:pPr>
+            <a:r>
+              <a:rPr sz="1700" b="0">
+                <a:solidFill>
+                  <a:srgbClr val="222222"/>
+                </a:solidFill>
+                <a:latin typeface="맑은 고딕"/>
+              </a:rPr>
+              <a:t>•  `krss_find_work: No work found` — 아카이버는 할 일이 없다</a:t>
+            </a:r>
+          </a:p>
+          <a:p>
+            <a:pPr algn="l">
+              <a:spcAft>
+                <a:spcPts val="1000"/>
+              </a:spcAft>
+            </a:pPr>
+            <a:r>
+              <a:rPr sz="1700" b="0">
+                <a:solidFill>
+                  <a:srgbClr val="222222"/>
+                </a:solidFill>
+                <a:latin typeface="맑은 고딕"/>
+              </a:rPr>
+              <a:t>•  `krsu.c:10213` 같은 것은 **해석 대상이 아니다**</a:t>
             </a:r>
           </a:p>
         </p:txBody>
@@ -11568,7 +12040,7 @@
         <p:spPr>
           <a:xfrm>
             <a:off x="0" y="0"/>
-            <a:ext cx="12191695" cy="1005840"/>
+            <a:ext cx="12191695" cy="6858000"/>
           </a:xfrm>
           <a:prstGeom prst="rect">
             <a:avLst/>
@@ -11611,8 +12083,8 @@
         </p:nvSpPr>
         <p:spPr>
           <a:xfrm>
-            <a:off x="548640" y="91440"/>
-            <a:ext cx="10972800" cy="777240"/>
+            <a:off x="822960" y="2011680"/>
+            <a:ext cx="10515600" cy="1097280"/>
           </a:xfrm>
           <a:prstGeom prst="rect">
             <a:avLst/>
@@ -11631,13 +12103,13 @@
               </a:spcAft>
             </a:pPr>
             <a:r>
-              <a:rPr sz="2600" b="1">
+              <a:rPr sz="4000" b="1">
                 <a:solidFill>
                   <a:srgbClr val="FFFFFF"/>
                 </a:solidFill>
                 <a:latin typeface="맑은 고딕"/>
               </a:rPr>
-              <a:t>닫아도 적용은 돈다</a:t>
+              <a:t>15.6</a:t>
             </a:r>
           </a:p>
         </p:txBody>
@@ -11650,8 +12122,8 @@
         </p:nvSpPr>
         <p:spPr>
           <a:xfrm>
-            <a:off x="640080" y="1078992"/>
-            <a:ext cx="10881360" cy="457200"/>
+            <a:off x="822960" y="3017520"/>
+            <a:ext cx="10515600" cy="914400"/>
           </a:xfrm>
           <a:prstGeom prst="rect">
             <a:avLst/>
@@ -11670,27 +12142,71 @@
               </a:spcAft>
             </a:pPr>
             <a:r>
-              <a:rPr sz="1500" b="0">
-                <a:solidFill>
-                  <a:srgbClr val="5A6672"/>
-                </a:solidFill>
-                <a:latin typeface="맑은 고딕"/>
-              </a:rPr>
-              <a:t>MOUNTED 의 실측</a:t>
-            </a:r>
-          </a:p>
-        </p:txBody>
-      </p:sp>
-      <p:sp>
-        <p:nvSpPr>
-          <p:cNvPr id="5" name="TextBox 4"/>
+              <a:rPr sz="2800" b="1">
+                <a:solidFill>
+                  <a:srgbClr val="FFFFFF"/>
+                </a:solidFill>
+                <a:latin typeface="맑은 고딕"/>
+              </a:rPr>
+              <a:t>Logical Standby 는 다른 뷰로 본다</a:t>
+            </a:r>
+          </a:p>
+        </p:txBody>
+      </p:sp>
+      <p:sp>
+        <p:nvSpPr>
+          <p:cNvPr id="5" name="Rectangle 4"/>
+          <p:cNvSpPr/>
+          <p:nvPr/>
+        </p:nvSpPr>
+        <p:spPr>
+          <a:xfrm>
+            <a:off x="822960" y="4114800"/>
+            <a:ext cx="5486400" cy="54864"/>
+          </a:xfrm>
+          <a:prstGeom prst="rect">
+            <a:avLst/>
+          </a:prstGeom>
+          <a:solidFill>
+            <a:srgbClr val="FFFFFF"/>
+          </a:solidFill>
+          <a:ln>
+            <a:noFill/>
+          </a:ln>
+          <a:effectLst/>
+        </p:spPr>
+        <p:style>
+          <a:lnRef idx="1">
+            <a:schemeClr val="accent1"/>
+          </a:lnRef>
+          <a:fillRef idx="3">
+            <a:schemeClr val="accent1"/>
+          </a:fillRef>
+          <a:effectRef idx="2">
+            <a:schemeClr val="accent1"/>
+          </a:effectRef>
+          <a:fontRef idx="minor">
+            <a:schemeClr val="lt1"/>
+          </a:fontRef>
+        </p:style>
+        <p:txBody>
+          <a:bodyPr rtlCol="0" anchor="ctr"/>
+          <a:lstStyle/>
+          <a:p>
+            <a:pPr algn="ctr"/>
+          </a:p>
+        </p:txBody>
+      </p:sp>
+      <p:sp>
+        <p:nvSpPr>
+          <p:cNvPr id="6" name="TextBox 5"/>
           <p:cNvSpPr txBox="1"/>
           <p:nvPr/>
         </p:nvSpPr>
         <p:spPr>
           <a:xfrm>
-            <a:off x="640080" y="1737360"/>
-            <a:ext cx="10881360" cy="4754880"/>
+            <a:off x="822960" y="4297680"/>
+            <a:ext cx="10058400" cy="2011680"/>
           </a:xfrm>
           <a:prstGeom prst="rect">
             <a:avLst/>
@@ -11705,65 +12221,33 @@
           <a:p>
             <a:pPr algn="l">
               <a:spcAft>
-                <a:spcPts val="1000"/>
-              </a:spcAft>
-            </a:pPr>
-            <a:r>
-              <a:rPr sz="1700" b="0">
-                <a:solidFill>
-                  <a:srgbClr val="222222"/>
-                </a:solidFill>
-                <a:latin typeface="맑은 고딕"/>
-              </a:rPr>
-              <a:t>•  `OPEN_MODE` **MOUNTED**, `MRP0` 은 `APPLYING_LOG` 그대로</a:t>
-            </a:r>
-          </a:p>
-          <a:p>
-            <a:pPr algn="l">
-              <a:spcAft>
-                <a:spcPts val="1000"/>
-              </a:spcAft>
-            </a:pPr>
-            <a:r>
-              <a:rPr sz="1700" b="0">
-                <a:solidFill>
-                  <a:srgbClr val="222222"/>
-                </a:solidFill>
-                <a:latin typeface="맑은 고딕"/>
-              </a:rPr>
-              <a:t>•  사용자 표 조회 → **`ORA-01219`** (9.4 의 `ORA-16000` 과 다르다)</a:t>
-            </a:r>
-          </a:p>
-          <a:p>
-            <a:pPr algn="l">
-              <a:spcAft>
-                <a:spcPts val="1000"/>
-              </a:spcAft>
-            </a:pPr>
-            <a:r>
-              <a:rPr sz="1700" b="0">
-                <a:solidFill>
-                  <a:srgbClr val="222222"/>
-                </a:solidFill>
-                <a:latin typeface="맑은 고딕"/>
-              </a:rPr>
-              <a:t>•  메시지의 뒷부분 — **"fixed tables or views only"**</a:t>
-            </a:r>
-          </a:p>
-          <a:p>
-            <a:pPr algn="l">
-              <a:spcAft>
-                <a:spcPts val="1000"/>
-              </a:spcAft>
-            </a:pPr>
-            <a:r>
-              <a:rPr sz="1700" b="0">
-                <a:solidFill>
-                  <a:srgbClr val="222222"/>
-                </a:solidFill>
-                <a:latin typeface="맑은 고딕"/>
-              </a:rPr>
-              <a:t>•  그래서 `V$DATAGUARD_STATS` 는 **닫혀 있어도 값이 나온다**</a:t>
+                <a:spcPts val="800"/>
+              </a:spcAft>
+            </a:pPr>
+            <a:r>
+              <a:rPr sz="1600" b="0">
+                <a:solidFill>
+                  <a:srgbClr val="FFFFFF"/>
+                </a:solidFill>
+                <a:latin typeface="맑은 고딕"/>
+              </a:rPr>
+              <a:t>•  익숙한 뷰가 비어 버린다</a:t>
+            </a:r>
+          </a:p>
+          <a:p>
+            <a:pPr algn="l">
+              <a:spcAft>
+                <a:spcPts val="800"/>
+              </a:spcAft>
+            </a:pPr>
+            <a:r>
+              <a:rPr sz="1600" b="0">
+                <a:solidFill>
+                  <a:srgbClr val="FFFFFF"/>
+                </a:solidFill>
+                <a:latin typeface="맑은 고딕"/>
+              </a:rPr>
+              <a:t>•  트랜잭션 단위로 볼 수 있다</a:t>
             </a:r>
           </a:p>
         </p:txBody>
@@ -11864,7 +12348,7 @@
                 </a:solidFill>
                 <a:latin typeface="맑은 고딕"/>
               </a:rPr>
-              <a:t>Primary 에서 읽는 두 열</a:t>
+              <a:t>뷰가 통째로 빈다</a:t>
             </a:r>
           </a:p>
         </p:txBody>
@@ -11903,7 +12387,7 @@
                 </a:solidFill>
                 <a:latin typeface="맑은 고딕"/>
               </a:rPr>
-              <a:t>WITH QUERY 가 표식이다</a:t>
+              <a:t>역할이 바뀌면</a:t>
             </a:r>
           </a:p>
         </p:txBody>
@@ -11942,7 +12426,7 @@
                 </a:solidFill>
                 <a:latin typeface="맑은 고딕"/>
               </a:rPr>
-              <a:t>•  `DATABASE_MODE` — `OPEN_READ-ONLY` ↔ **`MOUNTED-STANDBY`**</a:t>
+              <a:t>•  `V$MANAGED_STANDBY` — `ARCH` 4, `DGRD` 2. **`MRP0` 이 없다**</a:t>
             </a:r>
           </a:p>
           <a:p>
@@ -11958,7 +12442,7 @@
                 </a:solidFill>
                 <a:latin typeface="맑은 고딕"/>
               </a:rPr>
-              <a:t>•  `RECOVERY_MODE` — `... REAL TIME APPLY` **`WITH QUERY`** 유무</a:t>
+              <a:t>•  `V$DATAGUARD_STATS` — **`no rows selected`**</a:t>
             </a:r>
           </a:p>
           <a:p>
@@ -11974,7 +12458,7 @@
                 </a:solidFill>
                 <a:latin typeface="맑은 고딕"/>
               </a:rPr>
-              <a:t>•  `APPLIED_SEQ#` 는 닫은 뒤에도 올라간다 (8 → 10)</a:t>
+              <a:t>•  두 지연이 아예 없다 — 점검표의 보조 지표가 사라진다</a:t>
             </a:r>
           </a:p>
           <a:p>
@@ -11990,7 +12474,7 @@
                 </a:solidFill>
                 <a:latin typeface="맑은 고딕"/>
               </a:rPr>
-              <a:t>•  `V$DATAGUARD_STATS` 는 Primary 에서 **0행** — 이 방법은 성립하지 않는다</a:t>
+              <a:t>•  대신 `V$LOGSTDBY_STATE` 와 `DBA_LOGSTDBY_PROGRESS` 를 본다</a:t>
             </a:r>
           </a:p>
         </p:txBody>
@@ -12091,7 +12575,7 @@
                 </a:solidFill>
                 <a:latin typeface="맑은 고딕"/>
               </a:rPr>
-              <a:t>퀴즈 (Quiz)</a:t>
+              <a:t>V$LOGSTDBY_TRANSACTION</a:t>
             </a:r>
           </a:p>
         </p:txBody>
@@ -12104,8 +12588,8 @@
         </p:nvSpPr>
         <p:spPr>
           <a:xfrm>
-            <a:off x="640080" y="1371600"/>
-            <a:ext cx="10881360" cy="5120640"/>
+            <a:off x="640080" y="1078992"/>
+            <a:ext cx="10881360" cy="457200"/>
           </a:xfrm>
           <a:prstGeom prst="rect">
             <a:avLst/>
@@ -12120,17 +12604,56 @@
           <a:p>
             <a:pPr algn="l">
               <a:spcAft>
+                <a:spcPts val="600"/>
+              </a:spcAft>
+            </a:pPr>
+            <a:r>
+              <a:rPr sz="1500" b="0">
+                <a:solidFill>
+                  <a:srgbClr val="5A6672"/>
+                </a:solidFill>
+                <a:latin typeface="맑은 고딕"/>
+              </a:rPr>
+              <a:t>열 이름부터 다르다</a:t>
+            </a:r>
+          </a:p>
+        </p:txBody>
+      </p:sp>
+      <p:sp>
+        <p:nvSpPr>
+          <p:cNvPr id="5" name="TextBox 4"/>
+          <p:cNvSpPr txBox="1"/>
+          <p:nvPr/>
+        </p:nvSpPr>
+        <p:spPr>
+          <a:xfrm>
+            <a:off x="640080" y="1737360"/>
+            <a:ext cx="10881360" cy="4754880"/>
+          </a:xfrm>
+          <a:prstGeom prst="rect">
+            <a:avLst/>
+          </a:prstGeom>
+          <a:noFill/>
+        </p:spPr>
+        <p:txBody>
+          <a:bodyPr wrap="square">
+            <a:spAutoFit/>
+          </a:bodyPr>
+          <a:lstStyle/>
+          <a:p>
+            <a:pPr algn="l">
+              <a:spcAft>
                 <a:spcPts val="1000"/>
               </a:spcAft>
             </a:pPr>
             <a:r>
-              <a:rPr sz="1600" b="0">
+              <a:rPr sz="1700" b="0">
                 <a:solidFill>
                   <a:srgbClr val="222222"/>
                 </a:solidFill>
                 <a:latin typeface="맑은 고딕"/>
               </a:rPr>
-              <a:t>•  Q1. Standby 에서 커밋되지 않은 데이터가 보이지 않는 이유를 리두·UNDO 적용과 연결해 설명하라.</a:t>
+              <a:t>•  `XIDUSN` 으로 조회하면 **`ORA-00904`**</a:t>
             </a:r>
           </a:p>
           <a:p>
@@ -12140,13 +12663,13 @@
               </a:spcAft>
             </a:pPr>
             <a:r>
-              <a:rPr sz="1600" b="0">
+              <a:rPr sz="1700" b="0">
                 <a:solidFill>
                   <a:srgbClr val="222222"/>
                 </a:solidFill>
                 <a:latin typeface="맑은 고딕"/>
               </a:rPr>
-              <a:t>•  Q2. 첫 측정이 잘못된 결론을 낼 뻔한 원인은 무엇이며, 어떻게 바로잡았는가?</a:t>
+              <a:t>•  실제 열은 전부 **`PRIMARY_` 접두어** — `PRIMARY_XIDUSN` …</a:t>
             </a:r>
           </a:p>
           <a:p>
@@ -12156,13 +12679,13 @@
               </a:spcAft>
             </a:pPr>
             <a:r>
-              <a:rPr sz="1600" b="0">
+              <a:rPr sz="1700" b="0">
                 <a:solidFill>
                   <a:srgbClr val="222222"/>
                 </a:solidFill>
                 <a:latin typeface="맑은 고딕"/>
               </a:rPr>
-              <a:t>•  Q3. Standby 에서 되는 작업과 안 되는 작업을 가르는 기준은 무엇인가?</a:t>
+              <a:t>•  `SAVEPOINT_SCN` · `COMMIT_SCN` 은 19c 에 **없다**</a:t>
             </a:r>
           </a:p>
           <a:p>
@@ -12172,45 +12695,13 @@
               </a:spcAft>
             </a:pPr>
             <a:r>
-              <a:rPr sz="1600" b="0">
+              <a:rPr sz="1700" b="0">
                 <a:solidFill>
                   <a:srgbClr val="222222"/>
                 </a:solidFill>
                 <a:latin typeface="맑은 고딕"/>
               </a:rPr>
-              <a:t>•  Q4. Standby 에서 얻은 시퀀스 값이 Primary 와 연속되지 않는 이유와 실무적 함의는?</a:t>
-            </a:r>
-          </a:p>
-          <a:p>
-            <a:pPr algn="l">
-              <a:spcAft>
-                <a:spcPts val="1000"/>
-              </a:spcAft>
-            </a:pPr>
-            <a:r>
-              <a:rPr sz="1600" b="0">
-                <a:solidFill>
-                  <a:srgbClr val="222222"/>
-                </a:solidFill>
-                <a:latin typeface="맑은 고딕"/>
-              </a:rPr>
-              <a:t>•  Q5. DML 리다이렉션이 `SYS` 로 실패하는 이유와, 그것이 기능 검증에 주는 교훈은?</a:t>
-            </a:r>
-          </a:p>
-          <a:p>
-            <a:pPr algn="l">
-              <a:spcAft>
-                <a:spcPts val="1000"/>
-              </a:spcAft>
-            </a:pPr>
-            <a:r>
-              <a:rPr sz="1600" b="0">
-                <a:solidFill>
-                  <a:srgbClr val="222222"/>
-                </a:solidFill>
-                <a:latin typeface="맑은 고딕"/>
-              </a:rPr>
-              <a:t>•  Q6. ASYNC 구성에서 `SYNC WITH PRIMARY` 가 거부되는 이유를 보호 모드와 연결해 설명하라.</a:t>
+              <a:t>•  실측 — `XID 9.9.821 | DML | MINING COMPLETE | APPLY NONE | SRC_CON 3`</a:t>
             </a:r>
           </a:p>
         </p:txBody>
@@ -12311,7 +12802,7 @@
                 </a:solidFill>
                 <a:latin typeface="맑은 고딕"/>
               </a:rPr>
-              <a:t>요약 (Summary)</a:t>
+              <a:t>멈추면 이 뷰가 답하지 않는다</a:t>
             </a:r>
           </a:p>
         </p:txBody>
@@ -12324,8 +12815,8 @@
         </p:nvSpPr>
         <p:spPr>
           <a:xfrm>
-            <a:off x="640080" y="1371600"/>
-            <a:ext cx="10881360" cy="5120640"/>
+            <a:off x="640080" y="1078992"/>
+            <a:ext cx="10881360" cy="457200"/>
           </a:xfrm>
           <a:prstGeom prst="rect">
             <a:avLst/>
@@ -12340,17 +12831,56 @@
           <a:p>
             <a:pPr algn="l">
               <a:spcAft>
+                <a:spcPts val="600"/>
+              </a:spcAft>
+            </a:pPr>
+            <a:r>
+              <a:rPr sz="1500" b="0">
+                <a:solidFill>
+                  <a:srgbClr val="5A6672"/>
+                </a:solidFill>
+                <a:latin typeface="맑은 고딕"/>
+              </a:rPr>
+              <a:t>XID 는 어디서 찾는가</a:t>
+            </a:r>
+          </a:p>
+        </p:txBody>
+      </p:sp>
+      <p:sp>
+        <p:nvSpPr>
+          <p:cNvPr id="5" name="TextBox 4"/>
+          <p:cNvSpPr txBox="1"/>
+          <p:nvPr/>
+        </p:nvSpPr>
+        <p:spPr>
+          <a:xfrm>
+            <a:off x="640080" y="1737360"/>
+            <a:ext cx="10881360" cy="4754880"/>
+          </a:xfrm>
+          <a:prstGeom prst="rect">
+            <a:avLst/>
+          </a:prstGeom>
+          <a:noFill/>
+        </p:spPr>
+        <p:txBody>
+          <a:bodyPr wrap="square">
+            <a:spAutoFit/>
+          </a:bodyPr>
+          <a:lstStyle/>
+          <a:p>
+            <a:pPr algn="l">
+              <a:spcAft>
                 <a:spcPts val="1000"/>
               </a:spcAft>
             </a:pPr>
             <a:r>
-              <a:rPr sz="1600" b="0">
+              <a:rPr sz="1700" b="0">
                 <a:solidFill>
                   <a:srgbClr val="222222"/>
                 </a:solidFill>
                 <a:latin typeface="맑은 고딕"/>
               </a:rPr>
-              <a:t>•  ADG 의 표식은 `OPEN_MODE = READ ONLY WITH APPLY` 와 `RECOVERY_MODE = MANAGED REAL TIME APPLY` 두 가지다.</a:t>
+              <a:t>•  적용이 멈추면 `V$LOGSTDBY_TRANSACTION` 은 **비어 버린다**</a:t>
             </a:r>
           </a:p>
           <a:p>
@@ -12360,13 +12890,13 @@
               </a:spcAft>
             </a:pPr>
             <a:r>
-              <a:rPr sz="1600" b="0">
+              <a:rPr sz="1700" b="0">
                 <a:solidFill>
                   <a:srgbClr val="222222"/>
                 </a:solidFill>
                 <a:latin typeface="맑은 고딕"/>
               </a:rPr>
-              <a:t>•  기능 사용 통계는 `CDB_` 뷰의 CON_ID 3 에만 있고 `DETECTED_USAGES` 는 0이었다. 라이선스 근거로는 부족하다.</a:t>
+              <a:t>•  멈춘 뒤의 XID 는 `DBA_LOGSTDBY_EVENTS` 에 — 열 이름은 `XIDUSN`</a:t>
             </a:r>
           </a:p>
           <a:p>
@@ -12376,13 +12906,13 @@
               </a:spcAft>
             </a:pPr>
             <a:r>
-              <a:rPr sz="1600" b="0">
+              <a:rPr sz="1700" b="0">
                 <a:solidFill>
                   <a:srgbClr val="222222"/>
                 </a:solidFill>
                 <a:latin typeface="맑은 고딕"/>
               </a:rPr>
-              <a:t>•  MOUNTED 로만 두면 ADG 옵션이 필요 없다. 여는 순간부터 옵션의 영역이다.</a:t>
+              <a:t>•  실측 오류 **`ORA-26787`** (그 키의 행이 표에 없다)</a:t>
             </a:r>
           </a:p>
           <a:p>
@@ -12392,301 +12922,13 @@
               </a:spcAft>
             </a:pPr>
             <a:r>
-              <a:rPr sz="1600" b="0">
+              <a:rPr sz="1700" b="0">
                 <a:solidFill>
                   <a:srgbClr val="222222"/>
                 </a:solidFill>
                 <a:latin typeface="맑은 고딕"/>
               </a:rPr>
-              <a:t>•  Standby 조회는 **커밋된 데이터만** 보여 준다. 리두와 함께 UNDO 도 적용되기 때문이다.</a:t>
-            </a:r>
-          </a:p>
-          <a:p>
-            <a:pPr algn="l">
-              <a:spcAft>
-                <a:spcPts val="1000"/>
-              </a:spcAft>
-            </a:pPr>
-            <a:r>
-              <a:rPr sz="1600" b="0">
-                <a:solidFill>
-                  <a:srgbClr val="222222"/>
-                </a:solidFill>
-                <a:latin typeface="맑은 고딕"/>
-              </a:rPr>
-              <a:t>•  SQL*Plus 는 `EXIT` 시 암묵적으로 커밋한다. 이 때문에 첫 측정이 잘못된 결론을 낼 뻔했다.</a:t>
-            </a:r>
-          </a:p>
-          <a:p>
-            <a:pPr algn="l">
-              <a:spcAft>
-                <a:spcPts val="1000"/>
-              </a:spcAft>
-            </a:pPr>
-            <a:r>
-              <a:rPr sz="1600" b="0">
-                <a:solidFill>
-                  <a:srgbClr val="222222"/>
-                </a:solidFill>
-                <a:latin typeface="맑은 고딕"/>
-              </a:rPr>
-              <a:t>•  쓰기는 모두 **ORA-16000** 이다. `INSERT`·`UPDATE`·DDL 이 같은 오류다.</a:t>
-            </a:r>
-          </a:p>
-          <a:p>
-            <a:pPr algn="l">
-              <a:spcAft>
-                <a:spcPts val="1000"/>
-              </a:spcAft>
-            </a:pPr>
-            <a:r>
-              <a:rPr sz="1600" b="0">
-                <a:solidFill>
-                  <a:srgbClr val="222222"/>
-                </a:solidFill>
-                <a:latin typeface="맑은 고딕"/>
-              </a:rPr>
-              <a:t>•  정렬은 된다. 실측 7만 행 정렬에 TEMP 3MB 씩 사용됐다. 보고서 조회를 옮기는 근거다.</a:t>
-            </a:r>
-          </a:p>
-          <a:p>
-            <a:pPr algn="l">
-              <a:spcAft>
-                <a:spcPts val="1000"/>
-              </a:spcAft>
-            </a:pPr>
-            <a:r>
-              <a:rPr sz="1600" b="0">
-                <a:solidFill>
-                  <a:srgbClr val="222222"/>
-                </a:solidFill>
-                <a:latin typeface="맑은 고딕"/>
-              </a:rPr>
-              <a:t>•  `EXPLAIN PLAN` 과 GTT `INSERT` 도 된다. 데이터가 임시 테이블스페이스에 있기 때문이다.</a:t>
-            </a:r>
-          </a:p>
-          <a:p>
-            <a:pPr algn="l">
-              <a:spcAft>
-                <a:spcPts val="1000"/>
-              </a:spcAft>
-            </a:pPr>
-            <a:r>
-              <a:rPr sz="1600" b="0">
-                <a:solidFill>
-                  <a:srgbClr val="222222"/>
-                </a:solidFill>
-                <a:latin typeface="맑은 고딕"/>
-              </a:rPr>
-              <a:t>•  시퀀스도 되지만 **값이 뛴다.** Primary 에서 1이었던 시퀀스가 Standby 에서 21을 돌려주었다.</a:t>
-            </a:r>
-          </a:p>
-          <a:p>
-            <a:pPr algn="l">
-              <a:spcAft>
-                <a:spcPts val="1000"/>
-              </a:spcAft>
-            </a:pPr>
-            <a:r>
-              <a:rPr sz="1600" b="0">
-                <a:solidFill>
-                  <a:srgbClr val="222222"/>
-                </a:solidFill>
-                <a:latin typeface="맑은 고딕"/>
-              </a:rPr>
-              <a:t>•  통계 수집은 ORA-16000, AWR 은 전용 오류 **ORA-13516**. `V$` 뷰 조회는 자유롭다.</a:t>
-            </a:r>
-          </a:p>
-          <a:p>
-            <a:pPr algn="l">
-              <a:spcAft>
-                <a:spcPts val="1000"/>
-              </a:spcAft>
-            </a:pPr>
-            <a:r>
-              <a:rPr sz="1600" b="0">
-                <a:solidFill>
-                  <a:srgbClr val="222222"/>
-                </a:solidFill>
-                <a:latin typeface="맑은 고딕"/>
-              </a:rPr>
-              <a:t>•  경계를 가르는 기준은 **영구 데이터 파일이나 딕셔너리를 바꾸는가** 하나다.</a:t>
-            </a:r>
-          </a:p>
-          <a:p>
-            <a:pPr algn="l">
-              <a:spcAft>
-                <a:spcPts val="1000"/>
-              </a:spcAft>
-            </a:pPr>
-            <a:r>
-              <a:rPr sz="1600" b="0">
-                <a:solidFill>
-                  <a:srgbClr val="222222"/>
-                </a:solidFill>
-                <a:latin typeface="맑은 고딕"/>
-              </a:rPr>
-              <a:t>•  DML 리다이렉션은 일반 사용자로 `INSERT`·`UPDATE`·`DELETE` 가 모두 성공하며 Primary 에 반영된다.</a:t>
-            </a:r>
-          </a:p>
-          <a:p>
-            <a:pPr algn="l">
-              <a:spcAft>
-                <a:spcPts val="1000"/>
-              </a:spcAft>
-            </a:pPr>
-            <a:r>
-              <a:rPr sz="1600" b="0">
-                <a:solidFill>
-                  <a:srgbClr val="222222"/>
-                </a:solidFill>
-                <a:latin typeface="맑은 고딕"/>
-              </a:rPr>
-              <a:t>•  **`SYS` 로는 ORA-16397 로 실패한다.** 관리자 계정으로 시험하면 기능이 없다고 오판하기 쉽다.</a:t>
-            </a:r>
-          </a:p>
-          <a:p>
-            <a:pPr algn="l">
-              <a:spcAft>
-                <a:spcPts val="1000"/>
-              </a:spcAft>
-            </a:pPr>
-            <a:r>
-              <a:rPr sz="1600" b="0">
-                <a:solidFill>
-                  <a:srgbClr val="222222"/>
-                </a:solidFill>
-                <a:latin typeface="맑은 고딕"/>
-              </a:rPr>
-              <a:t>•  DDL 은 대상이 아니다. ORA-16000 이 나며, 오류 번호가 처리 경로를 알려 준다.</a:t>
-            </a:r>
-          </a:p>
-          <a:p>
-            <a:pPr algn="l">
-              <a:spcAft>
-                <a:spcPts val="1000"/>
-              </a:spcAft>
-            </a:pPr>
-            <a:r>
-              <a:rPr sz="1600" b="0">
-                <a:solidFill>
-                  <a:srgbClr val="222222"/>
-                </a:solidFill>
-                <a:latin typeface="맑은 고딕"/>
-              </a:rPr>
-              <a:t>•  리다이렉션의 가치는 부하 분산이 아니라 **접속 단순화**다. 실행은 Primary 에서 일어난다.</a:t>
-            </a:r>
-          </a:p>
-          <a:p>
-            <a:pPr algn="l">
-              <a:spcAft>
-                <a:spcPts val="1000"/>
-              </a:spcAft>
-            </a:pPr>
-            <a:r>
-              <a:rPr sz="1600" b="0">
-                <a:solidFill>
-                  <a:srgbClr val="222222"/>
-                </a:solidFill>
-                <a:latin typeface="맑은 고딕"/>
-              </a:rPr>
-              <a:t>•  `STANDBY_MAX_DATA_DELAY` 초과 시 **ORA-03172**. ASYNC 에서 0은 항상 위반된다.</a:t>
-            </a:r>
-          </a:p>
-          <a:p>
-            <a:pPr algn="l">
-              <a:spcAft>
-                <a:spcPts val="1000"/>
-              </a:spcAft>
-            </a:pPr>
-            <a:r>
-              <a:rPr sz="1600" b="0">
-                <a:solidFill>
-                  <a:srgbClr val="222222"/>
-                </a:solidFill>
-                <a:latin typeface="맑은 고딕"/>
-              </a:rPr>
-              <a:t>•  **`SYS` 세션에는 적용되지 않는다 — ORA-03174.** ADG 세션 기능은 일반 사용자를 전제로 한다.</a:t>
-            </a:r>
-          </a:p>
-          <a:p>
-            <a:pPr algn="l">
-              <a:spcAft>
-                <a:spcPts val="1000"/>
-              </a:spcAft>
-            </a:pPr>
-            <a:r>
-              <a:rPr sz="1600" b="0">
-                <a:solidFill>
-                  <a:srgbClr val="222222"/>
-                </a:solidFill>
-                <a:latin typeface="맑은 고딕"/>
-              </a:rPr>
-              <a:t>•  `SYNC WITH PRIMARY` 는 동기 전송이 전제다. ASYNC 에서는 **ORA-03173**.</a:t>
-            </a:r>
-          </a:p>
-          <a:p>
-            <a:pPr algn="l">
-              <a:spcAft>
-                <a:spcPts val="1000"/>
-              </a:spcAft>
-            </a:pPr>
-            <a:r>
-              <a:rPr sz="1600" b="0">
-                <a:solidFill>
-                  <a:srgbClr val="222222"/>
-                </a:solidFill>
-                <a:latin typeface="맑은 고딕"/>
-              </a:rPr>
-              <a:t>•  보호 모드는 8장에서 복구 가능성을, 9장에서 조회 신선도 보장을 결정했다.</a:t>
-            </a:r>
-          </a:p>
-          <a:p>
-            <a:pPr algn="l">
-              <a:spcAft>
-                <a:spcPts val="1000"/>
-              </a:spcAft>
-            </a:pPr>
-            <a:r>
-              <a:rPr sz="1600" b="0">
-                <a:solidFill>
-                  <a:srgbClr val="222222"/>
-                </a:solidFill>
-                <a:latin typeface="맑은 고딕"/>
-              </a:rPr>
-              <a:t>•  `V$STANDBY_EVENT_HISTOGRAM` 은 `apply lag` 하나만 누적한다. 2분 정지가 `2 minutes` 59회로 남았다.</a:t>
-            </a:r>
-          </a:p>
-          <a:p>
-            <a:pPr algn="l">
-              <a:spcAft>
-                <a:spcPts val="1000"/>
-              </a:spcAft>
-            </a:pPr>
-            <a:r>
-              <a:rPr sz="1600" b="0">
-                <a:solidFill>
-                  <a:srgbClr val="222222"/>
-                </a:solidFill>
-                <a:latin typeface="맑은 고딕"/>
-              </a:rPr>
-              <a:t>•  옵션 없이 쓰려면 MOUNTED 로 둔다. 적용은 돌고 조회만 **ORA-01219** 로 막힌다.</a:t>
-            </a:r>
-          </a:p>
-          <a:p>
-            <a:pPr algn="l">
-              <a:spcAft>
-                <a:spcPts val="1000"/>
-              </a:spcAft>
-            </a:pPr>
-            <a:r>
-              <a:rPr sz="1600" b="0">
-                <a:solidFill>
-                  <a:srgbClr val="222222"/>
-                </a:solidFill>
-                <a:latin typeface="맑은 고딕"/>
-              </a:rPr>
-              <a:t>•  Primary 쪽 표식은 `DATABASE_MODE` 와 `RECOVERY_MODE` 의 **`WITH QUERY`** 유무다.</a:t>
+              <a:t>•  `SKIP_TRANSACTION` — PDB 에서 `ORA-65040`, 정지 상태에서 `ORA-16104`</a:t>
             </a:r>
           </a:p>
         </p:txBody>
@@ -12718,7 +12960,7 @@
         <p:spPr>
           <a:xfrm>
             <a:off x="0" y="0"/>
-            <a:ext cx="12191695" cy="1005840"/>
+            <a:ext cx="12191695" cy="6858000"/>
           </a:xfrm>
           <a:prstGeom prst="rect">
             <a:avLst/>
@@ -12761,8 +13003,8 @@
         </p:nvSpPr>
         <p:spPr>
           <a:xfrm>
-            <a:off x="548640" y="91440"/>
-            <a:ext cx="10972800" cy="777240"/>
+            <a:off x="822960" y="2011680"/>
+            <a:ext cx="10515600" cy="1097280"/>
           </a:xfrm>
           <a:prstGeom prst="rect">
             <a:avLst/>
@@ -12781,13 +13023,13 @@
               </a:spcAft>
             </a:pPr>
             <a:r>
-              <a:rPr sz="2600" b="1">
+              <a:rPr sz="4000" b="1">
                 <a:solidFill>
                   <a:srgbClr val="FFFFFF"/>
                 </a:solidFill>
                 <a:latin typeface="맑은 고딕"/>
               </a:rPr>
-              <a:t>실습 개요 (Practice Overview)</a:t>
+              <a:t>15.7</a:t>
             </a:r>
           </a:p>
         </p:txBody>
@@ -12800,8 +13042,8 @@
         </p:nvSpPr>
         <p:spPr>
           <a:xfrm>
-            <a:off x="640080" y="1371600"/>
-            <a:ext cx="10881360" cy="5120640"/>
+            <a:off x="822960" y="3017520"/>
+            <a:ext cx="10515600" cy="914400"/>
           </a:xfrm>
           <a:prstGeom prst="rect">
             <a:avLst/>
@@ -12816,17 +13058,311 @@
           <a:p>
             <a:pPr algn="l">
               <a:spcAft>
+                <a:spcPts val="600"/>
+              </a:spcAft>
+            </a:pPr>
+            <a:r>
+              <a:rPr sz="2800" b="1">
+                <a:solidFill>
+                  <a:srgbClr val="FFFFFF"/>
+                </a:solidFill>
+                <a:latin typeface="맑은 고딕"/>
+              </a:rPr>
+              <a:t>상시 점검 스크립트</a:t>
+            </a:r>
+          </a:p>
+        </p:txBody>
+      </p:sp>
+      <p:sp>
+        <p:nvSpPr>
+          <p:cNvPr id="5" name="Rectangle 4"/>
+          <p:cNvSpPr/>
+          <p:nvPr/>
+        </p:nvSpPr>
+        <p:spPr>
+          <a:xfrm>
+            <a:off x="822960" y="4114800"/>
+            <a:ext cx="5486400" cy="54864"/>
+          </a:xfrm>
+          <a:prstGeom prst="rect">
+            <a:avLst/>
+          </a:prstGeom>
+          <a:solidFill>
+            <a:srgbClr val="FFFFFF"/>
+          </a:solidFill>
+          <a:ln>
+            <a:noFill/>
+          </a:ln>
+          <a:effectLst/>
+        </p:spPr>
+        <p:style>
+          <a:lnRef idx="1">
+            <a:schemeClr val="accent1"/>
+          </a:lnRef>
+          <a:fillRef idx="3">
+            <a:schemeClr val="accent1"/>
+          </a:fillRef>
+          <a:effectRef idx="2">
+            <a:schemeClr val="accent1"/>
+          </a:effectRef>
+          <a:fontRef idx="minor">
+            <a:schemeClr val="lt1"/>
+          </a:fontRef>
+        </p:style>
+        <p:txBody>
+          <a:bodyPr rtlCol="0" anchor="ctr"/>
+          <a:lstStyle/>
+          <a:p>
+            <a:pPr algn="ctr"/>
+          </a:p>
+        </p:txBody>
+      </p:sp>
+      <p:sp>
+        <p:nvSpPr>
+          <p:cNvPr id="6" name="TextBox 5"/>
+          <p:cNvSpPr txBox="1"/>
+          <p:nvPr/>
+        </p:nvSpPr>
+        <p:spPr>
+          <a:xfrm>
+            <a:off x="822960" y="4297680"/>
+            <a:ext cx="10058400" cy="2011680"/>
+          </a:xfrm>
+          <a:prstGeom prst="rect">
+            <a:avLst/>
+          </a:prstGeom>
+          <a:noFill/>
+        </p:spPr>
+        <p:txBody>
+          <a:bodyPr wrap="square">
+            <a:spAutoFit/>
+          </a:bodyPr>
+          <a:lstStyle/>
+          <a:p>
+            <a:pPr algn="l">
+              <a:spcAft>
+                <a:spcPts val="800"/>
+              </a:spcAft>
+            </a:pPr>
+            <a:r>
+              <a:rPr sz="1600" b="0">
+                <a:solidFill>
+                  <a:srgbClr val="FFFFFF"/>
+                </a:solidFill>
+                <a:latin typeface="맑은 고딕"/>
+              </a:rPr>
+              <a:t>•  역할별로 다르다</a:t>
+            </a:r>
+          </a:p>
+          <a:p>
+            <a:pPr algn="l">
+              <a:spcAft>
+                <a:spcPts val="800"/>
+              </a:spcAft>
+            </a:pPr>
+            <a:r>
+              <a:rPr sz="1600" b="0">
+                <a:solidFill>
+                  <a:srgbClr val="FFFFFF"/>
+                </a:solidFill>
+                <a:latin typeface="맑은 고딕"/>
+              </a:rPr>
+              <a:t>•  주 지표와 보조 지표</a:t>
+            </a:r>
+          </a:p>
+          <a:p>
+            <a:pPr algn="l">
+              <a:spcAft>
+                <a:spcPts val="800"/>
+              </a:spcAft>
+            </a:pPr>
+            <a:r>
+              <a:rPr sz="1600" b="0">
+                <a:solidFill>
+                  <a:srgbClr val="FFFFFF"/>
+                </a:solidFill>
+                <a:latin typeface="맑은 고딕"/>
+              </a:rPr>
+              <a:t>•  판정 규칙</a:t>
+            </a:r>
+          </a:p>
+        </p:txBody>
+      </p:sp>
+    </p:spTree>
+  </p:cSld>
+  <p:clrMapOvr>
+    <a:masterClrMapping/>
+  </p:clrMapOvr>
+</p:sld>
+</file>
+
+<file path=ppt/slides/slide39.xml><?xml version="1.0" encoding="utf-8"?>
+<p:sld xmlns:a="http://schemas.openxmlformats.org/drawingml/2006/main" xmlns:p="http://schemas.openxmlformats.org/presentationml/2006/main" xmlns:r="http://schemas.openxmlformats.org/officeDocument/2006/relationships">
+  <p:cSld>
+    <p:spTree>
+      <p:nvGrpSpPr>
+        <p:cNvPr id="1" name=""/>
+        <p:cNvGrpSpPr/>
+        <p:nvPr/>
+      </p:nvGrpSpPr>
+      <p:grpSpPr/>
+      <p:sp>
+        <p:nvSpPr>
+          <p:cNvPr id="2" name="Rectangle 1"/>
+          <p:cNvSpPr/>
+          <p:nvPr/>
+        </p:nvSpPr>
+        <p:spPr>
+          <a:xfrm>
+            <a:off x="0" y="0"/>
+            <a:ext cx="12191695" cy="1005840"/>
+          </a:xfrm>
+          <a:prstGeom prst="rect">
+            <a:avLst/>
+          </a:prstGeom>
+          <a:solidFill>
+            <a:srgbClr val="C0392B"/>
+          </a:solidFill>
+          <a:ln>
+            <a:noFill/>
+          </a:ln>
+          <a:effectLst/>
+        </p:spPr>
+        <p:style>
+          <a:lnRef idx="1">
+            <a:schemeClr val="accent1"/>
+          </a:lnRef>
+          <a:fillRef idx="3">
+            <a:schemeClr val="accent1"/>
+          </a:fillRef>
+          <a:effectRef idx="2">
+            <a:schemeClr val="accent1"/>
+          </a:effectRef>
+          <a:fontRef idx="minor">
+            <a:schemeClr val="lt1"/>
+          </a:fontRef>
+        </p:style>
+        <p:txBody>
+          <a:bodyPr rtlCol="0" anchor="ctr"/>
+          <a:lstStyle/>
+          <a:p>
+            <a:pPr algn="ctr"/>
+          </a:p>
+        </p:txBody>
+      </p:sp>
+      <p:sp>
+        <p:nvSpPr>
+          <p:cNvPr id="3" name="TextBox 2"/>
+          <p:cNvSpPr txBox="1"/>
+          <p:nvPr/>
+        </p:nvSpPr>
+        <p:spPr>
+          <a:xfrm>
+            <a:off x="548640" y="91440"/>
+            <a:ext cx="10972800" cy="777240"/>
+          </a:xfrm>
+          <a:prstGeom prst="rect">
+            <a:avLst/>
+          </a:prstGeom>
+          <a:noFill/>
+        </p:spPr>
+        <p:txBody>
+          <a:bodyPr wrap="square">
+            <a:spAutoFit/>
+          </a:bodyPr>
+          <a:lstStyle/>
+          <a:p>
+            <a:pPr algn="l">
+              <a:spcAft>
+                <a:spcPts val="600"/>
+              </a:spcAft>
+            </a:pPr>
+            <a:r>
+              <a:rPr sz="2600" b="1">
+                <a:solidFill>
+                  <a:srgbClr val="FFFFFF"/>
+                </a:solidFill>
+                <a:latin typeface="맑은 고딕"/>
+              </a:rPr>
+              <a:t>설계 원칙</a:t>
+            </a:r>
+          </a:p>
+        </p:txBody>
+      </p:sp>
+      <p:sp>
+        <p:nvSpPr>
+          <p:cNvPr id="4" name="TextBox 3"/>
+          <p:cNvSpPr txBox="1"/>
+          <p:nvPr/>
+        </p:nvSpPr>
+        <p:spPr>
+          <a:xfrm>
+            <a:off x="640080" y="1078992"/>
+            <a:ext cx="10881360" cy="457200"/>
+          </a:xfrm>
+          <a:prstGeom prst="rect">
+            <a:avLst/>
+          </a:prstGeom>
+          <a:noFill/>
+        </p:spPr>
+        <p:txBody>
+          <a:bodyPr wrap="square">
+            <a:spAutoFit/>
+          </a:bodyPr>
+          <a:lstStyle/>
+          <a:p>
+            <a:pPr algn="l">
+              <a:spcAft>
+                <a:spcPts val="600"/>
+              </a:spcAft>
+            </a:pPr>
+            <a:r>
+              <a:rPr sz="1500" b="0">
+                <a:solidFill>
+                  <a:srgbClr val="5A6672"/>
+                </a:solidFill>
+                <a:latin typeface="맑은 고딕"/>
+              </a:rPr>
+              <a:t>다섯 가지</a:t>
+            </a:r>
+          </a:p>
+        </p:txBody>
+      </p:sp>
+      <p:sp>
+        <p:nvSpPr>
+          <p:cNvPr id="5" name="TextBox 4"/>
+          <p:cNvSpPr txBox="1"/>
+          <p:nvPr/>
+        </p:nvSpPr>
+        <p:spPr>
+          <a:xfrm>
+            <a:off x="640080" y="1737360"/>
+            <a:ext cx="10881360" cy="4754880"/>
+          </a:xfrm>
+          <a:prstGeom prst="rect">
+            <a:avLst/>
+          </a:prstGeom>
+          <a:noFill/>
+        </p:spPr>
+        <p:txBody>
+          <a:bodyPr wrap="square">
+            <a:spAutoFit/>
+          </a:bodyPr>
+          <a:lstStyle/>
+          <a:p>
+            <a:pPr algn="l">
+              <a:spcAft>
                 <a:spcPts val="1000"/>
               </a:spcAft>
             </a:pPr>
             <a:r>
-              <a:rPr sz="1600" b="0">
+              <a:rPr sz="1700" b="0">
                 <a:solidFill>
                   <a:srgbClr val="222222"/>
                 </a:solidFill>
                 <a:latin typeface="맑은 고딕"/>
               </a:rPr>
-              <a:t>•  실습 01 — ADG 상태 확인: 두 표식과 기능 사용 통계, 세션 컨텍스트, PDB 서비스를 확인한다.</a:t>
+              <a:t>•  **① 역할에 따라 다른 것을 본다**</a:t>
             </a:r>
           </a:p>
           <a:p>
@@ -12836,13 +13372,13 @@
               </a:spcAft>
             </a:pPr>
             <a:r>
-              <a:rPr sz="1600" b="0">
+              <a:rPr sz="1700" b="0">
                 <a:solidFill>
                   <a:srgbClr val="222222"/>
                 </a:solidFill>
                 <a:latin typeface="맑은 고딕"/>
               </a:rPr>
-              <a:t>•  실습 02 — 읽기 일관성 검증: 미커밋 상태를 유지한 채 조회하고, SQL*Plus 의 함정을 재현한다.</a:t>
+              <a:t>•  ② `count(*)` 로 판정 가능한 숫자를 만든다</a:t>
             </a:r>
           </a:p>
           <a:p>
@@ -12852,13 +13388,13 @@
               </a:spcAft>
             </a:pPr>
             <a:r>
-              <a:rPr sz="1600" b="0">
+              <a:rPr sz="1700" b="0">
                 <a:solidFill>
                   <a:srgbClr val="222222"/>
                 </a:solidFill>
                 <a:latin typeface="맑은 고딕"/>
               </a:rPr>
-              <a:t>•  실습 03 — 되는 것과 안 되는 것: ORA-16000 을 재현하고 정렬·GTT·시퀀스·통계·AWR 을 확인한다.</a:t>
+              <a:t>•  ③ 정상값을 미리 정한다</a:t>
             </a:r>
           </a:p>
           <a:p>
@@ -12868,13 +13404,13 @@
               </a:spcAft>
             </a:pPr>
             <a:r>
-              <a:rPr sz="1600" b="0">
+              <a:rPr sz="1700" b="0">
                 <a:solidFill>
                   <a:srgbClr val="222222"/>
                 </a:solidFill>
                 <a:latin typeface="맑은 고딕"/>
               </a:rPr>
-              <a:t>•  실습 04 — DML 리다이렉션: 일반 사용자로 세 가지 DML 을 리다이렉트하고 Primary 에서 검증한다.</a:t>
+              <a:t>•  ④ `V$DATAGUARD_STATUS` 에는 **시간 조건**을 넣는다</a:t>
             </a:r>
           </a:p>
           <a:p>
@@ -12884,77 +13420,13 @@
               </a:spcAft>
             </a:pPr>
             <a:r>
-              <a:rPr sz="1600" b="0">
+              <a:rPr sz="1700" b="0">
                 <a:solidFill>
                   <a:srgbClr val="222222"/>
                 </a:solidFill>
                 <a:latin typeface="맑은 고딕"/>
               </a:rPr>
-              <a:t>•  실습 05 — 리다이렉션의 제약: `SYS` 의 ORA-16397 과 DDL 의 ORA-16000 을 구분하고 점검표를 만든다.</a:t>
-            </a:r>
-          </a:p>
-          <a:p>
-            <a:pPr algn="l">
-              <a:spcAft>
-                <a:spcPts val="1000"/>
-              </a:spcAft>
-            </a:pPr>
-            <a:r>
-              <a:rPr sz="1600" b="0">
-                <a:solidFill>
-                  <a:srgbClr val="222222"/>
-                </a:solidFill>
-                <a:latin typeface="맑은 고딕"/>
-              </a:rPr>
-              <a:t>•  실습 06 — 지연 한도: ORA-03172·ORA-03174·ORA-03173 을 재현하고 두 장치를 비교한다.</a:t>
-            </a:r>
-          </a:p>
-          <a:p>
-            <a:pPr algn="l">
-              <a:spcAft>
-                <a:spcPts val="1000"/>
-              </a:spcAft>
-            </a:pPr>
-            <a:r>
-              <a:rPr sz="1600" b="0">
-                <a:solidFill>
-                  <a:srgbClr val="222222"/>
-                </a:solidFill>
-                <a:latin typeface="맑은 고딕"/>
-              </a:rPr>
-              <a:t>•  실습 07 — 히스토그램: 적용을 멈췄다 재개하며 분포의 변화를 관찰한다.</a:t>
-            </a:r>
-          </a:p>
-          <a:p>
-            <a:pPr algn="l">
-              <a:spcAft>
-                <a:spcPts val="1000"/>
-              </a:spcAft>
-            </a:pPr>
-            <a:r>
-              <a:rPr sz="1600" b="0">
-                <a:solidFill>
-                  <a:srgbClr val="222222"/>
-                </a:solidFill>
-                <a:latin typeface="맑은 고딕"/>
-              </a:rPr>
-              <a:t>•  실습 08 — 옵션 없는 대안 경로: MOUNTED 로 내려 `ORA-01219` 를 재현하고 양쪽에서 동기화를 확인한다.</a:t>
-            </a:r>
-          </a:p>
-          <a:p>
-            <a:pPr algn="l">
-              <a:spcAft>
-                <a:spcPts val="1000"/>
-              </a:spcAft>
-            </a:pPr>
-            <a:r>
-              <a:rPr sz="1600" b="0">
-                <a:solidFill>
-                  <a:srgbClr val="222222"/>
-                </a:solidFill>
-                <a:latin typeface="맑은 고딕"/>
-              </a:rPr>
-              <a:t>•  실습 06·07 은 적용을 멈추고 08 은 Standby 를 닫는다. 각 실습 끝에서 반드시 원복한다.</a:t>
+              <a:t>•  ⑤ 조회 대상을 최소로 한다</a:t>
             </a:r>
           </a:p>
         </p:txBody>
@@ -13055,7 +13527,7 @@
                 </a:solidFill>
                 <a:latin typeface="맑은 고딕"/>
               </a:rPr>
-              <a:t>9.2</a:t>
+              <a:t>15.1</a:t>
             </a:r>
           </a:p>
         </p:txBody>
@@ -13094,7 +13566,7 @@
                 </a:solidFill>
                 <a:latin typeface="맑은 고딕"/>
               </a:rPr>
-              <a:t>무엇이 켜져 있는가</a:t>
+              <a:t>왜 아래층으로 내려가는가</a:t>
             </a:r>
           </a:p>
         </p:txBody>
@@ -13177,7 +13649,7 @@
                 </a:solidFill>
                 <a:latin typeface="맑은 고딕"/>
               </a:rPr>
-              <a:t>•  표식 두 가지</a:t>
+              <a:t>•  Broker 의 요약은 계산된 값이다</a:t>
             </a:r>
           </a:p>
           <a:p>
@@ -13193,23 +13665,1240 @@
                 </a:solidFill>
                 <a:latin typeface="맑은 고딕"/>
               </a:rPr>
-              <a:t>•  사용 기록과 라이선스</a:t>
-            </a:r>
-          </a:p>
-          <a:p>
-            <a:pPr algn="l">
-              <a:spcAft>
-                <a:spcPts val="800"/>
+              <a:t>•  세 가지 이유</a:t>
+            </a:r>
+          </a:p>
+        </p:txBody>
+      </p:sp>
+    </p:spTree>
+  </p:cSld>
+  <p:clrMapOvr>
+    <a:masterClrMapping/>
+  </p:clrMapOvr>
+</p:sld>
+</file>
+
+<file path=ppt/slides/slide40.xml><?xml version="1.0" encoding="utf-8"?>
+<p:sld xmlns:a="http://schemas.openxmlformats.org/drawingml/2006/main" xmlns:p="http://schemas.openxmlformats.org/presentationml/2006/main" xmlns:r="http://schemas.openxmlformats.org/officeDocument/2006/relationships">
+  <p:cSld>
+    <p:spTree>
+      <p:nvGrpSpPr>
+        <p:cNvPr id="1" name=""/>
+        <p:cNvGrpSpPr/>
+        <p:nvPr/>
+      </p:nvGrpSpPr>
+      <p:grpSpPr/>
+      <p:sp>
+        <p:nvSpPr>
+          <p:cNvPr id="2" name="Rectangle 1"/>
+          <p:cNvSpPr/>
+          <p:nvPr/>
+        </p:nvSpPr>
+        <p:spPr>
+          <a:xfrm>
+            <a:off x="0" y="0"/>
+            <a:ext cx="12191695" cy="1005840"/>
+          </a:xfrm>
+          <a:prstGeom prst="rect">
+            <a:avLst/>
+          </a:prstGeom>
+          <a:solidFill>
+            <a:srgbClr val="C0392B"/>
+          </a:solidFill>
+          <a:ln>
+            <a:noFill/>
+          </a:ln>
+          <a:effectLst/>
+        </p:spPr>
+        <p:style>
+          <a:lnRef idx="1">
+            <a:schemeClr val="accent1"/>
+          </a:lnRef>
+          <a:fillRef idx="3">
+            <a:schemeClr val="accent1"/>
+          </a:fillRef>
+          <a:effectRef idx="2">
+            <a:schemeClr val="accent1"/>
+          </a:effectRef>
+          <a:fontRef idx="minor">
+            <a:schemeClr val="lt1"/>
+          </a:fontRef>
+        </p:style>
+        <p:txBody>
+          <a:bodyPr rtlCol="0" anchor="ctr"/>
+          <a:lstStyle/>
+          <a:p>
+            <a:pPr algn="ctr"/>
+          </a:p>
+        </p:txBody>
+      </p:sp>
+      <p:sp>
+        <p:nvSpPr>
+          <p:cNvPr id="3" name="TextBox 2"/>
+          <p:cNvSpPr txBox="1"/>
+          <p:nvPr/>
+        </p:nvSpPr>
+        <p:spPr>
+          <a:xfrm>
+            <a:off x="548640" y="91440"/>
+            <a:ext cx="10972800" cy="777240"/>
+          </a:xfrm>
+          <a:prstGeom prst="rect">
+            <a:avLst/>
+          </a:prstGeom>
+          <a:noFill/>
+        </p:spPr>
+        <p:txBody>
+          <a:bodyPr wrap="square">
+            <a:spAutoFit/>
+          </a:bodyPr>
+          <a:lstStyle/>
+          <a:p>
+            <a:pPr algn="l">
+              <a:spcAft>
+                <a:spcPts val="600"/>
+              </a:spcAft>
+            </a:pPr>
+            <a:r>
+              <a:rPr sz="2600" b="1">
+                <a:solidFill>
+                  <a:srgbClr val="FFFFFF"/>
+                </a:solidFill>
+                <a:latin typeface="맑은 고딕"/>
+              </a:rPr>
+              <a:t>수집 항목</a:t>
+            </a:r>
+          </a:p>
+        </p:txBody>
+      </p:sp>
+      <p:sp>
+        <p:nvSpPr>
+          <p:cNvPr id="4" name="TextBox 3"/>
+          <p:cNvSpPr txBox="1"/>
+          <p:nvPr/>
+        </p:nvSpPr>
+        <p:spPr>
+          <a:xfrm>
+            <a:off x="640080" y="1078992"/>
+            <a:ext cx="10881360" cy="457200"/>
+          </a:xfrm>
+          <a:prstGeom prst="rect">
+            <a:avLst/>
+          </a:prstGeom>
+          <a:noFill/>
+        </p:spPr>
+        <p:txBody>
+          <a:bodyPr wrap="square">
+            <a:spAutoFit/>
+          </a:bodyPr>
+          <a:lstStyle/>
+          <a:p>
+            <a:pPr algn="l">
+              <a:spcAft>
+                <a:spcPts val="600"/>
+              </a:spcAft>
+            </a:pPr>
+            <a:r>
+              <a:rPr sz="1500" b="0">
+                <a:solidFill>
+                  <a:srgbClr val="5A6672"/>
+                </a:solidFill>
+                <a:latin typeface="맑은 고딕"/>
+              </a:rPr>
+              <a:t>Primary / Standby</a:t>
+            </a:r>
+          </a:p>
+        </p:txBody>
+      </p:sp>
+      <p:sp>
+        <p:nvSpPr>
+          <p:cNvPr id="5" name="TextBox 4"/>
+          <p:cNvSpPr txBox="1"/>
+          <p:nvPr/>
+        </p:nvSpPr>
+        <p:spPr>
+          <a:xfrm>
+            <a:off x="640080" y="1737360"/>
+            <a:ext cx="10881360" cy="4754880"/>
+          </a:xfrm>
+          <a:prstGeom prst="rect">
+            <a:avLst/>
+          </a:prstGeom>
+          <a:noFill/>
+        </p:spPr>
+        <p:txBody>
+          <a:bodyPr wrap="square">
+            <a:spAutoFit/>
+          </a:bodyPr>
+          <a:lstStyle/>
+          <a:p>
+            <a:pPr algn="l">
+              <a:spcAft>
+                <a:spcPts val="1000"/>
+              </a:spcAft>
+            </a:pPr>
+            <a:r>
+              <a:rPr sz="1700" b="0">
+                <a:solidFill>
+                  <a:srgbClr val="222222"/>
+                </a:solidFill>
+                <a:latin typeface="맑은 고딕"/>
+              </a:rPr>
+              <a:t>•  Primary — 목적지 `STATUS`, `LOG_ABNORMAL`, `DG_ERR`, `CUR_SEQ`</a:t>
+            </a:r>
+          </a:p>
+          <a:p>
+            <a:pPr algn="l">
+              <a:spcAft>
+                <a:spcPts val="1000"/>
+              </a:spcAft>
+            </a:pPr>
+            <a:r>
+              <a:rPr sz="1700" b="0">
+                <a:solidFill>
+                  <a:srgbClr val="222222"/>
+                </a:solidFill>
+                <a:latin typeface="맑은 고딕"/>
+              </a:rPr>
+              <a:t>•  Standby — `MRP0`, `SEQUENCE#`, `RECOVERY_MODE`</a:t>
+            </a:r>
+          </a:p>
+          <a:p>
+            <a:pPr algn="l">
+              <a:spcAft>
+                <a:spcPts val="1000"/>
+              </a:spcAft>
+            </a:pPr>
+            <a:r>
+              <a:rPr sz="1700" b="0">
+                <a:solidFill>
+                  <a:srgbClr val="222222"/>
+                </a:solidFill>
+                <a:latin typeface="맑은 고딕"/>
+              </a:rPr>
+              <a:t>•  Standby — **`SRL_ACTIVE`**, `GAP_CNT`, `DG_ERR`</a:t>
+            </a:r>
+          </a:p>
+          <a:p>
+            <a:pPr algn="l">
+              <a:spcAft>
+                <a:spcPts val="1000"/>
+              </a:spcAft>
+            </a:pPr>
+            <a:r>
+              <a:rPr sz="1700" b="0">
+                <a:solidFill>
+                  <a:srgbClr val="222222"/>
+                </a:solidFill>
+                <a:latin typeface="맑은 고딕"/>
+              </a:rPr>
+              <a:t>•  실측 `DG_ERR` chicago **3**(실습 03 흔적) / boston **0**</a:t>
+            </a:r>
+          </a:p>
+        </p:txBody>
+      </p:sp>
+    </p:spTree>
+  </p:cSld>
+  <p:clrMapOvr>
+    <a:masterClrMapping/>
+  </p:clrMapOvr>
+</p:sld>
+</file>
+
+<file path=ppt/slides/slide41.xml><?xml version="1.0" encoding="utf-8"?>
+<p:sld xmlns:a="http://schemas.openxmlformats.org/drawingml/2006/main" xmlns:p="http://schemas.openxmlformats.org/presentationml/2006/main" xmlns:r="http://schemas.openxmlformats.org/officeDocument/2006/relationships">
+  <p:cSld>
+    <p:spTree>
+      <p:nvGrpSpPr>
+        <p:cNvPr id="1" name=""/>
+        <p:cNvGrpSpPr/>
+        <p:nvPr/>
+      </p:nvGrpSpPr>
+      <p:grpSpPr/>
+      <p:sp>
+        <p:nvSpPr>
+          <p:cNvPr id="2" name="Rectangle 1"/>
+          <p:cNvSpPr/>
+          <p:nvPr/>
+        </p:nvSpPr>
+        <p:spPr>
+          <a:xfrm>
+            <a:off x="0" y="0"/>
+            <a:ext cx="12191695" cy="1005840"/>
+          </a:xfrm>
+          <a:prstGeom prst="rect">
+            <a:avLst/>
+          </a:prstGeom>
+          <a:solidFill>
+            <a:srgbClr val="C0392B"/>
+          </a:solidFill>
+          <a:ln>
+            <a:noFill/>
+          </a:ln>
+          <a:effectLst/>
+        </p:spPr>
+        <p:style>
+          <a:lnRef idx="1">
+            <a:schemeClr val="accent1"/>
+          </a:lnRef>
+          <a:fillRef idx="3">
+            <a:schemeClr val="accent1"/>
+          </a:fillRef>
+          <a:effectRef idx="2">
+            <a:schemeClr val="accent1"/>
+          </a:effectRef>
+          <a:fontRef idx="minor">
+            <a:schemeClr val="lt1"/>
+          </a:fontRef>
+        </p:style>
+        <p:txBody>
+          <a:bodyPr rtlCol="0" anchor="ctr"/>
+          <a:lstStyle/>
+          <a:p>
+            <a:pPr algn="ctr"/>
+          </a:p>
+        </p:txBody>
+      </p:sp>
+      <p:sp>
+        <p:nvSpPr>
+          <p:cNvPr id="3" name="TextBox 2"/>
+          <p:cNvSpPr txBox="1"/>
+          <p:nvPr/>
+        </p:nvSpPr>
+        <p:spPr>
+          <a:xfrm>
+            <a:off x="548640" y="91440"/>
+            <a:ext cx="10972800" cy="777240"/>
+          </a:xfrm>
+          <a:prstGeom prst="rect">
+            <a:avLst/>
+          </a:prstGeom>
+          <a:noFill/>
+        </p:spPr>
+        <p:txBody>
+          <a:bodyPr wrap="square">
+            <a:spAutoFit/>
+          </a:bodyPr>
+          <a:lstStyle/>
+          <a:p>
+            <a:pPr algn="l">
+              <a:spcAft>
+                <a:spcPts val="600"/>
+              </a:spcAft>
+            </a:pPr>
+            <a:r>
+              <a:rPr sz="2600" b="1">
+                <a:solidFill>
+                  <a:srgbClr val="FFFFFF"/>
+                </a:solidFill>
+                <a:latin typeface="맑은 고딕"/>
+              </a:rPr>
+              <a:t>주 지표와 보조 지표</a:t>
+            </a:r>
+          </a:p>
+        </p:txBody>
+      </p:sp>
+      <p:sp>
+        <p:nvSpPr>
+          <p:cNvPr id="4" name="TextBox 3"/>
+          <p:cNvSpPr txBox="1"/>
+          <p:nvPr/>
+        </p:nvSpPr>
+        <p:spPr>
+          <a:xfrm>
+            <a:off x="640080" y="1078992"/>
+            <a:ext cx="10881360" cy="457200"/>
+          </a:xfrm>
+          <a:prstGeom prst="rect">
+            <a:avLst/>
+          </a:prstGeom>
+          <a:noFill/>
+        </p:spPr>
+        <p:txBody>
+          <a:bodyPr wrap="square">
+            <a:spAutoFit/>
+          </a:bodyPr>
+          <a:lstStyle/>
+          <a:p>
+            <a:pPr algn="l">
+              <a:spcAft>
+                <a:spcPts val="600"/>
+              </a:spcAft>
+            </a:pPr>
+            <a:r>
+              <a:rPr sz="1500" b="0">
+                <a:solidFill>
+                  <a:srgbClr val="5A6672"/>
+                </a:solidFill>
+                <a:latin typeface="맑은 고딕"/>
+              </a:rPr>
+              <a:t>지연을 믿지 않는다</a:t>
+            </a:r>
+          </a:p>
+        </p:txBody>
+      </p:sp>
+      <p:sp>
+        <p:nvSpPr>
+          <p:cNvPr id="5" name="TextBox 4"/>
+          <p:cNvSpPr txBox="1"/>
+          <p:nvPr/>
+        </p:nvSpPr>
+        <p:spPr>
+          <a:xfrm>
+            <a:off x="640080" y="1737360"/>
+            <a:ext cx="10881360" cy="4754880"/>
+          </a:xfrm>
+          <a:prstGeom prst="rect">
+            <a:avLst/>
+          </a:prstGeom>
+          <a:noFill/>
+        </p:spPr>
+        <p:txBody>
+          <a:bodyPr wrap="square">
+            <a:spAutoFit/>
+          </a:bodyPr>
+          <a:lstStyle/>
+          <a:p>
+            <a:pPr algn="l">
+              <a:spcAft>
+                <a:spcPts val="1000"/>
+              </a:spcAft>
+            </a:pPr>
+            <a:r>
+              <a:rPr sz="1700" b="0">
+                <a:solidFill>
+                  <a:srgbClr val="222222"/>
+                </a:solidFill>
+                <a:latin typeface="맑은 고딕"/>
+              </a:rPr>
+              <a:t>•  **주 지표** — `SRL_ACTIVE`=1, `MRP0` 존재, 두 `SEQUENCE#` 일치, `STATUS`=VALID</a:t>
+            </a:r>
+          </a:p>
+          <a:p>
+            <a:pPr algn="l">
+              <a:spcAft>
+                <a:spcPts val="1000"/>
+              </a:spcAft>
+            </a:pPr>
+            <a:r>
+              <a:rPr sz="1700" b="0">
+                <a:solidFill>
+                  <a:srgbClr val="222222"/>
+                </a:solidFill>
+                <a:latin typeface="맑은 고딕"/>
+              </a:rPr>
+              <a:t>•  **보조 지표** — `transport lag`, `apply lag`</a:t>
+            </a:r>
+          </a:p>
+          <a:p>
+            <a:pPr algn="l">
+              <a:spcAft>
+                <a:spcPts val="1000"/>
+              </a:spcAft>
+            </a:pPr>
+            <a:r>
+              <a:rPr sz="1700" b="0">
+                <a:solidFill>
+                  <a:srgbClr val="222222"/>
+                </a:solidFill>
+                <a:latin typeface="맑은 고딕"/>
+              </a:rPr>
+              <a:t>•  지연은 **두 번 모두 0** 이었다 (14장 속성, 15장 리스너)</a:t>
+            </a:r>
+          </a:p>
+          <a:p>
+            <a:pPr algn="l">
+              <a:spcAft>
+                <a:spcPts val="1000"/>
+              </a:spcAft>
+            </a:pPr>
+            <a:r>
+              <a:rPr sz="1700" b="0">
+                <a:solidFill>
+                  <a:srgbClr val="222222"/>
+                </a:solidFill>
+                <a:latin typeface="맑은 고딕"/>
+              </a:rPr>
+              <a:t>•  주 지표가 무너지면 **끊긴** 것, 보조만 나쁘면 **느린** 것</a:t>
+            </a:r>
+          </a:p>
+        </p:txBody>
+      </p:sp>
+    </p:spTree>
+  </p:cSld>
+  <p:clrMapOvr>
+    <a:masterClrMapping/>
+  </p:clrMapOvr>
+</p:sld>
+</file>
+
+<file path=ppt/slides/slide42.xml><?xml version="1.0" encoding="utf-8"?>
+<p:sld xmlns:a="http://schemas.openxmlformats.org/drawingml/2006/main" xmlns:p="http://schemas.openxmlformats.org/presentationml/2006/main" xmlns:r="http://schemas.openxmlformats.org/officeDocument/2006/relationships">
+  <p:cSld>
+    <p:spTree>
+      <p:nvGrpSpPr>
+        <p:cNvPr id="1" name=""/>
+        <p:cNvGrpSpPr/>
+        <p:nvPr/>
+      </p:nvGrpSpPr>
+      <p:grpSpPr/>
+      <p:sp>
+        <p:nvSpPr>
+          <p:cNvPr id="2" name="Rectangle 1"/>
+          <p:cNvSpPr/>
+          <p:nvPr/>
+        </p:nvSpPr>
+        <p:spPr>
+          <a:xfrm>
+            <a:off x="0" y="0"/>
+            <a:ext cx="12191695" cy="1005840"/>
+          </a:xfrm>
+          <a:prstGeom prst="rect">
+            <a:avLst/>
+          </a:prstGeom>
+          <a:solidFill>
+            <a:srgbClr val="C0392B"/>
+          </a:solidFill>
+          <a:ln>
+            <a:noFill/>
+          </a:ln>
+          <a:effectLst/>
+        </p:spPr>
+        <p:style>
+          <a:lnRef idx="1">
+            <a:schemeClr val="accent1"/>
+          </a:lnRef>
+          <a:fillRef idx="3">
+            <a:schemeClr val="accent1"/>
+          </a:fillRef>
+          <a:effectRef idx="2">
+            <a:schemeClr val="accent1"/>
+          </a:effectRef>
+          <a:fontRef idx="minor">
+            <a:schemeClr val="lt1"/>
+          </a:fontRef>
+        </p:style>
+        <p:txBody>
+          <a:bodyPr rtlCol="0" anchor="ctr"/>
+          <a:lstStyle/>
+          <a:p>
+            <a:pPr algn="ctr"/>
+          </a:p>
+        </p:txBody>
+      </p:sp>
+      <p:sp>
+        <p:nvSpPr>
+          <p:cNvPr id="3" name="TextBox 2"/>
+          <p:cNvSpPr txBox="1"/>
+          <p:nvPr/>
+        </p:nvSpPr>
+        <p:spPr>
+          <a:xfrm>
+            <a:off x="548640" y="91440"/>
+            <a:ext cx="10972800" cy="777240"/>
+          </a:xfrm>
+          <a:prstGeom prst="rect">
+            <a:avLst/>
+          </a:prstGeom>
+          <a:noFill/>
+        </p:spPr>
+        <p:txBody>
+          <a:bodyPr wrap="square">
+            <a:spAutoFit/>
+          </a:bodyPr>
+          <a:lstStyle/>
+          <a:p>
+            <a:pPr algn="l">
+              <a:spcAft>
+                <a:spcPts val="600"/>
+              </a:spcAft>
+            </a:pPr>
+            <a:r>
+              <a:rPr sz="2600" b="1">
+                <a:solidFill>
+                  <a:srgbClr val="FFFFFF"/>
+                </a:solidFill>
+                <a:latin typeface="맑은 고딕"/>
+              </a:rPr>
+              <a:t>판정 규칙</a:t>
+            </a:r>
+          </a:p>
+        </p:txBody>
+      </p:sp>
+      <p:sp>
+        <p:nvSpPr>
+          <p:cNvPr id="4" name="TextBox 3"/>
+          <p:cNvSpPr txBox="1"/>
+          <p:nvPr/>
+        </p:nvSpPr>
+        <p:spPr>
+          <a:xfrm>
+            <a:off x="640080" y="1078992"/>
+            <a:ext cx="10881360" cy="457200"/>
+          </a:xfrm>
+          <a:prstGeom prst="rect">
+            <a:avLst/>
+          </a:prstGeom>
+          <a:noFill/>
+        </p:spPr>
+        <p:txBody>
+          <a:bodyPr wrap="square">
+            <a:spAutoFit/>
+          </a:bodyPr>
+          <a:lstStyle/>
+          <a:p>
+            <a:pPr algn="l">
+              <a:spcAft>
+                <a:spcPts val="600"/>
+              </a:spcAft>
+            </a:pPr>
+            <a:r>
+              <a:rPr sz="1500" b="0">
+                <a:solidFill>
+                  <a:srgbClr val="5A6672"/>
+                </a:solidFill>
+                <a:latin typeface="맑은 고딕"/>
+              </a:rPr>
+              <a:t>네 단계</a:t>
+            </a:r>
+          </a:p>
+        </p:txBody>
+      </p:sp>
+      <p:sp>
+        <p:nvSpPr>
+          <p:cNvPr id="5" name="TextBox 4"/>
+          <p:cNvSpPr txBox="1"/>
+          <p:nvPr/>
+        </p:nvSpPr>
+        <p:spPr>
+          <a:xfrm>
+            <a:off x="640080" y="1737360"/>
+            <a:ext cx="10881360" cy="4754880"/>
+          </a:xfrm>
+          <a:prstGeom prst="rect">
+            <a:avLst/>
+          </a:prstGeom>
+          <a:noFill/>
+        </p:spPr>
+        <p:txBody>
+          <a:bodyPr wrap="square">
+            <a:spAutoFit/>
+          </a:bodyPr>
+          <a:lstStyle/>
+          <a:p>
+            <a:pPr algn="l">
+              <a:spcAft>
+                <a:spcPts val="1000"/>
+              </a:spcAft>
+            </a:pPr>
+            <a:r>
+              <a:rPr sz="1700" b="0">
+                <a:solidFill>
+                  <a:srgbClr val="222222"/>
+                </a:solidFill>
+                <a:latin typeface="맑은 고딕"/>
+              </a:rPr>
+              <a:t>•  **정상** — 모든 기댓값과 일치</a:t>
+            </a:r>
+          </a:p>
+          <a:p>
+            <a:pPr algn="l">
+              <a:spcAft>
+                <a:spcPts val="1000"/>
+              </a:spcAft>
+            </a:pPr>
+            <a:r>
+              <a:rPr sz="1700" b="0">
+                <a:solidFill>
+                  <a:srgbClr val="222222"/>
+                </a:solidFill>
+                <a:latin typeface="맑은 고딕"/>
+              </a:rPr>
+              <a:t>•  **주의** — 지연이 임계값 초과 (`SRL_ACTIVE=1` 인 상태)</a:t>
+            </a:r>
+          </a:p>
+          <a:p>
+            <a:pPr algn="l">
+              <a:spcAft>
+                <a:spcPts val="1000"/>
+              </a:spcAft>
+            </a:pPr>
+            <a:r>
+              <a:rPr sz="1700" b="0">
+                <a:solidFill>
+                  <a:srgbClr val="222222"/>
+                </a:solidFill>
+                <a:latin typeface="맑은 고딕"/>
+              </a:rPr>
+              <a:t>•  **경고** — `DG_ERR&gt;0` 또는 `SEQUENCE#` 차이 2 이상</a:t>
+            </a:r>
+          </a:p>
+          <a:p>
+            <a:pPr algn="l">
+              <a:spcAft>
+                <a:spcPts val="1000"/>
+              </a:spcAft>
+            </a:pPr>
+            <a:r>
+              <a:rPr sz="1700" b="0">
+                <a:solidFill>
+                  <a:srgbClr val="222222"/>
+                </a:solidFill>
+                <a:latin typeface="맑은 고딕"/>
+              </a:rPr>
+              <a:t>•  **심각** — `SRL_ACTIVE=0` / `MRP0` 없음 / `STATUS='ERROR'`</a:t>
+            </a:r>
+          </a:p>
+        </p:txBody>
+      </p:sp>
+    </p:spTree>
+  </p:cSld>
+  <p:clrMapOvr>
+    <a:masterClrMapping/>
+  </p:clrMapOvr>
+</p:sld>
+</file>
+
+<file path=ppt/slides/slide43.xml><?xml version="1.0" encoding="utf-8"?>
+<p:sld xmlns:a="http://schemas.openxmlformats.org/drawingml/2006/main" xmlns:p="http://schemas.openxmlformats.org/presentationml/2006/main" xmlns:r="http://schemas.openxmlformats.org/officeDocument/2006/relationships">
+  <p:cSld>
+    <p:spTree>
+      <p:nvGrpSpPr>
+        <p:cNvPr id="1" name=""/>
+        <p:cNvGrpSpPr/>
+        <p:nvPr/>
+      </p:nvGrpSpPr>
+      <p:grpSpPr/>
+      <p:sp>
+        <p:nvSpPr>
+          <p:cNvPr id="2" name="Rectangle 1"/>
+          <p:cNvSpPr/>
+          <p:nvPr/>
+        </p:nvSpPr>
+        <p:spPr>
+          <a:xfrm>
+            <a:off x="0" y="0"/>
+            <a:ext cx="12191695" cy="1005840"/>
+          </a:xfrm>
+          <a:prstGeom prst="rect">
+            <a:avLst/>
+          </a:prstGeom>
+          <a:solidFill>
+            <a:srgbClr val="C0392B"/>
+          </a:solidFill>
+          <a:ln>
+            <a:noFill/>
+          </a:ln>
+          <a:effectLst/>
+        </p:spPr>
+        <p:style>
+          <a:lnRef idx="1">
+            <a:schemeClr val="accent1"/>
+          </a:lnRef>
+          <a:fillRef idx="3">
+            <a:schemeClr val="accent1"/>
+          </a:fillRef>
+          <a:effectRef idx="2">
+            <a:schemeClr val="accent1"/>
+          </a:effectRef>
+          <a:fontRef idx="minor">
+            <a:schemeClr val="lt1"/>
+          </a:fontRef>
+        </p:style>
+        <p:txBody>
+          <a:bodyPr rtlCol="0" anchor="ctr"/>
+          <a:lstStyle/>
+          <a:p>
+            <a:pPr algn="ctr"/>
+          </a:p>
+        </p:txBody>
+      </p:sp>
+      <p:sp>
+        <p:nvSpPr>
+          <p:cNvPr id="3" name="TextBox 2"/>
+          <p:cNvSpPr txBox="1"/>
+          <p:nvPr/>
+        </p:nvSpPr>
+        <p:spPr>
+          <a:xfrm>
+            <a:off x="548640" y="91440"/>
+            <a:ext cx="10972800" cy="777240"/>
+          </a:xfrm>
+          <a:prstGeom prst="rect">
+            <a:avLst/>
+          </a:prstGeom>
+          <a:noFill/>
+        </p:spPr>
+        <p:txBody>
+          <a:bodyPr wrap="square">
+            <a:spAutoFit/>
+          </a:bodyPr>
+          <a:lstStyle/>
+          <a:p>
+            <a:pPr algn="l">
+              <a:spcAft>
+                <a:spcPts val="600"/>
+              </a:spcAft>
+            </a:pPr>
+            <a:r>
+              <a:rPr sz="2600" b="1">
+                <a:solidFill>
+                  <a:srgbClr val="FFFFFF"/>
+                </a:solidFill>
+                <a:latin typeface="맑은 고딕"/>
+              </a:rPr>
+              <a:t>요약</a:t>
+            </a:r>
+          </a:p>
+        </p:txBody>
+      </p:sp>
+      <p:sp>
+        <p:nvSpPr>
+          <p:cNvPr id="4" name="TextBox 3"/>
+          <p:cNvSpPr txBox="1"/>
+          <p:nvPr/>
+        </p:nvSpPr>
+        <p:spPr>
+          <a:xfrm>
+            <a:off x="640080" y="1371600"/>
+            <a:ext cx="10881360" cy="5120640"/>
+          </a:xfrm>
+          <a:prstGeom prst="rect">
+            <a:avLst/>
+          </a:prstGeom>
+          <a:noFill/>
+        </p:spPr>
+        <p:txBody>
+          <a:bodyPr wrap="square">
+            <a:spAutoFit/>
+          </a:bodyPr>
+          <a:lstStyle/>
+          <a:p>
+            <a:pPr algn="l">
+              <a:spcAft>
+                <a:spcPts val="1000"/>
               </a:spcAft>
             </a:pPr>
             <a:r>
               <a:rPr sz="1600" b="0">
                 <a:solidFill>
+                  <a:srgbClr val="222222"/>
+                </a:solidFill>
+                <a:latin typeface="맑은 고딕"/>
+              </a:rPr>
+              <a:t>•  Standby 의 온라인 리두는 `SEQUENCE#`가 0, Primary 의 SRL 은 전부 `UNASSIGNED`</a:t>
+            </a:r>
+          </a:p>
+          <a:p>
+            <a:pPr algn="l">
+              <a:spcAft>
+                <a:spcPts val="1000"/>
+              </a:spcAft>
+            </a:pPr>
+            <a:r>
+              <a:rPr sz="1600" b="0">
+                <a:solidFill>
+                  <a:srgbClr val="222222"/>
+                </a:solidFill>
+                <a:latin typeface="맑은 고딕"/>
+              </a:rPr>
+              <a:t>•  SRL 은 **`ACTIVE` 가 정확히 하나**이고 시퀀스가 Primary 와 같아야 한다</a:t>
+            </a:r>
+          </a:p>
+          <a:p>
+            <a:pPr algn="l">
+              <a:spcAft>
+                <a:spcPts val="1000"/>
+              </a:spcAft>
+            </a:pPr>
+            <a:r>
+              <a:rPr sz="1600" b="0">
+                <a:solidFill>
+                  <a:srgbClr val="222222"/>
+                </a:solidFill>
+                <a:latin typeface="맑은 고딕"/>
+              </a:rPr>
+              <a:t>•  `V$ARCHIVE_DEST` 는 설정, `_STATUS` 는 지금 상태</a:t>
+            </a:r>
+          </a:p>
+          <a:p>
+            <a:pPr algn="l">
+              <a:spcAft>
+                <a:spcPts val="1000"/>
+              </a:spcAft>
+            </a:pPr>
+            <a:r>
+              <a:rPr sz="1600" b="0">
+                <a:solidFill>
+                  <a:srgbClr val="222222"/>
+                </a:solidFill>
+                <a:latin typeface="맑은 고딕"/>
+              </a:rPr>
+              <a:t>•  `V$ARCHIVED_LOG` 의 `APPLIED` 는 **`dest_id=2`만** 의미가 있다</a:t>
+            </a:r>
+          </a:p>
+          <a:p>
+            <a:pPr algn="l">
+              <a:spcAft>
+                <a:spcPts val="1000"/>
+              </a:spcAft>
+            </a:pPr>
+            <a:r>
+              <a:rPr sz="1600" b="0">
+                <a:solidFill>
+                  <a:srgbClr val="222222"/>
+                </a:solidFill>
+                <a:latin typeface="맑은 고딕"/>
+              </a:rPr>
+              <a:t>•  `APPLIED_SEQ#`=0 은 정상 — 실시간 적용은 SRL 에서 읽는다</a:t>
+            </a:r>
+          </a:p>
+          <a:p>
+            <a:pPr algn="l">
+              <a:spcAft>
+                <a:spcPts val="1000"/>
+              </a:spcAft>
+            </a:pPr>
+            <a:r>
+              <a:rPr sz="1600" b="0">
+                <a:solidFill>
+                  <a:srgbClr val="222222"/>
+                </a:solidFill>
+                <a:latin typeface="맑은 고딕"/>
+              </a:rPr>
+              <a:t>•  리스너를 내리면 `ERROR` / `INACTIVE` / **`ORA-12541`**</a:t>
+            </a:r>
+          </a:p>
+          <a:p>
+            <a:pPr algn="l">
+              <a:spcAft>
+                <a:spcPts val="1000"/>
+              </a:spcAft>
+            </a:pPr>
+            <a:r>
+              <a:rPr sz="1600" b="0">
+                <a:solidFill>
+                  <a:srgbClr val="222222"/>
+                </a:solidFill>
+                <a:latin typeface="맑은 고딕"/>
+              </a:rPr>
+              <a:t>•  그때도 **두 지연은 0** — 세 번째로 확인</a:t>
+            </a:r>
+          </a:p>
+          <a:p>
+            <a:pPr algn="l">
+              <a:spcAft>
+                <a:spcPts val="1000"/>
+              </a:spcAft>
+            </a:pPr>
+            <a:r>
+              <a:rPr sz="1600" b="0">
+                <a:solidFill>
+                  <a:srgbClr val="222222"/>
+                </a:solidFill>
+                <a:latin typeface="맑은 고딕"/>
+              </a:rPr>
+              <a:t>•  `ENABLE`+`ERROR`=장애, `RESET`=Broker, `DEFER`=사람</a:t>
+            </a:r>
+          </a:p>
+          <a:p>
+            <a:pPr algn="l">
+              <a:spcAft>
+                <a:spcPts val="1000"/>
+              </a:spcAft>
+            </a:pPr>
+            <a:r>
+              <a:rPr sz="1600" b="0">
+                <a:solidFill>
+                  <a:srgbClr val="222222"/>
+                </a:solidFill>
+                <a:latin typeface="맑은 고딕"/>
+              </a:rPr>
+              <a:t>•  판정 기준은 `SEVERITY` 가 아니라 **`ERROR_CODE`**</a:t>
+            </a:r>
+          </a:p>
+          <a:p>
+            <a:pPr algn="l">
+              <a:spcAft>
+                <a:spcPts val="1000"/>
+              </a:spcAft>
+            </a:pPr>
+            <a:r>
+              <a:rPr sz="1600" b="0">
+                <a:solidFill>
+                  <a:srgbClr val="222222"/>
+                </a:solidFill>
+                <a:latin typeface="맑은 고딕"/>
+              </a:rPr>
+              <a:t>•  복구까지 **약 4~5분** (`ReopenSecs` 300)</a:t>
+            </a:r>
+          </a:p>
+          <a:p>
+            <a:pPr algn="l">
+              <a:spcAft>
+                <a:spcPts val="1000"/>
+              </a:spcAft>
+            </a:pPr>
+            <a:r>
+              <a:rPr sz="1600" b="0">
+                <a:solidFill>
+                  <a:srgbClr val="222222"/>
+                </a:solidFill>
+                <a:latin typeface="맑은 고딕"/>
+              </a:rPr>
+              <a:t>•  조치 직후 Broker 가 `ERROR` 인 것은 **판정 시차**</a:t>
+            </a:r>
+          </a:p>
+          <a:p>
+            <a:pPr algn="l">
+              <a:spcAft>
+                <a:spcPts val="1000"/>
+              </a:spcAft>
+            </a:pPr>
+            <a:r>
+              <a:rPr sz="1600" b="0">
+                <a:solidFill>
+                  <a:srgbClr val="222222"/>
+                </a:solidFill>
+                <a:latin typeface="맑은 고딕"/>
+              </a:rPr>
+              <a:t>•  `LOG_ARCHIVE_TRACE` 는 비트마스크, 잘못된 값은 **ORA-02017**</a:t>
+            </a:r>
+          </a:p>
+          <a:p>
+            <a:pPr algn="l">
+              <a:spcAft>
+                <a:spcPts val="1000"/>
+              </a:spcAft>
+            </a:pPr>
+            <a:r>
+              <a:rPr sz="1600" b="0">
+                <a:solidFill>
+                  <a:srgbClr val="222222"/>
+                </a:solidFill>
+                <a:latin typeface="맑은 고딕"/>
+              </a:rPr>
+              <a:t>•  점검표의 핵심은 **`SRL_ACTIVE`**, 지연은 보조 지표</a:t>
+            </a:r>
+          </a:p>
+          <a:p>
+            <a:pPr algn="l">
+              <a:spcAft>
+                <a:spcPts val="1000"/>
+              </a:spcAft>
+            </a:pPr>
+            <a:r>
+              <a:rPr sz="1600" b="0">
+                <a:solidFill>
+                  <a:srgbClr val="222222"/>
+                </a:solidFill>
+                <a:latin typeface="맑은 고딕"/>
+              </a:rPr>
+              <a:t>•  Logical 이면 `MRP0` 도 `V$DATAGUARD_STATS` 도 없다</a:t>
+            </a:r>
+          </a:p>
+          <a:p>
+            <a:pPr algn="l">
+              <a:spcAft>
+                <a:spcPts val="1000"/>
+              </a:spcAft>
+            </a:pPr>
+            <a:r>
+              <a:rPr sz="1600" b="0">
+                <a:solidFill>
+                  <a:srgbClr val="222222"/>
+                </a:solidFill>
+                <a:latin typeface="맑은 고딕"/>
+              </a:rPr>
+              <a:t>•  `V$LOGSTDBY_TRANSACTION` 은 전부 **`PRIMARY_`** 접두어</a:t>
+            </a:r>
+          </a:p>
+        </p:txBody>
+      </p:sp>
+    </p:spTree>
+  </p:cSld>
+  <p:clrMapOvr>
+    <a:masterClrMapping/>
+  </p:clrMapOvr>
+</p:sld>
+</file>
+
+<file path=ppt/slides/slide44.xml><?xml version="1.0" encoding="utf-8"?>
+<p:sld xmlns:a="http://schemas.openxmlformats.org/drawingml/2006/main" xmlns:p="http://schemas.openxmlformats.org/presentationml/2006/main" xmlns:r="http://schemas.openxmlformats.org/officeDocument/2006/relationships">
+  <p:cSld>
+    <p:spTree>
+      <p:nvGrpSpPr>
+        <p:cNvPr id="1" name=""/>
+        <p:cNvGrpSpPr/>
+        <p:nvPr/>
+      </p:nvGrpSpPr>
+      <p:grpSpPr/>
+      <p:sp>
+        <p:nvSpPr>
+          <p:cNvPr id="2" name="Rectangle 1"/>
+          <p:cNvSpPr/>
+          <p:nvPr/>
+        </p:nvSpPr>
+        <p:spPr>
+          <a:xfrm>
+            <a:off x="0" y="0"/>
+            <a:ext cx="12191695" cy="1005840"/>
+          </a:xfrm>
+          <a:prstGeom prst="rect">
+            <a:avLst/>
+          </a:prstGeom>
+          <a:solidFill>
+            <a:srgbClr val="C0392B"/>
+          </a:solidFill>
+          <a:ln>
+            <a:noFill/>
+          </a:ln>
+          <a:effectLst/>
+        </p:spPr>
+        <p:style>
+          <a:lnRef idx="1">
+            <a:schemeClr val="accent1"/>
+          </a:lnRef>
+          <a:fillRef idx="3">
+            <a:schemeClr val="accent1"/>
+          </a:fillRef>
+          <a:effectRef idx="2">
+            <a:schemeClr val="accent1"/>
+          </a:effectRef>
+          <a:fontRef idx="minor">
+            <a:schemeClr val="lt1"/>
+          </a:fontRef>
+        </p:style>
+        <p:txBody>
+          <a:bodyPr rtlCol="0" anchor="ctr"/>
+          <a:lstStyle/>
+          <a:p>
+            <a:pPr algn="ctr"/>
+          </a:p>
+        </p:txBody>
+      </p:sp>
+      <p:sp>
+        <p:nvSpPr>
+          <p:cNvPr id="3" name="TextBox 2"/>
+          <p:cNvSpPr txBox="1"/>
+          <p:nvPr/>
+        </p:nvSpPr>
+        <p:spPr>
+          <a:xfrm>
+            <a:off x="548640" y="91440"/>
+            <a:ext cx="10972800" cy="777240"/>
+          </a:xfrm>
+          <a:prstGeom prst="rect">
+            <a:avLst/>
+          </a:prstGeom>
+          <a:noFill/>
+        </p:spPr>
+        <p:txBody>
+          <a:bodyPr wrap="square">
+            <a:spAutoFit/>
+          </a:bodyPr>
+          <a:lstStyle/>
+          <a:p>
+            <a:pPr algn="l">
+              <a:spcAft>
+                <a:spcPts val="600"/>
+              </a:spcAft>
+            </a:pPr>
+            <a:r>
+              <a:rPr sz="2600" b="1">
+                <a:solidFill>
                   <a:srgbClr val="FFFFFF"/>
                 </a:solidFill>
                 <a:latin typeface="맑은 고딕"/>
               </a:rPr>
-              <a:t>•  어디에 붙었는지 확인하기</a:t>
+              <a:t>다음 장 예고</a:t>
+            </a:r>
+          </a:p>
+        </p:txBody>
+      </p:sp>
+      <p:sp>
+        <p:nvSpPr>
+          <p:cNvPr id="4" name="TextBox 3"/>
+          <p:cNvSpPr txBox="1"/>
+          <p:nvPr/>
+        </p:nvSpPr>
+        <p:spPr>
+          <a:xfrm>
+            <a:off x="640080" y="1371600"/>
+            <a:ext cx="10881360" cy="5120640"/>
+          </a:xfrm>
+          <a:prstGeom prst="rect">
+            <a:avLst/>
+          </a:prstGeom>
+          <a:noFill/>
+        </p:spPr>
+        <p:txBody>
+          <a:bodyPr wrap="square">
+            <a:spAutoFit/>
+          </a:bodyPr>
+          <a:lstStyle/>
+          <a:p>
+            <a:pPr algn="l">
+              <a:spcAft>
+                <a:spcPts val="1000"/>
+              </a:spcAft>
+            </a:pPr>
+            <a:r>
+              <a:rPr sz="1600" b="0">
+                <a:solidFill>
+                  <a:srgbClr val="222222"/>
+                </a:solidFill>
+                <a:latin typeface="맑은 고딕"/>
+              </a:rPr>
+              <a:t>•  16장 — 역할 전환과 이후 운영</a:t>
+            </a:r>
+          </a:p>
+          <a:p>
+            <a:pPr algn="l">
+              <a:spcAft>
+                <a:spcPts val="1000"/>
+              </a:spcAft>
+            </a:pPr>
+            <a:r>
+              <a:rPr sz="1600" b="0">
+                <a:solidFill>
+                  <a:srgbClr val="222222"/>
+                </a:solidFill>
+                <a:latin typeface="맑은 고딕"/>
+              </a:rPr>
+              <a:t>•  Switchover 를 DGMGRL 과 SQL 두 방식으로</a:t>
+            </a:r>
+          </a:p>
+          <a:p>
+            <a:pPr algn="l">
+              <a:spcAft>
+                <a:spcPts val="1000"/>
+              </a:spcAft>
+            </a:pPr>
+            <a:r>
+              <a:rPr sz="1600" b="0">
+                <a:solidFill>
+                  <a:srgbClr val="222222"/>
+                </a:solidFill>
+                <a:latin typeface="맑은 고딕"/>
+              </a:rPr>
+              <a:t>•  조건 미충족 상태를 만들어 거부를 재현</a:t>
+            </a:r>
+          </a:p>
+          <a:p>
+            <a:pPr algn="l">
+              <a:spcAft>
+                <a:spcPts val="1000"/>
+              </a:spcAft>
+            </a:pPr>
+            <a:r>
+              <a:rPr sz="1600" b="0">
+                <a:solidFill>
+                  <a:srgbClr val="222222"/>
+                </a:solidFill>
+                <a:latin typeface="맑은 고딕"/>
+              </a:rPr>
+              <a:t>•  Failover 와 Reinstate, 그리고 Standby 백업</a:t>
             </a:r>
           </a:p>
         </p:txBody>
@@ -13310,7 +14999,7 @@
                 </a:solidFill>
                 <a:latin typeface="맑은 고딕"/>
               </a:rPr>
-              <a:t>ADG 의 표식</a:t>
+              <a:t>요약의 한계</a:t>
             </a:r>
           </a:p>
         </p:txBody>
@@ -13349,7 +15038,7 @@
                 </a:solidFill>
                 <a:latin typeface="맑은 고딕"/>
               </a:rPr>
-              <a:t>두 값을 함께 본다</a:t>
+              <a:t>14장에서 본 것</a:t>
             </a:r>
           </a:p>
         </p:txBody>
@@ -13388,7 +15077,7 @@
                 </a:solidFill>
                 <a:latin typeface="맑은 고딕"/>
               </a:rPr>
-              <a:t>•  `OPEN_MODE` = **READ ONLY WITH APPLY**</a:t>
+              <a:t>•  `LogShipping=OFF` 인데 `SHOW CONFIGURATION` 은 **SUCCESS**</a:t>
             </a:r>
           </a:p>
           <a:p>
@@ -13404,7 +15093,7 @@
                 </a:solidFill>
                 <a:latin typeface="맑은 고딕"/>
               </a:rPr>
-              <a:t>•  `RECOVERY_MODE` = **MANAGED REAL TIME APPLY**</a:t>
+              <a:t>•  두 지연도 **0**</a:t>
             </a:r>
           </a:p>
           <a:p>
@@ -13420,7 +15109,7 @@
                 </a:solidFill>
                 <a:latin typeface="맑은 고딕"/>
               </a:rPr>
-              <a:t>•  두 번째는 목적지 `STATUS` 가 VALID 일 때만 의미가 있다</a:t>
+              <a:t>•  `VALIDATE` 만 `Ready for Switchover: No`</a:t>
             </a:r>
           </a:p>
           <a:p>
@@ -13436,7 +15125,7 @@
                 </a:solidFill>
                 <a:latin typeface="맑은 고딕"/>
               </a:rPr>
-              <a:t>•  이 둘이 함께 확인되면 조회와 적용이 동시에 이뤄지고 있다</a:t>
+              <a:t>•  **어떤 위험은 요약에 나타나지 않는다**</a:t>
             </a:r>
           </a:p>
         </p:txBody>
@@ -13537,7 +15226,7 @@
                 </a:solidFill>
                 <a:latin typeface="맑은 고딕"/>
               </a:rPr>
-              <a:t>사용 기록은 CDB_ 뷰에</a:t>
+              <a:t>세 가지 이유</a:t>
             </a:r>
           </a:p>
         </p:txBody>
@@ -13576,7 +15265,7 @@
                 </a:solidFill>
                 <a:latin typeface="맑은 고딕"/>
               </a:rPr>
-              <a:t>그리고 0이어도 쓴 것이다</a:t>
+              <a:t>아래층이 필요한 까닭</a:t>
             </a:r>
           </a:p>
         </p:txBody>
@@ -13615,7 +15304,7 @@
                 </a:solidFill>
                 <a:latin typeface="맑은 고딕"/>
               </a:rPr>
-              <a:t>•  `DBA_FEATURE_USAGE_STATISTICS` → **no rows selected**</a:t>
+              <a:t>•  **① Broker 를 쓸 수 없는 환경** — JDBC 전용 감시, 운영 정책</a:t>
             </a:r>
           </a:p>
           <a:p>
@@ -13631,7 +15320,7 @@
                 </a:solidFill>
                 <a:latin typeface="맑은 고딕"/>
               </a:rPr>
-              <a:t>•  `CDB_FEATURE_USAGE_STATISTICS` CON_ID 3 에 두 항목</a:t>
+              <a:t>•  **② 왜 그 값이 나왔는지** 요약은 말해 주지 않는다</a:t>
             </a:r>
           </a:p>
           <a:p>
@@ -13647,7 +15336,7 @@
                 </a:solidFill>
                 <a:latin typeface="맑은 고딕"/>
               </a:rPr>
-              <a:t>•  그런데 `DETECTED_USAGES` 가 **0**</a:t>
+              <a:t>•  **③ 장애의 상세는 아래층에 있다**</a:t>
             </a:r>
           </a:p>
           <a:p>
@@ -13663,7 +15352,7 @@
                 </a:solidFill>
                 <a:latin typeface="맑은 고딕"/>
               </a:rPr>
-              <a:t>•  라이선스 판단은 `OPEN_MODE` 로 하는 편이 정확하다</a:t>
+              <a:t>•  Broker 는 `ORA-16857`, V$ 뷰는 **`ORA-12541`**</a:t>
             </a:r>
           </a:p>
         </p:txBody>
@@ -13695,7 +15384,7 @@
         <p:spPr>
           <a:xfrm>
             <a:off x="0" y="0"/>
-            <a:ext cx="12191695" cy="1005840"/>
+            <a:ext cx="12191695" cy="6858000"/>
           </a:xfrm>
           <a:prstGeom prst="rect">
             <a:avLst/>
@@ -13738,8 +15427,8 @@
         </p:nvSpPr>
         <p:spPr>
           <a:xfrm>
-            <a:off x="548640" y="91440"/>
-            <a:ext cx="10972800" cy="777240"/>
+            <a:off x="822960" y="2011680"/>
+            <a:ext cx="10515600" cy="1097280"/>
           </a:xfrm>
           <a:prstGeom prst="rect">
             <a:avLst/>
@@ -13758,13 +15447,13 @@
               </a:spcAft>
             </a:pPr>
             <a:r>
-              <a:rPr sz="2600" b="1">
+              <a:rPr sz="4000" b="1">
                 <a:solidFill>
                   <a:srgbClr val="FFFFFF"/>
                 </a:solidFill>
                 <a:latin typeface="맑은 고딕"/>
               </a:rPr>
-              <a:t>세션이 어디에 붙었는지</a:t>
+              <a:t>15.2</a:t>
             </a:r>
           </a:p>
         </p:txBody>
@@ -13777,8 +15466,8 @@
         </p:nvSpPr>
         <p:spPr>
           <a:xfrm>
-            <a:off x="640080" y="1078992"/>
-            <a:ext cx="10881360" cy="457200"/>
+            <a:off x="822960" y="3017520"/>
+            <a:ext cx="10515600" cy="914400"/>
           </a:xfrm>
           <a:prstGeom prst="rect">
             <a:avLst/>
@@ -13797,27 +15486,71 @@
               </a:spcAft>
             </a:pPr>
             <a:r>
-              <a:rPr sz="1500" b="0">
-                <a:solidFill>
-                  <a:srgbClr val="5A6672"/>
-                </a:solidFill>
-                <a:latin typeface="맑은 고딕"/>
-              </a:rPr>
-              <a:t>이름이 아니라 역할로</a:t>
-            </a:r>
-          </a:p>
-        </p:txBody>
-      </p:sp>
-      <p:sp>
-        <p:nvSpPr>
-          <p:cNvPr id="5" name="TextBox 4"/>
+              <a:rPr sz="2800" b="1">
+                <a:solidFill>
+                  <a:srgbClr val="FFFFFF"/>
+                </a:solidFill>
+                <a:latin typeface="맑은 고딕"/>
+              </a:rPr>
+              <a:t>로그 파일의 상태</a:t>
+            </a:r>
+          </a:p>
+        </p:txBody>
+      </p:sp>
+      <p:sp>
+        <p:nvSpPr>
+          <p:cNvPr id="5" name="Rectangle 4"/>
+          <p:cNvSpPr/>
+          <p:nvPr/>
+        </p:nvSpPr>
+        <p:spPr>
+          <a:xfrm>
+            <a:off x="822960" y="4114800"/>
+            <a:ext cx="5486400" cy="54864"/>
+          </a:xfrm>
+          <a:prstGeom prst="rect">
+            <a:avLst/>
+          </a:prstGeom>
+          <a:solidFill>
+            <a:srgbClr val="FFFFFF"/>
+          </a:solidFill>
+          <a:ln>
+            <a:noFill/>
+          </a:ln>
+          <a:effectLst/>
+        </p:spPr>
+        <p:style>
+          <a:lnRef idx="1">
+            <a:schemeClr val="accent1"/>
+          </a:lnRef>
+          <a:fillRef idx="3">
+            <a:schemeClr val="accent1"/>
+          </a:fillRef>
+          <a:effectRef idx="2">
+            <a:schemeClr val="accent1"/>
+          </a:effectRef>
+          <a:fontRef idx="minor">
+            <a:schemeClr val="lt1"/>
+          </a:fontRef>
+        </p:style>
+        <p:txBody>
+          <a:bodyPr rtlCol="0" anchor="ctr"/>
+          <a:lstStyle/>
+          <a:p>
+            <a:pPr algn="ctr"/>
+          </a:p>
+        </p:txBody>
+      </p:sp>
+      <p:sp>
+        <p:nvSpPr>
+          <p:cNvPr id="6" name="TextBox 5"/>
           <p:cNvSpPr txBox="1"/>
           <p:nvPr/>
         </p:nvSpPr>
         <p:spPr>
           <a:xfrm>
-            <a:off x="640080" y="1737360"/>
-            <a:ext cx="10881360" cy="4754880"/>
+            <a:off x="822960" y="4297680"/>
+            <a:ext cx="10058400" cy="2011680"/>
           </a:xfrm>
           <a:prstGeom prst="rect">
             <a:avLst/>
@@ -13832,65 +15565,33 @@
           <a:p>
             <a:pPr algn="l">
               <a:spcAft>
-                <a:spcPts val="1000"/>
-              </a:spcAft>
-            </a:pPr>
-            <a:r>
-              <a:rPr sz="1700" b="0">
-                <a:solidFill>
-                  <a:srgbClr val="222222"/>
-                </a:solidFill>
-                <a:latin typeface="맑은 고딕"/>
-              </a:rPr>
-              <a:t>•  `SYS_CONTEXT('userenv','db_unique_name')` → boston</a:t>
-            </a:r>
-          </a:p>
-          <a:p>
-            <a:pPr algn="l">
-              <a:spcAft>
-                <a:spcPts val="1000"/>
-              </a:spcAft>
-            </a:pPr>
-            <a:r>
-              <a:rPr sz="1700" b="0">
-                <a:solidFill>
-                  <a:srgbClr val="222222"/>
-                </a:solidFill>
-                <a:latin typeface="맑은 고딕"/>
-              </a:rPr>
-              <a:t>•  `SYS_CONTEXT('userenv','database_role')` → PHYSICAL STANDBY</a:t>
-            </a:r>
-          </a:p>
-          <a:p>
-            <a:pPr algn="l">
-              <a:spcAft>
-                <a:spcPts val="1000"/>
-              </a:spcAft>
-            </a:pPr>
-            <a:r>
-              <a:rPr sz="1700" b="0">
-                <a:solidFill>
-                  <a:srgbClr val="222222"/>
-                </a:solidFill>
-                <a:latin typeface="맑은 고딕"/>
-              </a:rPr>
-              <a:t>•  역할 전환 환경에서는 **역할로 판단**해야 한다</a:t>
-            </a:r>
-          </a:p>
-          <a:p>
-            <a:pPr algn="l">
-              <a:spcAft>
-                <a:spcPts val="1000"/>
-              </a:spcAft>
-            </a:pPr>
-            <a:r>
-              <a:rPr sz="1700" b="0">
-                <a:solidFill>
-                  <a:srgbClr val="222222"/>
-                </a:solidFill>
-                <a:latin typeface="맑은 고딕"/>
-              </a:rPr>
-              <a:t>•  Standby PDB 서비스는 PDB 가 열려 있어야 등록된다</a:t>
+                <a:spcPts val="800"/>
+              </a:spcAft>
+            </a:pPr>
+            <a:r>
+              <a:rPr sz="1600" b="0">
+                <a:solidFill>
+                  <a:srgbClr val="FFFFFF"/>
+                </a:solidFill>
+                <a:latin typeface="맑은 고딕"/>
+              </a:rPr>
+              <a:t>•  Primary 와 Standby 가 다르다</a:t>
+            </a:r>
+          </a:p>
+          <a:p>
+            <a:pPr algn="l">
+              <a:spcAft>
+                <a:spcPts val="800"/>
+              </a:spcAft>
+            </a:pPr>
+            <a:r>
+              <a:rPr sz="1600" b="0">
+                <a:solidFill>
+                  <a:srgbClr val="FFFFFF"/>
+                </a:solidFill>
+                <a:latin typeface="맑은 고딕"/>
+              </a:rPr>
+              <a:t>•  SRL 이 진짜 정보다</a:t>
             </a:r>
           </a:p>
         </p:txBody>
@@ -13922,7 +15623,7 @@
         <p:spPr>
           <a:xfrm>
             <a:off x="0" y="0"/>
-            <a:ext cx="12191695" cy="6858000"/>
+            <a:ext cx="12191695" cy="1005840"/>
           </a:xfrm>
           <a:prstGeom prst="rect">
             <a:avLst/>
@@ -13965,8 +15666,8 @@
         </p:nvSpPr>
         <p:spPr>
           <a:xfrm>
-            <a:off x="822960" y="2011680"/>
-            <a:ext cx="10515600" cy="1097280"/>
+            <a:off x="548640" y="91440"/>
+            <a:ext cx="10972800" cy="777240"/>
           </a:xfrm>
           <a:prstGeom prst="rect">
             <a:avLst/>
@@ -13985,13 +15686,13 @@
               </a:spcAft>
             </a:pPr>
             <a:r>
-              <a:rPr sz="4000" b="1">
+              <a:rPr sz="2600" b="1">
                 <a:solidFill>
                   <a:srgbClr val="FFFFFF"/>
                 </a:solidFill>
                 <a:latin typeface="맑은 고딕"/>
               </a:rPr>
-              <a:t>9.3</a:t>
+              <a:t>Primary 의 온라인 리두</a:t>
             </a:r>
           </a:p>
         </p:txBody>
@@ -14004,8 +15705,8 @@
         </p:nvSpPr>
         <p:spPr>
           <a:xfrm>
-            <a:off x="822960" y="3017520"/>
-            <a:ext cx="10515600" cy="914400"/>
+            <a:off x="640080" y="1078992"/>
+            <a:ext cx="10881360" cy="457200"/>
           </a:xfrm>
           <a:prstGeom prst="rect">
             <a:avLst/>
@@ -14024,71 +15725,27 @@
               </a:spcAft>
             </a:pPr>
             <a:r>
-              <a:rPr sz="2800" b="1">
-                <a:solidFill>
-                  <a:srgbClr val="FFFFFF"/>
-                </a:solidFill>
-                <a:latin typeface="맑은 고딕"/>
-              </a:rPr>
-              <a:t>실시간 조회의 일관성</a:t>
-            </a:r>
-          </a:p>
-        </p:txBody>
-      </p:sp>
-      <p:sp>
-        <p:nvSpPr>
-          <p:cNvPr id="5" name="Rectangle 4"/>
-          <p:cNvSpPr/>
-          <p:nvPr/>
-        </p:nvSpPr>
-        <p:spPr>
-          <a:xfrm>
-            <a:off x="822960" y="4114800"/>
-            <a:ext cx="5486400" cy="54864"/>
-          </a:xfrm>
-          <a:prstGeom prst="rect">
-            <a:avLst/>
-          </a:prstGeom>
-          <a:solidFill>
-            <a:srgbClr val="FFFFFF"/>
-          </a:solidFill>
-          <a:ln>
-            <a:noFill/>
-          </a:ln>
-          <a:effectLst/>
-        </p:spPr>
-        <p:style>
-          <a:lnRef idx="1">
-            <a:schemeClr val="accent1"/>
-          </a:lnRef>
-          <a:fillRef idx="3">
-            <a:schemeClr val="accent1"/>
-          </a:fillRef>
-          <a:effectRef idx="2">
-            <a:schemeClr val="accent1"/>
-          </a:effectRef>
-          <a:fontRef idx="minor">
-            <a:schemeClr val="lt1"/>
-          </a:fontRef>
-        </p:style>
-        <p:txBody>
-          <a:bodyPr rtlCol="0" anchor="ctr"/>
-          <a:lstStyle/>
-          <a:p>
-            <a:pPr algn="ctr"/>
-          </a:p>
-        </p:txBody>
-      </p:sp>
-      <p:sp>
-        <p:nvSpPr>
-          <p:cNvPr id="6" name="TextBox 5"/>
+              <a:rPr sz="1500" b="0">
+                <a:solidFill>
+                  <a:srgbClr val="5A6672"/>
+                </a:solidFill>
+                <a:latin typeface="맑은 고딕"/>
+              </a:rPr>
+              <a:t>기본 판정</a:t>
+            </a:r>
+          </a:p>
+        </p:txBody>
+      </p:sp>
+      <p:sp>
+        <p:nvSpPr>
+          <p:cNvPr id="5" name="TextBox 4"/>
           <p:cNvSpPr txBox="1"/>
           <p:nvPr/>
         </p:nvSpPr>
         <p:spPr>
           <a:xfrm>
-            <a:off x="822960" y="4297680"/>
-            <a:ext cx="10058400" cy="2011680"/>
+            <a:off x="640080" y="1737360"/>
+            <a:ext cx="10881360" cy="4754880"/>
           </a:xfrm>
           <a:prstGeom prst="rect">
             <a:avLst/>
@@ -14103,33 +15760,65 @@
           <a:p>
             <a:pPr algn="l">
               <a:spcAft>
-                <a:spcPts val="800"/>
-              </a:spcAft>
-            </a:pPr>
-            <a:r>
-              <a:rPr sz="1600" b="0">
-                <a:solidFill>
-                  <a:srgbClr val="FFFFFF"/>
-                </a:solidFill>
-                <a:latin typeface="맑은 고딕"/>
-              </a:rPr>
-              <a:t>•  커밋된 것만 보인다</a:t>
-            </a:r>
-          </a:p>
-          <a:p>
-            <a:pPr algn="l">
-              <a:spcAft>
-                <a:spcPts val="800"/>
-              </a:spcAft>
-            </a:pPr>
-            <a:r>
-              <a:rPr sz="1600" b="0">
-                <a:solidFill>
-                  <a:srgbClr val="FFFFFF"/>
-                </a:solidFill>
-                <a:latin typeface="맑은 고딕"/>
-              </a:rPr>
-              <a:t>•  측정의 함정</a:t>
+                <a:spcPts val="1000"/>
+              </a:spcAft>
+            </a:pPr>
+            <a:r>
+              <a:rPr sz="1700" b="0">
+                <a:solidFill>
+                  <a:srgbClr val="222222"/>
+                </a:solidFill>
+                <a:latin typeface="맑은 고딕"/>
+              </a:rPr>
+              <a:t>•  `CURRENT` 는 **정확히 하나** (실측 그룹 2, 시퀀스 74)</a:t>
+            </a:r>
+          </a:p>
+          <a:p>
+            <a:pPr algn="l">
+              <a:spcAft>
+                <a:spcPts val="1000"/>
+              </a:spcAft>
+            </a:pPr>
+            <a:r>
+              <a:rPr sz="1700" b="0">
+                <a:solidFill>
+                  <a:srgbClr val="222222"/>
+                </a:solidFill>
+                <a:latin typeface="맑은 고딕"/>
+              </a:rPr>
+              <a:t>•  그 그룹만 `ARCHIVED=NO` — **정상이다**</a:t>
+            </a:r>
+          </a:p>
+          <a:p>
+            <a:pPr algn="l">
+              <a:spcAft>
+                <a:spcPts val="1000"/>
+              </a:spcAft>
+            </a:pPr>
+            <a:r>
+              <a:rPr sz="1700" b="0">
+                <a:solidFill>
+                  <a:srgbClr val="222222"/>
+                </a:solidFill>
+                <a:latin typeface="맑은 고딕"/>
+              </a:rPr>
+              <a:t>•  `ACTIVE` + `ARCHIVED=NO` 가 쌓이면 아카이버가 밀린다</a:t>
+            </a:r>
+          </a:p>
+          <a:p>
+            <a:pPr algn="l">
+              <a:spcAft>
+                <a:spcPts val="1000"/>
+              </a:spcAft>
+            </a:pPr>
+            <a:r>
+              <a:rPr sz="1700" b="0">
+                <a:solidFill>
+                  <a:srgbClr val="222222"/>
+                </a:solidFill>
+                <a:latin typeface="맑은 고딕"/>
+              </a:rPr>
+              <a:t>•  `V$LOGFILE` 의 `STATUS` 는 **비어 있는 것이 정상**</a:t>
             </a:r>
           </a:p>
         </p:txBody>
@@ -14230,7 +15919,7 @@
                 </a:solidFill>
                 <a:latin typeface="맑은 고딕"/>
               </a:rPr>
-              <a:t>미커밋 데이터는 보이지 않는다</a:t>
+              <a:t>Standby 의 온라인 리두</a:t>
             </a:r>
           </a:p>
         </p:txBody>
@@ -14269,7 +15958,7 @@
                 </a:solidFill>
                 <a:latin typeface="맑은 고딕"/>
               </a:rPr>
-              <a:t>올바른 측정</a:t>
+              <a:t>쓰이지 않는다</a:t>
             </a:r>
           </a:p>
         </p:txBody>
@@ -14308,7 +15997,7 @@
                 </a:solidFill>
                 <a:latin typeface="맑은 고딕"/>
               </a:rPr>
-              <a:t>•  Primary 가 40초간 커밋하지 않는 상태를 유지</a:t>
+              <a:t>•  `SEQUENCE#` 가 **전부 0**</a:t>
             </a:r>
           </a:p>
           <a:p>
@@ -14324,7 +16013,7 @@
                 </a:solidFill>
                 <a:latin typeface="맑은 고딕"/>
               </a:rPr>
-              <a:t>•  그 사이 Standby 조회 → **커밋된 1건만** 보인다</a:t>
+              <a:t>•  리두는 Primary 가 만들고 Standby 는 받기만 한다</a:t>
             </a:r>
           </a:p>
           <a:p>
@@ -14340,7 +16029,7 @@
                 </a:solidFill>
                 <a:latin typeface="맑은 고딕"/>
               </a:rPr>
-              <a:t>•  롤백 후에도 결과가 같다</a:t>
+              <a:t>•  그러면 왜 있는가 — **역할이 바뀐 뒤에 쓰려고**</a:t>
             </a:r>
           </a:p>
           <a:p>
@@ -14356,7 +16045,7 @@
                 </a:solidFill>
                 <a:latin typeface="맑은 고딕"/>
               </a:rPr>
-              <a:t>•  리두와 함께 **UNDO 도 적용**되어 일관성이 유지된다</a:t>
+              <a:t>•  14장 `VERBOSE` 의 `Future` 구성이 계산한 대상</a:t>
             </a:r>
           </a:p>
         </p:txBody>

--- a/ADG/15장/15장_V뷰기반모니터링과문제해결.pptx
+++ b/ADG/15장/15장_V뷰기반모니터링과문제해결.pptx
@@ -49,6 +49,16 @@
     <p:sldId id="297" r:id="rId49"/>
     <p:sldId id="298" r:id="rId50"/>
     <p:sldId id="299" r:id="rId51"/>
+    <p:sldId id="300" r:id="rId52"/>
+    <p:sldId id="301" r:id="rId53"/>
+    <p:sldId id="302" r:id="rId54"/>
+    <p:sldId id="303" r:id="rId55"/>
+    <p:sldId id="304" r:id="rId56"/>
+    <p:sldId id="305" r:id="rId57"/>
+    <p:sldId id="306" r:id="rId58"/>
+    <p:sldId id="307" r:id="rId59"/>
+    <p:sldId id="308" r:id="rId60"/>
+    <p:sldId id="309" r:id="rId61"/>
   </p:sldIdLst>
   <p:sldSz cx="12191695" cy="6858000" type="screen4x3"/>
   <p:notesSz cx="6858000" cy="9144000"/>
@@ -545,7 +555,7 @@
           <a:lstStyle/>
           <a:p>
             <a:r>
-              <a:t>13·14장에서 Broker 는 편리한 도구였다. 한 줄로 구성 전체를 볼 수 있었다. 그런데 전송이 완전히 끊긴 상태에서 SUCCESS 가 나왔다. Intended State 라는 개념 때문이며 논리적으로는 맞는 판정이다. 그러나 감시의 목적에서 보면 그 화면만으로는 부족하다. 이 장은 요약되기 전의 원자료를 직접 읽는다. 새로운 뷰는 없고 4장부터 써 온 것들을 하나의 진단 체계로 묶는다.</a:t>
+              <a:t>Broker의 SHOW CONFIGURATION에 경고가 뜨면 많은 분들이 Broker 경고 번호로 검색부터 합니다. 그런데 그 번호는 대개 "Standby가 리두 소스와 오래 끊겨 있다" 같은 증상 설명입니다. 리스너가 내려갔는지, 비밀번호 파일이 어긋났는지는 Primary의 V$ARCHIVE_DEST ERROR 열에 ORA- 번호로 남아 있습니다. 또 하나, Broker 프로세스나 관측자가 멈추면 Broker 화면은 오래된 상태를 보여 줄 수 있습니다. 인스턴스가 떠 있는 한 V$ 뷰는 지금 값을 냅니다.</a:t>
             </a:r>
           </a:p>
         </p:txBody>
@@ -615,7 +625,7 @@
           <a:lstStyle/>
           <a:p>
             <a:r>
-              <a:t>값의 종류는 YES, WRONG VALID_TYPE, WRONG VALID_ROLE, INACTIVE, UNKNOWN 다섯이다. 막 바꾼 직후와 아예 쓰지 않는 목적지가 같은 값으로 보인다는 것이 함정이다. 감시에 쓸 실용적인 조건은 WHERE destination IS NOT NULL AND valid_now &lt;&gt; 'YES' 다. 쓰는 목적지 중 유효하지 않은 것만 걸러진다.</a:t>
+              <a:t>VALID_FOR 속성의 두 값이 VALID_TYPE과 VALID_ROLE로 보이고, VALID_NOW가 지금 그 설정이 쓰이는지를 판정합니다. WRONG VALID_ROLE은 오류처럼 보이지만 역할 전환에 대비해 미리 넣어 둔 목적지라면 당연한 값입니다. 반면 WRONG VALID_TYPE은 대개 설정 누락이고, STANDBY_LOGFILES용 목적지를 정의했는데 SRL이 없는 경우가 전형적입니다. Standby에서 원격 목적지가 WRONG VALID_ROLE로, 로컬 목적지가 YES로 보이면 정상입니다.</a:t>
             </a:r>
           </a:p>
         </p:txBody>
@@ -685,7 +695,7 @@
           <a:lstStyle/>
           <a:p>
             <a:r>
-              <a:t>RFS 는 클라이언트별로 여럿 뜬다. LGWR 는 실시간 리두를, Archival 은 아카이브 파일을 받는다. UNKNOWN 은 아직 배정되지 않은 예비다. MRP0 는 SRL 을 읽어 적용하고 ARCH 는 Standby 에서 SRL 을 아카이브한다. DGRD 는 13장에서 Broker 를 켠 뒤에 생긴 통신용 프로세스다. 블록 단위 비교는 apply lag 보다 정밀한 지표다.</a:t>
+              <a:t>이름이 V$ARCHIVE_DEST와 비슷해서 같은 뷰의 다른 버전쯤으로 여기기 쉬운데, 관점이 다릅니다. 앞의 뷰가 내 설정과 내 전송을 보여 준다면 이 뷰는 목적지에 있는 데이터베이스의 상태를 보여 줍니다. RECOVERY_MODE가 IDLE이면 Standby에 접속하지 않고도 적용 중지를 알 수 있습니다. APPLIED_SEQ#가 Primary의 현재 순번보다 한두 개 뒤인 것은 정상입니다. 실시간 적용 중인 현재 로그는 아직 아카이브되지 않았기 때문입니다.</a:t>
             </a:r>
           </a:p>
         </p:txBody>
@@ -755,7 +765,7 @@
           <a:lstStyle/>
           <a:p>
             <a:r>
-              <a:t>조건을 빼면 항상 절반이 NO 로 나오고, 이것을 보고 절반이 적용되지 않았다고 읽는 것이 흔한 오해다. 조건을 넣으면 실측에서 70~73번 모두 YES 였다. 부수적으로 같은 시퀀스의 로컬·원격 COMPLETION_TIME 차이도 읽는다. 70번이 로컬 19:55:38, 원격 19:56:30 으로 약 52초였다. 그것이 전송에 걸린 시간이며 평소 값을 알아 두면 느려졌을 때 알아볼 수 있다.</a:t>
+              <a:t>실시간 전송이 흐르고 있다면 쓰레드마다 ACTIVE인 SRL이 하나 있고, 그 SEQUENCE#가 Primary의 현재 순번과 같습니다. 모든 SRL이 UNASSIGNED에 머물러 있는데 아카이브 로그만 늘어난다면 리두가 SRL을 건너뛰고 있다는 신호이고, SRL 크기가 Primary 온라인 로그보다 작은 경우가 가장 흔한 원인입니다. ARCHIVED 열은 직관과 다른 조합이 있어서 STATUS 없이 단독으로 읽으면 틀리기 쉽습니다. 교재의 조합표를 함께 보면서 해석합니다.</a:t>
             </a:r>
           </a:p>
         </p:txBody>
@@ -825,7 +835,7 @@
           <a:lstStyle/>
           <a:p>
             <a:r>
-              <a:t>이 값을 감시 지표로 쓰면 상시 경보가 뜬다. 9장에서 실시간 적용을 켠 순간부터 계속 0 이었을 것이다. 대신 apply lag, MRP0 의 SEQUENCE#, SRL 의 ACTIVE 그룹을 본다. 역설적인 확인도 있다. MRP0 가 74번을 적용 중인데 ARCHIVED_SEQ# 는 73이다. 아카이브되기 전의 리두를 이미 적용하고 있다는 뜻이며 실시간 적용이 정상 동작한다는 가장 분명한 증거다.</a:t>
+              <a:t>SYNC 전송에서는 Primary의 커밋이 Standby 응답을 기다리므로, 응답이 가끔 몇 초씩 늦어지면 그 순간 Primary 업무 전체가 멈칫합니다. 평균값에는 이런 꼬리가 묻혀 버립니다. 이 히스토그램은 응답 시간을 초 단위 구간으로 나눠 횟수를 쌓기 때문에 꼬리가 보입니다. NET_TIMEOUT을 너무 짧게 잡으면 일시적 지연에도 목적지가 끊기고, 너무 길게 잡으면 Standby가 응답하지 않을 때 Primary가 그만큼 기다립니다. 분포를 보고 그 사이에서 정합니다.</a:t>
             </a:r>
           </a:p>
         </p:txBody>
@@ -895,7 +905,7 @@
           <a:lstStyle/>
           <a:p>
             <a:r>
-              <a:t>두 실습의 대비가 이 장의 설계다. 같은 결과(전송 없음)를 서로 다른 원인으로 만들어 놓고 각 층이 어떻게 다르게 답하는지 본다. boston 데이터베이스 자체는 살아 있고 접속만 안 되는 상태다. 실제 운영에서 네트워크 문제나 리스너 장애로 흔히 생기는 상황이며 데이터에는 영향이 없으므로 실습으로 만들기 안전하다. 복구에 시간이 걸리므로 실습 시간을 넉넉히 잡아야 한다는 점도 미리 일러 둔다.</a:t>
+              <a:t>Standby에서 이 뷰 하나로 수신과 적용이 모두 보입니다. managed recovery 행이 있으면 적용이 기동된 것이고, ACTION을 보면 지금 무엇을 하는지 알 수 있습니다. WAIT_FOR_GAP이면 갭 진단으로, WAIT_FOR_LOG가 오래 지속되면 공급 쪽을 봅니다. 공식 교재는 recovery logmerger 행의 SEQUENCE#로 적용 위치를 보는 예를 듭니다. RFS async의 순번과 같거나 한 단계 뒤라면 수신과 적용이 나란히 가고 있습니다.</a:t>
             </a:r>
           </a:p>
         </p:txBody>
@@ -965,7 +975,7 @@
           <a:lstStyle/>
           <a:p>
             <a:r>
-              <a:t>ERROR 열에 실제 원인이 그대로 들어 있다는 것이 이 뷰의 값어치다. 그리고 파라미터가 ENABLE 그대로라는 점이 진단의 열쇠다. 14장에서 Broker 로 껐을 때는 RESET 이었다. ENABLE 인데 STATUS 가 ERROR 이면 장애, RESET 이면 Broker 가 껐고, DEFER 면 사람이 SQL 로 껐다. 두 열의 조합만으로 장애인가 설정인가가 갈린다.</a:t>
+              <a:t>오래된 점검 스크립트는 APPLIED='YES'인 최대 순번으로 적용 위치를 판단합니다. 그런데 실시간 적용에서는 지금 적용 중인 리두가 SRL에 있고, 아카이브되기 전까지 이 뷰에 행이 생기지 않으니 늘 한두 순번 뒤처져 보입니다. 반대로 몇 시간째 값이 그대로여도 리두 생성이 적어 로그 전환이 없었던 것일 수 있습니다. 적용 상태는 ACTION과 apply lag로 함께 판단하고, 이 열은 보조 근거로만 씁니다.</a:t>
             </a:r>
           </a:p>
         </p:txBody>
@@ -1035,7 +1045,7 @@
           <a:lstStyle/>
           <a:p>
             <a:r>
-              <a:t>접속 문자열이 나오므로 tnsnames 설정 오류라면 여기서 드러난다. 트레이스 파일 이름은 다음 층으로 내려가는 고리가 된다. 마지막 줄이 중요하다. Standby 로 보내지 못해도 Primary 는 멈추지 않는다. MaxPerformance 이기 때문이며 MaxProtection 이었다면 멈췄을 것이다. 8장에서 배운 보호 모드의 차이가 여기서 실제로 드러난다.</a:t>
+              <a:t>물리 Standby의 Redo Apply는 끝나지 않는 미디어 복구라서 미디어 복구 통계 뷰로 적용 성능을 잴 수 있습니다. Average Apply Rate는 기다린 시간까지 포함하므로 리두가 적은 구성에서는 낮게 나옵니다. 낮다고 걱정할 값이 아닙니다. 판단은 Active Apply Rate를 배치 시간대 Primary의 리두 생성량과 비교해서 합니다. 적용 속도는 충분한데 Last Applied Redo의 시각만 뒤처진다면 처리 능력보다는 전송이나 갭 쪽을 의심합니다.</a:t>
             </a:r>
           </a:p>
         </p:txBody>
@@ -1105,7 +1115,7 @@
           <a:lstStyle/>
           <a:p>
             <a:r>
-              <a:t>두 방향의 반례를 모두 봤다는 것이 중요하다. 한쪽만 봤다면 Warning 을 무시하거나 반대로 전부 확인하는 규칙을 만들었을 것이다. 오라클이 조치까지 알려 주는 행이 Warning 으로 분류되어 있다는 점도 인상적이다. 감시 SQL 은 ERROR_CODE &lt;&gt; 0 과 시간 조건을 함께 넣는다. 이 뷰는 재기동 전까지 과거 기록을 그대로 들고 있기 때문이다.</a:t>
+              <a:t>V$DATAGUARD_STATS의 apply lag는 조회한 순간의 값 하나라서, 새벽 3시에 10분 밀렸다가 아침에 회복된 일은 알려 주지 않습니다. 이 히스토그램은 지연 크기별로 횟수를 쌓고 마지막으로 기록된 시각까지 남겨 줍니다. 긴 구간의 시각을 Primary 배치 일정이나 네트워크 작업과 맞춰 보면 원인 후보가 금방 줄어듭니다. 실시간 조회 세션의 허용 지연을 정할 때도 이 분포가 근거 자료가 됩니다.</a:t>
             </a:r>
           </a:p>
         </p:txBody>
@@ -1175,7 +1185,7 @@
           <a:lstStyle/>
           <a:p>
             <a:r>
-              <a:t>오지 않으니 늦지도 않는다. 14장에서 확인한 성질이 실제 장애에서도 그대로다. 그러므로 Standby 쪽 판정은 지연이 아니라 프로세스를 본다. RFS(LGWR) 가 사라진 것이 연결이 끊겼다는 가장 직접적인 증거다. 그리고 Standby 는 전송이 꺼졌다는 사실을 모른다. 안 온다와 안 보낸다를 받는 쪽에서는 구별할 수 없으므로 양쪽을 다 봐야 한다. 지연만 보는 감시는 이 상황을 끝내 잡지 못한다.</a:t>
+              <a:t>서버에 들어가 경고 로그 파일을 열지 않고도 최근 Data Guard 사건을 시간순으로 따라갈 수 있는 뷰입니다. 주의할 것은 두 가지입니다. 첫째, 적용을 일부러 멈췄을 때 남는 ORA-16037처럼 의도된 동작도 오류 코드가 붙어 기록되므로 코드만 보고 장애로 판정하면 안 됩니다. 둘째, 인스턴스 메모리에 있어서 재기동하면 비워지고 오래된 메시지는 밀려납니다. 지난 사고를 분석할 때는 경고 로그로 가야 합니다.</a:t>
             </a:r>
           </a:p>
         </p:txBody>
@@ -1245,7 +1255,7 @@
           <a:lstStyle/>
           <a:p>
             <a:r>
-              <a:t>층을 내려갈수록 구체적이 된다. 이 사례는 2층에서 끝났다. 원인이 분명했기 때문이다. 4층인 트레이스까지 내려가는 것은 오류는 없는데 느리다 같은 경우다. Broker 가 ORA-16857 로 경보한 것은 TransportDisconnectedThreshold 라는 임계값이 있기 때문이며, 14장에서 정리한 규칙 그대로다. 임계값이 있는 항목만 경보한다.</a:t>
+              <a:t>네 지표의 정의는 7장에서 봤으니 여기서는 진단에 쓰는 방법만 정리합니다. 두 lag를 함께 보면 구간이 좁혀집니다. 가장 위험한 착각은 연결이 끊긴 동안 마지막으로 계산된 0초가 그대로 남아 정상처럼 보이는 경우입니다. DATUM_TIME이 현재 시각에서 멀어져 있으면 값 자체를 믿지 않습니다. 그리고 lag 계산도, 여러 뷰의 사건 대조도 모두 시각에 기대므로 두 서버 시계가 어긋나 있으면 진단 전체가 틀어집니다.</a:t>
             </a:r>
           </a:p>
         </p:txBody>
@@ -1315,7 +1325,7 @@
           <a:lstStyle/>
           <a:p>
             <a:r>
-              <a:t>세 번째가 이 장 전체를 관통한다. 리스너를 내렸을 때 Broker 는 member disconnected 라고만 말했다. 같은 시점에 V$ARCHIVE_DEST 의 ERROR 열에는 ORA-12541: TNS:no listener 가 그대로 들어 있었다. 원인은 아래층에 있다. 네 번째 이유도 있다. 조치를 마친 직후 SHOW 는 ERROR 였는데 SQL 뷰는 이미 VALID 였다. 아래층이 먼저 회복되고 요약이 나중에 따라온다.</a:t>
+              <a:t>Data Guard 정보는 한곳에 모여 있지 않습니다. 목적지별 전송 결과와 응답 시간은 Primary에만 쌓이고, 수신 프로세스, 갭, 지연 지표, 적용 속도는 Standby에서만 의미 있는 값이 나옵니다. V$ARCHIVED_LOG만 해도 Primary에서는 목적지별 전송 기록, Standby에서는 수신과 적용 기록입니다. 한쪽만 보고 판단하면 절반만 보고 결론을 내리는 셈이라, 진단 쿼리는 처음부터 두 터미널을 열어 놓고 같은 시각에 돌리는 습관을 들이는 편이 좋습니다.</a:t>
             </a:r>
           </a:p>
         </p:txBody>
@@ -1385,7 +1395,7 @@
           <a:lstStyle/>
           <a:p>
             <a:r>
-              <a:t>갭 뷰가 비어 있다고 갭이 없는 것이 아니다. 이 뷰는 Standby 가 받아야 하는데 못 받은 구간을 인식했을 때 채워지는데, 지금은 연락 자체를 못 받고 있다. 8장에서 개념으로 배운 갭을 여기서는 시퀀스 번호의 변화로 확인했다. 행이 없는 것은 조회로 볼 수 없으므로 Primary 의 최대 시퀀스와 비교하는 방법을 함께 써야 한다. 조회로 볼 수 없는 것을 다루는 요령이기도 하다.</a:t>
+              <a:t>문제 유형은 리두가 오지 않는 전송 문제, 왔는데 반영되지 않는 적용 문제, 중간 로그가 빠진 갭 문제로 나뉩니다. 처음 1분 안에 볼 것은 Standby의 두 lag와 V$DATAGUARD_PROCESS 목록입니다. 이것만으로 어느 갈래인지 대부분 정해지고, 그다음 볼 뷰가 달라집니다. 갈래를 정하지 않고 아는 뷰를 모두 조회하기 시작하면 정보는 많아지는데 결론은 늦어집니다. Maximum Availability 구성이라면 PROTECTION_LEVEL도 첫 관찰 항목에 넣습니다.</a:t>
             </a:r>
           </a:p>
         </p:txBody>
@@ -1455,7 +1465,7 @@
           <a:lstStyle/>
           <a:p>
             <a:r>
-              <a:t>이유는 ReopenSecs 다. 13장의 속성 목록에서 실측값이 300 이었다. 실패한 목적지를 즉시 다시 시도하지 않고 그만큼 기다린다. 죽은 목적지에 계속 접속하면 아카이버가 붙잡히기 때문이다. 급하면 재촉할 수 있다. Broker 환경이라면 LogShipping 을 OFF 로 했다가 ON 으로 준다. Broker 가 없다면 DEFER 후 ENABLE 인데, Broker 환경에서 그 SQL 을 쓰면 안 된다.</a:t>
+              <a:t>공식 교재가 꼽는 전송 실패 원인 목록입니다. 대부분은 ERROR 열의 번호로 연결되지만, 목적지 상태를 DEFER로 둔 경우나 파라미터를 고쳐 놓고 적용하지 않은 경우는 오류가 나지 않아서 목록을 하나씩 확인해야 합니다. 인증 문제는 연결 자체는 성공하고 로그인 단계에서 거부되므로 네트워크 점검만으로는 찾을 수 없습니다. Standby의 비밀번호 파일을 Primary에서 다시 복사하는 것이 일반적인 해결책입니다.</a:t>
             </a:r>
           </a:p>
         </p:txBody>
@@ -1525,7 +1535,7 @@
           <a:lstStyle/>
           <a:p>
             <a:r>
-              <a:t>status updated 58 seconds ago 가 그 증거다. Broker 상태는 주기적으로 다시 계산되며 그 출력은 문제가 있던 구간을 반영한 것이다. 고친 직후의 화면을 결론으로 삼지 않는다. 조치 완료는 아래층부터 확인한다. V$ARCHIVE_DEST 가 VALID 인가, 끊긴 동안의 데이터가 따라왔는가, MRP0 와 RFS 가 돌아왔는가. 그다음에 Broker 를 본다.</a:t>
+              <a:t>적용 문제는 세 모양으로 나타납니다. 프로세스가 아예 없으면 누가 멈췄거나 오류로 멈춘 것이고, 데이터 파일 생성 실패나 블록 손상이 오류 정지의 흔한 원인입니다. 프로세스는 있는데 계속 기다리기만 한다면 적용 능력보다 리두 공급 쪽을 볼 차례이고, RECOVERY_MODE로 실시간 적용 여부를 확인합니다. 계속 바쁘게 적용하는데도 lag가 줄지 않는다면 그때 Standby의 CPU와 I/O를 봅니다.</a:t>
             </a:r>
           </a:p>
         </p:txBody>
@@ -1595,7 +1605,7 @@
           <a:lstStyle/>
           <a:p>
             <a:r>
-              <a:t>SCOPE=BOTH 가 자동으로 붙는다는 것이 중요하다. 다음 기동에도 유지되므로 반드시 되돌려야 하며, 재기동으로도 꺼지지 않는다. ORA-02017: integer value required 는 음수에도 나온다. 이 파라미터가 부호 없는 정수를 받기 때문이며, 오류 메시지가 원인을 정확히 설명하지 않는 예다. 이런 경우가 드물지 않으므로 메시지를 그대로 믿기보다 문서에서 유효 범위를 확인한다.</a:t>
+              <a:t>적용은 로그 순서를 건너뛸 수 없어서 하나라도 빠지면 그 앞에서 멈춥니다. Standby의 V$ARCHIVE_GAP으로 범위를 보고, Primary의 GAP_STATUS로 자동 해소가 가능한 상태인지 판단합니다. RESOLVABLE이면 FAL과 ping이 채워 주기를 기다리면 되고, Fetch Archive Log 메시지로 진행을 확인합니다. 빠진 로그가 Primary에서 이미 지워졌다면 백업에서 복원해 등록하거나, 19c에서는 서비스를 통해 Standby를 앞으로 굴리는 방법을 씁니다.</a:t>
             </a:r>
           </a:p>
         </p:txBody>
@@ -1665,7 +1675,7 @@
           <a:lstStyle/>
           <a:p>
             <a:r>
-              <a:t>알림 로그에서 본 chicago_arc1_2482.trc 가 이 목록에 있다. 알림 로그가 트레이스 파일 이름을 알려 준다는 것이 두 로그를 잇는 고리다. 우리 환경은 실시간 전송이므로 TT04 가 계속 일하고, 그래서 파일이 가장 크며 평소 진단에서 볼 것도 이 파일이다. 알림 로그에도 TT04 (PID:7487): SRL selected 가 나오므로 같은 프로세스임을 확인할 수 있다.</a:t>
+              <a:t>연결과 인증 계열은 Primary의 ERROR 열에 거의 그대로 들어옵니다. 12541과 12514는 Oracle Net 오류라서 3장에서 다룬 리스너와 정적 등록을 다시 확인하면 됩니다. 인증 실패는 Primary에서 16191로, Standby에서는 접속 거부 메시지로 나타나서 같은 사건이 양쪽에 다른 모양으로 남습니다. 16047과 16012는 보내는 대상이 기대한 데이터베이스가 아닐 때 나옵니다. 복제 환경을 여러 개 운영할 때 서비스 이름이 섞이는 경우를 떠올리면 됩니다.</a:t>
             </a:r>
           </a:p>
         </p:txBody>
@@ -1735,7 +1745,7 @@
           <a:lstStyle/>
           <a:p>
             <a:r>
-              <a:t>정상일 때의 모습을 알아 두는 것이 이 파일을 쓰는 방법이다. 문제가 있으면 같은 자리에 오류나 재시도가 나타난다. 켤 때의 원칙도 정리해 둔다. 필요한 수준만 켠다, 시간을 정해 둔다, 켜기 전에 공간을 확인한다, 끈 뒤 V$PARAMETER 로 0인지 확인한다, 오래된 트레이스는 adrci 의 purge 로 정리한다. 실무에서 가장 흔한 사고는 켜 둔 것을 잊는 것이다.</a:t>
+              <a:t>이 묶음은 경고 로그에서 주로 만납니다. 16198이 자주 보이면 응답 시간 히스토그램을 함께 보고 NET_TIMEOUT 값을 재검토합니다. 16086은 SRL 개수가 부족하거나 크기가 맞지 않을 때 나오며 실시간 전송이 깨지는 원인이 됩니다. 16401과 16037은 처음 보면 놀라지만 대부분 정상 동작의 흔적입니다. Broker 구성에서는 이 오류들이 Broker 경고로 한 번 더 감싸여 보이므로 감싸인 원래 번호를 찾아 들어가는 편이 빠릅니다.</a:t>
             </a:r>
           </a:p>
         </p:txBody>
@@ -1805,7 +1815,7 @@
           <a:lstStyle/>
           <a:p>
             <a:r>
-              <a:t>15.2.2 절에서 뷰가 조회된다고 값이 있는 것은 아니라고 했는데 여기서는 한 걸음 더 나간다. 역할이 Logical 이 되면 뷰가 통째로 빈다. 감시 스크립트를 역할과 무관하게 돌리면 지연을 못 읽은 것을 장애로 오인한다. 판정은 STATE 한 값으로 한다. IDLE 이 정상, APPLYING 이 적용 중, SQL APPLY NOT ON 이면 멈춘 것이다. 진행은 DBA_LOGSTDBY_PROGRESS 의 세 SCN 으로 본다. 실측은 APPLIED 2988122 / READ 2988125 / NEWEST 2988129 로 거의 같았고 이것이 따라잡았다는 뜻이다.</a:t>
+              <a:t>ERROR 열은 마지막 오류 하나만 보여 주고, V$DATAGUARD_STATUS는 최근 것만 메모리에 들고 있습니다. 사건의 전후 흐름을 보려면 경고 로그를 열어야 합니다. 이때 요령은 시각을 기준으로 양쪽을 맞추는 것입니다. Primary에서 전송 실패가 찍힌 시각 앞뒤로 Standby 경고 로그에 RFS 연결이나 거부 기록이 있는지 찾습니다. 서버 접속이 막혀 있다면 V$DIAG_ALERT_EXT로 경고 로그 내용을 SQL로 조회할 수 있습니다.</a:t>
             </a:r>
           </a:p>
         </p:txBody>
@@ -1875,7 +1885,7 @@
           <a:lstStyle/>
           <a:p>
             <a:r>
-              <a:t>200 만 행을 한 트랜잭션으로 넣고 2초 간격으로 조회하면 행이 잡힌다. PRIMARY_ 가 붙는 이유는 이 XID 가 Standby 의 것이 아니라 Primary 에서 그 트랜잭션이 받았던 번호이기 때문이다. 그래야 Primary 의 V$TRANSACTION 과 대조할 수 있다. PRIMARY_START_TIME 과 지금 시각의 차이가 그 트랜잭션이 붙잡고 있는 시간이며 실측 52초였다. 적용이 느릴 때 원인을 트랜잭션 단위로 설명할 수 있는 유일한 뷰다.</a:t>
+              <a:t>수준 표를 외울 필요는 없고, 비트를 더하는 구조라는 것과 의심 구간에 맞는 비트를 고른다는 원칙만 알면 됩니다. 전송 문제라면 Primary에서 목적지 관련 수준과 512 네트워크 활동을, Standby에서 1024 RFS를 고르는 식입니다. 갭이 반복되면 FAL 128과 ping 2048을 더합니다. 512의 설명에 LGWR이라는 이름이 남아 있지만 19c 비동기 전송은 TT 프로세스가 맡고 있어서, 전송 네트워크 활동 정도로 이해하면 됩니다.</a:t>
             </a:r>
           </a:p>
         </p:txBody>
@@ -1945,7 +1955,7 @@
           <a:lstStyle/>
           <a:p>
             <a:r>
-              <a:t>Standby 에서 SYS 로 복제 대상 행을 지운 뒤 Primary 에서 그 행을 고치면 적용이 멈춘다. STATE 는 SQL APPLY NOT ON 이 되고 DBA_LOGSTDBY_EVENTS 에 ORA-26787 이 표 이름과 키 값까지 함께 남는다. ORA-16222 는 자동 재시도다. 건너뛰기가 거부되면 원인을 없애는 편이 낫다. 지운 행을 되돌려 놓고 적용을 다시 시작하면 밀려 있던 UPDATE 가 정상 적용된다. 건너뛰었다면 그 변경은 영원히 반영되지 않는다.</a:t>
+              <a:t>값을 바꾸면 다음 아카이브 작업부터 반영되므로, 재현하려면 로그 전환을 한 번 일으키는 편이 빠릅니다. SCOPE를 BOTH로 켰다면 끌 때도 BOTH로 해야 SPFILE에 진단 설정이 남지 않습니다. 트레이스 파일 이름에는 rfs, tt00 같은 프로세스 이름이 들어가므로 시각으로 범위를 좁힌 뒤 해당 프로세스 파일만 엽니다. Broker 구성이라면 이 파라미터도 Broker가 관리하므로 DGMGRL 쪽에서 바꿔 설정이 어긋나지 않게 합니다.</a:t>
             </a:r>
           </a:p>
         </p:txBody>
@@ -2015,7 +2025,7 @@
           <a:lstStyle/>
           <a:p>
             <a:r>
-              <a:t>첫 번째가 가장 중요하다. V$DATAGUARD_STATS 는 Primary 에서 no rows 이고, V$STANDBY_LOG 는 Primary 에서 전부 UNASSIGNED 다. 둘 다 오류가 나지 않으므로 같은 스크립트를 양쪽에 돌리면 Primary 에서 조용히 오판한다. V$DATABASE 로 역할을 먼저 판정하고 분기하는 구조여야 하며, 빈 결과와 오류도 구별해 처리해야 한다.</a:t>
+              <a:t>큰 값으로 켜 두면 리두 생성이 많은 시스템에서는 트레이스가 순식간에 불어납니다. 문제는 대개 끄는 것을 잊는 데서 생깁니다. 몇 주 뒤 진단 디렉터리가 가득 차서 다른 장애로 번지는 일이 실제로 흔합니다. 켤 때 끄는 시각까지 작업 계획에 적어 두는 습관이 필요합니다. 오라클 지원에 트레이스를 보낼 때는 같은 시간대의 양쪽 경고 로그를 함께 보내야 전후 맥락을 읽을 수 있습니다.</a:t>
             </a:r>
           </a:p>
         </p:txBody>
@@ -2085,7 +2095,7 @@
           <a:lstStyle/>
           <a:p>
             <a:r>
-              <a:t>STATUS 에 값이 들어가는 경우는 INVALID, STALE, DELETED 셋뿐이다. 비어 있는 것이 정상이라는 성질은 감시 스크립트에 쓰기 좋다. WHERE status IS NOT NULL 인 행이 하나라도 나오면 확인 대상이라는 조건 하나로 끝난다. ACTIVE 이면서 아카이브되지 않은 그룹이 쌓이는 것은 방치하면 로그 전환 자체가 멈추는 문제로 이어진다.</a:t>
+              <a:t>문제를 좁혀 가는 과정을 층으로 나누면 어디까지 내려가야 하는지 판단이 쉬워집니다. 리스너 미기동, 서비스 이름 오타, 인증 실패처럼 원인이 분명한 장애는 ERROR 열의 ORA- 번호 하나로 끝납니다. 트레이스까지 내려가는 경우는 오류 메시지가 없는데 간헐적으로 전송이 지연되거나, 재현하기 어려운 연결 끊김이 있을 때입니다. 처음부터 트레이스를 켜는 것은 시간과 디스크를 낭비하는 일이 되기 쉽습니다.</a:t>
             </a:r>
           </a:p>
         </p:txBody>
@@ -2155,7 +2165,7 @@
           <a:lstStyle/>
           <a:p>
             <a:r>
-              <a:t>boston 의 DG_ERR 가 0 인 것이 의미가 있다. 실습 03 의 오류는 Primary 쪽에만 기록됐다. 보내는 쪽이 실패를 알고 받는 쪽은 모르기 때문이며, 양쪽을 다 봐야 하는 이유가 여기 있다. DG_ERR 에는 시간 조건이 들어 있으므로 한 시간이 지나면 자동으로 0 이 된다. 이 값 하나가 지금 봐야 할 일이 있는가에 답한다. 나머지 항목의 기댓값도 미리 정해 두어야 스크립트가 판정할 수 있다.</a:t>
+              <a:t>장애가 난 뒤 손으로 조회하는 쿼리와 주기적으로 도는 점검 쿼리는 쓰는 뷰가 같아도 설계가 다릅니다. 점검 스크립트는 표를 출력하는 대신 COUNT나 초 단위 숫자를 뽑아 기대값과 비교해야 합니다. 역할 판정을 맨 앞에 두는 이유는 역할 전환 뒤에도 같은 스크립트가 그대로 돌게 하기 위해서입니다. 물리 Standby는 마운트 상태라 DBA_ 뷰에 기대면 스크립트가 오류로 끝나고, 그 오류가 점검 실패인지 장애인지 구분하기도 어렵습니다.</a:t>
             </a:r>
           </a:p>
         </p:txBody>
@@ -2225,7 +2235,7 @@
           <a:lstStyle/>
           <a:p>
             <a:r>
-              <a:t>SRL_ACTIVE 가 이 점검표의 핵심이다. 지연이 0 으로 보이는 두 상황 모두에서 ACTIVE 인 SRL 이 사라지므로 이 값 하나가 두 사례를 모두 잡는다. 지연을 버리라는 뜻은 아니다. 흐르고는 있는데 느린 상황은 지연만이 잡는다. 두 종류를 함께 두어야 끊겼다와 느리다를 구별할 수 있고, 그래야 대응의 시급성도 달라진다. 대응의 시급성이 달라지므로 이 구분이 실무에서 중요하다.</a:t>
+              <a:t>Primary 쪽 항목은 모두 기대값이 분명해서 판정 규칙으로 옮기기 쉽습니다. 오류 메시지는 반드시 마지막 점검 시각 이후 행만 셉니다. 그렇지 않으면 지난주 유지 보수 때 일부러 멈춘 적용의 흔적이 매번 경보로 다시 울립니다. GAP_STATUS는 로그 전환 직후 잠깐 LOG SWITCH GAP이 보일 수 있으니, 한 번 보이면 주의, 연속으로 보이면 경보처럼 단계를 두면 오경보가 줄어듭니다.</a:t>
             </a:r>
           </a:p>
         </p:txBody>
@@ -2295,7 +2305,427 @@
           <a:lstStyle/>
           <a:p>
             <a:r>
-              <a:t>모든 이상을 같은 무게로 알리면 아무도 보지 않는다. 14장에서 임계값을 다루며 확인한 것과 같은 원칙이다. 심각은 즉시 사람을 부르고 경고는 근무 시간에 확인하며 주의는 추세만 기록한다. 자동화는 1~3층이 쉽고 14장의 VALIDATE 는 파싱이 번거로워 자주 빠진다. 최소한 Ready for Switchover 한 줄만이라도 grep 으로 뽑아 둔다.</a:t>
+              <a:t>lag 값은 '+00 00:00:02' 같은 문자열이라 TO_DSINTERVAL로 바꾼 뒤 초로 환산해야 기준과 비교할 수 있습니다. 값이 비어 있으면 결과가 NULL이 되는데, 이것을 0으로 처리하면 안 되고 지표 없음이라는 별도 경보로 다뤄야 합니다. managed recovery 행이 0이면 lag와 상관없이 즉시 경보를 냅니다. 적용이 멈춘 직후에는 lag가 아직 작아서 lag만 보는 스크립트는 한동안 아무것도 잡지 못합니다.</a:t>
+            </a:r>
+          </a:p>
+        </p:txBody>
+      </p:sp>
+      <p:sp>
+        <p:nvSpPr>
+          <p:cNvPr id="4" name="Slide Number Placeholder 3"/>
+          <p:cNvSpPr>
+            <a:spLocks noGrp="1"/>
+          </p:cNvSpPr>
+          <p:nvPr>
+            <p:ph type="sldNum" idx="5" sz="quarter"/>
+          </p:nvPr>
+        </p:nvSpPr>
+        <p:spPr/>
+      </p:sp>
+    </p:spTree>
+  </p:cSld>
+  <p:clrMapOvr>
+    <a:masterClrMapping/>
+  </p:clrMapOvr>
+</p:notes>
+</file>
+
+<file path=ppt/notesSlides/notesSlide33.xml><?xml version="1.0" encoding="utf-8"?>
+<p:notes xmlns:a="http://schemas.openxmlformats.org/drawingml/2006/main" xmlns:p="http://schemas.openxmlformats.org/presentationml/2006/main" xmlns:r="http://schemas.openxmlformats.org/officeDocument/2006/relationships">
+  <p:cSld>
+    <p:spTree>
+      <p:nvGrpSpPr>
+        <p:cNvPr id="1" name=""/>
+        <p:cNvGrpSpPr/>
+        <p:nvPr/>
+      </p:nvGrpSpPr>
+      <p:grpSpPr>
+        <a:xfrm>
+          <a:off x="0" y="0"/>
+          <a:ext cx="0" cy="0"/>
+          <a:chOff x="0" y="0"/>
+          <a:chExt cx="0" cy="0"/>
+        </a:xfrm>
+      </p:grpSpPr>
+      <p:sp>
+        <p:nvSpPr>
+          <p:cNvPr id="2" name="Slide Image Placeholder 1"/>
+          <p:cNvSpPr>
+            <a:spLocks noGrp="1"/>
+          </p:cNvSpPr>
+          <p:nvPr>
+            <p:ph type="sldImg" idx="2"/>
+          </p:nvPr>
+        </p:nvSpPr>
+        <p:spPr/>
+      </p:sp>
+      <p:sp>
+        <p:nvSpPr>
+          <p:cNvPr id="3" name="Notes Placeholder 2"/>
+          <p:cNvSpPr>
+            <a:spLocks noGrp="1"/>
+          </p:cNvSpPr>
+          <p:nvPr>
+            <p:ph type="body" idx="3" sz="quarter"/>
+          </p:nvPr>
+        </p:nvSpPr>
+        <p:spPr/>
+        <p:txBody>
+          <a:bodyPr/>
+          <a:lstStyle/>
+          <a:p>
+            <a:r>
+              <a:t>임계값을 몇 초로 할지는 기술이 아니라 업무가 정합니다. 장애 때 잃어도 되는 데이터 범위가 transport lag 기준이 되고, 복구에 허용되는 시간이 apply lag와 apply finish time 기준이 됩니다. 양쪽 점검을 같은 시각에 돌려 한곳에 모으면 Primary의 ERROR와 같은 시각 Standby의 상태를 나란히 대조할 수 있습니다. Broker의 ApplyLagThreshold 같은 속성도 함께 쓰되, Broker가 멈춘 상황을 대비해 SQL 점검은 따로 유지합니다.</a:t>
+            </a:r>
+          </a:p>
+        </p:txBody>
+      </p:sp>
+      <p:sp>
+        <p:nvSpPr>
+          <p:cNvPr id="4" name="Slide Number Placeholder 3"/>
+          <p:cNvSpPr>
+            <a:spLocks noGrp="1"/>
+          </p:cNvSpPr>
+          <p:nvPr>
+            <p:ph type="sldNum" idx="5" sz="quarter"/>
+          </p:nvPr>
+        </p:nvSpPr>
+        <p:spPr/>
+      </p:sp>
+    </p:spTree>
+  </p:cSld>
+  <p:clrMapOvr>
+    <a:masterClrMapping/>
+  </p:clrMapOvr>
+</p:notes>
+</file>
+
+<file path=ppt/notesSlides/notesSlide34.xml><?xml version="1.0" encoding="utf-8"?>
+<p:notes xmlns:a="http://schemas.openxmlformats.org/drawingml/2006/main" xmlns:p="http://schemas.openxmlformats.org/presentationml/2006/main" xmlns:r="http://schemas.openxmlformats.org/officeDocument/2006/relationships">
+  <p:cSld>
+    <p:spTree>
+      <p:nvGrpSpPr>
+        <p:cNvPr id="1" name=""/>
+        <p:cNvGrpSpPr/>
+        <p:nvPr/>
+      </p:nvGrpSpPr>
+      <p:grpSpPr>
+        <a:xfrm>
+          <a:off x="0" y="0"/>
+          <a:ext cx="0" cy="0"/>
+          <a:chOff x="0" y="0"/>
+          <a:chExt cx="0" cy="0"/>
+        </a:xfrm>
+      </p:grpSpPr>
+      <p:sp>
+        <p:nvSpPr>
+          <p:cNvPr id="2" name="Slide Image Placeholder 1"/>
+          <p:cNvSpPr>
+            <a:spLocks noGrp="1"/>
+          </p:cNvSpPr>
+          <p:nvPr>
+            <p:ph type="sldImg" idx="2"/>
+          </p:nvPr>
+        </p:nvSpPr>
+        <p:spPr/>
+      </p:sp>
+      <p:sp>
+        <p:nvSpPr>
+          <p:cNvPr id="3" name="Notes Placeholder 2"/>
+          <p:cNvSpPr>
+            <a:spLocks noGrp="1"/>
+          </p:cNvSpPr>
+          <p:nvPr>
+            <p:ph type="body" idx="3" sz="quarter"/>
+          </p:nvPr>
+        </p:nvSpPr>
+        <p:spPr/>
+        <p:txBody>
+          <a:bodyPr/>
+          <a:lstStyle/>
+          <a:p>
+            <a:r>
+              <a:t>Logical Standby로 바꾸고 기존 점검 스크립트를 그대로 돌리면 갭 0건, 오류 0건으로 모두 정상이라고 나옵니다. 실제로는 해당 뷰들이 Logical Standby에서 쓰이지 않아 비어 있는 것입니다. Primary에서 받은 로그는 Logical Standby 입장에서 남의 로그라서 V$ARCHIVED_LOG 대신 DBA_LOGSTDBY_LOG에 등록됩니다. 다행히 전송 쪽은 그대로라 Primary의 목적지 뷰와 Standby의 RFS는 지금까지 본 방식으로 읽으면 됩니다.</a:t>
+            </a:r>
+          </a:p>
+        </p:txBody>
+      </p:sp>
+      <p:sp>
+        <p:nvSpPr>
+          <p:cNvPr id="4" name="Slide Number Placeholder 3"/>
+          <p:cNvSpPr>
+            <a:spLocks noGrp="1"/>
+          </p:cNvSpPr>
+          <p:nvPr>
+            <p:ph type="sldNum" idx="5" sz="quarter"/>
+          </p:nvPr>
+        </p:nvSpPr>
+        <p:spPr/>
+      </p:sp>
+    </p:spTree>
+  </p:cSld>
+  <p:clrMapOvr>
+    <a:masterClrMapping/>
+  </p:clrMapOvr>
+</p:notes>
+</file>
+
+<file path=ppt/notesSlides/notesSlide35.xml><?xml version="1.0" encoding="utf-8"?>
+<p:notes xmlns:a="http://schemas.openxmlformats.org/drawingml/2006/main" xmlns:p="http://schemas.openxmlformats.org/presentationml/2006/main" xmlns:r="http://schemas.openxmlformats.org/officeDocument/2006/relationships">
+  <p:cSld>
+    <p:spTree>
+      <p:nvGrpSpPr>
+        <p:cNvPr id="1" name=""/>
+        <p:cNvGrpSpPr/>
+        <p:nvPr/>
+      </p:nvGrpSpPr>
+      <p:grpSpPr>
+        <a:xfrm>
+          <a:off x="0" y="0"/>
+          <a:ext cx="0" cy="0"/>
+          <a:chOff x="0" y="0"/>
+          <a:chExt cx="0" cy="0"/>
+        </a:xfrm>
+      </p:grpSpPr>
+      <p:sp>
+        <p:nvSpPr>
+          <p:cNvPr id="2" name="Slide Image Placeholder 1"/>
+          <p:cNvSpPr>
+            <a:spLocks noGrp="1"/>
+          </p:cNvSpPr>
+          <p:nvPr>
+            <p:ph type="sldImg" idx="2"/>
+          </p:nvPr>
+        </p:nvSpPr>
+        <p:spPr/>
+      </p:sp>
+      <p:sp>
+        <p:nvSpPr>
+          <p:cNvPr id="3" name="Notes Placeholder 2"/>
+          <p:cNvSpPr>
+            <a:spLocks noGrp="1"/>
+          </p:cNvSpPr>
+          <p:nvPr>
+            <p:ph type="body" idx="3" sz="quarter"/>
+          </p:nvPr>
+        </p:nvSpPr>
+        <p:spPr/>
+        <p:txBody>
+          <a:bodyPr/>
+          <a:lstStyle/>
+          <a:p>
+            <a:r>
+              <a:t>Logical Standby는 로그 순번보다 SCN과 시각으로 진행을 봅니다. STATE 한 단어로 지금 무엇을 하는지 알 수 있는데, SQL APPLY NOT ON이면 적용이 꺼진 상태입니다. 진행 뷰에서 LATEST_SCN은 받은 리두의 끝, APPLIED_SCN은 적용이 끝난 지점이라 두 값의 움직임을 보면 수신 문제인지 적용 문제인지가 갈립니다. LATEST_TIME과 APPLIED_TIME의 차이가 Logical Standby의 적용 지연을 가늠하는 기본 지표입니다.</a:t>
+            </a:r>
+          </a:p>
+        </p:txBody>
+      </p:sp>
+      <p:sp>
+        <p:nvSpPr>
+          <p:cNvPr id="4" name="Slide Number Placeholder 3"/>
+          <p:cNvSpPr>
+            <a:spLocks noGrp="1"/>
+          </p:cNvSpPr>
+          <p:nvPr>
+            <p:ph type="sldNum" idx="5" sz="quarter"/>
+          </p:nvPr>
+        </p:nvSpPr>
+        <p:spPr/>
+      </p:sp>
+    </p:spTree>
+  </p:cSld>
+  <p:clrMapOvr>
+    <a:masterClrMapping/>
+  </p:clrMapOvr>
+</p:notes>
+</file>
+
+<file path=ppt/notesSlides/notesSlide36.xml><?xml version="1.0" encoding="utf-8"?>
+<p:notes xmlns:a="http://schemas.openxmlformats.org/drawingml/2006/main" xmlns:p="http://schemas.openxmlformats.org/presentationml/2006/main" xmlns:r="http://schemas.openxmlformats.org/officeDocument/2006/relationships">
+  <p:cSld>
+    <p:spTree>
+      <p:nvGrpSpPr>
+        <p:cNvPr id="1" name=""/>
+        <p:cNvGrpSpPr/>
+        <p:nvPr/>
+      </p:nvGrpSpPr>
+      <p:grpSpPr>
+        <a:xfrm>
+          <a:off x="0" y="0"/>
+          <a:ext cx="0" cy="0"/>
+          <a:chOff x="0" y="0"/>
+          <a:chExt cx="0" cy="0"/>
+        </a:xfrm>
+      </p:grpSpPr>
+      <p:sp>
+        <p:nvSpPr>
+          <p:cNvPr id="2" name="Slide Image Placeholder 1"/>
+          <p:cNvSpPr>
+            <a:spLocks noGrp="1"/>
+          </p:cNvSpPr>
+          <p:nvPr>
+            <p:ph type="sldImg" idx="2"/>
+          </p:nvPr>
+        </p:nvSpPr>
+        <p:spPr/>
+      </p:sp>
+      <p:sp>
+        <p:nvSpPr>
+          <p:cNvPr id="3" name="Notes Placeholder 2"/>
+          <p:cNvSpPr>
+            <a:spLocks noGrp="1"/>
+          </p:cNvSpPr>
+          <p:nvPr>
+            <p:ph type="body" idx="3" sz="quarter"/>
+          </p:nvPr>
+        </p:nvSpPr>
+        <p:spPr/>
+        <p:txBody>
+          <a:bodyPr/>
+          <a:lstStyle/>
+          <a:p>
+            <a:r>
+              <a:t>이 뷰의 트랜잭션 ID는 Primary에서 붙은 ID라서 Logical Standby의 V$TRANSACTION과 연결되지 않습니다. 공식 교재가 따로 짚는 부분입니다. 적용이 느려졌을 때 이 뷰에 오래 머무는 트랜잭션이 있다면 그것이 원인일 가능성이 큽니다. Primary에서 한 문장으로 수백만 행을 바꾼 일괄 갱신은 Logical Standby에서 행 단위 SQL로 풀려 실행되므로 훨씬 오래 걸립니다. PRIMARY_XID로 Primary 쪽 작업을 찾아 업무 단위로 추적합니다.</a:t>
+            </a:r>
+          </a:p>
+        </p:txBody>
+      </p:sp>
+      <p:sp>
+        <p:nvSpPr>
+          <p:cNvPr id="4" name="Slide Number Placeholder 3"/>
+          <p:cNvSpPr>
+            <a:spLocks noGrp="1"/>
+          </p:cNvSpPr>
+          <p:nvPr>
+            <p:ph type="sldNum" idx="5" sz="quarter"/>
+          </p:nvPr>
+        </p:nvSpPr>
+        <p:spPr/>
+      </p:sp>
+    </p:spTree>
+  </p:cSld>
+  <p:clrMapOvr>
+    <a:masterClrMapping/>
+  </p:clrMapOvr>
+</p:notes>
+</file>
+
+<file path=ppt/notesSlides/notesSlide37.xml><?xml version="1.0" encoding="utf-8"?>
+<p:notes xmlns:a="http://schemas.openxmlformats.org/drawingml/2006/main" xmlns:p="http://schemas.openxmlformats.org/presentationml/2006/main" xmlns:r="http://schemas.openxmlformats.org/officeDocument/2006/relationships">
+  <p:cSld>
+    <p:spTree>
+      <p:nvGrpSpPr>
+        <p:cNvPr id="1" name=""/>
+        <p:cNvGrpSpPr/>
+        <p:nvPr/>
+      </p:nvGrpSpPr>
+      <p:grpSpPr>
+        <a:xfrm>
+          <a:off x="0" y="0"/>
+          <a:ext cx="0" cy="0"/>
+          <a:chOff x="0" y="0"/>
+          <a:chExt cx="0" cy="0"/>
+        </a:xfrm>
+      </p:grpSpPr>
+      <p:sp>
+        <p:nvSpPr>
+          <p:cNvPr id="2" name="Slide Image Placeholder 1"/>
+          <p:cNvSpPr>
+            <a:spLocks noGrp="1"/>
+          </p:cNvSpPr>
+          <p:nvPr>
+            <p:ph type="sldImg" idx="2"/>
+          </p:nvPr>
+        </p:nvSpPr>
+        <p:spPr/>
+      </p:sp>
+      <p:sp>
+        <p:nvSpPr>
+          <p:cNvPr id="3" name="Notes Placeholder 2"/>
+          <p:cNvSpPr>
+            <a:spLocks noGrp="1"/>
+          </p:cNvSpPr>
+          <p:nvPr>
+            <p:ph type="body" idx="3" sz="quarter"/>
+          </p:nvPr>
+        </p:nvSpPr>
+        <p:spPr/>
+        <p:txBody>
+          <a:bodyPr/>
+          <a:lstStyle/>
+          <a:p>
+            <a:r>
+              <a:t>SQL Apply는 실패한 문장을 만나면 멈추고, 그 문장과 오류를 이 뷰에 남깁니다. 데이터 파일 경로가 없어 DDL이 실패한 경우처럼 원인을 고친 뒤 해당 작업을 Standby에서 직접 수행했다면, 실패 트랜잭션을 건너뛰고 적용을 재개합니다. 건너뛰기는 편리하지만 그 트랜잭션의 결과를 사람이 대신 맞췄다는 선언이라, 무엇을 건너뛰고 어떻게 보정했는지 기록을 남겨야 합니다. 같은 유형이 반복되면 12장에서 본 SKIP 규칙을 검토합니다.</a:t>
+            </a:r>
+          </a:p>
+        </p:txBody>
+      </p:sp>
+      <p:sp>
+        <p:nvSpPr>
+          <p:cNvPr id="4" name="Slide Number Placeholder 3"/>
+          <p:cNvSpPr>
+            <a:spLocks noGrp="1"/>
+          </p:cNvSpPr>
+          <p:nvPr>
+            <p:ph type="sldNum" idx="5" sz="quarter"/>
+          </p:nvPr>
+        </p:nvSpPr>
+        <p:spPr/>
+      </p:sp>
+    </p:spTree>
+  </p:cSld>
+  <p:clrMapOvr>
+    <a:masterClrMapping/>
+  </p:clrMapOvr>
+</p:notes>
+</file>
+
+<file path=ppt/notesSlides/notesSlide38.xml><?xml version="1.0" encoding="utf-8"?>
+<p:notes xmlns:a="http://schemas.openxmlformats.org/drawingml/2006/main" xmlns:p="http://schemas.openxmlformats.org/presentationml/2006/main" xmlns:r="http://schemas.openxmlformats.org/officeDocument/2006/relationships">
+  <p:cSld>
+    <p:spTree>
+      <p:nvGrpSpPr>
+        <p:cNvPr id="1" name=""/>
+        <p:cNvGrpSpPr/>
+        <p:nvPr/>
+      </p:nvGrpSpPr>
+      <p:grpSpPr>
+        <a:xfrm>
+          <a:off x="0" y="0"/>
+          <a:ext cx="0" cy="0"/>
+          <a:chOff x="0" y="0"/>
+          <a:chExt cx="0" cy="0"/>
+        </a:xfrm>
+      </p:grpSpPr>
+      <p:sp>
+        <p:nvSpPr>
+          <p:cNvPr id="2" name="Slide Image Placeholder 1"/>
+          <p:cNvSpPr>
+            <a:spLocks noGrp="1"/>
+          </p:cNvSpPr>
+          <p:nvPr>
+            <p:ph type="sldImg" idx="2"/>
+          </p:nvPr>
+        </p:nvSpPr>
+        <p:spPr/>
+      </p:sp>
+      <p:sp>
+        <p:nvSpPr>
+          <p:cNvPr id="3" name="Notes Placeholder 2"/>
+          <p:cNvSpPr>
+            <a:spLocks noGrp="1"/>
+          </p:cNvSpPr>
+          <p:nvPr>
+            <p:ph type="body" idx="3" sz="quarter"/>
+          </p:nvPr>
+        </p:nvSpPr>
+        <p:spPr/>
+        <p:txBody>
+          <a:bodyPr/>
+          <a:lstStyle/>
+          <a:p>
+            <a:r>
+              <a:t>역할 전환 뒤에는 같은 서버, 같은 쿼리가 완전히 다른 의미의 값을 냅니다. 어제까지 Primary였던 서버에서 V$ARCHIVE_DEST를 조회하는 습관이 남아 있으면 엉뚱한 결론을 내립니다. 또 ERROR 열이나 이력 뷰에는 이미 해결된 오류가 남아 있는 경우가 많아서, 시각을 보지 않고 번호만 보면 지나간 사건을 붙잡고 시간을 씁니다. 사고 분석에 필요한 메시지는 재기동하면 사라지므로 경고 로그나 점검 결과 테이블에 남겨 둡니다.</a:t>
             </a:r>
           </a:p>
         </p:txBody>
@@ -2365,7 +2795,7 @@
           <a:lstStyle/>
           <a:p>
             <a:r>
-              <a:t>14장에서 본 boston Online Redo Log Files: Not Cleared 도 같은 맥락이다. 쓰이지 않았으니 정리할 것도 없다. 여기서 오해가 자주 생긴다. Standby 의 CURRENT 시퀀스가 0인데 괜찮으냐는 질문이다. 괜찮다. 이 뷰가 아니라 V$STANDBY_LOG 를 봐야 한다. 뷰를 잘못 골라 정상을 이상으로 읽는 것이 이 장에서 반복해 다루는 함정이다.</a:t>
+              <a:t>PROTECTION_MODE와 PROTECTION_LEVEL의 차이가 가장 쓸모 있는 부분입니다. Maximum Availability로 설정해 두었더라도 SYNC Standby와의 동기화가 깨지면 PROTECTION_LEVEL이 RESYNCHRONIZATION으로 떨어집니다. 설정은 그대로라 파라미터만 보면 아무 문제가 없어 보입니다. 두 열을 비교해서 다르면 설정만큼 보호받지 못하는 상태입니다. FORCE_LOGGING도 같이 보는 이유는, 누군가 NO로 바꾸면 NOLOGGING 작업의 변경이 Standby에 전달되지 않기 때문입니다.</a:t>
             </a:r>
           </a:p>
         </p:txBody>
@@ -2435,7 +2865,7 @@
           <a:lstStyle/>
           <a:p>
             <a:r>
-              <a:t>chicago 는 손으로 만들었고 boston 은 OMF 가 만들었다. 동작에는 지장이 없지만 알아 두어야 한다. 전환하면 boston 이 Primary 가 되고 그때는 온라인 리두가 이중화된 상태로 운영된다. 반대로 chicago 는 단일 멤버다. 13장에서 손으로 관리하던 시절의 표기 불일치를 본 것과 같은 종류의 관찰이며, 구성의 이력이 파일 목록에 남는다.</a:t>
+              <a:t>Primary 쪽 뷰는 모두 "보내는 일"과 관련됩니다. 이 가운데 V$ARCHIVE_DEST_STATUS는 Primary에 접속한 채로 Standby의 적용 상태와 갭 상태를 보여 준다는 점에서 특히 쓸모가 있습니다. Standby 서버에 접속할 권한이 없는 운영자도 적용이 멈췄는지를 여기서 확인할 수 있습니다. 응답 시간 히스토그램은 SYNC 목적지에만 의미가 있으니 ASYNC 구성에서는 비어 있어도 이상하지 않습니다.</a:t>
             </a:r>
           </a:p>
         </p:txBody>
@@ -2505,7 +2935,7 @@
           <a:lstStyle/>
           <a:p>
             <a:r>
-              <a:t>ACTIVE 인 그룹의 SEQUENCE# 74 가 Primary 의 CURRENT 시퀀스와 같다. 두 값을 비교하는 것이 판정의 핵심이다. USED 8,977KB 는 200MB 중 약 9MB 를 썼다는 뜻이며 14장의 SendQEntries 가 보여 준 SIZE 6911KB 와 같은 성격의 값이다. 이 뷰가 이 장에서 가장 중요한 지표가 되는 이유는 실습 03 에서 드러난다.</a:t>
+              <a:t>Standby 쪽 점검은 프로세스부터 봅니다. managed recovery 역할이 없다면 다른 지표는 볼 필요도 없이 적용이 멈춘 상태입니다. 그다음 SRL이 리두를 받고 있는지, 갭이 있는지, 얼마나 늦었는지 순서로 내려갑니다. Far Sync는 받아서 넘기기만 하므로 수신 쪽 뷰와 목적지 쪽 뷰를 함께 보고, 적용 관련 뷰는 비어 있습니다. Logical Standby는 적용 관련 뷰가 완전히 다른 계열이라 15.9절에서 따로 봅니다.</a:t>
             </a:r>
           </a:p>
         </p:txBody>
@@ -2575,7 +3005,7 @@
           <a:lstStyle/>
           <a:p>
             <a:r>
-              <a:t>이것이 이 장에서 반복되는 함정의 첫 사례다. 오류가 나지 않는다. 뷰도 있고 권한도 있으며 행도 나온다. 그런데 값의 의미가 다르다. 감시 스크립트가 SRL_ACTIVE=0 을 받고 심각으로 판정하면 Primary 에서 상시 오경보가 난다. 스크립트는 V$DATABASE 로 역할을 먼저 판정하고 분기해야 한다. 실습 06 에서 이 함정을 실제로 재현한다.</a:t>
+              <a:t>no rows selected를 보고 정상이라고 판단했다가 실은 엉뚱한 쪽에서 조회했던 경우가 꽤 많습니다. 갭 뷰를 Primary에서 보면 언제나 비어 있고, 지연 지표도 Standby가 받은 정보로 계산하므로 Primary에서는 채워지지 않습니다. 또 물리 Standby는 대개 마운트 상태라 DBA_ 계열 딕셔너리 뷰를 조회할 수 없습니다. V$ 뷰는 제어 파일과 메모리에서 오기 때문에 마운트 상태에서도 동작하고, 그래서 점검 스크립트는 V$ 뷰만으로 짜야 합니다.</a:t>
             </a:r>
           </a:p>
         </p:txBody>
@@ -2645,7 +3075,7 @@
           <a:lstStyle/>
           <a:p>
             <a:r>
-              <a:t>둘 다 STATUS 열을 가지고 있어 혼동하기 쉽다. VALID_NOW 가 있으면 V$ARCHIVE_DEST 다. 로컬 목적지의 RECOVERY_MODE 가 IDLE 인 것도 읽어 둔다. 로컬에는 적용이라는 개념이 없기 때문이며 TYPE 도 LOCAL 이다. 원격인 2번만 PHYSICAL 이고 MANAGED REAL TIME APPLY 다. 같은 목적지를 두 뷰가 다르게 표현한다는 점도 기억한다.</a:t>
+              <a:t>STATUS 값 가운데 실무에서 자주 만나는 것은 ERROR와 DEFERRED입니다. DEFERRED는 누군가 LOG_ARCHIVE_DEST_STATE_n을 DEFER로 바꿔 놓은 상태인데, 유지 보수 때 꺼 두고 다시 켜는 것을 잊는 경우가 흔합니다. 이때는 오류도 경보도 없이 전송만 멈춥니다. BAD PARAM은 파라미터 문자열을 해석하지 못한 상태라 속성 철자부터 봅니다. 31개 행이 모두 나오니 조회할 때는 원격 목적지만 걸러 보는 편이 읽기 쉽습니다.</a:t>
             </a:r>
           </a:p>
         </p:txBody>
@@ -2715,7 +3145,7 @@
           <a:lstStyle/>
           <a:p>
             <a:r>
-              <a:t>7장에서 VALID_FOR=(online_logfiles, all_roles) 로 한 덩어리로 쓴 것이 뷰에서는 두 열로 나뉜다. 13장에서 Broker 가 인수하며 만든 설정이 그대로 보인다. 1번이 SYNCHRONOUS 인 것에 놀라지 않는다. 로컬 디스크 쓰기이므로 네트워크 전송이 아니며 여기서의 동기는 프로세스가 기다린다는 뜻일 뿐이다. 보호 모드와 연결되는 열은 AFFIRM 이며 실측은 NO 였다.</a:t>
+              <a:t>공식 교재도 Standby가 리두를 받지 못하면 V$ARCHIVE_DEST의 ERROR 열을 먼저 보라고 합니다. 여기서 많이 당황하는 지점이 재시도 대기입니다. 리스너를 다시 올렸는데도 STATUS가 몇 분째 ERROR로 남아 있으면, 고친 게 안 먹혔다고 생각하고 다른 설정을 건드리기 시작합니다. 실패한 목적지는 REOPEN_SECS가 지나야 다시 시도합니다. 기다리거나, 목적지 상태를 ENABLE로 다시 설정해 재시도를 앞당기면 됩니다.</a:t>
             </a:r>
           </a:p>
         </p:txBody>
@@ -5965,7 +6395,7 @@
                 </a:solidFill>
                 <a:latin typeface="맑은 고딕"/>
               </a:rPr>
-              <a:t>요약 아래층으로 내려간다</a:t>
+              <a:t>요약 너머의 숫자와 ORA- 번호를 읽는다</a:t>
             </a:r>
           </a:p>
         </p:txBody>
@@ -6004,7 +6434,7 @@
                 </a:solidFill>
                 <a:latin typeface="맑은 고딕"/>
               </a:rPr>
-              <a:t>원자료를 직접 읽는 자리</a:t>
+              <a:t>제15장</a:t>
             </a:r>
           </a:p>
         </p:txBody>
@@ -6105,7 +6535,7 @@
                 </a:solidFill>
                 <a:latin typeface="맑은 고딕"/>
               </a:rPr>
-              <a:t>양쪽 구성이 다르다</a:t>
+              <a:t>Primary에서 보는 뷰</a:t>
             </a:r>
           </a:p>
         </p:txBody>
@@ -6144,7 +6574,7 @@
                 </a:solidFill>
                 <a:latin typeface="맑은 고딕"/>
               </a:rPr>
-              <a:t>OMF 의 흔적</a:t>
+              <a:t>보낸 결과와 상대편의 상태</a:t>
             </a:r>
           </a:p>
         </p:txBody>
@@ -6183,7 +6613,7 @@
                 </a:solidFill>
                 <a:latin typeface="맑은 고딕"/>
               </a:rPr>
-              <a:t>•  boston `V$LOGFILE` — **14행** (그룹당 멤버 둘)</a:t>
+              <a:t>•  V$ARCHIVE_DEST: 설정, 상태, 마지막 오류</a:t>
             </a:r>
           </a:p>
           <a:p>
@@ -6199,7 +6629,7 @@
                 </a:solidFill>
                 <a:latin typeface="맑은 고딕"/>
               </a:rPr>
-              <a:t>•  chicago — **7행** (그룹당 하나)</a:t>
+              <a:t>•  V$ARCHIVE_DEST_STATUS: 목적지 너머 Standby 상태</a:t>
             </a:r>
           </a:p>
           <a:p>
@@ -6215,7 +6645,7 @@
                 </a:solidFill>
                 <a:latin typeface="맑은 고딕"/>
               </a:rPr>
-              <a:t>•  6장에서 `DB_CREATE_ONLINE_LOG_DEST_1`·`_2` 를 지정한 결과</a:t>
+              <a:t>•  V$ARCHIVED_LOG: 목적지별 아카이브 기록</a:t>
             </a:r>
           </a:p>
           <a:p>
@@ -6231,7 +6661,23 @@
                 </a:solidFill>
                 <a:latin typeface="맑은 고딕"/>
               </a:rPr>
-              <a:t>•  **역할이 바뀌면 다중화 수준도 바뀐다**</a:t>
+              <a:t>•  V$REDO_DEST_RESP_HISTOGRAM: SYNC 응답 시간</a:t>
+            </a:r>
+          </a:p>
+          <a:p>
+            <a:pPr algn="l">
+              <a:spcAft>
+                <a:spcPts val="1000"/>
+              </a:spcAft>
+            </a:pPr>
+            <a:r>
+              <a:rPr sz="1700" b="0">
+                <a:solidFill>
+                  <a:srgbClr val="222222"/>
+                </a:solidFill>
+                <a:latin typeface="맑은 고딕"/>
+              </a:rPr>
+              <a:t>•  V$DATAGUARD_STATUS: 최근 전송 사건</a:t>
             </a:r>
           </a:p>
         </p:txBody>
@@ -6332,7 +6778,7 @@
                 </a:solidFill>
                 <a:latin typeface="맑은 고딕"/>
               </a:rPr>
-              <a:t>SRL 이 진짜 정보다</a:t>
+              <a:t>Standby에서 보는 뷰</a:t>
             </a:r>
           </a:p>
         </p:txBody>
@@ -6371,7 +6817,7 @@
                 </a:solidFill>
                 <a:latin typeface="맑은 고딕"/>
               </a:rPr>
-              <a:t>하나만 ACTIVE</a:t>
+              <a:t>받았는가, 적용했는가, 얼마나 늦었는가</a:t>
             </a:r>
           </a:p>
         </p:txBody>
@@ -6410,7 +6856,7 @@
                 </a:solidFill>
                 <a:latin typeface="맑은 고딕"/>
               </a:rPr>
-              <a:t>•  실측 — 그룹 4가 `ACTIVE`, 시퀀스 **74**, `USED` **8,977KB**</a:t>
+              <a:t>•  V$DATAGUARD_PROCESS: 수신·적용 역할과 ACTION</a:t>
             </a:r>
           </a:p>
           <a:p>
@@ -6426,7 +6872,7 @@
                 </a:solidFill>
                 <a:latin typeface="맑은 고딕"/>
               </a:rPr>
-              <a:t>•  나머지 셋은 `UNASSIGNED`</a:t>
+              <a:t>•  V$STANDBY_LOG: SRL이 리두를 받는가</a:t>
             </a:r>
           </a:p>
           <a:p>
@@ -6442,7 +6888,7 @@
                 </a:solidFill>
                 <a:latin typeface="맑은 고딕"/>
               </a:rPr>
-              <a:t>•  **`ACTIVE` 가 정확히 하나**여야 한다</a:t>
+              <a:t>•  V$DATAGUARD_STATS, V$ARCHIVE_GAP</a:t>
             </a:r>
           </a:p>
           <a:p>
@@ -6458,7 +6904,23 @@
                 </a:solidFill>
                 <a:latin typeface="맑은 고딕"/>
               </a:rPr>
-              <a:t>•  0개면 리두가 오지 않는다. 2개 이상이면 아카이버 확인</a:t>
+              <a:t>•  V$RECOVERY_PROGRESS: 적용 속도</a:t>
+            </a:r>
+          </a:p>
+          <a:p>
+            <a:pPr algn="l">
+              <a:spcAft>
+                <a:spcPts val="1000"/>
+              </a:spcAft>
+            </a:pPr>
+            <a:r>
+              <a:rPr sz="1700" b="0">
+                <a:solidFill>
+                  <a:srgbClr val="222222"/>
+                </a:solidFill>
+                <a:latin typeface="맑은 고딕"/>
+              </a:rPr>
+              <a:t>•  V$STANDBY_EVENT_HISTOGRAM: 지연의 분포</a:t>
             </a:r>
           </a:p>
         </p:txBody>
@@ -6559,7 +7021,7 @@
                 </a:solidFill>
                 <a:latin typeface="맑은 고딕"/>
               </a:rPr>
-              <a:t>Primary 의 SRL</a:t>
+              <a:t>빈 결과를 읽는 법</a:t>
             </a:r>
           </a:p>
         </p:txBody>
@@ -6598,7 +7060,7 @@
                 </a:solidFill>
                 <a:latin typeface="맑은 고딕"/>
               </a:rPr>
-              <a:t>조회는 되지만 값이 없다</a:t>
+              <a:t>정상이라서 빈 것인가, 잘못 물어서 빈 것인가</a:t>
             </a:r>
           </a:p>
         </p:txBody>
@@ -6637,7 +7099,7 @@
                 </a:solidFill>
                 <a:latin typeface="맑은 고딕"/>
               </a:rPr>
-              <a:t>•  넷 다 `UNASSIGNED`, `SEQUENCE# 0`</a:t>
+              <a:t>•  Standby의 V$ARCHIVE_GAP이 비면 갭 없음</a:t>
             </a:r>
           </a:p>
           <a:p>
@@ -6653,7 +7115,7 @@
                 </a:solidFill>
                 <a:latin typeface="맑은 고딕"/>
               </a:rPr>
-              <a:t>•  Primary 는 SRL 을 쓰지 않는다 — 전환 후를 위해 있다</a:t>
+              <a:t>•  Primary의 V$ARCHIVE_GAP은 원래 비어 있음</a:t>
             </a:r>
           </a:p>
           <a:p>
@@ -6669,7 +7131,7 @@
                 </a:solidFill>
                 <a:latin typeface="맑은 고딕"/>
               </a:rPr>
-              <a:t>•  **뷰가 조회된다는 것과 값이 있다는 것은 다르다**</a:t>
+              <a:t>•  Primary의 V$DATAGUARD_STATS는 지표가 비어 있음</a:t>
             </a:r>
           </a:p>
           <a:p>
@@ -6685,7 +7147,23 @@
                 </a:solidFill>
                 <a:latin typeface="맑은 고딕"/>
               </a:rPr>
-              <a:t>•  감시가 전부 `UNASSIGNED` 를 받았다면 **조회한 쪽**을 먼저 의심</a:t>
+              <a:t>•  마운트 상태 Standby는 DBA_ 뷰를 못 씀</a:t>
+            </a:r>
+          </a:p>
+          <a:p>
+            <a:pPr algn="l">
+              <a:spcAft>
+                <a:spcPts val="1000"/>
+              </a:spcAft>
+            </a:pPr>
+            <a:r>
+              <a:rPr sz="1700" b="0">
+                <a:solidFill>
+                  <a:srgbClr val="222222"/>
+                </a:solidFill>
+                <a:latin typeface="맑은 고딕"/>
+              </a:rPr>
+              <a:t>•  점검 스크립트는 V$ 뷰만으로 구성</a:t>
             </a:r>
           </a:p>
         </p:txBody>
@@ -6786,7 +7264,7 @@
                 </a:solidFill>
                 <a:latin typeface="맑은 고딕"/>
               </a:rPr>
-              <a:t>15.3</a:t>
+              <a:t>15.4</a:t>
             </a:r>
           </a:p>
         </p:txBody>
@@ -6825,7 +7303,7 @@
                 </a:solidFill>
                 <a:latin typeface="맑은 고딕"/>
               </a:rPr>
-              <a:t>아카이브 목적지</a:t>
+              <a:t>전송 경로를 읽는 뷰</a:t>
             </a:r>
           </a:p>
         </p:txBody>
@@ -6908,7 +7386,7 @@
                 </a:solidFill>
                 <a:latin typeface="맑은 고딕"/>
               </a:rPr>
-              <a:t>•  이름이 비슷한 두 뷰</a:t>
+              <a:t>•  V$ARCHIVE_DEST의 STATUS와 ERROR</a:t>
             </a:r>
           </a:p>
           <a:p>
@@ -6924,7 +7402,7 @@
                 </a:solidFill>
                 <a:latin typeface="맑은 고딕"/>
               </a:rPr>
-              <a:t>•  VALID_NOW 읽기</a:t>
+              <a:t>•  VALID_NOW 판정</a:t>
             </a:r>
           </a:p>
           <a:p>
@@ -6940,7 +7418,7 @@
                 </a:solidFill>
                 <a:latin typeface="맑은 고딕"/>
               </a:rPr>
-              <a:t>•  APPLIED 의 함정</a:t>
+              <a:t>•  V$ARCHIVE_DEST_STATUS, SRL, 응답 시간 분포</a:t>
             </a:r>
           </a:p>
         </p:txBody>
@@ -7041,7 +7519,7 @@
                 </a:solidFill>
                 <a:latin typeface="맑은 고딕"/>
               </a:rPr>
-              <a:t>두 뷰, 다른 관점</a:t>
+              <a:t>V$ARCHIVE_DEST의 STATUS</a:t>
             </a:r>
           </a:p>
         </p:txBody>
@@ -7080,7 +7558,7 @@
                 </a:solidFill>
                 <a:latin typeface="맑은 고딕"/>
               </a:rPr>
-              <a:t>구별하는 법</a:t>
+              <a:t>한 단어로 요약된 목적지 상태</a:t>
             </a:r>
           </a:p>
         </p:txBody>
@@ -7119,7 +7597,7 @@
                 </a:solidFill>
                 <a:latin typeface="맑은 고딕"/>
               </a:rPr>
-              <a:t>•  `V$ARCHIVE_DEST` — **설정**이 어떻게 되어 있는가</a:t>
+              <a:t>•  VALID, INACTIVE, DEFERRED, ERROR</a:t>
             </a:r>
           </a:p>
           <a:p>
@@ -7135,7 +7613,7 @@
                 </a:solidFill>
                 <a:latin typeface="맑은 고딕"/>
               </a:rPr>
-              <a:t>•  `V$ARCHIVE_DEST_STATUS` — **지금** 어떤 상태인가</a:t>
+              <a:t>•  DISABLED, BAD PARAM, ALTERNATE, FULL</a:t>
             </a:r>
           </a:p>
           <a:p>
@@ -7151,7 +7629,7 @@
                 </a:solidFill>
                 <a:latin typeface="맑은 고딕"/>
               </a:rPr>
-              <a:t>•  구별법 — `RECOVERY_MODE` 가 있으면 `_STATUS`</a:t>
+              <a:t>•  19c는 31개 목적지가 모두 행으로 나옴</a:t>
             </a:r>
           </a:p>
           <a:p>
@@ -7167,7 +7645,7 @@
                 </a:solidFill>
                 <a:latin typeface="맑은 고딕"/>
               </a:rPr>
-              <a:t>•  실측 `dest_id=1` 의 `RECOVERY_MODE` = **IDLE**</a:t>
+              <a:t>•  TARGET='STANDBY'로 원격 목적지만 거름</a:t>
             </a:r>
           </a:p>
         </p:txBody>
@@ -7268,7 +7746,7 @@
                 </a:solidFill>
                 <a:latin typeface="맑은 고딕"/>
               </a:rPr>
-              <a:t>VALID_FOR 가 열로 분해된다</a:t>
+              <a:t>ERROR 열과 재시도</a:t>
             </a:r>
           </a:p>
         </p:txBody>
@@ -7307,7 +7785,7 @@
                 </a:solidFill>
                 <a:latin typeface="맑은 고딕"/>
               </a:rPr>
-              <a:t>7장의 그것</a:t>
+              <a:t>원인은 ORA- 번호로 남는다</a:t>
             </a:r>
           </a:p>
         </p:txBody>
@@ -7346,7 +7824,7 @@
                 </a:solidFill>
                 <a:latin typeface="맑은 고딕"/>
               </a:rPr>
-              <a:t>•  `TARGET` — 1번 `PRIMARY`(로컬), 2번 `STANDBY`(원격)</a:t>
+              <a:t>•  ERROR: 마지막 오류의 번호와 메시지</a:t>
             </a:r>
           </a:p>
           <a:p>
@@ -7362,7 +7840,7 @@
                 </a:solidFill>
                 <a:latin typeface="맑은 고딕"/>
               </a:rPr>
-              <a:t>•  `VALID_TYPE` — 2번은 `ONLINE_LOGFILE`</a:t>
+              <a:t>•  FAIL_DATE, FAIL_SEQUENCE: 언제, 몇 번 로그</a:t>
             </a:r>
           </a:p>
           <a:p>
@@ -7378,7 +7856,7 @@
                 </a:solidFill>
                 <a:latin typeface="맑은 고딕"/>
               </a:rPr>
-              <a:t>•  `VALID_ROLE` — 둘 다 `ALL_ROLES`</a:t>
+              <a:t>•  REOPEN_SECS: 재시도까지 대기(기본 300초)</a:t>
             </a:r>
           </a:p>
           <a:p>
@@ -7394,7 +7872,7 @@
                 </a:solidFill>
                 <a:latin typeface="맑은 고딕"/>
               </a:rPr>
-              <a:t>•  `AFFIRM` **NO** / 1번 `TRANSMIT_MODE` **SYNCHRONOUS**</a:t>
+              <a:t>•  MAX_FAILURE: 재시도 한도</a:t>
             </a:r>
           </a:p>
         </p:txBody>
@@ -7495,7 +7973,7 @@
                 </a:solidFill>
                 <a:latin typeface="맑은 고딕"/>
               </a:rPr>
-              <a:t>VALID_NOW 읽기</a:t>
+              <a:t>VALID_TYPE, VALID_ROLE, VALID_NOW</a:t>
             </a:r>
           </a:p>
         </p:txBody>
@@ -7534,7 +8012,7 @@
                 </a:solidFill>
                 <a:latin typeface="맑은 고딕"/>
               </a:rPr>
-              <a:t>UNKNOWN 이 29개</a:t>
+              <a:t>설정이 틀린 것과 지금 안 쓰이는 것을 구분</a:t>
             </a:r>
           </a:p>
         </p:txBody>
@@ -7573,7 +8051,7 @@
                 </a:solidFill>
                 <a:latin typeface="맑은 고딕"/>
               </a:rPr>
-              <a:t>•  이 뷰는 목적지 **31개를 전부** 보여 준다</a:t>
+              <a:t>•  YES: 현재 역할에 맞게 쓰이는 중</a:t>
             </a:r>
           </a:p>
           <a:p>
@@ -7589,7 +8067,7 @@
                 </a:solidFill>
                 <a:latin typeface="맑은 고딕"/>
               </a:rPr>
-              <a:t>•  쓰지 않는 목적지는 설정이 비어 `UNKNOWN`</a:t>
+              <a:t>•  WRONG VALID_TYPE: 해당 로그 유형이 없음</a:t>
             </a:r>
           </a:p>
           <a:p>
@@ -7605,7 +8083,7 @@
                 </a:solidFill>
                 <a:latin typeface="맑은 고딕"/>
               </a:rPr>
-              <a:t>•  10장 Far Sync 설정 직후에도 `UNKNOWN` 이었다</a:t>
+              <a:t>•  WRONG VALID_ROLE: 현재 역할에서 쓰이지 않음</a:t>
             </a:r>
           </a:p>
           <a:p>
@@ -7621,7 +8099,23 @@
                 </a:solidFill>
                 <a:latin typeface="맑은 고딕"/>
               </a:rPr>
-              <a:t>•  **`DESTINATION` 이 비었는지 먼저 확인한다**</a:t>
+              <a:t>•  UNKNOWN: 목적지 미정의</a:t>
+            </a:r>
+          </a:p>
+          <a:p>
+            <a:pPr algn="l">
+              <a:spcAft>
+                <a:spcPts val="1000"/>
+              </a:spcAft>
+            </a:pPr>
+            <a:r>
+              <a:rPr sz="1700" b="0">
+                <a:solidFill>
+                  <a:srgbClr val="222222"/>
+                </a:solidFill>
+                <a:latin typeface="맑은 고딕"/>
+              </a:rPr>
+              <a:t>•  Primary와 Standby의 목적지 구성은 비대칭</a:t>
             </a:r>
           </a:p>
         </p:txBody>
@@ -7722,7 +8216,7 @@
                 </a:solidFill>
                 <a:latin typeface="맑은 고딕"/>
               </a:rPr>
-              <a:t>프로세스를 읽는다</a:t>
+              <a:t>V$ARCHIVE_DEST_STATUS</a:t>
             </a:r>
           </a:p>
         </p:txBody>
@@ -7761,7 +8255,7 @@
                 </a:solidFill>
                 <a:latin typeface="맑은 고딕"/>
               </a:rPr>
-              <a:t>실시간 적용의 모습</a:t>
+              <a:t>Primary에서 목적지 너머를 본다</a:t>
             </a:r>
           </a:p>
         </p:txBody>
@@ -7800,7 +8294,7 @@
                 </a:solidFill>
                 <a:latin typeface="맑은 고딕"/>
               </a:rPr>
-              <a:t>•  `RFS`(LGWR) 시퀀스 **74** 블록 **17964**</a:t>
+              <a:t>•  DATABASE_MODE: 상대편이 마운트인지 읽기 전용인지</a:t>
             </a:r>
           </a:p>
           <a:p>
@@ -7816,7 +8310,7 @@
                 </a:solidFill>
                 <a:latin typeface="맑은 고딕"/>
               </a:rPr>
-              <a:t>•  `MRP0` 시퀀스 **74** 블록 **17964**</a:t>
+              <a:t>•  RECOVERY_MODE: IDLE이면 적용 중지</a:t>
             </a:r>
           </a:p>
           <a:p>
@@ -7832,7 +8326,7 @@
                 </a:solidFill>
                 <a:latin typeface="맑은 고딕"/>
               </a:rPr>
-              <a:t>•  **두 값이 같으면 받는 즉시 적용 중**</a:t>
+              <a:t>•  GAP_STATUS: NO GAP, RESOLVABLE, UNRESOLVABLE</a:t>
             </a:r>
           </a:p>
           <a:p>
@@ -7848,7 +8342,23 @@
                 </a:solidFill>
                 <a:latin typeface="맑은 고딕"/>
               </a:rPr>
-              <a:t>•  벌어지면 밀린 것 — **블록 단위로** 볼 수 있다</a:t>
+              <a:t>•  SRL, STANDBY_LOGFILE_COUNT</a:t>
+            </a:r>
+          </a:p>
+          <a:p>
+            <a:pPr algn="l">
+              <a:spcAft>
+                <a:spcPts val="1000"/>
+              </a:spcAft>
+            </a:pPr>
+            <a:r>
+              <a:rPr sz="1700" b="0">
+                <a:solidFill>
+                  <a:srgbClr val="222222"/>
+                </a:solidFill>
+                <a:latin typeface="맑은 고딕"/>
+              </a:rPr>
+              <a:t>•  APPLIED_SEQ#는 현재 순번보다 한두 개 뒤</a:t>
             </a:r>
           </a:p>
         </p:txBody>
@@ -7949,7 +8459,7 @@
                 </a:solidFill>
                 <a:latin typeface="맑은 고딕"/>
               </a:rPr>
-              <a:t>함정 ①</a:t>
+              <a:t>V$STANDBY_LOG로 SRL 읽기</a:t>
             </a:r>
           </a:p>
         </p:txBody>
@@ -7988,7 +8498,7 @@
                 </a:solidFill>
                 <a:latin typeface="맑은 고딕"/>
               </a:rPr>
-              <a:t>APPLIED 열</a:t>
+              <a:t>리두가 SRL을 거치고 있는가</a:t>
             </a:r>
           </a:p>
         </p:txBody>
@@ -8027,7 +8537,7 @@
                 </a:solidFill>
                 <a:latin typeface="맑은 고딕"/>
               </a:rPr>
-              <a:t>•  같은 시퀀스가 **두 줄씩** 나온다</a:t>
+              <a:t>•  STATUS: UNASSIGNED와 ACTIVE</a:t>
             </a:r>
           </a:p>
           <a:p>
@@ -8043,7 +8553,7 @@
                 </a:solidFill>
                 <a:latin typeface="맑은 고딕"/>
               </a:rPr>
-              <a:t>•  `dest_id=1` 은 **영원히 NO** — 로컬 아카이브다</a:t>
+              <a:t>•  ARCHIVED 값은 STATUS와 짝지어 해석</a:t>
             </a:r>
           </a:p>
           <a:p>
@@ -8059,7 +8569,7 @@
                 </a:solidFill>
                 <a:latin typeface="맑은 고딕"/>
               </a:rPr>
-              <a:t>•  `dest_id=2` 가 실제 적용 여부</a:t>
+              <a:t>•  쓰레드마다 ACTIVE 하나, SEQUENCE#가 현재 순번</a:t>
             </a:r>
           </a:p>
           <a:p>
@@ -8075,7 +8585,23 @@
                 </a:solidFill>
                 <a:latin typeface="맑은 고딕"/>
               </a:rPr>
-              <a:t>•  **`WHERE dest_id=2` 가 필수**</a:t>
+              <a:t>•  전부 UNASSIGNED면 SRL을 거치지 않는 중</a:t>
+            </a:r>
+          </a:p>
+          <a:p>
+            <a:pPr algn="l">
+              <a:spcAft>
+                <a:spcPts val="1000"/>
+              </a:spcAft>
+            </a:pPr>
+            <a:r>
+              <a:rPr sz="1700" b="0">
+                <a:solidFill>
+                  <a:srgbClr val="222222"/>
+                </a:solidFill>
+                <a:latin typeface="맑은 고딕"/>
+              </a:rPr>
+              <a:t>•  V$LOGFILE의 TYPE=STANDBY로 멤버 확인</a:t>
             </a:r>
           </a:p>
         </p:txBody>
@@ -8176,7 +8702,7 @@
                 </a:solidFill>
                 <a:latin typeface="맑은 고딕"/>
               </a:rPr>
-              <a:t>함정 ②</a:t>
+              <a:t>V$REDO_DEST_RESP_HISTOGRAM</a:t>
             </a:r>
           </a:p>
         </p:txBody>
@@ -8215,7 +8741,7 @@
                 </a:solidFill>
                 <a:latin typeface="맑은 고딕"/>
               </a:rPr>
-              <a:t>APPLIED_SEQ# 가 0</a:t>
+              <a:t>SYNC 응답 시간은 평균보다 분포로</a:t>
             </a:r>
           </a:p>
         </p:txBody>
@@ -8254,7 +8780,7 @@
                 </a:solidFill>
                 <a:latin typeface="맑은 고딕"/>
               </a:rPr>
-              <a:t>•  `ARCHIVED_SEQ#` 73 인데 `APPLIED_SEQ#` **0**</a:t>
+              <a:t>•  SYNC 목적지별 응답 시간 구간과 빈도</a:t>
             </a:r>
           </a:p>
           <a:p>
@@ -8270,7 +8796,7 @@
                 </a:solidFill>
                 <a:latin typeface="맑은 고딕"/>
               </a:rPr>
-              <a:t>•  적용이 멈춘 것이 **아니다**</a:t>
+              <a:t>•  정상: 0~1초 구간에 몰리고 긴 구간은 드묾</a:t>
             </a:r>
           </a:p>
           <a:p>
@@ -8286,7 +8812,7 @@
                 </a:solidFill>
                 <a:latin typeface="맑은 고딕"/>
               </a:rPr>
-              <a:t>•  **실시간 적용은 SRL 에서 직접 읽는다**</a:t>
+              <a:t>•  긴 구간 빈도 증가 = 네트워크·Standby I/O 흔들림</a:t>
             </a:r>
           </a:p>
           <a:p>
@@ -8302,7 +8828,23 @@
                 </a:solidFill>
                 <a:latin typeface="맑은 고딕"/>
               </a:rPr>
-              <a:t>•  근거 — `RECOVERY_MODE` = `MANAGED REAL TIME APPLY`</a:t>
+              <a:t>•  NET_TIMEOUT을 정하는 근거 자료</a:t>
+            </a:r>
+          </a:p>
+          <a:p>
+            <a:pPr algn="l">
+              <a:spcAft>
+                <a:spcPts val="1000"/>
+              </a:spcAft>
+            </a:pPr>
+            <a:r>
+              <a:rPr sz="1700" b="0">
+                <a:solidFill>
+                  <a:srgbClr val="222222"/>
+                </a:solidFill>
+                <a:latin typeface="맑은 고딕"/>
+              </a:rPr>
+              <a:t>•  인스턴스 기동 이후 누적, 기간은 스냅샷 차이로</a:t>
             </a:r>
           </a:p>
         </p:txBody>
@@ -8403,7 +8945,7 @@
                 </a:solidFill>
                 <a:latin typeface="맑은 고딕"/>
               </a:rPr>
-              <a:t>학습 목표 (Objectives)</a:t>
+              <a:t>학습 목표</a:t>
             </a:r>
           </a:p>
         </p:txBody>
@@ -8442,7 +8984,7 @@
                 </a:solidFill>
                 <a:latin typeface="맑은 고딕"/>
               </a:rPr>
-              <a:t>•  `V$LOG` · `V$LOGFILE` · `V$STANDBY_LOG` 의 STATUS 를 역할별로 해석한다.</a:t>
+              <a:t>•  SQL로 Data Guard를 감시하는 이유를 설명한다</a:t>
             </a:r>
           </a:p>
           <a:p>
@@ -8458,7 +9000,7 @@
                 </a:solidFill>
                 <a:latin typeface="맑은 고딕"/>
               </a:rPr>
-              <a:t>•  `V$ARCHIVE_DEST` 와 `V$ARCHIVE_DEST_STATUS` 의 관점 차이를 안다.</a:t>
+              <a:t>•  역할별로 볼 V$ 뷰를 구분한다</a:t>
             </a:r>
           </a:p>
           <a:p>
@@ -8474,7 +9016,7 @@
                 </a:solidFill>
                 <a:latin typeface="맑은 고딕"/>
               </a:rPr>
-              <a:t>•  `VALID_NOW` · `VALID_TYPE` · `VALID_ROLE` 로 목적지를 판정한다.</a:t>
+              <a:t>•  전송 경로와 적용 경로의 상태를 판정한다</a:t>
             </a:r>
           </a:p>
           <a:p>
@@ -8490,7 +9032,7 @@
                 </a:solidFill>
                 <a:latin typeface="맑은 고딕"/>
               </a:rPr>
-              <a:t>•  전송이 끊긴 상황을 만들어 `ERROR` 열을 확인하고 복구를 검증한다.</a:t>
+              <a:t>•  전송·적용·갭 문제를 증상에서 원인으로 좁힌다</a:t>
             </a:r>
           </a:p>
           <a:p>
@@ -8506,7 +9048,7 @@
                 </a:solidFill>
                 <a:latin typeface="맑은 고딕"/>
               </a:rPr>
-              <a:t>•  `V$ARCHIVED_LOG` 의 `APPLIED` 가 목적지마다 다른 이유를 설명한다.</a:t>
+              <a:t>•  ORA- 오류 위치와 LOG_ARCHIVE_TRACE를 활용한다</a:t>
             </a:r>
           </a:p>
           <a:p>
@@ -8522,55 +9064,7 @@
                 </a:solidFill>
                 <a:latin typeface="맑은 고딕"/>
               </a:rPr>
-              <a:t>•  `V$MANAGED_STANDBY` 의 프로세스 구성을 읽는다.</a:t>
-            </a:r>
-          </a:p>
-          <a:p>
-            <a:pPr algn="l">
-              <a:spcAft>
-                <a:spcPts val="1000"/>
-              </a:spcAft>
-            </a:pPr>
-            <a:r>
-              <a:rPr sz="1600" b="0">
-                <a:solidFill>
-                  <a:srgbClr val="222222"/>
-                </a:solidFill>
-                <a:latin typeface="맑은 고딕"/>
-              </a:rPr>
-              <a:t>•  `LOG_ARCHIVE_TRACE` 로 추적을 켜고 트레이스 파일을 읽는다.</a:t>
-            </a:r>
-          </a:p>
-          <a:p>
-            <a:pPr algn="l">
-              <a:spcAft>
-                <a:spcPts val="1000"/>
-              </a:spcAft>
-            </a:pPr>
-            <a:r>
-              <a:rPr sz="1600" b="0">
-                <a:solidFill>
-                  <a:srgbClr val="222222"/>
-                </a:solidFill>
-                <a:latin typeface="맑은 고딕"/>
-              </a:rPr>
-              <a:t>•  Logical Standby 에서 어떤 뷰가 비는지 알고 `V$LOGSTDBY_TRANSACTION` 을 읽는다.</a:t>
-            </a:r>
-          </a:p>
-          <a:p>
-            <a:pPr algn="l">
-              <a:spcAft>
-                <a:spcPts val="1000"/>
-              </a:spcAft>
-            </a:pPr>
-            <a:r>
-              <a:rPr sz="1600" b="0">
-                <a:solidFill>
-                  <a:srgbClr val="222222"/>
-                </a:solidFill>
-                <a:latin typeface="맑은 고딕"/>
-              </a:rPr>
-              <a:t>•  지표를 한 번에 수집하는 상시 점검 스크립트를 만든다.</a:t>
+              <a:t>•  상시 점검 스크립트와 Logical Standby 감시를 설계한다</a:t>
             </a:r>
           </a:p>
         </p:txBody>
@@ -8671,7 +9165,7 @@
                 </a:solidFill>
                 <a:latin typeface="맑은 고딕"/>
               </a:rPr>
-              <a:t>15.4</a:t>
+              <a:t>15.5</a:t>
             </a:r>
           </a:p>
         </p:txBody>
@@ -8710,7 +9204,7 @@
                 </a:solidFill>
                 <a:latin typeface="맑은 고딕"/>
               </a:rPr>
-              <a:t>전송이 끊기면</a:t>
+              <a:t>적용 경로를 읽는 뷰</a:t>
             </a:r>
           </a:p>
         </p:txBody>
@@ -8793,7 +9287,7 @@
                 </a:solidFill>
                 <a:latin typeface="맑은 고딕"/>
               </a:rPr>
-              <a:t>•  의도하지 않은 중단을 만든다</a:t>
+              <a:t>•  프로세스와 APPLIED 열</a:t>
             </a:r>
           </a:p>
           <a:p>
@@ -8809,7 +9303,7 @@
                 </a:solidFill>
                 <a:latin typeface="맑은 고딕"/>
               </a:rPr>
-              <a:t>•  층별로 무엇이 보이는가</a:t>
+              <a:t>•  적용 속도와 지연의 분포</a:t>
             </a:r>
           </a:p>
           <a:p>
@@ -8825,7 +9319,7 @@
                 </a:solidFill>
                 <a:latin typeface="맑은 고딕"/>
               </a:rPr>
-              <a:t>•  복구는 즉시 되지 않는다</a:t>
+              <a:t>•  사건 기록과 지표의 조합</a:t>
             </a:r>
           </a:p>
         </p:txBody>
@@ -8926,7 +9420,7 @@
                 </a:solidFill>
                 <a:latin typeface="맑은 고딕"/>
               </a:rPr>
-              <a:t>리스너를 내린다</a:t>
+              <a:t>V$DATAGUARD_PROCESS</a:t>
             </a:r>
           </a:p>
         </p:txBody>
@@ -8965,7 +9459,7 @@
                 </a:solidFill>
                 <a:latin typeface="맑은 고딕"/>
               </a:rPr>
-              <a:t>의도하지 않은 중단</a:t>
+              <a:t>적용은 살아 있는가, 무엇을 하는가</a:t>
             </a:r>
           </a:p>
         </p:txBody>
@@ -9004,7 +9498,7 @@
                 </a:solidFill>
                 <a:latin typeface="맑은 고딕"/>
               </a:rPr>
-              <a:t>•  14장은 속성으로 껐다 — **의도한 중단**, `SUCCESS`</a:t>
+              <a:t>•  managed recovery 행이 없으면 적용 미기동</a:t>
             </a:r>
           </a:p>
           <a:p>
@@ -9020,7 +9514,7 @@
                 </a:solidFill>
                 <a:latin typeface="맑은 고딕"/>
               </a:rPr>
-              <a:t>•  이번은 `lsnrctl stop` — **장애**</a:t>
+              <a:t>•  ACTION: APPLYING_LOG, WAIT_FOR_LOG, WAIT_FOR_GAP</a:t>
             </a:r>
           </a:p>
           <a:p>
@@ -9036,7 +9530,7 @@
                 </a:solidFill>
                 <a:latin typeface="맑은 고딕"/>
               </a:rPr>
-              <a:t>•  `TNS-12541` / `Linux Error: 111: Connection refused`</a:t>
+              <a:t>•  logmerger와 RFS async의 SEQUENCE# 비교</a:t>
             </a:r>
           </a:p>
           <a:p>
@@ -9052,7 +9546,7 @@
                 </a:solidFill>
                 <a:latin typeface="맑은 고딕"/>
               </a:rPr>
-              <a:t>•  Primary 에서 변경 후 로그 두 번 전환</a:t>
+              <a:t>•  RFS 행이 없으면 Primary와 연결 없음</a:t>
             </a:r>
           </a:p>
         </p:txBody>
@@ -9153,7 +9647,7 @@
                 </a:solidFill>
                 <a:latin typeface="맑은 고딕"/>
               </a:rPr>
-              <a:t>Primary 가 보는 것</a:t>
+              <a:t>V$ARCHIVED_LOG의 APPLIED</a:t>
             </a:r>
           </a:p>
         </p:txBody>
@@ -9192,7 +9686,7 @@
                 </a:solidFill>
                 <a:latin typeface="맑은 고딕"/>
               </a:rPr>
-              <a:t>세 열이 바뀐다</a:t>
+              <a:t>가장 많이 쓰고 가장 많이 오해하는 열</a:t>
             </a:r>
           </a:p>
         </p:txBody>
@@ -9231,7 +9725,7 @@
                 </a:solidFill>
                 <a:latin typeface="맑은 고딕"/>
               </a:rPr>
-              <a:t>•  `STATUS` `VALID` → **`ERROR`**</a:t>
+              <a:t>•  값은 YES, NO, IN-MEMORY</a:t>
             </a:r>
           </a:p>
           <a:p>
@@ -9247,7 +9741,7 @@
                 </a:solidFill>
                 <a:latin typeface="맑은 고딕"/>
               </a:rPr>
-              <a:t>•  `VALID_NOW` `YES` → **`INACTIVE`**</a:t>
+              <a:t>•  실시간 적용 중인 리두는 아직 이 뷰에 없음</a:t>
             </a:r>
           </a:p>
           <a:p>
@@ -9263,7 +9757,7 @@
                 </a:solidFill>
                 <a:latin typeface="맑은 고딕"/>
               </a:rPr>
-              <a:t>•  `ERROR` (빈값) → **`ORA-12541: TNS:no listener`**</a:t>
+              <a:t>•  최대 APPLIED 순번은 실제보다 한두 개 뒤</a:t>
             </a:r>
           </a:p>
           <a:p>
@@ -9279,7 +9773,23 @@
                 </a:solidFill>
                 <a:latin typeface="맑은 고딕"/>
               </a:rPr>
-              <a:t>•  `LOG_ARCHIVE_DEST_STATE_2` 는 **`ENABLE` 그대로**</a:t>
+              <a:t>•  값이 오래 안 변해도 곧 중단은 아님</a:t>
+            </a:r>
+          </a:p>
+          <a:p>
+            <a:pPr algn="l">
+              <a:spcAft>
+                <a:spcPts val="1000"/>
+              </a:spcAft>
+            </a:pPr>
+            <a:r>
+              <a:rPr sz="1700" b="0">
+                <a:solidFill>
+                  <a:srgbClr val="222222"/>
+                </a:solidFill>
+                <a:latin typeface="맑은 고딕"/>
+              </a:rPr>
+              <a:t>•  Primary 쪽 값은 Standby보다 늦게 갱신</a:t>
             </a:r>
           </a:p>
         </p:txBody>
@@ -9380,7 +9890,7 @@
                 </a:solidFill>
                 <a:latin typeface="맑은 고딕"/>
               </a:rPr>
-              <a:t>알림 로그가 더 주는 것</a:t>
+              <a:t>V$RECOVERY_PROGRESS</a:t>
             </a:r>
           </a:p>
         </p:txBody>
@@ -9419,7 +9929,7 @@
                 </a:solidFill>
                 <a:latin typeface="맑은 고딕"/>
               </a:rPr>
-              <a:t>뷰에 없는 정보</a:t>
+              <a:t>적용 속도를 숫자로 잰다</a:t>
             </a:r>
           </a:p>
         </p:txBody>
@@ -9458,7 +9968,7 @@
                 </a:solidFill>
                 <a:latin typeface="맑은 고딕"/>
               </a:rPr>
-              <a:t>•  **접속 문자열 전체** — `HOST`·`PORT`·`SERVICE_NAME`</a:t>
+              <a:t>•  Active Apply Rate: 실제 적용 시간 기준 속도</a:t>
             </a:r>
           </a:p>
           <a:p>
@@ -9474,7 +9984,7 @@
                 </a:solidFill>
                 <a:latin typeface="맑은 고딕"/>
               </a:rPr>
-              <a:t>•  **프로세스** — `ARC1 (PID:2482)`</a:t>
+              <a:t>•  Average Apply Rate: 대기 포함 평균</a:t>
             </a:r>
           </a:p>
           <a:p>
@@ -9490,7 +10000,7 @@
                 </a:solidFill>
                 <a:latin typeface="맑은 고딕"/>
               </a:rPr>
-              <a:t>•  **트레이스 파일 이름** — `chicago_arc1_2482.trc`</a:t>
+              <a:t>•  Redo Applied, Last Applied Redo</a:t>
             </a:r>
           </a:p>
           <a:p>
@@ -9506,7 +10016,23 @@
                 </a:solidFill>
                 <a:latin typeface="맑은 고딕"/>
               </a:rPr>
-              <a:t>•  `ORA-16055` / **`archiver continuing`**</a:t>
+              <a:t>•  기준은 Primary의 리두 생성 속도</a:t>
+            </a:r>
+          </a:p>
+          <a:p>
+            <a:pPr algn="l">
+              <a:spcAft>
+                <a:spcPts val="1000"/>
+              </a:spcAft>
+            </a:pPr>
+            <a:r>
+              <a:rPr sz="1700" b="0">
+                <a:solidFill>
+                  <a:srgbClr val="222222"/>
+                </a:solidFill>
+                <a:latin typeface="맑은 고딕"/>
+              </a:rPr>
+              <a:t>•  속도 정상인데 시각이 멀어지면 공급 문제</a:t>
             </a:r>
           </a:p>
         </p:txBody>
@@ -9607,7 +10133,7 @@
                 </a:solidFill>
                 <a:latin typeface="맑은 고딕"/>
               </a:rPr>
-              <a:t>SEVERITY 가 아니라 ERROR_CODE</a:t>
+              <a:t>V$STANDBY_EVENT_HISTOGRAM</a:t>
             </a:r>
           </a:p>
         </p:txBody>
@@ -9646,7 +10172,7 @@
                 </a:solidFill>
                 <a:latin typeface="맑은 고딕"/>
               </a:rPr>
-              <a:t>두 방향의 반례</a:t>
+              <a:t>지금 값이 아니라 지연이 쌓인 모양</a:t>
             </a:r>
           </a:p>
         </p:txBody>
@@ -9685,7 +10211,7 @@
                 </a:solidFill>
                 <a:latin typeface="맑은 고딕"/>
               </a:rPr>
-              <a:t>•  14장 — `SRL selected ...` **Warning 인데 ERROR_CODE 0** (정상)</a:t>
+              <a:t>•  apply lag를 표본으로 잴 때마다 구간 카운트 증가</a:t>
             </a:r>
           </a:p>
           <a:p>
@@ -9701,7 +10227,7 @@
                 </a:solidFill>
                 <a:latin typeface="맑은 고딕"/>
               </a:rPr>
-              <a:t>•  15장 — `Check whether the listener is up` **Warning 인데 12541**</a:t>
+              <a:t>•  건강한 모양: 0초 구간이 압도적</a:t>
             </a:r>
           </a:p>
           <a:p>
@@ -9717,7 +10243,7 @@
                 </a:solidFill>
                 <a:latin typeface="맑은 고딕"/>
               </a:rPr>
-              <a:t>•  **`Warning` 은 위험도 안전도 뜻하지 않는다**</a:t>
+              <a:t>•  긴 구간의 LAST_TIME_UPDATED로 사건 시각 추적</a:t>
             </a:r>
           </a:p>
           <a:p>
@@ -9733,7 +10259,7 @@
                 </a:solidFill>
                 <a:latin typeface="맑은 고딕"/>
               </a:rPr>
-              <a:t>•  판정 기준은 `ERROR_CODE`</a:t>
+              <a:t>•  STANDBY_MAX_DATA_DELAY를 정하는 근거</a:t>
             </a:r>
           </a:p>
         </p:txBody>
@@ -9834,7 +10360,7 @@
                 </a:solidFill>
                 <a:latin typeface="맑은 고딕"/>
               </a:rPr>
-              <a:t>Standby 가 보는 것</a:t>
+              <a:t>V$DATAGUARD_STATUS</a:t>
             </a:r>
           </a:p>
         </p:txBody>
@@ -9873,7 +10399,7 @@
                 </a:solidFill>
                 <a:latin typeface="맑은 고딕"/>
               </a:rPr>
-              <a:t>지연은 또 0이다</a:t>
+              <a:t>경고 로그를 SQL로 읽는 창</a:t>
             </a:r>
           </a:p>
         </p:txBody>
@@ -9912,7 +10438,7 @@
                 </a:solidFill>
                 <a:latin typeface="맑은 고딕"/>
               </a:rPr>
-              <a:t>•  `MRP0` `APPLYING_LOG` → **`WAIT_FOR_LOG`**, 시퀀스 75</a:t>
+              <a:t>•  FACILITY: Transport, Apply, RFS, FAL 등 출처</a:t>
             </a:r>
           </a:p>
           <a:p>
@@ -9928,7 +10454,7 @@
                 </a:solidFill>
                 <a:latin typeface="맑은 고딕"/>
               </a:rPr>
-              <a:t>•  `RFS`(LGWR) 가 **사라졌다**</a:t>
+              <a:t>•  SEVERITY: Error, Fatal만 골라 상시 점검</a:t>
             </a:r>
           </a:p>
           <a:p>
@@ -9944,7 +10470,7 @@
                 </a:solidFill>
                 <a:latin typeface="맑은 고딕"/>
               </a:rPr>
-              <a:t>•  `V$STANDBY_LOG` 의 `ACTIVE` **0개**</a:t>
+              <a:t>•  ERROR_CODE가 0이 아닌 행이 오류</a:t>
             </a:r>
           </a:p>
           <a:p>
@@ -9960,7 +10486,23 @@
                 </a:solidFill>
                 <a:latin typeface="맑은 고딕"/>
               </a:rPr>
-              <a:t>•  두 지연은 **0** — 변하지 않는다</a:t>
+              <a:t>•  ORA-16037처럼 의도된 동작도 코드로 남음</a:t>
+            </a:r>
+          </a:p>
+          <a:p>
+            <a:pPr algn="l">
+              <a:spcAft>
+                <a:spcPts val="1000"/>
+              </a:spcAft>
+            </a:pPr>
+            <a:r>
+              <a:rPr sz="1700" b="0">
+                <a:solidFill>
+                  <a:srgbClr val="222222"/>
+                </a:solidFill>
+                <a:latin typeface="맑은 고딕"/>
+              </a:rPr>
+              <a:t>•  메모리 기반, 재기동하면 사라짐</a:t>
             </a:r>
           </a:p>
         </p:txBody>
@@ -10061,7 +10603,7 @@
                 </a:solidFill>
                 <a:latin typeface="맑은 고딕"/>
               </a:rPr>
-              <a:t>층마다 다른 답</a:t>
+              <a:t>V$DATAGUARD_STATS의 진단 활용</a:t>
             </a:r>
           </a:p>
         </p:txBody>
@@ -10100,7 +10642,7 @@
                 </a:solidFill>
                 <a:latin typeface="맑은 고딕"/>
               </a:rPr>
-              <a:t>같은 사건, 다른 정보</a:t>
+              <a:t>값 하나보다 조합과 신선도</a:t>
             </a:r>
           </a:p>
         </p:txBody>
@@ -10139,7 +10681,7 @@
                 </a:solidFill>
                 <a:latin typeface="맑은 고딕"/>
               </a:rPr>
-              <a:t>•  `SHOW CONFIGURATION` — `WARNING` + ORA-16857 → **문제가 있다**</a:t>
+              <a:t>•  transport lag 큼: 전송 구간</a:t>
             </a:r>
           </a:p>
           <a:p>
@@ -10155,7 +10697,7 @@
                 </a:solidFill>
                 <a:latin typeface="맑은 고딕"/>
               </a:rPr>
-              <a:t>•  `VALIDATE DATABASE` — `Ready for SW: No` → **전환 불가**</a:t>
+              <a:t>•  transport lag 작고 apply lag 큼: 적용 구간</a:t>
             </a:r>
           </a:p>
           <a:p>
@@ -10171,7 +10713,7 @@
                 </a:solidFill>
                 <a:latin typeface="맑은 고딕"/>
               </a:rPr>
-              <a:t>•  `V$ARCHIVE_DEST` — `ERROR` + **ORA-12541** → **왜**</a:t>
+              <a:t>•  DATUM_TIME이 오래되면 지표를 믿지 않음</a:t>
             </a:r>
           </a:p>
           <a:p>
@@ -10187,7 +10729,7 @@
                 </a:solidFill>
                 <a:latin typeface="맑은 고딕"/>
               </a:rPr>
-              <a:t>•  알림 로그 — 접속 문자열·프로세스 → **어디를 고칠지**</a:t>
+              <a:t>•  두 서버의 시계를 같은 NTP 소스에 맞춤</a:t>
             </a:r>
           </a:p>
         </p:txBody>
@@ -10219,7 +10761,7 @@
         <p:spPr>
           <a:xfrm>
             <a:off x="0" y="0"/>
-            <a:ext cx="12191695" cy="1005840"/>
+            <a:ext cx="12191695" cy="6858000"/>
           </a:xfrm>
           <a:prstGeom prst="rect">
             <a:avLst/>
@@ -10262,8 +10804,8 @@
         </p:nvSpPr>
         <p:spPr>
           <a:xfrm>
-            <a:off x="548640" y="91440"/>
-            <a:ext cx="10972800" cy="777240"/>
+            <a:off x="822960" y="2011680"/>
+            <a:ext cx="10515600" cy="1097280"/>
           </a:xfrm>
           <a:prstGeom prst="rect">
             <a:avLst/>
@@ -10282,13 +10824,13 @@
               </a:spcAft>
             </a:pPr>
             <a:r>
-              <a:rPr sz="2600" b="1">
+              <a:rPr sz="4000" b="1">
                 <a:solidFill>
                   <a:srgbClr val="FFFFFF"/>
                 </a:solidFill>
                 <a:latin typeface="맑은 고딕"/>
               </a:rPr>
-              <a:t>갭이 만들어지는 과정</a:t>
+              <a:t>15.6</a:t>
             </a:r>
           </a:p>
         </p:txBody>
@@ -10301,8 +10843,8 @@
         </p:nvSpPr>
         <p:spPr>
           <a:xfrm>
-            <a:off x="640080" y="1078992"/>
-            <a:ext cx="10881360" cy="457200"/>
+            <a:off x="822960" y="3017520"/>
+            <a:ext cx="10515600" cy="914400"/>
           </a:xfrm>
           <a:prstGeom prst="rect">
             <a:avLst/>
@@ -10321,27 +10863,71 @@
               </a:spcAft>
             </a:pPr>
             <a:r>
-              <a:rPr sz="1500" b="0">
-                <a:solidFill>
-                  <a:srgbClr val="5A6672"/>
-                </a:solidFill>
-                <a:latin typeface="맑은 고딕"/>
-              </a:rPr>
-              <a:t>시퀀스로 본다</a:t>
-            </a:r>
-          </a:p>
-        </p:txBody>
-      </p:sp>
-      <p:sp>
-        <p:nvSpPr>
-          <p:cNvPr id="5" name="TextBox 4"/>
+              <a:rPr sz="2800" b="1">
+                <a:solidFill>
+                  <a:srgbClr val="FFFFFF"/>
+                </a:solidFill>
+                <a:latin typeface="맑은 고딕"/>
+              </a:rPr>
+              <a:t>증상에서 원인으로 좁히는 진단 순서</a:t>
+            </a:r>
+          </a:p>
+        </p:txBody>
+      </p:sp>
+      <p:sp>
+        <p:nvSpPr>
+          <p:cNvPr id="5" name="Rectangle 4"/>
+          <p:cNvSpPr/>
+          <p:nvPr/>
+        </p:nvSpPr>
+        <p:spPr>
+          <a:xfrm>
+            <a:off x="822960" y="4114800"/>
+            <a:ext cx="5486400" cy="54864"/>
+          </a:xfrm>
+          <a:prstGeom prst="rect">
+            <a:avLst/>
+          </a:prstGeom>
+          <a:solidFill>
+            <a:srgbClr val="FFFFFF"/>
+          </a:solidFill>
+          <a:ln>
+            <a:noFill/>
+          </a:ln>
+          <a:effectLst/>
+        </p:spPr>
+        <p:style>
+          <a:lnRef idx="1">
+            <a:schemeClr val="accent1"/>
+          </a:lnRef>
+          <a:fillRef idx="3">
+            <a:schemeClr val="accent1"/>
+          </a:fillRef>
+          <a:effectRef idx="2">
+            <a:schemeClr val="accent1"/>
+          </a:effectRef>
+          <a:fontRef idx="minor">
+            <a:schemeClr val="lt1"/>
+          </a:fontRef>
+        </p:style>
+        <p:txBody>
+          <a:bodyPr rtlCol="0" anchor="ctr"/>
+          <a:lstStyle/>
+          <a:p>
+            <a:pPr algn="ctr"/>
+          </a:p>
+        </p:txBody>
+      </p:sp>
+      <p:sp>
+        <p:nvSpPr>
+          <p:cNvPr id="6" name="TextBox 5"/>
           <p:cNvSpPr txBox="1"/>
           <p:nvPr/>
         </p:nvSpPr>
         <p:spPr>
           <a:xfrm>
-            <a:off x="640080" y="1737360"/>
-            <a:ext cx="10881360" cy="4754880"/>
+            <a:off x="822960" y="4297680"/>
+            <a:ext cx="10058400" cy="2011680"/>
           </a:xfrm>
           <a:prstGeom prst="rect">
             <a:avLst/>
@@ -10356,65 +10942,49 @@
           <a:p>
             <a:pPr algn="l">
               <a:spcAft>
-                <a:spcPts val="1000"/>
-              </a:spcAft>
-            </a:pPr>
-            <a:r>
-              <a:rPr sz="1700" b="0">
-                <a:solidFill>
-                  <a:srgbClr val="222222"/>
-                </a:solidFill>
-                <a:latin typeface="맑은 고딕"/>
-              </a:rPr>
-              <a:t>•  **73번** `dest_id=2` `APPLIED=YES` — 끊기기 전에 갔다</a:t>
-            </a:r>
-          </a:p>
-          <a:p>
-            <a:pPr algn="l">
-              <a:spcAft>
-                <a:spcPts val="1000"/>
-              </a:spcAft>
-            </a:pPr>
-            <a:r>
-              <a:rPr sz="1700" b="0">
-                <a:solidFill>
-                  <a:srgbClr val="222222"/>
-                </a:solidFill>
-                <a:latin typeface="맑은 고딕"/>
-              </a:rPr>
-              <a:t>•  **74번** 행은 있는데 `NO` — 등록됐지만 가지 못했다</a:t>
-            </a:r>
-          </a:p>
-          <a:p>
-            <a:pPr algn="l">
-              <a:spcAft>
-                <a:spcPts val="1000"/>
-              </a:spcAft>
-            </a:pPr>
-            <a:r>
-              <a:rPr sz="1700" b="0">
-                <a:solidFill>
-                  <a:srgbClr val="222222"/>
-                </a:solidFill>
-                <a:latin typeface="맑은 고딕"/>
-              </a:rPr>
-              <a:t>•  **75번** `dest_id=2` **행 자체가 없다**</a:t>
-            </a:r>
-          </a:p>
-          <a:p>
-            <a:pPr algn="l">
-              <a:spcAft>
-                <a:spcPts val="1000"/>
-              </a:spcAft>
-            </a:pPr>
-            <a:r>
-              <a:rPr sz="1700" b="0">
-                <a:solidFill>
-                  <a:srgbClr val="222222"/>
-                </a:solidFill>
-                <a:latin typeface="맑은 고딕"/>
-              </a:rPr>
-              <a:t>•  `V$ARCHIVE_GAP` 은 **비어 있다**</a:t>
+                <a:spcPts val="800"/>
+              </a:spcAft>
+            </a:pPr>
+            <a:r>
+              <a:rPr sz="1600" b="0">
+                <a:solidFill>
+                  <a:srgbClr val="FFFFFF"/>
+                </a:solidFill>
+                <a:latin typeface="맑은 고딕"/>
+              </a:rPr>
+              <a:t>•  첫 관찰로 갈래를 정한다</a:t>
+            </a:r>
+          </a:p>
+          <a:p>
+            <a:pPr algn="l">
+              <a:spcAft>
+                <a:spcPts val="800"/>
+              </a:spcAft>
+            </a:pPr>
+            <a:r>
+              <a:rPr sz="1600" b="0">
+                <a:solidFill>
+                  <a:srgbClr val="FFFFFF"/>
+                </a:solidFill>
+                <a:latin typeface="맑은 고딕"/>
+              </a:rPr>
+              <a:t>•  전송, 적용, 갭 문제</a:t>
+            </a:r>
+          </a:p>
+          <a:p>
+            <a:pPr algn="l">
+              <a:spcAft>
+                <a:spcPts val="800"/>
+              </a:spcAft>
+            </a:pPr>
+            <a:r>
+              <a:rPr sz="1600" b="0">
+                <a:solidFill>
+                  <a:srgbClr val="FFFFFF"/>
+                </a:solidFill>
+                <a:latin typeface="맑은 고딕"/>
+              </a:rPr>
+              <a:t>•  자주 만나는 ORA- 오류</a:t>
             </a:r>
           </a:p>
         </p:txBody>
@@ -10515,7 +11085,7 @@
                 </a:solidFill>
                 <a:latin typeface="맑은 고딕"/>
               </a:rPr>
-              <a:t>복구는 즉시 되지 않는다</a:t>
+              <a:t>첫 관찰로 갈래 정하기</a:t>
             </a:r>
           </a:p>
         </p:txBody>
@@ -10554,7 +11124,7 @@
                 </a:solidFill>
                 <a:latin typeface="맑은 고딕"/>
               </a:rPr>
-              <a:t>ReopenSecs 300</a:t>
+              <a:t>lag 두 개와 프로세스 목록</a:t>
             </a:r>
           </a:p>
         </p:txBody>
@@ -10593,7 +11163,7 @@
                 </a:solidFill>
                 <a:latin typeface="맑은 고딕"/>
               </a:rPr>
-              <a:t>•  `lsnrctl start` 후 70·120·170·220초 — **계속 ORA-12541**</a:t>
+              <a:t>•  transport lag 증가, RFS 없음 → 전송 문제</a:t>
             </a:r>
           </a:p>
           <a:p>
@@ -10609,7 +11179,7 @@
                 </a:solidFill>
                 <a:latin typeface="맑은 고딕"/>
               </a:rPr>
-              <a:t>•  **270초에 `VALID`**</a:t>
+              <a:t>•  apply lag만 증가 → 적용 문제</a:t>
             </a:r>
           </a:p>
           <a:p>
@@ -10625,7 +11195,7 @@
                 </a:solidFill>
                 <a:latin typeface="맑은 고딕"/>
               </a:rPr>
-              <a:t>•  리스너는 이미 살아 있는데도 그렇다</a:t>
+              <a:t>•  MRP ACTION이 WAIT_FOR_GAP → 갭 문제</a:t>
             </a:r>
           </a:p>
           <a:p>
@@ -10641,7 +11211,7 @@
                 </a:solidFill>
                 <a:latin typeface="맑은 고딕"/>
               </a:rPr>
-              <a:t>•  여기서 **다른 문제라고 오판하기 쉽다**</a:t>
+              <a:t>•  PROTECTION_LEVEL 저하 → SYNC 전송 문제</a:t>
             </a:r>
           </a:p>
         </p:txBody>
@@ -10742,7 +11312,7 @@
                 </a:solidFill>
                 <a:latin typeface="맑은 고딕"/>
               </a:rPr>
-              <a:t>조치 직후의 함정</a:t>
+              <a:t>전송 문제의 점검 목록</a:t>
             </a:r>
           </a:p>
         </p:txBody>
@@ -10781,7 +11351,7 @@
                 </a:solidFill>
                 <a:latin typeface="맑은 고딕"/>
               </a:rPr>
-              <a:t>판정 시차</a:t>
+              <a:t>ERROR 열이 비어 있을 때</a:t>
             </a:r>
           </a:p>
         </p:txBody>
@@ -10820,7 +11390,7 @@
                 </a:solidFill>
                 <a:latin typeface="맑은 고딕"/>
               </a:rPr>
-              <a:t>•  전송 재개 직후 `SHOW CONFIGURATION` 이 **ERROR**</a:t>
+              <a:t>•  tnsnames.ora 서비스 이름과 SERVICE 값 일치</a:t>
             </a:r>
           </a:p>
           <a:p>
@@ -10836,7 +11406,7 @@
                 </a:solidFill>
                 <a:latin typeface="맑은 고딕"/>
               </a:rPr>
-              <a:t>•  새로 `ORA-16778` 까지 붙었다</a:t>
+              <a:t>•  LOG_ARCHIVE_DEST_STATE_n이 ENABLE인가</a:t>
             </a:r>
           </a:p>
           <a:p>
@@ -10852,7 +11422,7 @@
                 </a:solidFill>
                 <a:latin typeface="맑은 고딕"/>
               </a:rPr>
-              <a:t>•  같은 시점에 SQL 뷰는 이미 **`VALID`**</a:t>
+              <a:t>•  Standby 리스너와 인스턴스가 떠 있는가</a:t>
             </a:r>
           </a:p>
           <a:p>
@@ -10868,7 +11438,23 @@
                 </a:solidFill>
                 <a:latin typeface="맑은 고딕"/>
               </a:rPr>
-              <a:t>•  잠시 뒤 다시 조회 → **`SUCCESS`**</a:t>
+              <a:t>•  추가한 목적지를 아직 적용하지 않았는가</a:t>
+            </a:r>
+          </a:p>
+          <a:p>
+            <a:pPr algn="l">
+              <a:spcAft>
+                <a:spcPts val="1000"/>
+              </a:spcAft>
+            </a:pPr>
+            <a:r>
+              <a:rPr sz="1700" b="0">
+                <a:solidFill>
+                  <a:srgbClr val="222222"/>
+                </a:solidFill>
+                <a:latin typeface="맑은 고딕"/>
+              </a:rPr>
+              <a:t>•  리두 전송 인증(비밀번호 파일)이 맞는가</a:t>
             </a:r>
           </a:p>
         </p:txBody>
@@ -10969,7 +11555,7 @@
                 </a:solidFill>
                 <a:latin typeface="맑은 고딕"/>
               </a:rPr>
-              <a:t>이 장의 구성 (Agenda)</a:t>
+              <a:t>Agenda</a:t>
             </a:r>
           </a:p>
         </p:txBody>
@@ -11008,7 +11594,7 @@
                 </a:solidFill>
                 <a:latin typeface="맑은 고딕"/>
               </a:rPr>
-              <a:t>•  15.2  로그 파일의 상태를 읽는다</a:t>
+              <a:t>•  15.2  SQL로 Data Guard를 감시하는 이유</a:t>
             </a:r>
           </a:p>
           <a:p>
@@ -11024,7 +11610,7 @@
                 </a:solidFill>
                 <a:latin typeface="맑은 고딕"/>
               </a:rPr>
-              <a:t>•  15.3  아카이브 목적지를 읽는다</a:t>
+              <a:t>•  15.3  역할별 뷰 지도</a:t>
             </a:r>
           </a:p>
           <a:p>
@@ -11040,7 +11626,7 @@
                 </a:solidFill>
                 <a:latin typeface="맑은 고딕"/>
               </a:rPr>
-              <a:t>•  15.4  전송이 끊기면 무엇이 보이는가</a:t>
+              <a:t>•  15.4  전송 경로를 읽는 뷰  /  15.5  적용 경로를 읽는 뷰</a:t>
             </a:r>
           </a:p>
           <a:p>
@@ -11056,7 +11642,7 @@
                 </a:solidFill>
                 <a:latin typeface="맑은 고딕"/>
               </a:rPr>
-              <a:t>•  15.5  추적을 켠다</a:t>
+              <a:t>•  15.6  증상에서 원인으로 좁히는 진단 순서</a:t>
             </a:r>
           </a:p>
           <a:p>
@@ -11072,7 +11658,7 @@
                 </a:solidFill>
                 <a:latin typeface="맑은 고딕"/>
               </a:rPr>
-              <a:t>•  15.6  Logical Standby 는 다른 뷰로 본다</a:t>
+              <a:t>•  15.7  경고 로그와 LOG_ARCHIVE_TRACE  /  15.8  상시 점검 스크립트 설계</a:t>
             </a:r>
           </a:p>
           <a:p>
@@ -11088,7 +11674,7 @@
                 </a:solidFill>
                 <a:latin typeface="맑은 고딕"/>
               </a:rPr>
-              <a:t>•  15.7  상시 점검 스크립트</a:t>
+              <a:t>•  15.9  Logical Standby 모니터링  /  15.10  운영 시 주의점</a:t>
             </a:r>
           </a:p>
         </p:txBody>
@@ -11120,7 +11706,7 @@
         <p:spPr>
           <a:xfrm>
             <a:off x="0" y="0"/>
-            <a:ext cx="12191695" cy="6858000"/>
+            <a:ext cx="12191695" cy="1005840"/>
           </a:xfrm>
           <a:prstGeom prst="rect">
             <a:avLst/>
@@ -11163,8 +11749,8 @@
         </p:nvSpPr>
         <p:spPr>
           <a:xfrm>
-            <a:off x="822960" y="2011680"/>
-            <a:ext cx="10515600" cy="1097280"/>
+            <a:off x="548640" y="91440"/>
+            <a:ext cx="10972800" cy="777240"/>
           </a:xfrm>
           <a:prstGeom prst="rect">
             <a:avLst/>
@@ -11183,13 +11769,13 @@
               </a:spcAft>
             </a:pPr>
             <a:r>
-              <a:rPr sz="4000" b="1">
+              <a:rPr sz="2600" b="1">
                 <a:solidFill>
                   <a:srgbClr val="FFFFFF"/>
                 </a:solidFill>
                 <a:latin typeface="맑은 고딕"/>
               </a:rPr>
-              <a:t>15.5</a:t>
+              <a:t>적용 문제</a:t>
             </a:r>
           </a:p>
         </p:txBody>
@@ -11202,8 +11788,8 @@
         </p:nvSpPr>
         <p:spPr>
           <a:xfrm>
-            <a:off x="822960" y="3017520"/>
-            <a:ext cx="10515600" cy="914400"/>
+            <a:off x="640080" y="1078992"/>
+            <a:ext cx="10881360" cy="457200"/>
           </a:xfrm>
           <a:prstGeom prst="rect">
             <a:avLst/>
@@ -11222,71 +11808,27 @@
               </a:spcAft>
             </a:pPr>
             <a:r>
-              <a:rPr sz="2800" b="1">
-                <a:solidFill>
-                  <a:srgbClr val="FFFFFF"/>
-                </a:solidFill>
-                <a:latin typeface="맑은 고딕"/>
-              </a:rPr>
-              <a:t>추적을 켠다</a:t>
-            </a:r>
-          </a:p>
-        </p:txBody>
-      </p:sp>
-      <p:sp>
-        <p:nvSpPr>
-          <p:cNvPr id="5" name="Rectangle 4"/>
-          <p:cNvSpPr/>
-          <p:nvPr/>
-        </p:nvSpPr>
-        <p:spPr>
-          <a:xfrm>
-            <a:off x="822960" y="4114800"/>
-            <a:ext cx="5486400" cy="54864"/>
-          </a:xfrm>
-          <a:prstGeom prst="rect">
-            <a:avLst/>
-          </a:prstGeom>
-          <a:solidFill>
-            <a:srgbClr val="FFFFFF"/>
-          </a:solidFill>
-          <a:ln>
-            <a:noFill/>
-          </a:ln>
-          <a:effectLst/>
-        </p:spPr>
-        <p:style>
-          <a:lnRef idx="1">
-            <a:schemeClr val="accent1"/>
-          </a:lnRef>
-          <a:fillRef idx="3">
-            <a:schemeClr val="accent1"/>
-          </a:fillRef>
-          <a:effectRef idx="2">
-            <a:schemeClr val="accent1"/>
-          </a:effectRef>
-          <a:fontRef idx="minor">
-            <a:schemeClr val="lt1"/>
-          </a:fontRef>
-        </p:style>
-        <p:txBody>
-          <a:bodyPr rtlCol="0" anchor="ctr"/>
-          <a:lstStyle/>
-          <a:p>
-            <a:pPr algn="ctr"/>
-          </a:p>
-        </p:txBody>
-      </p:sp>
-      <p:sp>
-        <p:nvSpPr>
-          <p:cNvPr id="6" name="TextBox 5"/>
+              <a:rPr sz="1500" b="0">
+                <a:solidFill>
+                  <a:srgbClr val="5A6672"/>
+                </a:solidFill>
+                <a:latin typeface="맑은 고딕"/>
+              </a:rPr>
+              <a:t>프로세스가 있는가, 무엇을 기다리는가</a:t>
+            </a:r>
+          </a:p>
+        </p:txBody>
+      </p:sp>
+      <p:sp>
+        <p:nvSpPr>
+          <p:cNvPr id="5" name="TextBox 4"/>
           <p:cNvSpPr txBox="1"/>
           <p:nvPr/>
         </p:nvSpPr>
         <p:spPr>
           <a:xfrm>
-            <a:off x="822960" y="4297680"/>
-            <a:ext cx="10058400" cy="2011680"/>
+            <a:off x="640080" y="1737360"/>
+            <a:ext cx="10881360" cy="4754880"/>
           </a:xfrm>
           <a:prstGeom prst="rect">
             <a:avLst/>
@@ -11301,33 +11843,81 @@
           <a:p>
             <a:pPr algn="l">
               <a:spcAft>
-                <a:spcPts val="800"/>
-              </a:spcAft>
-            </a:pPr>
-            <a:r>
-              <a:rPr sz="1600" b="0">
-                <a:solidFill>
-                  <a:srgbClr val="FFFFFF"/>
-                </a:solidFill>
-                <a:latin typeface="맑은 고딕"/>
-              </a:rPr>
-              <a:t>•  비트마스크와 원칙</a:t>
-            </a:r>
-          </a:p>
-          <a:p>
-            <a:pPr algn="l">
-              <a:spcAft>
-                <a:spcPts val="800"/>
-              </a:spcAft>
-            </a:pPr>
-            <a:r>
-              <a:rPr sz="1600" b="0">
-                <a:solidFill>
-                  <a:srgbClr val="FFFFFF"/>
-                </a:solidFill>
-                <a:latin typeface="맑은 고딕"/>
-              </a:rPr>
-              <a:t>•  정상일 때의 모습</a:t>
+                <a:spcPts val="1000"/>
+              </a:spcAft>
+            </a:pPr>
+            <a:r>
+              <a:rPr sz="1700" b="0">
+                <a:solidFill>
+                  <a:srgbClr val="222222"/>
+                </a:solidFill>
+                <a:latin typeface="맑은 고딕"/>
+              </a:rPr>
+              <a:t>•  managed recovery 없음: 미기동 또는 오류로 정지</a:t>
+            </a:r>
+          </a:p>
+          <a:p>
+            <a:pPr algn="l">
+              <a:spcAft>
+                <a:spcPts val="1000"/>
+              </a:spcAft>
+            </a:pPr>
+            <a:r>
+              <a:rPr sz="1700" b="0">
+                <a:solidFill>
+                  <a:srgbClr val="222222"/>
+                </a:solidFill>
+                <a:latin typeface="맑은 고딕"/>
+              </a:rPr>
+              <a:t>•  정지 원인은 V$DATAGUARD_STATUS와 경고 로그</a:t>
+            </a:r>
+          </a:p>
+          <a:p>
+            <a:pPr algn="l">
+              <a:spcAft>
+                <a:spcPts val="1000"/>
+              </a:spcAft>
+            </a:pPr>
+            <a:r>
+              <a:rPr sz="1700" b="0">
+                <a:solidFill>
+                  <a:srgbClr val="222222"/>
+                </a:solidFill>
+                <a:latin typeface="맑은 고딕"/>
+              </a:rPr>
+              <a:t>•  WAIT_FOR_LOG 지속: 실시간 적용 꺼짐, DELAY</a:t>
+            </a:r>
+          </a:p>
+          <a:p>
+            <a:pPr algn="l">
+              <a:spcAft>
+                <a:spcPts val="1000"/>
+              </a:spcAft>
+            </a:pPr>
+            <a:r>
+              <a:rPr sz="1700" b="0">
+                <a:solidFill>
+                  <a:srgbClr val="222222"/>
+                </a:solidFill>
+                <a:latin typeface="맑은 고딕"/>
+              </a:rPr>
+              <a:t>•  APPLYING_LOG인데 lag 증가: 처리량 부족</a:t>
+            </a:r>
+          </a:p>
+          <a:p>
+            <a:pPr algn="l">
+              <a:spcAft>
+                <a:spcPts val="1000"/>
+              </a:spcAft>
+            </a:pPr>
+            <a:r>
+              <a:rPr sz="1700" b="0">
+                <a:solidFill>
+                  <a:srgbClr val="222222"/>
+                </a:solidFill>
+                <a:latin typeface="맑은 고딕"/>
+              </a:rPr>
+              <a:t>•  처리량은 Active Apply Rate로 확인</a:t>
             </a:r>
           </a:p>
         </p:txBody>
@@ -11428,7 +12018,7 @@
                 </a:solidFill>
                 <a:latin typeface="맑은 고딕"/>
               </a:rPr>
-              <a:t>LOG_ARCHIVE_TRACE</a:t>
+              <a:t>갭 문제</a:t>
             </a:r>
           </a:p>
         </p:txBody>
@@ -11467,7 +12057,7 @@
                 </a:solidFill>
                 <a:latin typeface="맑은 고딕"/>
               </a:rPr>
-              <a:t>비트마스크다</a:t>
+              <a:t>적용은 순서대로만 진행된다</a:t>
             </a:r>
           </a:p>
         </p:txBody>
@@ -11506,7 +12096,7 @@
                 </a:solidFill>
                 <a:latin typeface="맑은 고딕"/>
               </a:rPr>
-              <a:t>•  기본 **0**. 값을 더해 조합한다</a:t>
+              <a:t>•  Standby V$ARCHIVE_GAP: 빠진 순번 범위</a:t>
             </a:r>
           </a:p>
           <a:p>
@@ -11522,7 +12112,7 @@
                 </a:solidFill>
                 <a:latin typeface="맑은 고딕"/>
               </a:rPr>
-              <a:t>•  `4`(목적지 상태) + `8`(목적지 활동) = **12**</a:t>
+              <a:t>•  Primary GAP_STATUS: RESOLVABLE인가</a:t>
             </a:r>
           </a:p>
           <a:p>
@@ -11538,7 +12128,7 @@
                 </a:solidFill>
                 <a:latin typeface="맑은 고딕"/>
               </a:rPr>
-              <a:t>•  동적이지만 알림 로그에 **`SCOPE=BOTH`** 로 남는다</a:t>
+              <a:t>•  자동 해소: ARCn ping과 FAL</a:t>
             </a:r>
           </a:p>
           <a:p>
@@ -11554,7 +12144,23 @@
                 </a:solidFill>
                 <a:latin typeface="맑은 고딕"/>
               </a:rPr>
-              <a:t>•  잘못된 값은 음수든 문자열이든 **ORA-02017**</a:t>
+              <a:t>•  Primary에서 지워졌으면 수동 개입</a:t>
+            </a:r>
+          </a:p>
+          <a:p>
+            <a:pPr algn="l">
+              <a:spcAft>
+                <a:spcPts val="1000"/>
+              </a:spcAft>
+            </a:pPr>
+            <a:r>
+              <a:rPr sz="1700" b="0">
+                <a:solidFill>
+                  <a:srgbClr val="222222"/>
+                </a:solidFill>
+                <a:latin typeface="맑은 고딕"/>
+              </a:rPr>
+              <a:t>•  19c: RECOVER STANDBY DATABASE FROM SERVICE</a:t>
             </a:r>
           </a:p>
         </p:txBody>
@@ -11655,7 +12261,7 @@
                 </a:solidFill>
                 <a:latin typeface="맑은 고딕"/>
               </a:rPr>
-              <a:t>어디에 남는가</a:t>
+              <a:t>자주 만나는 ORA- 오류 ①</a:t>
             </a:r>
           </a:p>
         </p:txBody>
@@ -11694,7 +12300,7 @@
                 </a:solidFill>
                 <a:latin typeface="맑은 고딕"/>
               </a:rPr>
-              <a:t>프로세스별로 나뉜다</a:t>
+              <a:t>연결과 인증</a:t>
             </a:r>
           </a:p>
         </p:txBody>
@@ -11733,7 +12339,7 @@
                 </a:solidFill>
                 <a:latin typeface="맑은 고딕"/>
               </a:rPr>
-              <a:t>•  이름 규칙 `&lt;SID&gt;_&lt;프로세스&gt;_&lt;PID&gt;.trc`</a:t>
+              <a:t>•  ORA-12541: Standby 리스너 없음</a:t>
             </a:r>
           </a:p>
           <a:p>
@@ -11749,7 +12355,7 @@
                 </a:solidFill>
                 <a:latin typeface="맑은 고딕"/>
               </a:rPr>
-              <a:t>•  위치는 **ADR 의 trace 디렉터리** (14장 EXPORT 와 같은 곳)</a:t>
+              <a:t>•  ORA-12514: 리스너가 서비스를 모름</a:t>
             </a:r>
           </a:p>
           <a:p>
@@ -11765,7 +12371,7 @@
                 </a:solidFill>
                 <a:latin typeface="맑은 고딕"/>
               </a:rPr>
-              <a:t>•  `ARCn` — 아카이브 전송·FAL / `TTnn` — **실시간 리두 전송**</a:t>
+              <a:t>•  ORA-01017, ORA-16191: 전송 인증 실패</a:t>
             </a:r>
           </a:p>
           <a:p>
@@ -11781,7 +12387,23 @@
                 </a:solidFill>
                 <a:latin typeface="맑은 고딕"/>
               </a:rPr>
-              <a:t>•  실측 `chicago_tt04_7487.trc` = **664KB** (arc0 은 30KB)</a:t>
+              <a:t>•  ORA-16047: DB_UNIQUE_NAME 불일치</a:t>
+            </a:r>
+          </a:p>
+          <a:p>
+            <a:pPr algn="l">
+              <a:spcAft>
+                <a:spcPts val="1000"/>
+              </a:spcAft>
+            </a:pPr>
+            <a:r>
+              <a:rPr sz="1700" b="0">
+                <a:solidFill>
+                  <a:srgbClr val="222222"/>
+                </a:solidFill>
+                <a:latin typeface="맑은 고딕"/>
+              </a:rPr>
+              <a:t>•  ORA-16012: 데이터베이스 식별자 불일치</a:t>
             </a:r>
           </a:p>
         </p:txBody>
@@ -11882,7 +12504,7 @@
                 </a:solidFill>
                 <a:latin typeface="맑은 고딕"/>
               </a:rPr>
-              <a:t>정상일 때의 모습</a:t>
+              <a:t>자주 만나는 ORA- 오류 ②</a:t>
             </a:r>
           </a:p>
         </p:txBody>
@@ -11921,7 +12543,7 @@
                 </a:solidFill>
                 <a:latin typeface="맑은 고딕"/>
               </a:rPr>
-              <a:t>읽을 수 있는 것만</a:t>
+              <a:t>전송 시간, SRL, FAL, 적용</a:t>
             </a:r>
           </a:p>
         </p:txBody>
@@ -11960,7 +12582,7 @@
                 </a:solidFill>
                 <a:latin typeface="맑은 고딕"/>
               </a:rPr>
-              <a:t>•  `Acquiring LGWR NS Write latch` — 전송이 일어나고 있다</a:t>
+              <a:t>•  ORA-16198: SYNC 전송 중 NET_TIMEOUT 초과</a:t>
             </a:r>
           </a:p>
           <a:p>
@@ -11976,7 +12598,7 @@
                 </a:solidFill>
                 <a:latin typeface="맑은 고딕"/>
               </a:rPr>
-              <a:t>•  `Sleeping for 100 centi-second(s)` — **한가하다**</a:t>
+              <a:t>•  ORA-16086: Standby에 쓸 수 있는 SRL 없음</a:t>
             </a:r>
           </a:p>
           <a:p>
@@ -11992,7 +12614,7 @@
                 </a:solidFill>
                 <a:latin typeface="맑은 고딕"/>
               </a:rPr>
-              <a:t>•  `krss_find_work: No work found` — 아카이버는 할 일이 없다</a:t>
+              <a:t>•  ORA-16055: FAL 요청 거절</a:t>
             </a:r>
           </a:p>
           <a:p>
@@ -12008,7 +12630,23 @@
                 </a:solidFill>
                 <a:latin typeface="맑은 고딕"/>
               </a:rPr>
-              <a:t>•  `krsu.c:10213` 같은 것은 **해석 대상이 아니다**</a:t>
+              <a:t>•  ORA-16401: 이미 받은 로그 재수신 거절, 대개 무해</a:t>
+            </a:r>
+          </a:p>
+          <a:p>
+            <a:pPr algn="l">
+              <a:spcAft>
+                <a:spcPts val="1000"/>
+              </a:spcAft>
+            </a:pPr>
+            <a:r>
+              <a:rPr sz="1700" b="0">
+                <a:solidFill>
+                  <a:srgbClr val="222222"/>
+                </a:solidFill>
+                <a:latin typeface="맑은 고딕"/>
+              </a:rPr>
+              <a:t>•  ORA-16037: 사용자 적용 취소, 의도했다면 정상</a:t>
             </a:r>
           </a:p>
         </p:txBody>
@@ -12109,7 +12747,7 @@
                 </a:solidFill>
                 <a:latin typeface="맑은 고딕"/>
               </a:rPr>
-              <a:t>15.6</a:t>
+              <a:t>15.7</a:t>
             </a:r>
           </a:p>
         </p:txBody>
@@ -12148,7 +12786,7 @@
                 </a:solidFill>
                 <a:latin typeface="맑은 고딕"/>
               </a:rPr>
-              <a:t>Logical Standby 는 다른 뷰로 본다</a:t>
+              <a:t>경고 로그와 LOG_ARCHIVE_TRACE</a:t>
             </a:r>
           </a:p>
         </p:txBody>
@@ -12231,7 +12869,7 @@
                 </a:solidFill>
                 <a:latin typeface="맑은 고딕"/>
               </a:rPr>
-              <a:t>•  익숙한 뷰가 비어 버린다</a:t>
+              <a:t>•  오류가 남는 다섯 곳</a:t>
             </a:r>
           </a:p>
           <a:p>
@@ -12247,7 +12885,23 @@
                 </a:solidFill>
                 <a:latin typeface="맑은 고딕"/>
               </a:rPr>
-              <a:t>•  트랜잭션 단위로 볼 수 있다</a:t>
+              <a:t>•  추적 수준의 구조</a:t>
+            </a:r>
+          </a:p>
+          <a:p>
+            <a:pPr algn="l">
+              <a:spcAft>
+                <a:spcPts val="800"/>
+              </a:spcAft>
+            </a:pPr>
+            <a:r>
+              <a:rPr sz="1600" b="0">
+                <a:solidFill>
+                  <a:srgbClr val="FFFFFF"/>
+                </a:solidFill>
+                <a:latin typeface="맑은 고딕"/>
+              </a:rPr>
+              <a:t>•  켜고 끄는 절차</a:t>
             </a:r>
           </a:p>
         </p:txBody>
@@ -12348,7 +13002,7 @@
                 </a:solidFill>
                 <a:latin typeface="맑은 고딕"/>
               </a:rPr>
-              <a:t>뷰가 통째로 빈다</a:t>
+              <a:t>ORA- 오류가 남는 위치</a:t>
             </a:r>
           </a:p>
         </p:txBody>
@@ -12387,7 +13041,7 @@
                 </a:solidFill>
                 <a:latin typeface="맑은 고딕"/>
               </a:rPr>
-              <a:t>역할이 바뀌면</a:t>
+              <a:t>같은 사건, 다른 양의 정보</a:t>
             </a:r>
           </a:p>
         </p:txBody>
@@ -12426,7 +13080,7 @@
                 </a:solidFill>
                 <a:latin typeface="맑은 고딕"/>
               </a:rPr>
-              <a:t>•  `V$MANAGED_STANDBY` — `ARCH` 4, `DGRD` 2. **`MRP0` 이 없다**</a:t>
+              <a:t>•  V$ARCHIVE_DEST.ERROR: 목적지별 마지막 오류</a:t>
             </a:r>
           </a:p>
           <a:p>
@@ -12442,7 +13096,7 @@
                 </a:solidFill>
                 <a:latin typeface="맑은 고딕"/>
               </a:rPr>
-              <a:t>•  `V$DATAGUARD_STATS` — **`no rows selected`**</a:t>
+              <a:t>•  V$DATAGUARD_STATUS: 최근 메시지, 메모리</a:t>
             </a:r>
           </a:p>
           <a:p>
@@ -12458,7 +13112,7 @@
                 </a:solidFill>
                 <a:latin typeface="맑은 고딕"/>
               </a:rPr>
-              <a:t>•  두 지연이 아예 없다 — 점검표의 보조 지표가 사라진다</a:t>
+              <a:t>•  경고 로그: 앞뒤 사건 전체</a:t>
             </a:r>
           </a:p>
           <a:p>
@@ -12474,7 +13128,23 @@
                 </a:solidFill>
                 <a:latin typeface="맑은 고딕"/>
               </a:rPr>
-              <a:t>•  대신 `V$LOGSTDBY_STATE` 와 `DBA_LOGSTDBY_PROGRESS` 를 본다</a:t>
+              <a:t>•  프로세스 트레이스, Broker 로그 drcSID.log</a:t>
+            </a:r>
+          </a:p>
+          <a:p>
+            <a:pPr algn="l">
+              <a:spcAft>
+                <a:spcPts val="1000"/>
+              </a:spcAft>
+            </a:pPr>
+            <a:r>
+              <a:rPr sz="1700" b="0">
+                <a:solidFill>
+                  <a:srgbClr val="222222"/>
+                </a:solidFill>
+                <a:latin typeface="맑은 고딕"/>
+              </a:rPr>
+              <a:t>•  위치는 V$DIAG_INFO의 Diag Trace</a:t>
             </a:r>
           </a:p>
         </p:txBody>
@@ -12575,7 +13245,7 @@
                 </a:solidFill>
                 <a:latin typeface="맑은 고딕"/>
               </a:rPr>
-              <a:t>V$LOGSTDBY_TRANSACTION</a:t>
+              <a:t>LOG_ARCHIVE_TRACE의 수준</a:t>
             </a:r>
           </a:p>
         </p:txBody>
@@ -12614,7 +13284,7 @@
                 </a:solidFill>
                 <a:latin typeface="맑은 고딕"/>
               </a:rPr>
-              <a:t>열 이름부터 다르다</a:t>
+              <a:t>2의 거듭제곱을 더해 켠다</a:t>
             </a:r>
           </a:p>
         </p:txBody>
@@ -12653,7 +13323,7 @@
                 </a:solidFill>
                 <a:latin typeface="맑은 고딕"/>
               </a:rPr>
-              <a:t>•  `XIDUSN` 으로 조회하면 **`ORA-00904`**</a:t>
+              <a:t>•  기본값 0, 추적 꺼짐</a:t>
             </a:r>
           </a:p>
           <a:p>
@@ -12669,7 +13339,7 @@
                 </a:solidFill>
                 <a:latin typeface="맑은 고딕"/>
               </a:rPr>
-              <a:t>•  실제 열은 전부 **`PRIMARY_` 접두어** — `PRIMARY_XIDUSN` …</a:t>
+              <a:t>•  각 수준은 1, 2, 4, 8 … 32768</a:t>
             </a:r>
           </a:p>
           <a:p>
@@ -12685,7 +13355,7 @@
                 </a:solidFill>
                 <a:latin typeface="맑은 고딕"/>
               </a:rPr>
-              <a:t>•  `SAVEPOINT_SCN` · `COMMIT_SCN` 은 19c 에 **없다**</a:t>
+              <a:t>•  6 = 2(목적지 상태) + 4(작업 단계)</a:t>
             </a:r>
           </a:p>
           <a:p>
@@ -12701,7 +13371,23 @@
                 </a:solidFill>
                 <a:latin typeface="맑은 고딕"/>
               </a:rPr>
-              <a:t>•  실측 — `XID 9.9.821 | DML | MINING COMPLETE | APPLY NONE | SRC_CON 3`</a:t>
+              <a:t>•  512 네트워크, 1024 RFS, 128 FAL, 2048 ping</a:t>
+            </a:r>
+          </a:p>
+          <a:p>
+            <a:pPr algn="l">
+              <a:spcAft>
+                <a:spcPts val="1000"/>
+              </a:spcAft>
+            </a:pPr>
+            <a:r>
+              <a:rPr sz="1700" b="0">
+                <a:solidFill>
+                  <a:srgbClr val="222222"/>
+                </a:solidFill>
+                <a:latin typeface="맑은 고딕"/>
+              </a:rPr>
+              <a:t>•  4096 실시간 적용, 8192 Redo Apply</a:t>
             </a:r>
           </a:p>
         </p:txBody>
@@ -12802,7 +13488,7 @@
                 </a:solidFill>
                 <a:latin typeface="맑은 고딕"/>
               </a:rPr>
-              <a:t>멈추면 이 뷰가 답하지 않는다</a:t>
+              <a:t>켜고 끄는 절차</a:t>
             </a:r>
           </a:p>
         </p:txBody>
@@ -12841,7 +13527,7 @@
                 </a:solidFill>
                 <a:latin typeface="맑은 고딕"/>
               </a:rPr>
-              <a:t>XID 는 어디서 찾는가</a:t>
+              <a:t>다음 아카이브 작업부터 반영</a:t>
             </a:r>
           </a:p>
         </p:txBody>
@@ -12880,7 +13566,7 @@
                 </a:solidFill>
                 <a:latin typeface="맑은 고딕"/>
               </a:rPr>
-              <a:t>•  적용이 멈추면 `V$LOGSTDBY_TRANSACTION` 은 **비어 버린다**</a:t>
+              <a:t>•  ALTER SYSTEM으로 열림·마운트 상태에서 변경</a:t>
             </a:r>
           </a:p>
           <a:p>
@@ -12896,7 +13582,7 @@
                 </a:solidFill>
                 <a:latin typeface="맑은 고딕"/>
               </a:rPr>
-              <a:t>•  멈춘 뒤의 XID 는 `DBA_LOGSTDBY_EVENTS` 에 — 열 이름은 `XIDUSN`</a:t>
+              <a:t>•  정수가 아니면 ORA-02017</a:t>
             </a:r>
           </a:p>
           <a:p>
@@ -12912,7 +13598,7 @@
                 </a:solidFill>
                 <a:latin typeface="맑은 고딕"/>
               </a:rPr>
-              <a:t>•  실측 오류 **`ORA-26787`** (그 키의 행이 표에 없다)</a:t>
+              <a:t>•  SCOPE=MEMORY로 켜면 재기동 시 자동 해제</a:t>
             </a:r>
           </a:p>
           <a:p>
@@ -12928,7 +13614,23 @@
                 </a:solidFill>
                 <a:latin typeface="맑은 고딕"/>
               </a:rPr>
-              <a:t>•  `SKIP_TRANSACTION` — PDB 에서 `ORA-65040`, 정지 상태에서 `ORA-16104`</a:t>
+              <a:t>•  트레이스 파일 이름에 프로세스 이름이 들어감</a:t>
+            </a:r>
+          </a:p>
+          <a:p>
+            <a:pPr algn="l">
+              <a:spcAft>
+                <a:spcPts val="1000"/>
+              </a:spcAft>
+            </a:pPr>
+            <a:r>
+              <a:rPr sz="1700" b="0">
+                <a:solidFill>
+                  <a:srgbClr val="222222"/>
+                </a:solidFill>
+                <a:latin typeface="맑은 고딕"/>
+              </a:rPr>
+              <a:t>•  Broker 구성은 Broker 쪽에서 변경</a:t>
             </a:r>
           </a:p>
         </p:txBody>
@@ -12960,7 +13662,7 @@
         <p:spPr>
           <a:xfrm>
             <a:off x="0" y="0"/>
-            <a:ext cx="12191695" cy="6858000"/>
+            <a:ext cx="12191695" cy="1005840"/>
           </a:xfrm>
           <a:prstGeom prst="rect">
             <a:avLst/>
@@ -13003,8 +13705,8 @@
         </p:nvSpPr>
         <p:spPr>
           <a:xfrm>
-            <a:off x="822960" y="2011680"/>
-            <a:ext cx="10515600" cy="1097280"/>
+            <a:off x="548640" y="91440"/>
+            <a:ext cx="10972800" cy="777240"/>
           </a:xfrm>
           <a:prstGeom prst="rect">
             <a:avLst/>
@@ -13023,13 +13725,13 @@
               </a:spcAft>
             </a:pPr>
             <a:r>
-              <a:rPr sz="4000" b="1">
+              <a:rPr sz="2600" b="1">
                 <a:solidFill>
                   <a:srgbClr val="FFFFFF"/>
                 </a:solidFill>
                 <a:latin typeface="맑은 고딕"/>
               </a:rPr>
-              <a:t>15.7</a:t>
+              <a:t>추적은 좁게, 짧게</a:t>
             </a:r>
           </a:p>
         </p:txBody>
@@ -13042,8 +13744,8 @@
         </p:nvSpPr>
         <p:spPr>
           <a:xfrm>
-            <a:off x="822960" y="3017520"/>
-            <a:ext cx="10515600" cy="914400"/>
+            <a:off x="640080" y="1078992"/>
+            <a:ext cx="10881360" cy="457200"/>
           </a:xfrm>
           <a:prstGeom prst="rect">
             <a:avLst/>
@@ -13062,71 +13764,27 @@
               </a:spcAft>
             </a:pPr>
             <a:r>
-              <a:rPr sz="2800" b="1">
-                <a:solidFill>
-                  <a:srgbClr val="FFFFFF"/>
-                </a:solidFill>
-                <a:latin typeface="맑은 고딕"/>
-              </a:rPr>
-              <a:t>상시 점검 스크립트</a:t>
-            </a:r>
-          </a:p>
-        </p:txBody>
-      </p:sp>
-      <p:sp>
-        <p:nvSpPr>
-          <p:cNvPr id="5" name="Rectangle 4"/>
-          <p:cNvSpPr/>
-          <p:nvPr/>
-        </p:nvSpPr>
-        <p:spPr>
-          <a:xfrm>
-            <a:off x="822960" y="4114800"/>
-            <a:ext cx="5486400" cy="54864"/>
-          </a:xfrm>
-          <a:prstGeom prst="rect">
-            <a:avLst/>
-          </a:prstGeom>
-          <a:solidFill>
-            <a:srgbClr val="FFFFFF"/>
-          </a:solidFill>
-          <a:ln>
-            <a:noFill/>
-          </a:ln>
-          <a:effectLst/>
-        </p:spPr>
-        <p:style>
-          <a:lnRef idx="1">
-            <a:schemeClr val="accent1"/>
-          </a:lnRef>
-          <a:fillRef idx="3">
-            <a:schemeClr val="accent1"/>
-          </a:fillRef>
-          <a:effectRef idx="2">
-            <a:schemeClr val="accent1"/>
-          </a:effectRef>
-          <a:fontRef idx="minor">
-            <a:schemeClr val="lt1"/>
-          </a:fontRef>
-        </p:style>
-        <p:txBody>
-          <a:bodyPr rtlCol="0" anchor="ctr"/>
-          <a:lstStyle/>
-          <a:p>
-            <a:pPr algn="ctr"/>
-          </a:p>
-        </p:txBody>
-      </p:sp>
-      <p:sp>
-        <p:nvSpPr>
-          <p:cNvPr id="6" name="TextBox 5"/>
+              <a:rPr sz="1500" b="0">
+                <a:solidFill>
+                  <a:srgbClr val="5A6672"/>
+                </a:solidFill>
+                <a:latin typeface="맑은 고딕"/>
+              </a:rPr>
+              <a:t>진단 도구가 장애를 만들지 않도록</a:t>
+            </a:r>
+          </a:p>
+        </p:txBody>
+      </p:sp>
+      <p:sp>
+        <p:nvSpPr>
+          <p:cNvPr id="5" name="TextBox 4"/>
           <p:cNvSpPr txBox="1"/>
           <p:nvPr/>
         </p:nvSpPr>
         <p:spPr>
           <a:xfrm>
-            <a:off x="822960" y="4297680"/>
-            <a:ext cx="10058400" cy="2011680"/>
+            <a:off x="640080" y="1737360"/>
+            <a:ext cx="10881360" cy="4754880"/>
           </a:xfrm>
           <a:prstGeom prst="rect">
             <a:avLst/>
@@ -13141,49 +13799,65 @@
           <a:p>
             <a:pPr algn="l">
               <a:spcAft>
-                <a:spcPts val="800"/>
-              </a:spcAft>
-            </a:pPr>
-            <a:r>
-              <a:rPr sz="1600" b="0">
-                <a:solidFill>
-                  <a:srgbClr val="FFFFFF"/>
-                </a:solidFill>
-                <a:latin typeface="맑은 고딕"/>
-              </a:rPr>
-              <a:t>•  역할별로 다르다</a:t>
-            </a:r>
-          </a:p>
-          <a:p>
-            <a:pPr algn="l">
-              <a:spcAft>
-                <a:spcPts val="800"/>
-              </a:spcAft>
-            </a:pPr>
-            <a:r>
-              <a:rPr sz="1600" b="0">
-                <a:solidFill>
-                  <a:srgbClr val="FFFFFF"/>
-                </a:solidFill>
-                <a:latin typeface="맑은 고딕"/>
-              </a:rPr>
-              <a:t>•  주 지표와 보조 지표</a:t>
-            </a:r>
-          </a:p>
-          <a:p>
-            <a:pPr algn="l">
-              <a:spcAft>
-                <a:spcPts val="800"/>
-              </a:spcAft>
-            </a:pPr>
-            <a:r>
-              <a:rPr sz="1600" b="0">
-                <a:solidFill>
-                  <a:srgbClr val="FFFFFF"/>
-                </a:solidFill>
-                <a:latin typeface="맑은 고딕"/>
-              </a:rPr>
-              <a:t>•  판정 규칙</a:t>
+                <a:spcPts val="1000"/>
+              </a:spcAft>
+            </a:pPr>
+            <a:r>
+              <a:rPr sz="1700" b="0">
+                <a:solidFill>
+                  <a:srgbClr val="222222"/>
+                </a:solidFill>
+                <a:latin typeface="맑은 고딕"/>
+              </a:rPr>
+              <a:t>•  의심 구간에 맞는 수준만 선택</a:t>
+            </a:r>
+          </a:p>
+          <a:p>
+            <a:pPr algn="l">
+              <a:spcAft>
+                <a:spcPts val="1000"/>
+              </a:spcAft>
+            </a:pPr>
+            <a:r>
+              <a:rPr sz="1700" b="0">
+                <a:solidFill>
+                  <a:srgbClr val="222222"/>
+                </a:solidFill>
+                <a:latin typeface="맑은 고딕"/>
+              </a:rPr>
+              <a:t>•  켠 시각과 끈 시각을 작업 기록에</a:t>
+            </a:r>
+          </a:p>
+          <a:p>
+            <a:pPr algn="l">
+              <a:spcAft>
+                <a:spcPts val="1000"/>
+              </a:spcAft>
+            </a:pPr>
+            <a:r>
+              <a:rPr sz="1700" b="0">
+                <a:solidFill>
+                  <a:srgbClr val="222222"/>
+                </a:solidFill>
+                <a:latin typeface="맑은 고딕"/>
+              </a:rPr>
+              <a:t>•  끄는 것을 잊으면 ADR 디렉터리가 찬다</a:t>
+            </a:r>
+          </a:p>
+          <a:p>
+            <a:pPr algn="l">
+              <a:spcAft>
+                <a:spcPts val="1000"/>
+              </a:spcAft>
+            </a:pPr>
+            <a:r>
+              <a:rPr sz="1700" b="0">
+                <a:solidFill>
+                  <a:srgbClr val="222222"/>
+                </a:solidFill>
+                <a:latin typeface="맑은 고딕"/>
+              </a:rPr>
+              <a:t>•  지원 요청에는 양쪽 경고 로그를 함께</a:t>
             </a:r>
           </a:p>
         </p:txBody>
@@ -13215,7 +13889,7 @@
         <p:spPr>
           <a:xfrm>
             <a:off x="0" y="0"/>
-            <a:ext cx="12191695" cy="1005840"/>
+            <a:ext cx="12191695" cy="6858000"/>
           </a:xfrm>
           <a:prstGeom prst="rect">
             <a:avLst/>
@@ -13258,8 +13932,8 @@
         </p:nvSpPr>
         <p:spPr>
           <a:xfrm>
-            <a:off x="548640" y="91440"/>
-            <a:ext cx="10972800" cy="777240"/>
+            <a:off x="822960" y="2011680"/>
+            <a:ext cx="10515600" cy="1097280"/>
           </a:xfrm>
           <a:prstGeom prst="rect">
             <a:avLst/>
@@ -13278,13 +13952,13 @@
               </a:spcAft>
             </a:pPr>
             <a:r>
-              <a:rPr sz="2600" b="1">
+              <a:rPr sz="4000" b="1">
                 <a:solidFill>
                   <a:srgbClr val="FFFFFF"/>
                 </a:solidFill>
                 <a:latin typeface="맑은 고딕"/>
               </a:rPr>
-              <a:t>설계 원칙</a:t>
+              <a:t>15.8</a:t>
             </a:r>
           </a:p>
         </p:txBody>
@@ -13297,8 +13971,8 @@
         </p:nvSpPr>
         <p:spPr>
           <a:xfrm>
-            <a:off x="640080" y="1078992"/>
-            <a:ext cx="10881360" cy="457200"/>
+            <a:off x="822960" y="3017520"/>
+            <a:ext cx="10515600" cy="914400"/>
           </a:xfrm>
           <a:prstGeom prst="rect">
             <a:avLst/>
@@ -13317,27 +13991,71 @@
               </a:spcAft>
             </a:pPr>
             <a:r>
-              <a:rPr sz="1500" b="0">
-                <a:solidFill>
-                  <a:srgbClr val="5A6672"/>
-                </a:solidFill>
-                <a:latin typeface="맑은 고딕"/>
-              </a:rPr>
-              <a:t>다섯 가지</a:t>
-            </a:r>
-          </a:p>
-        </p:txBody>
-      </p:sp>
-      <p:sp>
-        <p:nvSpPr>
-          <p:cNvPr id="5" name="TextBox 4"/>
+              <a:rPr sz="2800" b="1">
+                <a:solidFill>
+                  <a:srgbClr val="FFFFFF"/>
+                </a:solidFill>
+                <a:latin typeface="맑은 고딕"/>
+              </a:rPr>
+              <a:t>상시 점검 스크립트 설계</a:t>
+            </a:r>
+          </a:p>
+        </p:txBody>
+      </p:sp>
+      <p:sp>
+        <p:nvSpPr>
+          <p:cNvPr id="5" name="Rectangle 4"/>
+          <p:cNvSpPr/>
+          <p:nvPr/>
+        </p:nvSpPr>
+        <p:spPr>
+          <a:xfrm>
+            <a:off x="822960" y="4114800"/>
+            <a:ext cx="5486400" cy="54864"/>
+          </a:xfrm>
+          <a:prstGeom prst="rect">
+            <a:avLst/>
+          </a:prstGeom>
+          <a:solidFill>
+            <a:srgbClr val="FFFFFF"/>
+          </a:solidFill>
+          <a:ln>
+            <a:noFill/>
+          </a:ln>
+          <a:effectLst/>
+        </p:spPr>
+        <p:style>
+          <a:lnRef idx="1">
+            <a:schemeClr val="accent1"/>
+          </a:lnRef>
+          <a:fillRef idx="3">
+            <a:schemeClr val="accent1"/>
+          </a:fillRef>
+          <a:effectRef idx="2">
+            <a:schemeClr val="accent1"/>
+          </a:effectRef>
+          <a:fontRef idx="minor">
+            <a:schemeClr val="lt1"/>
+          </a:fontRef>
+        </p:style>
+        <p:txBody>
+          <a:bodyPr rtlCol="0" anchor="ctr"/>
+          <a:lstStyle/>
+          <a:p>
+            <a:pPr algn="ctr"/>
+          </a:p>
+        </p:txBody>
+      </p:sp>
+      <p:sp>
+        <p:nvSpPr>
+          <p:cNvPr id="6" name="TextBox 5"/>
           <p:cNvSpPr txBox="1"/>
           <p:nvPr/>
         </p:nvSpPr>
         <p:spPr>
           <a:xfrm>
-            <a:off x="640080" y="1737360"/>
-            <a:ext cx="10881360" cy="4754880"/>
+            <a:off x="822960" y="4297680"/>
+            <a:ext cx="10058400" cy="2011680"/>
           </a:xfrm>
           <a:prstGeom prst="rect">
             <a:avLst/>
@@ -13352,81 +14070,49 @@
           <a:p>
             <a:pPr algn="l">
               <a:spcAft>
-                <a:spcPts val="1000"/>
-              </a:spcAft>
-            </a:pPr>
-            <a:r>
-              <a:rPr sz="1700" b="0">
-                <a:solidFill>
-                  <a:srgbClr val="222222"/>
-                </a:solidFill>
-                <a:latin typeface="맑은 고딕"/>
-              </a:rPr>
-              <a:t>•  **① 역할에 따라 다른 것을 본다**</a:t>
-            </a:r>
-          </a:p>
-          <a:p>
-            <a:pPr algn="l">
-              <a:spcAft>
-                <a:spcPts val="1000"/>
-              </a:spcAft>
-            </a:pPr>
-            <a:r>
-              <a:rPr sz="1700" b="0">
-                <a:solidFill>
-                  <a:srgbClr val="222222"/>
-                </a:solidFill>
-                <a:latin typeface="맑은 고딕"/>
-              </a:rPr>
-              <a:t>•  ② `count(*)` 로 판정 가능한 숫자를 만든다</a:t>
-            </a:r>
-          </a:p>
-          <a:p>
-            <a:pPr algn="l">
-              <a:spcAft>
-                <a:spcPts val="1000"/>
-              </a:spcAft>
-            </a:pPr>
-            <a:r>
-              <a:rPr sz="1700" b="0">
-                <a:solidFill>
-                  <a:srgbClr val="222222"/>
-                </a:solidFill>
-                <a:latin typeface="맑은 고딕"/>
-              </a:rPr>
-              <a:t>•  ③ 정상값을 미리 정한다</a:t>
-            </a:r>
-          </a:p>
-          <a:p>
-            <a:pPr algn="l">
-              <a:spcAft>
-                <a:spcPts val="1000"/>
-              </a:spcAft>
-            </a:pPr>
-            <a:r>
-              <a:rPr sz="1700" b="0">
-                <a:solidFill>
-                  <a:srgbClr val="222222"/>
-                </a:solidFill>
-                <a:latin typeface="맑은 고딕"/>
-              </a:rPr>
-              <a:t>•  ④ `V$DATAGUARD_STATUS` 에는 **시간 조건**을 넣는다</a:t>
-            </a:r>
-          </a:p>
-          <a:p>
-            <a:pPr algn="l">
-              <a:spcAft>
-                <a:spcPts val="1000"/>
-              </a:spcAft>
-            </a:pPr>
-            <a:r>
-              <a:rPr sz="1700" b="0">
-                <a:solidFill>
-                  <a:srgbClr val="222222"/>
-                </a:solidFill>
-                <a:latin typeface="맑은 고딕"/>
-              </a:rPr>
-              <a:t>•  ⑤ 조회 대상을 최소로 한다</a:t>
+                <a:spcPts val="800"/>
+              </a:spcAft>
+            </a:pPr>
+            <a:r>
+              <a:rPr sz="1600" b="0">
+                <a:solidFill>
+                  <a:srgbClr val="FFFFFF"/>
+                </a:solidFill>
+                <a:latin typeface="맑은 고딕"/>
+              </a:rPr>
+              <a:t>•  설계 원칙</a:t>
+            </a:r>
+          </a:p>
+          <a:p>
+            <a:pPr algn="l">
+              <a:spcAft>
+                <a:spcPts val="800"/>
+              </a:spcAft>
+            </a:pPr>
+            <a:r>
+              <a:rPr sz="1600" b="0">
+                <a:solidFill>
+                  <a:srgbClr val="FFFFFF"/>
+                </a:solidFill>
+                <a:latin typeface="맑은 고딕"/>
+              </a:rPr>
+              <a:t>•  Primary와 Standby 점검 항목</a:t>
+            </a:r>
+          </a:p>
+          <a:p>
+            <a:pPr algn="l">
+              <a:spcAft>
+                <a:spcPts val="800"/>
+              </a:spcAft>
+            </a:pPr>
+            <a:r>
+              <a:rPr sz="1600" b="0">
+                <a:solidFill>
+                  <a:srgbClr val="FFFFFF"/>
+                </a:solidFill>
+                <a:latin typeface="맑은 고딕"/>
+              </a:rPr>
+              <a:t>•  임계값과 판정</a:t>
             </a:r>
           </a:p>
         </p:txBody>
@@ -13527,7 +14213,7 @@
                 </a:solidFill>
                 <a:latin typeface="맑은 고딕"/>
               </a:rPr>
-              <a:t>15.1</a:t>
+              <a:t>15.2</a:t>
             </a:r>
           </a:p>
         </p:txBody>
@@ -13566,7 +14252,7 @@
                 </a:solidFill>
                 <a:latin typeface="맑은 고딕"/>
               </a:rPr>
-              <a:t>왜 아래층으로 내려가는가</a:t>
+              <a:t>SQL로 Data Guard를 감시하는 이유</a:t>
             </a:r>
           </a:p>
         </p:txBody>
@@ -13649,7 +14335,7 @@
                 </a:solidFill>
                 <a:latin typeface="맑은 고딕"/>
               </a:rPr>
-              <a:t>•  Broker 의 요약은 계산된 값이다</a:t>
+              <a:t>•  Broker는 요약, 원인은 V$ 뷰에</a:t>
             </a:r>
           </a:p>
           <a:p>
@@ -13665,7 +14351,23 @@
                 </a:solidFill>
                 <a:latin typeface="맑은 고딕"/>
               </a:rPr>
-              <a:t>•  세 가지 이유</a:t>
+              <a:t>•  정보는 역할마다 나뉘어 있다</a:t>
+            </a:r>
+          </a:p>
+          <a:p>
+            <a:pPr algn="l">
+              <a:spcAft>
+                <a:spcPts val="800"/>
+              </a:spcAft>
+            </a:pPr>
+            <a:r>
+              <a:rPr sz="1600" b="0">
+                <a:solidFill>
+                  <a:srgbClr val="FFFFFF"/>
+                </a:solidFill>
+                <a:latin typeface="맑은 고딕"/>
+              </a:rPr>
+              <a:t>•  증상, 위치, 원인, 과정의 네 층</a:t>
             </a:r>
           </a:p>
         </p:txBody>
@@ -13766,7 +14468,7 @@
                 </a:solidFill>
                 <a:latin typeface="맑은 고딕"/>
               </a:rPr>
-              <a:t>수집 항목</a:t>
+              <a:t>설계 원칙</a:t>
             </a:r>
           </a:p>
         </p:txBody>
@@ -13805,7 +14507,7 @@
                 </a:solidFill>
                 <a:latin typeface="맑은 고딕"/>
               </a:rPr>
-              <a:t>Primary / Standby</a:t>
+              <a:t>사람이 읽지 않아도 판정이 나오게</a:t>
             </a:r>
           </a:p>
         </p:txBody>
@@ -13844,7 +14546,7 @@
                 </a:solidFill>
                 <a:latin typeface="맑은 고딕"/>
               </a:rPr>
-              <a:t>•  Primary — 목적지 `STATUS`, `LOG_ABNORMAL`, `DG_ERR`, `CUR_SEQ`</a:t>
+              <a:t>•  역할을 먼저 판정하고 분기</a:t>
             </a:r>
           </a:p>
           <a:p>
@@ -13860,7 +14562,7 @@
                 </a:solidFill>
                 <a:latin typeface="맑은 고딕"/>
               </a:rPr>
-              <a:t>•  Standby — `MRP0`, `SEQUENCE#`, `RECOVERY_MODE`</a:t>
+              <a:t>•  결과는 숫자나 정해진 단어로</a:t>
             </a:r>
           </a:p>
           <a:p>
@@ -13876,7 +14578,7 @@
                 </a:solidFill>
                 <a:latin typeface="맑은 고딕"/>
               </a:rPr>
-              <a:t>•  Standby — **`SRL_ACTIVE`**, `GAP_CNT`, `DG_ERR`</a:t>
+              <a:t>•  정상 기대값을 미리 정의</a:t>
             </a:r>
           </a:p>
           <a:p>
@@ -13892,7 +14594,23 @@
                 </a:solidFill>
                 <a:latin typeface="맑은 고딕"/>
               </a:rPr>
-              <a:t>•  실측 `DG_ERR` chicago **3**(실습 03 흔적) / boston **0**</a:t>
+              <a:t>•  lag는 DATUM_TIME과 묶어서</a:t>
+            </a:r>
+          </a:p>
+          <a:p>
+            <a:pPr algn="l">
+              <a:spcAft>
+                <a:spcPts val="1000"/>
+              </a:spcAft>
+            </a:pPr>
+            <a:r>
+              <a:rPr sz="1700" b="0">
+                <a:solidFill>
+                  <a:srgbClr val="222222"/>
+                </a:solidFill>
+                <a:latin typeface="맑은 고딕"/>
+              </a:rPr>
+              <a:t>•  마운트 상태에서 동작, V$ 뷰만 사용</a:t>
             </a:r>
           </a:p>
         </p:txBody>
@@ -13993,7 +14711,7 @@
                 </a:solidFill>
                 <a:latin typeface="맑은 고딕"/>
               </a:rPr>
-              <a:t>주 지표와 보조 지표</a:t>
+              <a:t>Primary 점검 항목</a:t>
             </a:r>
           </a:p>
         </p:txBody>
@@ -14032,7 +14750,7 @@
                 </a:solidFill>
                 <a:latin typeface="맑은 고딕"/>
               </a:rPr>
-              <a:t>지연을 믿지 않는다</a:t>
+              <a:t>보냈는가, 보호 수준은 유지되는가</a:t>
             </a:r>
           </a:p>
         </p:txBody>
@@ -14071,7 +14789,7 @@
                 </a:solidFill>
                 <a:latin typeface="맑은 고딕"/>
               </a:rPr>
-              <a:t>•  **주 지표** — `SRL_ACTIVE`=1, `MRP0` 존재, 두 `SEQUENCE#` 일치, `STATUS`=VALID</a:t>
+              <a:t>•  STATUS&lt;&gt;'VALID'인 원격 목적지 수 = 0</a:t>
             </a:r>
           </a:p>
           <a:p>
@@ -14087,7 +14805,7 @@
                 </a:solidFill>
                 <a:latin typeface="맑은 고딕"/>
               </a:rPr>
-              <a:t>•  **보조 지표** — `transport lag`, `apply lag`</a:t>
+              <a:t>•  PROTECTION_MODE = PROTECTION_LEVEL</a:t>
             </a:r>
           </a:p>
           <a:p>
@@ -14103,7 +14821,7 @@
                 </a:solidFill>
                 <a:latin typeface="맑은 고딕"/>
               </a:rPr>
-              <a:t>•  지연은 **두 번 모두 0** 이었다 (14장 속성, 15장 리스너)</a:t>
+              <a:t>•  상대편 RECOVERY_MODE가 IDLE이 아님</a:t>
             </a:r>
           </a:p>
           <a:p>
@@ -14119,7 +14837,23 @@
                 </a:solidFill>
                 <a:latin typeface="맑은 고딕"/>
               </a:rPr>
-              <a:t>•  주 지표가 무너지면 **끊긴** 것, 보조만 나쁘면 **느린** 것</a:t>
+              <a:t>•  GAP_STATUS = NO GAP</a:t>
+            </a:r>
+          </a:p>
+          <a:p>
+            <a:pPr algn="l">
+              <a:spcAft>
+                <a:spcPts val="1000"/>
+              </a:spcAft>
+            </a:pPr>
+            <a:r>
+              <a:rPr sz="1700" b="0">
+                <a:solidFill>
+                  <a:srgbClr val="222222"/>
+                </a:solidFill>
+                <a:latin typeface="맑은 고딕"/>
+              </a:rPr>
+              <a:t>•  최근 점검 이후 Error·Fatal 메시지 = 0</a:t>
             </a:r>
           </a:p>
         </p:txBody>
@@ -14220,7 +14954,7 @@
                 </a:solidFill>
                 <a:latin typeface="맑은 고딕"/>
               </a:rPr>
-              <a:t>판정 규칙</a:t>
+              <a:t>Standby 점검 항목</a:t>
             </a:r>
           </a:p>
         </p:txBody>
@@ -14259,7 +14993,7 @@
                 </a:solidFill>
                 <a:latin typeface="맑은 고딕"/>
               </a:rPr>
-              <a:t>네 단계</a:t>
+              <a:t>적용이 살아 있고, 늦지 않았는가</a:t>
             </a:r>
           </a:p>
         </p:txBody>
@@ -14298,7 +15032,7 @@
                 </a:solidFill>
                 <a:latin typeface="맑은 고딕"/>
               </a:rPr>
-              <a:t>•  **정상** — 모든 기댓값과 일치</a:t>
+              <a:t>•  managed recovery 행 수 = 1</a:t>
             </a:r>
           </a:p>
           <a:p>
@@ -14314,7 +15048,7 @@
                 </a:solidFill>
                 <a:latin typeface="맑은 고딕"/>
               </a:rPr>
-              <a:t>•  **주의** — 지연이 임계값 초과 (`SRL_ACTIVE=1` 인 상태)</a:t>
+              <a:t>•  RFS 계열 행 1 이상</a:t>
             </a:r>
           </a:p>
           <a:p>
@@ -14330,7 +15064,7 @@
                 </a:solidFill>
                 <a:latin typeface="맑은 고딕"/>
               </a:rPr>
-              <a:t>•  **경고** — `DG_ERR&gt;0` 또는 `SEQUENCE#` 차이 2 이상</a:t>
+              <a:t>•  V$ARCHIVE_GAP 행 수 = 0</a:t>
             </a:r>
           </a:p>
           <a:p>
@@ -14346,7 +15080,23 @@
                 </a:solidFill>
                 <a:latin typeface="맑은 고딕"/>
               </a:rPr>
-              <a:t>•  **심각** — `SRL_ACTIVE=0` / `MRP0` 없음 / `STATUS='ERROR'`</a:t>
+              <a:t>•  apply lag를 초로 환산해 기준과 비교</a:t>
+            </a:r>
+          </a:p>
+          <a:p>
+            <a:pPr algn="l">
+              <a:spcAft>
+                <a:spcPts val="1000"/>
+              </a:spcAft>
+            </a:pPr>
+            <a:r>
+              <a:rPr sz="1700" b="0">
+                <a:solidFill>
+                  <a:srgbClr val="222222"/>
+                </a:solidFill>
+                <a:latin typeface="맑은 고딕"/>
+              </a:rPr>
+              <a:t>•  SYSDATE와 DATUM_TIME 차이가 수십 초 이내</a:t>
             </a:r>
           </a:p>
         </p:txBody>
@@ -14447,7 +15197,7 @@
                 </a:solidFill>
                 <a:latin typeface="맑은 고딕"/>
               </a:rPr>
-              <a:t>요약</a:t>
+              <a:t>임계값과 운영 연계</a:t>
             </a:r>
           </a:p>
         </p:txBody>
@@ -14460,8 +15210,8 @@
         </p:nvSpPr>
         <p:spPr>
           <a:xfrm>
-            <a:off x="640080" y="1371600"/>
-            <a:ext cx="10881360" cy="5120640"/>
+            <a:off x="640080" y="1078992"/>
+            <a:ext cx="10881360" cy="457200"/>
           </a:xfrm>
           <a:prstGeom prst="rect">
             <a:avLst/>
@@ -14476,241 +15226,104 @@
           <a:p>
             <a:pPr algn="l">
               <a:spcAft>
-                <a:spcPts val="1000"/>
-              </a:spcAft>
-            </a:pPr>
-            <a:r>
-              <a:rPr sz="1600" b="0">
-                <a:solidFill>
-                  <a:srgbClr val="222222"/>
-                </a:solidFill>
-                <a:latin typeface="맑은 고딕"/>
-              </a:rPr>
-              <a:t>•  Standby 의 온라인 리두는 `SEQUENCE#`가 0, Primary 의 SRL 은 전부 `UNASSIGNED`</a:t>
-            </a:r>
-          </a:p>
-          <a:p>
-            <a:pPr algn="l">
-              <a:spcAft>
-                <a:spcPts val="1000"/>
-              </a:spcAft>
-            </a:pPr>
-            <a:r>
-              <a:rPr sz="1600" b="0">
-                <a:solidFill>
-                  <a:srgbClr val="222222"/>
-                </a:solidFill>
-                <a:latin typeface="맑은 고딕"/>
-              </a:rPr>
-              <a:t>•  SRL 은 **`ACTIVE` 가 정확히 하나**이고 시퀀스가 Primary 와 같아야 한다</a:t>
-            </a:r>
-          </a:p>
-          <a:p>
-            <a:pPr algn="l">
-              <a:spcAft>
-                <a:spcPts val="1000"/>
-              </a:spcAft>
-            </a:pPr>
-            <a:r>
-              <a:rPr sz="1600" b="0">
-                <a:solidFill>
-                  <a:srgbClr val="222222"/>
-                </a:solidFill>
-                <a:latin typeface="맑은 고딕"/>
-              </a:rPr>
-              <a:t>•  `V$ARCHIVE_DEST` 는 설정, `_STATUS` 는 지금 상태</a:t>
-            </a:r>
-          </a:p>
-          <a:p>
-            <a:pPr algn="l">
-              <a:spcAft>
-                <a:spcPts val="1000"/>
-              </a:spcAft>
-            </a:pPr>
-            <a:r>
-              <a:rPr sz="1600" b="0">
-                <a:solidFill>
-                  <a:srgbClr val="222222"/>
-                </a:solidFill>
-                <a:latin typeface="맑은 고딕"/>
-              </a:rPr>
-              <a:t>•  `V$ARCHIVED_LOG` 의 `APPLIED` 는 **`dest_id=2`만** 의미가 있다</a:t>
-            </a:r>
-          </a:p>
-          <a:p>
-            <a:pPr algn="l">
-              <a:spcAft>
-                <a:spcPts val="1000"/>
-              </a:spcAft>
-            </a:pPr>
-            <a:r>
-              <a:rPr sz="1600" b="0">
-                <a:solidFill>
-                  <a:srgbClr val="222222"/>
-                </a:solidFill>
-                <a:latin typeface="맑은 고딕"/>
-              </a:rPr>
-              <a:t>•  `APPLIED_SEQ#`=0 은 정상 — 실시간 적용은 SRL 에서 읽는다</a:t>
-            </a:r>
-          </a:p>
-          <a:p>
-            <a:pPr algn="l">
-              <a:spcAft>
-                <a:spcPts val="1000"/>
-              </a:spcAft>
-            </a:pPr>
-            <a:r>
-              <a:rPr sz="1600" b="0">
-                <a:solidFill>
-                  <a:srgbClr val="222222"/>
-                </a:solidFill>
-                <a:latin typeface="맑은 고딕"/>
-              </a:rPr>
-              <a:t>•  리스너를 내리면 `ERROR` / `INACTIVE` / **`ORA-12541`**</a:t>
-            </a:r>
-          </a:p>
-          <a:p>
-            <a:pPr algn="l">
-              <a:spcAft>
-                <a:spcPts val="1000"/>
-              </a:spcAft>
-            </a:pPr>
-            <a:r>
-              <a:rPr sz="1600" b="0">
-                <a:solidFill>
-                  <a:srgbClr val="222222"/>
-                </a:solidFill>
-                <a:latin typeface="맑은 고딕"/>
-              </a:rPr>
-              <a:t>•  그때도 **두 지연은 0** — 세 번째로 확인</a:t>
-            </a:r>
-          </a:p>
-          <a:p>
-            <a:pPr algn="l">
-              <a:spcAft>
-                <a:spcPts val="1000"/>
-              </a:spcAft>
-            </a:pPr>
-            <a:r>
-              <a:rPr sz="1600" b="0">
-                <a:solidFill>
-                  <a:srgbClr val="222222"/>
-                </a:solidFill>
-                <a:latin typeface="맑은 고딕"/>
-              </a:rPr>
-              <a:t>•  `ENABLE`+`ERROR`=장애, `RESET`=Broker, `DEFER`=사람</a:t>
-            </a:r>
-          </a:p>
-          <a:p>
-            <a:pPr algn="l">
-              <a:spcAft>
-                <a:spcPts val="1000"/>
-              </a:spcAft>
-            </a:pPr>
-            <a:r>
-              <a:rPr sz="1600" b="0">
-                <a:solidFill>
-                  <a:srgbClr val="222222"/>
-                </a:solidFill>
-                <a:latin typeface="맑은 고딕"/>
-              </a:rPr>
-              <a:t>•  판정 기준은 `SEVERITY` 가 아니라 **`ERROR_CODE`**</a:t>
-            </a:r>
-          </a:p>
-          <a:p>
-            <a:pPr algn="l">
-              <a:spcAft>
-                <a:spcPts val="1000"/>
-              </a:spcAft>
-            </a:pPr>
-            <a:r>
-              <a:rPr sz="1600" b="0">
-                <a:solidFill>
-                  <a:srgbClr val="222222"/>
-                </a:solidFill>
-                <a:latin typeface="맑은 고딕"/>
-              </a:rPr>
-              <a:t>•  복구까지 **약 4~5분** (`ReopenSecs` 300)</a:t>
-            </a:r>
-          </a:p>
-          <a:p>
-            <a:pPr algn="l">
-              <a:spcAft>
-                <a:spcPts val="1000"/>
-              </a:spcAft>
-            </a:pPr>
-            <a:r>
-              <a:rPr sz="1600" b="0">
-                <a:solidFill>
-                  <a:srgbClr val="222222"/>
-                </a:solidFill>
-                <a:latin typeface="맑은 고딕"/>
-              </a:rPr>
-              <a:t>•  조치 직후 Broker 가 `ERROR` 인 것은 **판정 시차**</a:t>
-            </a:r>
-          </a:p>
-          <a:p>
-            <a:pPr algn="l">
-              <a:spcAft>
-                <a:spcPts val="1000"/>
-              </a:spcAft>
-            </a:pPr>
-            <a:r>
-              <a:rPr sz="1600" b="0">
-                <a:solidFill>
-                  <a:srgbClr val="222222"/>
-                </a:solidFill>
-                <a:latin typeface="맑은 고딕"/>
-              </a:rPr>
-              <a:t>•  `LOG_ARCHIVE_TRACE` 는 비트마스크, 잘못된 값은 **ORA-02017**</a:t>
-            </a:r>
-          </a:p>
-          <a:p>
-            <a:pPr algn="l">
-              <a:spcAft>
-                <a:spcPts val="1000"/>
-              </a:spcAft>
-            </a:pPr>
-            <a:r>
-              <a:rPr sz="1600" b="0">
-                <a:solidFill>
-                  <a:srgbClr val="222222"/>
-                </a:solidFill>
-                <a:latin typeface="맑은 고딕"/>
-              </a:rPr>
-              <a:t>•  점검표의 핵심은 **`SRL_ACTIVE`**, 지연은 보조 지표</a:t>
-            </a:r>
-          </a:p>
-          <a:p>
-            <a:pPr algn="l">
-              <a:spcAft>
-                <a:spcPts val="1000"/>
-              </a:spcAft>
-            </a:pPr>
-            <a:r>
-              <a:rPr sz="1600" b="0">
-                <a:solidFill>
-                  <a:srgbClr val="222222"/>
-                </a:solidFill>
-                <a:latin typeface="맑은 고딕"/>
-              </a:rPr>
-              <a:t>•  Logical 이면 `MRP0` 도 `V$DATAGUARD_STATS` 도 없다</a:t>
-            </a:r>
-          </a:p>
-          <a:p>
-            <a:pPr algn="l">
-              <a:spcAft>
-                <a:spcPts val="1000"/>
-              </a:spcAft>
-            </a:pPr>
-            <a:r>
-              <a:rPr sz="1600" b="0">
-                <a:solidFill>
-                  <a:srgbClr val="222222"/>
-                </a:solidFill>
-                <a:latin typeface="맑은 고딕"/>
-              </a:rPr>
-              <a:t>•  `V$LOGSTDBY_TRANSACTION` 은 전부 **`PRIMARY_`** 접두어</a:t>
+                <a:spcPts val="600"/>
+              </a:spcAft>
+            </a:pPr>
+            <a:r>
+              <a:rPr sz="1500" b="0">
+                <a:solidFill>
+                  <a:srgbClr val="5A6672"/>
+                </a:solidFill>
+                <a:latin typeface="맑은 고딕"/>
+              </a:rPr>
+              <a:t>기준은 업무에서 거꾸로 정한다</a:t>
+            </a:r>
+          </a:p>
+        </p:txBody>
+      </p:sp>
+      <p:sp>
+        <p:nvSpPr>
+          <p:cNvPr id="5" name="TextBox 4"/>
+          <p:cNvSpPr txBox="1"/>
+          <p:nvPr/>
+        </p:nvSpPr>
+        <p:spPr>
+          <a:xfrm>
+            <a:off x="640080" y="1737360"/>
+            <a:ext cx="10881360" cy="4754880"/>
+          </a:xfrm>
+          <a:prstGeom prst="rect">
+            <a:avLst/>
+          </a:prstGeom>
+          <a:noFill/>
+        </p:spPr>
+        <p:txBody>
+          <a:bodyPr wrap="square">
+            <a:spAutoFit/>
+          </a:bodyPr>
+          <a:lstStyle/>
+          <a:p>
+            <a:pPr algn="l">
+              <a:spcAft>
+                <a:spcPts val="1000"/>
+              </a:spcAft>
+            </a:pPr>
+            <a:r>
+              <a:rPr sz="1700" b="0">
+                <a:solidFill>
+                  <a:srgbClr val="222222"/>
+                </a:solidFill>
+                <a:latin typeface="맑은 고딕"/>
+              </a:rPr>
+              <a:t>•  transport lag ↔ RPO, apply lag·finish time ↔ RTO</a:t>
+            </a:r>
+          </a:p>
+          <a:p>
+            <a:pPr algn="l">
+              <a:spcAft>
+                <a:spcPts val="1000"/>
+              </a:spcAft>
+            </a:pPr>
+            <a:r>
+              <a:rPr sz="1700" b="0">
+                <a:solidFill>
+                  <a:srgbClr val="222222"/>
+                </a:solidFill>
+                <a:latin typeface="맑은 고딕"/>
+              </a:rPr>
+              <a:t>•  주의와 경보 두 단계로 판정</a:t>
+            </a:r>
+          </a:p>
+          <a:p>
+            <a:pPr algn="l">
+              <a:spcAft>
+                <a:spcPts val="1000"/>
+              </a:spcAft>
+            </a:pPr>
+            <a:r>
+              <a:rPr sz="1700" b="0">
+                <a:solidFill>
+                  <a:srgbClr val="222222"/>
+                </a:solidFill>
+                <a:latin typeface="맑은 고딕"/>
+              </a:rPr>
+              <a:t>•  양쪽을 같은 주기, 같은 시각에 실행</a:t>
+            </a:r>
+          </a:p>
+          <a:p>
+            <a:pPr algn="l">
+              <a:spcAft>
+                <a:spcPts val="1000"/>
+              </a:spcAft>
+            </a:pPr>
+            <a:r>
+              <a:rPr sz="1700" b="0">
+                <a:solidFill>
+                  <a:srgbClr val="222222"/>
+                </a:solidFill>
+                <a:latin typeface="맑은 고딕"/>
+              </a:rPr>
+              <a:t>•  Broker 임계값 속성과 함께 운영</a:t>
             </a:r>
           </a:p>
         </p:txBody>
@@ -14742,7 +15355,7 @@
         <p:spPr>
           <a:xfrm>
             <a:off x="0" y="0"/>
-            <a:ext cx="12191695" cy="1005840"/>
+            <a:ext cx="12191695" cy="6858000"/>
           </a:xfrm>
           <a:prstGeom prst="rect">
             <a:avLst/>
@@ -14785,8 +15398,8 @@
         </p:nvSpPr>
         <p:spPr>
           <a:xfrm>
-            <a:off x="548640" y="91440"/>
-            <a:ext cx="10972800" cy="777240"/>
+            <a:off x="822960" y="2011680"/>
+            <a:ext cx="10515600" cy="1097280"/>
           </a:xfrm>
           <a:prstGeom prst="rect">
             <a:avLst/>
@@ -14805,13 +15418,13 @@
               </a:spcAft>
             </a:pPr>
             <a:r>
-              <a:rPr sz="2600" b="1">
+              <a:rPr sz="4000" b="1">
                 <a:solidFill>
                   <a:srgbClr val="FFFFFF"/>
                 </a:solidFill>
                 <a:latin typeface="맑은 고딕"/>
               </a:rPr>
-              <a:t>다음 장 예고</a:t>
+              <a:t>15.9</a:t>
             </a:r>
           </a:p>
         </p:txBody>
@@ -14824,8 +15437,8 @@
         </p:nvSpPr>
         <p:spPr>
           <a:xfrm>
-            <a:off x="640080" y="1371600"/>
-            <a:ext cx="10881360" cy="5120640"/>
+            <a:off x="822960" y="3017520"/>
+            <a:ext cx="10515600" cy="914400"/>
           </a:xfrm>
           <a:prstGeom prst="rect">
             <a:avLst/>
@@ -14840,65 +15453,1343 @@
           <a:p>
             <a:pPr algn="l">
               <a:spcAft>
-                <a:spcPts val="1000"/>
+                <a:spcPts val="600"/>
+              </a:spcAft>
+            </a:pPr>
+            <a:r>
+              <a:rPr sz="2800" b="1">
+                <a:solidFill>
+                  <a:srgbClr val="FFFFFF"/>
+                </a:solidFill>
+                <a:latin typeface="맑은 고딕"/>
+              </a:rPr>
+              <a:t>Logical Standby 모니터링</a:t>
+            </a:r>
+          </a:p>
+        </p:txBody>
+      </p:sp>
+      <p:sp>
+        <p:nvSpPr>
+          <p:cNvPr id="5" name="Rectangle 4"/>
+          <p:cNvSpPr/>
+          <p:nvPr/>
+        </p:nvSpPr>
+        <p:spPr>
+          <a:xfrm>
+            <a:off x="822960" y="4114800"/>
+            <a:ext cx="5486400" cy="54864"/>
+          </a:xfrm>
+          <a:prstGeom prst="rect">
+            <a:avLst/>
+          </a:prstGeom>
+          <a:solidFill>
+            <a:srgbClr val="FFFFFF"/>
+          </a:solidFill>
+          <a:ln>
+            <a:noFill/>
+          </a:ln>
+          <a:effectLst/>
+        </p:spPr>
+        <p:style>
+          <a:lnRef idx="1">
+            <a:schemeClr val="accent1"/>
+          </a:lnRef>
+          <a:fillRef idx="3">
+            <a:schemeClr val="accent1"/>
+          </a:fillRef>
+          <a:effectRef idx="2">
+            <a:schemeClr val="accent1"/>
+          </a:effectRef>
+          <a:fontRef idx="minor">
+            <a:schemeClr val="lt1"/>
+          </a:fontRef>
+        </p:style>
+        <p:txBody>
+          <a:bodyPr rtlCol="0" anchor="ctr"/>
+          <a:lstStyle/>
+          <a:p>
+            <a:pPr algn="ctr"/>
+          </a:p>
+        </p:txBody>
+      </p:sp>
+      <p:sp>
+        <p:nvSpPr>
+          <p:cNvPr id="6" name="TextBox 5"/>
+          <p:cNvSpPr txBox="1"/>
+          <p:nvPr/>
+        </p:nvSpPr>
+        <p:spPr>
+          <a:xfrm>
+            <a:off x="822960" y="4297680"/>
+            <a:ext cx="10058400" cy="2011680"/>
+          </a:xfrm>
+          <a:prstGeom prst="rect">
+            <a:avLst/>
+          </a:prstGeom>
+          <a:noFill/>
+        </p:spPr>
+        <p:txBody>
+          <a:bodyPr wrap="square">
+            <a:spAutoFit/>
+          </a:bodyPr>
+          <a:lstStyle/>
+          <a:p>
+            <a:pPr algn="l">
+              <a:spcAft>
+                <a:spcPts val="800"/>
               </a:spcAft>
             </a:pPr>
             <a:r>
               <a:rPr sz="1600" b="0">
                 <a:solidFill>
-                  <a:srgbClr val="222222"/>
-                </a:solidFill>
-                <a:latin typeface="맑은 고딕"/>
-              </a:rPr>
-              <a:t>•  16장 — 역할 전환과 이후 운영</a:t>
-            </a:r>
-          </a:p>
-          <a:p>
-            <a:pPr algn="l">
-              <a:spcAft>
-                <a:spcPts val="1000"/>
+                  <a:srgbClr val="FFFFFF"/>
+                </a:solidFill>
+                <a:latin typeface="맑은 고딕"/>
+              </a:rPr>
+              <a:t>•  물리 Standby용 뷰가 조용해지는 이유</a:t>
+            </a:r>
+          </a:p>
+          <a:p>
+            <a:pPr algn="l">
+              <a:spcAft>
+                <a:spcPts val="800"/>
               </a:spcAft>
             </a:pPr>
             <a:r>
               <a:rPr sz="1600" b="0">
                 <a:solidFill>
-                  <a:srgbClr val="222222"/>
-                </a:solidFill>
-                <a:latin typeface="맑은 고딕"/>
-              </a:rPr>
-              <a:t>•  Switchover 를 DGMGRL 과 SQL 두 방식으로</a:t>
-            </a:r>
-          </a:p>
-          <a:p>
-            <a:pPr algn="l">
-              <a:spcAft>
-                <a:spcPts val="1000"/>
+                  <a:srgbClr val="FFFFFF"/>
+                </a:solidFill>
+                <a:latin typeface="맑은 고딕"/>
+              </a:rPr>
+              <a:t>•  상태와 진행, 트랜잭션</a:t>
+            </a:r>
+          </a:p>
+          <a:p>
+            <a:pPr algn="l">
+              <a:spcAft>
+                <a:spcPts val="800"/>
               </a:spcAft>
             </a:pPr>
             <a:r>
               <a:rPr sz="1600" b="0">
                 <a:solidFill>
-                  <a:srgbClr val="222222"/>
-                </a:solidFill>
-                <a:latin typeface="맑은 고딕"/>
-              </a:rPr>
-              <a:t>•  조건 미충족 상태를 만들어 거부를 재현</a:t>
-            </a:r>
-          </a:p>
-          <a:p>
-            <a:pPr algn="l">
-              <a:spcAft>
-                <a:spcPts val="1000"/>
+                  <a:srgbClr val="FFFFFF"/>
+                </a:solidFill>
+                <a:latin typeface="맑은 고딕"/>
+              </a:rPr>
+              <a:t>•  이벤트와 멈춘 적용</a:t>
+            </a:r>
+          </a:p>
+        </p:txBody>
+      </p:sp>
+    </p:spTree>
+  </p:cSld>
+  <p:clrMapOvr>
+    <a:masterClrMapping/>
+  </p:clrMapOvr>
+</p:sld>
+</file>
+
+<file path=ppt/slides/slide45.xml><?xml version="1.0" encoding="utf-8"?>
+<p:sld xmlns:a="http://schemas.openxmlformats.org/drawingml/2006/main" xmlns:p="http://schemas.openxmlformats.org/presentationml/2006/main" xmlns:r="http://schemas.openxmlformats.org/officeDocument/2006/relationships">
+  <p:cSld>
+    <p:spTree>
+      <p:nvGrpSpPr>
+        <p:cNvPr id="1" name=""/>
+        <p:cNvGrpSpPr/>
+        <p:nvPr/>
+      </p:nvGrpSpPr>
+      <p:grpSpPr/>
+      <p:sp>
+        <p:nvSpPr>
+          <p:cNvPr id="2" name="Rectangle 1"/>
+          <p:cNvSpPr/>
+          <p:nvPr/>
+        </p:nvSpPr>
+        <p:spPr>
+          <a:xfrm>
+            <a:off x="0" y="0"/>
+            <a:ext cx="12191695" cy="1005840"/>
+          </a:xfrm>
+          <a:prstGeom prst="rect">
+            <a:avLst/>
+          </a:prstGeom>
+          <a:solidFill>
+            <a:srgbClr val="C0392B"/>
+          </a:solidFill>
+          <a:ln>
+            <a:noFill/>
+          </a:ln>
+          <a:effectLst/>
+        </p:spPr>
+        <p:style>
+          <a:lnRef idx="1">
+            <a:schemeClr val="accent1"/>
+          </a:lnRef>
+          <a:fillRef idx="3">
+            <a:schemeClr val="accent1"/>
+          </a:fillRef>
+          <a:effectRef idx="2">
+            <a:schemeClr val="accent1"/>
+          </a:effectRef>
+          <a:fontRef idx="minor">
+            <a:schemeClr val="lt1"/>
+          </a:fontRef>
+        </p:style>
+        <p:txBody>
+          <a:bodyPr rtlCol="0" anchor="ctr"/>
+          <a:lstStyle/>
+          <a:p>
+            <a:pPr algn="ctr"/>
+          </a:p>
+        </p:txBody>
+      </p:sp>
+      <p:sp>
+        <p:nvSpPr>
+          <p:cNvPr id="3" name="TextBox 2"/>
+          <p:cNvSpPr txBox="1"/>
+          <p:nvPr/>
+        </p:nvSpPr>
+        <p:spPr>
+          <a:xfrm>
+            <a:off x="548640" y="91440"/>
+            <a:ext cx="10972800" cy="777240"/>
+          </a:xfrm>
+          <a:prstGeom prst="rect">
+            <a:avLst/>
+          </a:prstGeom>
+          <a:noFill/>
+        </p:spPr>
+        <p:txBody>
+          <a:bodyPr wrap="square">
+            <a:spAutoFit/>
+          </a:bodyPr>
+          <a:lstStyle/>
+          <a:p>
+            <a:pPr algn="l">
+              <a:spcAft>
+                <a:spcPts val="600"/>
+              </a:spcAft>
+            </a:pPr>
+            <a:r>
+              <a:rPr sz="2600" b="1">
+                <a:solidFill>
+                  <a:srgbClr val="FFFFFF"/>
+                </a:solidFill>
+                <a:latin typeface="맑은 고딕"/>
+              </a:rPr>
+              <a:t>물리 Standby용 뷰가 조용해진다</a:t>
+            </a:r>
+          </a:p>
+        </p:txBody>
+      </p:sp>
+      <p:sp>
+        <p:nvSpPr>
+          <p:cNvPr id="4" name="TextBox 3"/>
+          <p:cNvSpPr txBox="1"/>
+          <p:nvPr/>
+        </p:nvSpPr>
+        <p:spPr>
+          <a:xfrm>
+            <a:off x="640080" y="1078992"/>
+            <a:ext cx="10881360" cy="457200"/>
+          </a:xfrm>
+          <a:prstGeom prst="rect">
+            <a:avLst/>
+          </a:prstGeom>
+          <a:noFill/>
+        </p:spPr>
+        <p:txBody>
+          <a:bodyPr wrap="square">
+            <a:spAutoFit/>
+          </a:bodyPr>
+          <a:lstStyle/>
+          <a:p>
+            <a:pPr algn="l">
+              <a:spcAft>
+                <a:spcPts val="600"/>
+              </a:spcAft>
+            </a:pPr>
+            <a:r>
+              <a:rPr sz="1500" b="0">
+                <a:solidFill>
+                  <a:srgbClr val="5A6672"/>
+                </a:solidFill>
+                <a:latin typeface="맑은 고딕"/>
+              </a:rPr>
+              <a:t>적용 쪽 뷰 계열이 통째로 바뀐다</a:t>
+            </a:r>
+          </a:p>
+        </p:txBody>
+      </p:sp>
+      <p:sp>
+        <p:nvSpPr>
+          <p:cNvPr id="5" name="TextBox 4"/>
+          <p:cNvSpPr txBox="1"/>
+          <p:nvPr/>
+        </p:nvSpPr>
+        <p:spPr>
+          <a:xfrm>
+            <a:off x="640080" y="1737360"/>
+            <a:ext cx="10881360" cy="4754880"/>
+          </a:xfrm>
+          <a:prstGeom prst="rect">
+            <a:avLst/>
+          </a:prstGeom>
+          <a:noFill/>
+        </p:spPr>
+        <p:txBody>
+          <a:bodyPr wrap="square">
+            <a:spAutoFit/>
+          </a:bodyPr>
+          <a:lstStyle/>
+          <a:p>
+            <a:pPr algn="l">
+              <a:spcAft>
+                <a:spcPts val="1000"/>
+              </a:spcAft>
+            </a:pPr>
+            <a:r>
+              <a:rPr sz="1700" b="0">
+                <a:solidFill>
+                  <a:srgbClr val="222222"/>
+                </a:solidFill>
+                <a:latin typeface="맑은 고딕"/>
+              </a:rPr>
+              <a:t>•  MRP 대신 LSP와 SQL Apply 프로세스들</a:t>
+            </a:r>
+          </a:p>
+          <a:p>
+            <a:pPr algn="l">
+              <a:spcAft>
+                <a:spcPts val="1000"/>
+              </a:spcAft>
+            </a:pPr>
+            <a:r>
+              <a:rPr sz="1700" b="0">
+                <a:solidFill>
+                  <a:srgbClr val="222222"/>
+                </a:solidFill>
+                <a:latin typeface="맑은 고딕"/>
+              </a:rPr>
+              <a:t>•  받은 로그는 DBA_LOGSTDBY_LOG에 등록</a:t>
+            </a:r>
+          </a:p>
+          <a:p>
+            <a:pPr algn="l">
+              <a:spcAft>
+                <a:spcPts val="1000"/>
+              </a:spcAft>
+            </a:pPr>
+            <a:r>
+              <a:rPr sz="1700" b="0">
+                <a:solidFill>
+                  <a:srgbClr val="222222"/>
+                </a:solidFill>
+                <a:latin typeface="맑은 고딕"/>
+              </a:rPr>
+              <a:t>•  V$ARCHIVE_GAP, V$RECOVERY_PROGRESS는 비어 있음</a:t>
+            </a:r>
+          </a:p>
+          <a:p>
+            <a:pPr algn="l">
+              <a:spcAft>
+                <a:spcPts val="1000"/>
+              </a:spcAft>
+            </a:pPr>
+            <a:r>
+              <a:rPr sz="1700" b="0">
+                <a:solidFill>
+                  <a:srgbClr val="222222"/>
+                </a:solidFill>
+                <a:latin typeface="맑은 고딕"/>
+              </a:rPr>
+              <a:t>•  물리용 점검 스크립트는 정상으로 오판</a:t>
+            </a:r>
+          </a:p>
+          <a:p>
+            <a:pPr algn="l">
+              <a:spcAft>
+                <a:spcPts val="1000"/>
+              </a:spcAft>
+            </a:pPr>
+            <a:r>
+              <a:rPr sz="1700" b="0">
+                <a:solidFill>
+                  <a:srgbClr val="222222"/>
+                </a:solidFill>
+                <a:latin typeface="맑은 고딕"/>
+              </a:rPr>
+              <a:t>•  전송 쪽 뷰는 물리 Standby와 같다</a:t>
+            </a:r>
+          </a:p>
+        </p:txBody>
+      </p:sp>
+    </p:spTree>
+  </p:cSld>
+  <p:clrMapOvr>
+    <a:masterClrMapping/>
+  </p:clrMapOvr>
+</p:sld>
+</file>
+
+<file path=ppt/slides/slide46.xml><?xml version="1.0" encoding="utf-8"?>
+<p:sld xmlns:a="http://schemas.openxmlformats.org/drawingml/2006/main" xmlns:p="http://schemas.openxmlformats.org/presentationml/2006/main" xmlns:r="http://schemas.openxmlformats.org/officeDocument/2006/relationships">
+  <p:cSld>
+    <p:spTree>
+      <p:nvGrpSpPr>
+        <p:cNvPr id="1" name=""/>
+        <p:cNvGrpSpPr/>
+        <p:nvPr/>
+      </p:nvGrpSpPr>
+      <p:grpSpPr/>
+      <p:sp>
+        <p:nvSpPr>
+          <p:cNvPr id="2" name="Rectangle 1"/>
+          <p:cNvSpPr/>
+          <p:nvPr/>
+        </p:nvSpPr>
+        <p:spPr>
+          <a:xfrm>
+            <a:off x="0" y="0"/>
+            <a:ext cx="12191695" cy="1005840"/>
+          </a:xfrm>
+          <a:prstGeom prst="rect">
+            <a:avLst/>
+          </a:prstGeom>
+          <a:solidFill>
+            <a:srgbClr val="C0392B"/>
+          </a:solidFill>
+          <a:ln>
+            <a:noFill/>
+          </a:ln>
+          <a:effectLst/>
+        </p:spPr>
+        <p:style>
+          <a:lnRef idx="1">
+            <a:schemeClr val="accent1"/>
+          </a:lnRef>
+          <a:fillRef idx="3">
+            <a:schemeClr val="accent1"/>
+          </a:fillRef>
+          <a:effectRef idx="2">
+            <a:schemeClr val="accent1"/>
+          </a:effectRef>
+          <a:fontRef idx="minor">
+            <a:schemeClr val="lt1"/>
+          </a:fontRef>
+        </p:style>
+        <p:txBody>
+          <a:bodyPr rtlCol="0" anchor="ctr"/>
+          <a:lstStyle/>
+          <a:p>
+            <a:pPr algn="ctr"/>
+          </a:p>
+        </p:txBody>
+      </p:sp>
+      <p:sp>
+        <p:nvSpPr>
+          <p:cNvPr id="3" name="TextBox 2"/>
+          <p:cNvSpPr txBox="1"/>
+          <p:nvPr/>
+        </p:nvSpPr>
+        <p:spPr>
+          <a:xfrm>
+            <a:off x="548640" y="91440"/>
+            <a:ext cx="10972800" cy="777240"/>
+          </a:xfrm>
+          <a:prstGeom prst="rect">
+            <a:avLst/>
+          </a:prstGeom>
+          <a:noFill/>
+        </p:spPr>
+        <p:txBody>
+          <a:bodyPr wrap="square">
+            <a:spAutoFit/>
+          </a:bodyPr>
+          <a:lstStyle/>
+          <a:p>
+            <a:pPr algn="l">
+              <a:spcAft>
+                <a:spcPts val="600"/>
+              </a:spcAft>
+            </a:pPr>
+            <a:r>
+              <a:rPr sz="2600" b="1">
+                <a:solidFill>
+                  <a:srgbClr val="FFFFFF"/>
+                </a:solidFill>
+                <a:latin typeface="맑은 고딕"/>
+              </a:rPr>
+              <a:t>상태와 진행</a:t>
+            </a:r>
+          </a:p>
+        </p:txBody>
+      </p:sp>
+      <p:sp>
+        <p:nvSpPr>
+          <p:cNvPr id="4" name="TextBox 3"/>
+          <p:cNvSpPr txBox="1"/>
+          <p:nvPr/>
+        </p:nvSpPr>
+        <p:spPr>
+          <a:xfrm>
+            <a:off x="640080" y="1078992"/>
+            <a:ext cx="10881360" cy="457200"/>
+          </a:xfrm>
+          <a:prstGeom prst="rect">
+            <a:avLst/>
+          </a:prstGeom>
+          <a:noFill/>
+        </p:spPr>
+        <p:txBody>
+          <a:bodyPr wrap="square">
+            <a:spAutoFit/>
+          </a:bodyPr>
+          <a:lstStyle/>
+          <a:p>
+            <a:pPr algn="l">
+              <a:spcAft>
+                <a:spcPts val="600"/>
+              </a:spcAft>
+            </a:pPr>
+            <a:r>
+              <a:rPr sz="1500" b="0">
+                <a:solidFill>
+                  <a:srgbClr val="5A6672"/>
+                </a:solidFill>
+                <a:latin typeface="맑은 고딕"/>
+              </a:rPr>
+              <a:t>STATE와 SCN으로 본다</a:t>
+            </a:r>
+          </a:p>
+        </p:txBody>
+      </p:sp>
+      <p:sp>
+        <p:nvSpPr>
+          <p:cNvPr id="5" name="TextBox 4"/>
+          <p:cNvSpPr txBox="1"/>
+          <p:nvPr/>
+        </p:nvSpPr>
+        <p:spPr>
+          <a:xfrm>
+            <a:off x="640080" y="1737360"/>
+            <a:ext cx="10881360" cy="4754880"/>
+          </a:xfrm>
+          <a:prstGeom prst="rect">
+            <a:avLst/>
+          </a:prstGeom>
+          <a:noFill/>
+        </p:spPr>
+        <p:txBody>
+          <a:bodyPr wrap="square">
+            <a:spAutoFit/>
+          </a:bodyPr>
+          <a:lstStyle/>
+          <a:p>
+            <a:pPr algn="l">
+              <a:spcAft>
+                <a:spcPts val="1000"/>
+              </a:spcAft>
+            </a:pPr>
+            <a:r>
+              <a:rPr sz="1700" b="0">
+                <a:solidFill>
+                  <a:srgbClr val="222222"/>
+                </a:solidFill>
+                <a:latin typeface="맑은 고딕"/>
+              </a:rPr>
+              <a:t>•  V$LOGSTDBY_STATE: APPLYING, IDLE, WAITING ON GAP 등</a:t>
+            </a:r>
+          </a:p>
+          <a:p>
+            <a:pPr algn="l">
+              <a:spcAft>
+                <a:spcPts val="1000"/>
+              </a:spcAft>
+            </a:pPr>
+            <a:r>
+              <a:rPr sz="1700" b="0">
+                <a:solidFill>
+                  <a:srgbClr val="222222"/>
+                </a:solidFill>
+                <a:latin typeface="맑은 고딕"/>
+              </a:rPr>
+              <a:t>•  REALTIME_APPLY: Y이면 실시간 적용</a:t>
+            </a:r>
+          </a:p>
+          <a:p>
+            <a:pPr algn="l">
+              <a:spcAft>
+                <a:spcPts val="1000"/>
+              </a:spcAft>
+            </a:pPr>
+            <a:r>
+              <a:rPr sz="1700" b="0">
+                <a:solidFill>
+                  <a:srgbClr val="222222"/>
+                </a:solidFill>
+                <a:latin typeface="맑은 고딕"/>
+              </a:rPr>
+              <a:t>•  V$LOGSTDBY_PROGRESS: APPLIED_SCN, LATEST_SCN</a:t>
+            </a:r>
+          </a:p>
+          <a:p>
+            <a:pPr algn="l">
+              <a:spcAft>
+                <a:spcPts val="1000"/>
+              </a:spcAft>
+            </a:pPr>
+            <a:r>
+              <a:rPr sz="1700" b="0">
+                <a:solidFill>
+                  <a:srgbClr val="222222"/>
+                </a:solidFill>
+                <a:latin typeface="맑은 고딕"/>
+              </a:rPr>
+              <a:t>•  LATEST 멈춤은 수신, APPLIED만 멈춤은 적용 문제</a:t>
+            </a:r>
+          </a:p>
+          <a:p>
+            <a:pPr algn="l">
+              <a:spcAft>
+                <a:spcPts val="1000"/>
+              </a:spcAft>
+            </a:pPr>
+            <a:r>
+              <a:rPr sz="1700" b="0">
+                <a:solidFill>
+                  <a:srgbClr val="222222"/>
+                </a:solidFill>
+                <a:latin typeface="맑은 고딕"/>
+              </a:rPr>
+              <a:t>•  RESTART_SCN 이전 로그는 삭제 가능</a:t>
+            </a:r>
+          </a:p>
+        </p:txBody>
+      </p:sp>
+    </p:spTree>
+  </p:cSld>
+  <p:clrMapOvr>
+    <a:masterClrMapping/>
+  </p:clrMapOvr>
+</p:sld>
+</file>
+
+<file path=ppt/slides/slide47.xml><?xml version="1.0" encoding="utf-8"?>
+<p:sld xmlns:a="http://schemas.openxmlformats.org/drawingml/2006/main" xmlns:p="http://schemas.openxmlformats.org/presentationml/2006/main" xmlns:r="http://schemas.openxmlformats.org/officeDocument/2006/relationships">
+  <p:cSld>
+    <p:spTree>
+      <p:nvGrpSpPr>
+        <p:cNvPr id="1" name=""/>
+        <p:cNvGrpSpPr/>
+        <p:nvPr/>
+      </p:nvGrpSpPr>
+      <p:grpSpPr/>
+      <p:sp>
+        <p:nvSpPr>
+          <p:cNvPr id="2" name="Rectangle 1"/>
+          <p:cNvSpPr/>
+          <p:nvPr/>
+        </p:nvSpPr>
+        <p:spPr>
+          <a:xfrm>
+            <a:off x="0" y="0"/>
+            <a:ext cx="12191695" cy="1005840"/>
+          </a:xfrm>
+          <a:prstGeom prst="rect">
+            <a:avLst/>
+          </a:prstGeom>
+          <a:solidFill>
+            <a:srgbClr val="C0392B"/>
+          </a:solidFill>
+          <a:ln>
+            <a:noFill/>
+          </a:ln>
+          <a:effectLst/>
+        </p:spPr>
+        <p:style>
+          <a:lnRef idx="1">
+            <a:schemeClr val="accent1"/>
+          </a:lnRef>
+          <a:fillRef idx="3">
+            <a:schemeClr val="accent1"/>
+          </a:fillRef>
+          <a:effectRef idx="2">
+            <a:schemeClr val="accent1"/>
+          </a:effectRef>
+          <a:fontRef idx="minor">
+            <a:schemeClr val="lt1"/>
+          </a:fontRef>
+        </p:style>
+        <p:txBody>
+          <a:bodyPr rtlCol="0" anchor="ctr"/>
+          <a:lstStyle/>
+          <a:p>
+            <a:pPr algn="ctr"/>
+          </a:p>
+        </p:txBody>
+      </p:sp>
+      <p:sp>
+        <p:nvSpPr>
+          <p:cNvPr id="3" name="TextBox 2"/>
+          <p:cNvSpPr txBox="1"/>
+          <p:nvPr/>
+        </p:nvSpPr>
+        <p:spPr>
+          <a:xfrm>
+            <a:off x="548640" y="91440"/>
+            <a:ext cx="10972800" cy="777240"/>
+          </a:xfrm>
+          <a:prstGeom prst="rect">
+            <a:avLst/>
+          </a:prstGeom>
+          <a:noFill/>
+        </p:spPr>
+        <p:txBody>
+          <a:bodyPr wrap="square">
+            <a:spAutoFit/>
+          </a:bodyPr>
+          <a:lstStyle/>
+          <a:p>
+            <a:pPr algn="l">
+              <a:spcAft>
+                <a:spcPts val="600"/>
+              </a:spcAft>
+            </a:pPr>
+            <a:r>
+              <a:rPr sz="2600" b="1">
+                <a:solidFill>
+                  <a:srgbClr val="FFFFFF"/>
+                </a:solidFill>
+                <a:latin typeface="맑은 고딕"/>
+              </a:rPr>
+              <a:t>V$LOGSTDBY_TRANSACTION</a:t>
+            </a:r>
+          </a:p>
+        </p:txBody>
+      </p:sp>
+      <p:sp>
+        <p:nvSpPr>
+          <p:cNvPr id="4" name="TextBox 3"/>
+          <p:cNvSpPr txBox="1"/>
+          <p:nvPr/>
+        </p:nvSpPr>
+        <p:spPr>
+          <a:xfrm>
+            <a:off x="640080" y="1078992"/>
+            <a:ext cx="10881360" cy="457200"/>
+          </a:xfrm>
+          <a:prstGeom prst="rect">
+            <a:avLst/>
+          </a:prstGeom>
+          <a:noFill/>
+        </p:spPr>
+        <p:txBody>
+          <a:bodyPr wrap="square">
+            <a:spAutoFit/>
+          </a:bodyPr>
+          <a:lstStyle/>
+          <a:p>
+            <a:pPr algn="l">
+              <a:spcAft>
+                <a:spcPts val="600"/>
+              </a:spcAft>
+            </a:pPr>
+            <a:r>
+              <a:rPr sz="1500" b="0">
+                <a:solidFill>
+                  <a:srgbClr val="5A6672"/>
+                </a:solidFill>
+                <a:latin typeface="맑은 고딕"/>
+              </a:rPr>
+              <a:t>지금 처리 중인 Primary 트랜잭션</a:t>
+            </a:r>
+          </a:p>
+        </p:txBody>
+      </p:sp>
+      <p:sp>
+        <p:nvSpPr>
+          <p:cNvPr id="5" name="TextBox 4"/>
+          <p:cNvSpPr txBox="1"/>
+          <p:nvPr/>
+        </p:nvSpPr>
+        <p:spPr>
+          <a:xfrm>
+            <a:off x="640080" y="1737360"/>
+            <a:ext cx="10881360" cy="4754880"/>
+          </a:xfrm>
+          <a:prstGeom prst="rect">
+            <a:avLst/>
+          </a:prstGeom>
+          <a:noFill/>
+        </p:spPr>
+        <p:txBody>
+          <a:bodyPr wrap="square">
+            <a:spAutoFit/>
+          </a:bodyPr>
+          <a:lstStyle/>
+          <a:p>
+            <a:pPr algn="l">
+              <a:spcAft>
+                <a:spcPts val="1000"/>
+              </a:spcAft>
+            </a:pPr>
+            <a:r>
+              <a:rPr sz="1700" b="0">
+                <a:solidFill>
+                  <a:srgbClr val="222222"/>
+                </a:solidFill>
+                <a:latin typeface="맑은 고딕"/>
+              </a:rPr>
+              <a:t>•  PRIMARY_XID, TYPE, MINING_STATUS, APPLY_STATUS</a:t>
+            </a:r>
+          </a:p>
+          <a:p>
+            <a:pPr algn="l">
+              <a:spcAft>
+                <a:spcPts val="1000"/>
+              </a:spcAft>
+            </a:pPr>
+            <a:r>
+              <a:rPr sz="1700" b="0">
+                <a:solidFill>
+                  <a:srgbClr val="222222"/>
+                </a:solidFill>
+                <a:latin typeface="맑은 고딕"/>
+              </a:rPr>
+              <a:t>•  ID는 Primary에서 부여된 트랜잭션 ID</a:t>
+            </a:r>
+          </a:p>
+          <a:p>
+            <a:pPr algn="l">
+              <a:spcAft>
+                <a:spcPts val="1000"/>
+              </a:spcAft>
+            </a:pPr>
+            <a:r>
+              <a:rPr sz="1700" b="0">
+                <a:solidFill>
+                  <a:srgbClr val="222222"/>
+                </a:solidFill>
+                <a:latin typeface="맑은 고딕"/>
+              </a:rPr>
+              <a:t>•  Standby의 실제 트랜잭션은 V$TRANSACTION</a:t>
+            </a:r>
+          </a:p>
+          <a:p>
+            <a:pPr algn="l">
+              <a:spcAft>
+                <a:spcPts val="1000"/>
+              </a:spcAft>
+            </a:pPr>
+            <a:r>
+              <a:rPr sz="1700" b="0">
+                <a:solidFill>
+                  <a:srgbClr val="222222"/>
+                </a:solidFill>
+                <a:latin typeface="맑은 고딕"/>
+              </a:rPr>
+              <a:t>•  오래 머무는 트랜잭션이 지연의 후보</a:t>
+            </a:r>
+          </a:p>
+        </p:txBody>
+      </p:sp>
+    </p:spTree>
+  </p:cSld>
+  <p:clrMapOvr>
+    <a:masterClrMapping/>
+  </p:clrMapOvr>
+</p:sld>
+</file>
+
+<file path=ppt/slides/slide48.xml><?xml version="1.0" encoding="utf-8"?>
+<p:sld xmlns:a="http://schemas.openxmlformats.org/drawingml/2006/main" xmlns:p="http://schemas.openxmlformats.org/presentationml/2006/main" xmlns:r="http://schemas.openxmlformats.org/officeDocument/2006/relationships">
+  <p:cSld>
+    <p:spTree>
+      <p:nvGrpSpPr>
+        <p:cNvPr id="1" name=""/>
+        <p:cNvGrpSpPr/>
+        <p:nvPr/>
+      </p:nvGrpSpPr>
+      <p:grpSpPr/>
+      <p:sp>
+        <p:nvSpPr>
+          <p:cNvPr id="2" name="Rectangle 1"/>
+          <p:cNvSpPr/>
+          <p:nvPr/>
+        </p:nvSpPr>
+        <p:spPr>
+          <a:xfrm>
+            <a:off x="0" y="0"/>
+            <a:ext cx="12191695" cy="1005840"/>
+          </a:xfrm>
+          <a:prstGeom prst="rect">
+            <a:avLst/>
+          </a:prstGeom>
+          <a:solidFill>
+            <a:srgbClr val="C0392B"/>
+          </a:solidFill>
+          <a:ln>
+            <a:noFill/>
+          </a:ln>
+          <a:effectLst/>
+        </p:spPr>
+        <p:style>
+          <a:lnRef idx="1">
+            <a:schemeClr val="accent1"/>
+          </a:lnRef>
+          <a:fillRef idx="3">
+            <a:schemeClr val="accent1"/>
+          </a:fillRef>
+          <a:effectRef idx="2">
+            <a:schemeClr val="accent1"/>
+          </a:effectRef>
+          <a:fontRef idx="minor">
+            <a:schemeClr val="lt1"/>
+          </a:fontRef>
+        </p:style>
+        <p:txBody>
+          <a:bodyPr rtlCol="0" anchor="ctr"/>
+          <a:lstStyle/>
+          <a:p>
+            <a:pPr algn="ctr"/>
+          </a:p>
+        </p:txBody>
+      </p:sp>
+      <p:sp>
+        <p:nvSpPr>
+          <p:cNvPr id="3" name="TextBox 2"/>
+          <p:cNvSpPr txBox="1"/>
+          <p:nvPr/>
+        </p:nvSpPr>
+        <p:spPr>
+          <a:xfrm>
+            <a:off x="548640" y="91440"/>
+            <a:ext cx="10972800" cy="777240"/>
+          </a:xfrm>
+          <a:prstGeom prst="rect">
+            <a:avLst/>
+          </a:prstGeom>
+          <a:noFill/>
+        </p:spPr>
+        <p:txBody>
+          <a:bodyPr wrap="square">
+            <a:spAutoFit/>
+          </a:bodyPr>
+          <a:lstStyle/>
+          <a:p>
+            <a:pPr algn="l">
+              <a:spcAft>
+                <a:spcPts val="600"/>
+              </a:spcAft>
+            </a:pPr>
+            <a:r>
+              <a:rPr sz="2600" b="1">
+                <a:solidFill>
+                  <a:srgbClr val="FFFFFF"/>
+                </a:solidFill>
+                <a:latin typeface="맑은 고딕"/>
+              </a:rPr>
+              <a:t>DBA_LOGSTDBY_EVENTS와 멈춘 적용</a:t>
+            </a:r>
+          </a:p>
+        </p:txBody>
+      </p:sp>
+      <p:sp>
+        <p:nvSpPr>
+          <p:cNvPr id="4" name="TextBox 3"/>
+          <p:cNvSpPr txBox="1"/>
+          <p:nvPr/>
+        </p:nvSpPr>
+        <p:spPr>
+          <a:xfrm>
+            <a:off x="640080" y="1078992"/>
+            <a:ext cx="10881360" cy="457200"/>
+          </a:xfrm>
+          <a:prstGeom prst="rect">
+            <a:avLst/>
+          </a:prstGeom>
+          <a:noFill/>
+        </p:spPr>
+        <p:txBody>
+          <a:bodyPr wrap="square">
+            <a:spAutoFit/>
+          </a:bodyPr>
+          <a:lstStyle/>
+          <a:p>
+            <a:pPr algn="l">
+              <a:spcAft>
+                <a:spcPts val="600"/>
+              </a:spcAft>
+            </a:pPr>
+            <a:r>
+              <a:rPr sz="1500" b="0">
+                <a:solidFill>
+                  <a:srgbClr val="5A6672"/>
+                </a:solidFill>
+                <a:latin typeface="맑은 고딕"/>
+              </a:rPr>
+              <a:t>실패한 문장과 오류가 남는다</a:t>
+            </a:r>
+          </a:p>
+        </p:txBody>
+      </p:sp>
+      <p:sp>
+        <p:nvSpPr>
+          <p:cNvPr id="5" name="TextBox 4"/>
+          <p:cNvSpPr txBox="1"/>
+          <p:nvPr/>
+        </p:nvSpPr>
+        <p:spPr>
+          <a:xfrm>
+            <a:off x="640080" y="1737360"/>
+            <a:ext cx="10881360" cy="4754880"/>
+          </a:xfrm>
+          <a:prstGeom prst="rect">
+            <a:avLst/>
+          </a:prstGeom>
+          <a:noFill/>
+        </p:spPr>
+        <p:txBody>
+          <a:bodyPr wrap="square">
+            <a:spAutoFit/>
+          </a:bodyPr>
+          <a:lstStyle/>
+          <a:p>
+            <a:pPr algn="l">
+              <a:spcAft>
+                <a:spcPts val="1000"/>
+              </a:spcAft>
+            </a:pPr>
+            <a:r>
+              <a:rPr sz="1700" b="0">
+                <a:solidFill>
+                  <a:srgbClr val="222222"/>
+                </a:solidFill>
+                <a:latin typeface="맑은 고딕"/>
+              </a:rPr>
+              <a:t>•  EVENT_TIME, XID, EVENT, STATUS_CODE, STATUS</a:t>
+            </a:r>
+          </a:p>
+          <a:p>
+            <a:pPr algn="l">
+              <a:spcAft>
+                <a:spcPts val="1000"/>
+              </a:spcAft>
+            </a:pPr>
+            <a:r>
+              <a:rPr sz="1700" b="0">
+                <a:solidFill>
+                  <a:srgbClr val="222222"/>
+                </a:solidFill>
+                <a:latin typeface="맑은 고딕"/>
+              </a:rPr>
+              <a:t>•  보관 건수는 MAX_EVENTS_RECORDED로 조정</a:t>
+            </a:r>
+          </a:p>
+          <a:p>
+            <a:pPr algn="l">
+              <a:spcAft>
+                <a:spcPts val="1000"/>
+              </a:spcAft>
+            </a:pPr>
+            <a:r>
+              <a:rPr sz="1700" b="0">
+                <a:solidFill>
+                  <a:srgbClr val="222222"/>
+                </a:solidFill>
+                <a:latin typeface="맑은 고딕"/>
+              </a:rPr>
+              <a:t>•  원인을 고친 뒤 다시 시작</a:t>
+            </a:r>
+          </a:p>
+          <a:p>
+            <a:pPr algn="l">
+              <a:spcAft>
+                <a:spcPts val="1000"/>
+              </a:spcAft>
+            </a:pPr>
+            <a:r>
+              <a:rPr sz="1700" b="0">
+                <a:solidFill>
+                  <a:srgbClr val="222222"/>
+                </a:solidFill>
+                <a:latin typeface="맑은 고딕"/>
+              </a:rPr>
+              <a:t>•  SKIP FAILED TRANSACTION은 정합성을 사람이 책임</a:t>
+            </a:r>
+          </a:p>
+          <a:p>
+            <a:pPr algn="l">
+              <a:spcAft>
+                <a:spcPts val="1000"/>
+              </a:spcAft>
+            </a:pPr>
+            <a:r>
+              <a:rPr sz="1700" b="0">
+                <a:solidFill>
+                  <a:srgbClr val="222222"/>
+                </a:solidFill>
+                <a:latin typeface="맑은 고딕"/>
+              </a:rPr>
+              <a:t>•  반복되는 유형은 SKIP 규칙 검토</a:t>
+            </a:r>
+          </a:p>
+        </p:txBody>
+      </p:sp>
+    </p:spTree>
+  </p:cSld>
+  <p:clrMapOvr>
+    <a:masterClrMapping/>
+  </p:clrMapOvr>
+</p:sld>
+</file>
+
+<file path=ppt/slides/slide49.xml><?xml version="1.0" encoding="utf-8"?>
+<p:sld xmlns:a="http://schemas.openxmlformats.org/drawingml/2006/main" xmlns:p="http://schemas.openxmlformats.org/presentationml/2006/main" xmlns:r="http://schemas.openxmlformats.org/officeDocument/2006/relationships">
+  <p:cSld>
+    <p:spTree>
+      <p:nvGrpSpPr>
+        <p:cNvPr id="1" name=""/>
+        <p:cNvGrpSpPr/>
+        <p:nvPr/>
+      </p:nvGrpSpPr>
+      <p:grpSpPr/>
+      <p:sp>
+        <p:nvSpPr>
+          <p:cNvPr id="2" name="Rectangle 1"/>
+          <p:cNvSpPr/>
+          <p:nvPr/>
+        </p:nvSpPr>
+        <p:spPr>
+          <a:xfrm>
+            <a:off x="0" y="0"/>
+            <a:ext cx="12191695" cy="6858000"/>
+          </a:xfrm>
+          <a:prstGeom prst="rect">
+            <a:avLst/>
+          </a:prstGeom>
+          <a:solidFill>
+            <a:srgbClr val="C0392B"/>
+          </a:solidFill>
+          <a:ln>
+            <a:noFill/>
+          </a:ln>
+          <a:effectLst/>
+        </p:spPr>
+        <p:style>
+          <a:lnRef idx="1">
+            <a:schemeClr val="accent1"/>
+          </a:lnRef>
+          <a:fillRef idx="3">
+            <a:schemeClr val="accent1"/>
+          </a:fillRef>
+          <a:effectRef idx="2">
+            <a:schemeClr val="accent1"/>
+          </a:effectRef>
+          <a:fontRef idx="minor">
+            <a:schemeClr val="lt1"/>
+          </a:fontRef>
+        </p:style>
+        <p:txBody>
+          <a:bodyPr rtlCol="0" anchor="ctr"/>
+          <a:lstStyle/>
+          <a:p>
+            <a:pPr algn="ctr"/>
+          </a:p>
+        </p:txBody>
+      </p:sp>
+      <p:sp>
+        <p:nvSpPr>
+          <p:cNvPr id="3" name="TextBox 2"/>
+          <p:cNvSpPr txBox="1"/>
+          <p:nvPr/>
+        </p:nvSpPr>
+        <p:spPr>
+          <a:xfrm>
+            <a:off x="822960" y="2011680"/>
+            <a:ext cx="10515600" cy="1097280"/>
+          </a:xfrm>
+          <a:prstGeom prst="rect">
+            <a:avLst/>
+          </a:prstGeom>
+          <a:noFill/>
+        </p:spPr>
+        <p:txBody>
+          <a:bodyPr wrap="square">
+            <a:spAutoFit/>
+          </a:bodyPr>
+          <a:lstStyle/>
+          <a:p>
+            <a:pPr algn="l">
+              <a:spcAft>
+                <a:spcPts val="600"/>
+              </a:spcAft>
+            </a:pPr>
+            <a:r>
+              <a:rPr sz="4000" b="1">
+                <a:solidFill>
+                  <a:srgbClr val="FFFFFF"/>
+                </a:solidFill>
+                <a:latin typeface="맑은 고딕"/>
+              </a:rPr>
+              <a:t>15.10</a:t>
+            </a:r>
+          </a:p>
+        </p:txBody>
+      </p:sp>
+      <p:sp>
+        <p:nvSpPr>
+          <p:cNvPr id="4" name="TextBox 3"/>
+          <p:cNvSpPr txBox="1"/>
+          <p:nvPr/>
+        </p:nvSpPr>
+        <p:spPr>
+          <a:xfrm>
+            <a:off x="822960" y="3017520"/>
+            <a:ext cx="10515600" cy="914400"/>
+          </a:xfrm>
+          <a:prstGeom prst="rect">
+            <a:avLst/>
+          </a:prstGeom>
+          <a:noFill/>
+        </p:spPr>
+        <p:txBody>
+          <a:bodyPr wrap="square">
+            <a:spAutoFit/>
+          </a:bodyPr>
+          <a:lstStyle/>
+          <a:p>
+            <a:pPr algn="l">
+              <a:spcAft>
+                <a:spcPts val="600"/>
+              </a:spcAft>
+            </a:pPr>
+            <a:r>
+              <a:rPr sz="2800" b="1">
+                <a:solidFill>
+                  <a:srgbClr val="FFFFFF"/>
+                </a:solidFill>
+                <a:latin typeface="맑은 고딕"/>
+              </a:rPr>
+              <a:t>운영 시 주의점</a:t>
+            </a:r>
+          </a:p>
+        </p:txBody>
+      </p:sp>
+      <p:sp>
+        <p:nvSpPr>
+          <p:cNvPr id="5" name="Rectangle 4"/>
+          <p:cNvSpPr/>
+          <p:nvPr/>
+        </p:nvSpPr>
+        <p:spPr>
+          <a:xfrm>
+            <a:off x="822960" y="4114800"/>
+            <a:ext cx="5486400" cy="54864"/>
+          </a:xfrm>
+          <a:prstGeom prst="rect">
+            <a:avLst/>
+          </a:prstGeom>
+          <a:solidFill>
+            <a:srgbClr val="FFFFFF"/>
+          </a:solidFill>
+          <a:ln>
+            <a:noFill/>
+          </a:ln>
+          <a:effectLst/>
+        </p:spPr>
+        <p:style>
+          <a:lnRef idx="1">
+            <a:schemeClr val="accent1"/>
+          </a:lnRef>
+          <a:fillRef idx="3">
+            <a:schemeClr val="accent1"/>
+          </a:fillRef>
+          <a:effectRef idx="2">
+            <a:schemeClr val="accent1"/>
+          </a:effectRef>
+          <a:fontRef idx="minor">
+            <a:schemeClr val="lt1"/>
+          </a:fontRef>
+        </p:style>
+        <p:txBody>
+          <a:bodyPr rtlCol="0" anchor="ctr"/>
+          <a:lstStyle/>
+          <a:p>
+            <a:pPr algn="ctr"/>
+          </a:p>
+        </p:txBody>
+      </p:sp>
+      <p:sp>
+        <p:nvSpPr>
+          <p:cNvPr id="6" name="TextBox 5"/>
+          <p:cNvSpPr txBox="1"/>
+          <p:nvPr/>
+        </p:nvSpPr>
+        <p:spPr>
+          <a:xfrm>
+            <a:off x="822960" y="4297680"/>
+            <a:ext cx="10058400" cy="2011680"/>
+          </a:xfrm>
+          <a:prstGeom prst="rect">
+            <a:avLst/>
+          </a:prstGeom>
+          <a:noFill/>
+        </p:spPr>
+        <p:txBody>
+          <a:bodyPr wrap="square">
+            <a:spAutoFit/>
+          </a:bodyPr>
+          <a:lstStyle/>
+          <a:p>
+            <a:pPr algn="l">
+              <a:spcAft>
+                <a:spcPts val="800"/>
               </a:spcAft>
             </a:pPr>
             <a:r>
               <a:rPr sz="1600" b="0">
                 <a:solidFill>
-                  <a:srgbClr val="222222"/>
-                </a:solidFill>
-                <a:latin typeface="맑은 고딕"/>
-              </a:rPr>
-              <a:t>•  Failover 와 Reinstate, 그리고 Standby 백업</a:t>
+                  <a:srgbClr val="FFFFFF"/>
+                </a:solidFill>
+                <a:latin typeface="맑은 고딕"/>
+              </a:rPr>
+              <a:t>•  역할 확인 후 해석</a:t>
+            </a:r>
+          </a:p>
+          <a:p>
+            <a:pPr algn="l">
+              <a:spcAft>
+                <a:spcPts val="800"/>
+              </a:spcAft>
+            </a:pPr>
+            <a:r>
+              <a:rPr sz="1600" b="0">
+                <a:solidFill>
+                  <a:srgbClr val="FFFFFF"/>
+                </a:solidFill>
+                <a:latin typeface="맑은 고딕"/>
+              </a:rPr>
+              <a:t>•  과거 오류와 현재 오류 구분</a:t>
+            </a:r>
+          </a:p>
+          <a:p>
+            <a:pPr algn="l">
+              <a:spcAft>
+                <a:spcPts val="800"/>
+              </a:spcAft>
+            </a:pPr>
+            <a:r>
+              <a:rPr sz="1600" b="0">
+                <a:solidFill>
+                  <a:srgbClr val="FFFFFF"/>
+                </a:solidFill>
+                <a:latin typeface="맑은 고딕"/>
+              </a:rPr>
+              <a:t>•  메모리 뷰와 로그의 보존 차이</a:t>
             </a:r>
           </a:p>
         </p:txBody>
@@ -14999,7 +16890,7 @@
                 </a:solidFill>
                 <a:latin typeface="맑은 고딕"/>
               </a:rPr>
-              <a:t>요약의 한계</a:t>
+              <a:t>Broker 요약과 V$ 뷰</a:t>
             </a:r>
           </a:p>
         </p:txBody>
@@ -15038,7 +16929,7 @@
                 </a:solidFill>
                 <a:latin typeface="맑은 고딕"/>
               </a:rPr>
-              <a:t>14장에서 본 것</a:t>
+              <a:t>경고 코드는 증상, ORA- 번호는 원인</a:t>
             </a:r>
           </a:p>
         </p:txBody>
@@ -15077,7 +16968,7 @@
                 </a:solidFill>
                 <a:latin typeface="맑은 고딕"/>
               </a:rPr>
-              <a:t>•  `LogShipping=OFF` 인데 `SHOW CONFIGURATION` 은 **SUCCESS**</a:t>
+              <a:t>•  Broker 판정은 V$ 뷰와 경고 로그를 묶은 결과</a:t>
             </a:r>
           </a:p>
           <a:p>
@@ -15093,7 +16984,7 @@
                 </a:solidFill>
                 <a:latin typeface="맑은 고딕"/>
               </a:rPr>
-              <a:t>•  두 지연도 **0**</a:t>
+              <a:t>•  끊겼다는 사실은 알려도 왜 끊겼는지는 모름</a:t>
             </a:r>
           </a:p>
           <a:p>
@@ -15109,7 +17000,7 @@
                 </a:solidFill>
                 <a:latin typeface="맑은 고딕"/>
               </a:rPr>
-              <a:t>•  `VALIDATE` 만 `Ready for Switchover: No`</a:t>
+              <a:t>•  원인은 V$ARCHIVE_DEST.ERROR, 경고 로그에</a:t>
             </a:r>
           </a:p>
           <a:p>
@@ -15125,7 +17016,1050 @@
                 </a:solidFill>
                 <a:latin typeface="맑은 고딕"/>
               </a:rPr>
-              <a:t>•  **어떤 위험은 요약에 나타나지 않는다**</a:t>
+              <a:t>•  Broker 없는 구성은 V$ 뷰가 유일한 수단</a:t>
+            </a:r>
+          </a:p>
+          <a:p>
+            <a:pPr algn="l">
+              <a:spcAft>
+                <a:spcPts val="1000"/>
+              </a:spcAft>
+            </a:pPr>
+            <a:r>
+              <a:rPr sz="1700" b="0">
+                <a:solidFill>
+                  <a:srgbClr val="222222"/>
+                </a:solidFill>
+                <a:latin typeface="맑은 고딕"/>
+              </a:rPr>
+              <a:t>•  Broker가 멈춰도 V$ 뷰는 현재 값을 낸다</a:t>
+            </a:r>
+          </a:p>
+        </p:txBody>
+      </p:sp>
+    </p:spTree>
+  </p:cSld>
+  <p:clrMapOvr>
+    <a:masterClrMapping/>
+  </p:clrMapOvr>
+</p:sld>
+</file>
+
+<file path=ppt/slides/slide50.xml><?xml version="1.0" encoding="utf-8"?>
+<p:sld xmlns:a="http://schemas.openxmlformats.org/drawingml/2006/main" xmlns:p="http://schemas.openxmlformats.org/presentationml/2006/main" xmlns:r="http://schemas.openxmlformats.org/officeDocument/2006/relationships">
+  <p:cSld>
+    <p:spTree>
+      <p:nvGrpSpPr>
+        <p:cNvPr id="1" name=""/>
+        <p:cNvGrpSpPr/>
+        <p:nvPr/>
+      </p:nvGrpSpPr>
+      <p:grpSpPr/>
+      <p:sp>
+        <p:nvSpPr>
+          <p:cNvPr id="2" name="Rectangle 1"/>
+          <p:cNvSpPr/>
+          <p:nvPr/>
+        </p:nvSpPr>
+        <p:spPr>
+          <a:xfrm>
+            <a:off x="0" y="0"/>
+            <a:ext cx="12191695" cy="1005840"/>
+          </a:xfrm>
+          <a:prstGeom prst="rect">
+            <a:avLst/>
+          </a:prstGeom>
+          <a:solidFill>
+            <a:srgbClr val="C0392B"/>
+          </a:solidFill>
+          <a:ln>
+            <a:noFill/>
+          </a:ln>
+          <a:effectLst/>
+        </p:spPr>
+        <p:style>
+          <a:lnRef idx="1">
+            <a:schemeClr val="accent1"/>
+          </a:lnRef>
+          <a:fillRef idx="3">
+            <a:schemeClr val="accent1"/>
+          </a:fillRef>
+          <a:effectRef idx="2">
+            <a:schemeClr val="accent1"/>
+          </a:effectRef>
+          <a:fontRef idx="minor">
+            <a:schemeClr val="lt1"/>
+          </a:fontRef>
+        </p:style>
+        <p:txBody>
+          <a:bodyPr rtlCol="0" anchor="ctr"/>
+          <a:lstStyle/>
+          <a:p>
+            <a:pPr algn="ctr"/>
+          </a:p>
+        </p:txBody>
+      </p:sp>
+      <p:sp>
+        <p:nvSpPr>
+          <p:cNvPr id="3" name="TextBox 2"/>
+          <p:cNvSpPr txBox="1"/>
+          <p:nvPr/>
+        </p:nvSpPr>
+        <p:spPr>
+          <a:xfrm>
+            <a:off x="548640" y="91440"/>
+            <a:ext cx="10972800" cy="777240"/>
+          </a:xfrm>
+          <a:prstGeom prst="rect">
+            <a:avLst/>
+          </a:prstGeom>
+          <a:noFill/>
+        </p:spPr>
+        <p:txBody>
+          <a:bodyPr wrap="square">
+            <a:spAutoFit/>
+          </a:bodyPr>
+          <a:lstStyle/>
+          <a:p>
+            <a:pPr algn="l">
+              <a:spcAft>
+                <a:spcPts val="600"/>
+              </a:spcAft>
+            </a:pPr>
+            <a:r>
+              <a:rPr sz="2600" b="1">
+                <a:solidFill>
+                  <a:srgbClr val="FFFFFF"/>
+                </a:solidFill>
+                <a:latin typeface="맑은 고딕"/>
+              </a:rPr>
+              <a:t>운영 시 주의점</a:t>
+            </a:r>
+          </a:p>
+        </p:txBody>
+      </p:sp>
+      <p:sp>
+        <p:nvSpPr>
+          <p:cNvPr id="4" name="TextBox 3"/>
+          <p:cNvSpPr txBox="1"/>
+          <p:nvPr/>
+        </p:nvSpPr>
+        <p:spPr>
+          <a:xfrm>
+            <a:off x="640080" y="1078992"/>
+            <a:ext cx="10881360" cy="457200"/>
+          </a:xfrm>
+          <a:prstGeom prst="rect">
+            <a:avLst/>
+          </a:prstGeom>
+          <a:noFill/>
+        </p:spPr>
+        <p:txBody>
+          <a:bodyPr wrap="square">
+            <a:spAutoFit/>
+          </a:bodyPr>
+          <a:lstStyle/>
+          <a:p>
+            <a:pPr algn="l">
+              <a:spcAft>
+                <a:spcPts val="600"/>
+              </a:spcAft>
+            </a:pPr>
+            <a:r>
+              <a:rPr sz="1500" b="0">
+                <a:solidFill>
+                  <a:srgbClr val="5A6672"/>
+                </a:solidFill>
+                <a:latin typeface="맑은 고딕"/>
+              </a:rPr>
+              <a:t>조회 결과를 읽는 순간의 실수들</a:t>
+            </a:r>
+          </a:p>
+        </p:txBody>
+      </p:sp>
+      <p:sp>
+        <p:nvSpPr>
+          <p:cNvPr id="5" name="TextBox 4"/>
+          <p:cNvSpPr txBox="1"/>
+          <p:nvPr/>
+        </p:nvSpPr>
+        <p:spPr>
+          <a:xfrm>
+            <a:off x="640080" y="1737360"/>
+            <a:ext cx="10881360" cy="4754880"/>
+          </a:xfrm>
+          <a:prstGeom prst="rect">
+            <a:avLst/>
+          </a:prstGeom>
+          <a:noFill/>
+        </p:spPr>
+        <p:txBody>
+          <a:bodyPr wrap="square">
+            <a:spAutoFit/>
+          </a:bodyPr>
+          <a:lstStyle/>
+          <a:p>
+            <a:pPr algn="l">
+              <a:spcAft>
+                <a:spcPts val="1000"/>
+              </a:spcAft>
+            </a:pPr>
+            <a:r>
+              <a:rPr sz="1700" b="0">
+                <a:solidFill>
+                  <a:srgbClr val="222222"/>
+                </a:solidFill>
+                <a:latin typeface="맑은 고딕"/>
+              </a:rPr>
+              <a:t>•  역할을 먼저 확인하고 값을 해석</a:t>
+            </a:r>
+          </a:p>
+          <a:p>
+            <a:pPr algn="l">
+              <a:spcAft>
+                <a:spcPts val="1000"/>
+              </a:spcAft>
+            </a:pPr>
+            <a:r>
+              <a:rPr sz="1700" b="0">
+                <a:solidFill>
+                  <a:srgbClr val="222222"/>
+                </a:solidFill>
+                <a:latin typeface="맑은 고딕"/>
+              </a:rPr>
+              <a:t>•  ERROR와 이력 오류는 시각과 함께</a:t>
+            </a:r>
+          </a:p>
+          <a:p>
+            <a:pPr algn="l">
+              <a:spcAft>
+                <a:spcPts val="1000"/>
+              </a:spcAft>
+            </a:pPr>
+            <a:r>
+              <a:rPr sz="1700" b="0">
+                <a:solidFill>
+                  <a:srgbClr val="222222"/>
+                </a:solidFill>
+                <a:latin typeface="맑은 고딕"/>
+              </a:rPr>
+              <a:t>•  메모리 뷰는 재기동 시 사라짐, 로그로 보존</a:t>
+            </a:r>
+          </a:p>
+          <a:p>
+            <a:pPr algn="l">
+              <a:spcAft>
+                <a:spcPts val="1000"/>
+              </a:spcAft>
+            </a:pPr>
+            <a:r>
+              <a:rPr sz="1700" b="0">
+                <a:solidFill>
+                  <a:srgbClr val="222222"/>
+                </a:solidFill>
+                <a:latin typeface="맑은 고딕"/>
+              </a:rPr>
+              <a:t>•  Logical Standby 갈래를 점검에 따로</a:t>
+            </a:r>
+          </a:p>
+          <a:p>
+            <a:pPr algn="l">
+              <a:spcAft>
+                <a:spcPts val="1000"/>
+              </a:spcAft>
+            </a:pPr>
+            <a:r>
+              <a:rPr sz="1700" b="0">
+                <a:solidFill>
+                  <a:srgbClr val="222222"/>
+                </a:solidFill>
+                <a:latin typeface="맑은 고딕"/>
+              </a:rPr>
+              <a:t>•  두 서버 시계 동기화</a:t>
+            </a:r>
+          </a:p>
+        </p:txBody>
+      </p:sp>
+    </p:spTree>
+  </p:cSld>
+  <p:clrMapOvr>
+    <a:masterClrMapping/>
+  </p:clrMapOvr>
+</p:sld>
+</file>
+
+<file path=ppt/slides/slide51.xml><?xml version="1.0" encoding="utf-8"?>
+<p:sld xmlns:a="http://schemas.openxmlformats.org/drawingml/2006/main" xmlns:p="http://schemas.openxmlformats.org/presentationml/2006/main" xmlns:r="http://schemas.openxmlformats.org/officeDocument/2006/relationships">
+  <p:cSld>
+    <p:spTree>
+      <p:nvGrpSpPr>
+        <p:cNvPr id="1" name=""/>
+        <p:cNvGrpSpPr/>
+        <p:nvPr/>
+      </p:nvGrpSpPr>
+      <p:grpSpPr/>
+      <p:sp>
+        <p:nvSpPr>
+          <p:cNvPr id="2" name="Rectangle 1"/>
+          <p:cNvSpPr/>
+          <p:nvPr/>
+        </p:nvSpPr>
+        <p:spPr>
+          <a:xfrm>
+            <a:off x="0" y="0"/>
+            <a:ext cx="12191695" cy="1005840"/>
+          </a:xfrm>
+          <a:prstGeom prst="rect">
+            <a:avLst/>
+          </a:prstGeom>
+          <a:solidFill>
+            <a:srgbClr val="C0392B"/>
+          </a:solidFill>
+          <a:ln>
+            <a:noFill/>
+          </a:ln>
+          <a:effectLst/>
+        </p:spPr>
+        <p:style>
+          <a:lnRef idx="1">
+            <a:schemeClr val="accent1"/>
+          </a:lnRef>
+          <a:fillRef idx="3">
+            <a:schemeClr val="accent1"/>
+          </a:fillRef>
+          <a:effectRef idx="2">
+            <a:schemeClr val="accent1"/>
+          </a:effectRef>
+          <a:fontRef idx="minor">
+            <a:schemeClr val="lt1"/>
+          </a:fontRef>
+        </p:style>
+        <p:txBody>
+          <a:bodyPr rtlCol="0" anchor="ctr"/>
+          <a:lstStyle/>
+          <a:p>
+            <a:pPr algn="ctr"/>
+          </a:p>
+        </p:txBody>
+      </p:sp>
+      <p:sp>
+        <p:nvSpPr>
+          <p:cNvPr id="3" name="TextBox 2"/>
+          <p:cNvSpPr txBox="1"/>
+          <p:nvPr/>
+        </p:nvSpPr>
+        <p:spPr>
+          <a:xfrm>
+            <a:off x="548640" y="91440"/>
+            <a:ext cx="10972800" cy="777240"/>
+          </a:xfrm>
+          <a:prstGeom prst="rect">
+            <a:avLst/>
+          </a:prstGeom>
+          <a:noFill/>
+        </p:spPr>
+        <p:txBody>
+          <a:bodyPr wrap="square">
+            <a:spAutoFit/>
+          </a:bodyPr>
+          <a:lstStyle/>
+          <a:p>
+            <a:pPr algn="l">
+              <a:spcAft>
+                <a:spcPts val="600"/>
+              </a:spcAft>
+            </a:pPr>
+            <a:r>
+              <a:rPr sz="2600" b="1">
+                <a:solidFill>
+                  <a:srgbClr val="FFFFFF"/>
+                </a:solidFill>
+                <a:latin typeface="맑은 고딕"/>
+              </a:rPr>
+              <a:t>요약</a:t>
+            </a:r>
+          </a:p>
+        </p:txBody>
+      </p:sp>
+      <p:sp>
+        <p:nvSpPr>
+          <p:cNvPr id="4" name="TextBox 3"/>
+          <p:cNvSpPr txBox="1"/>
+          <p:nvPr/>
+        </p:nvSpPr>
+        <p:spPr>
+          <a:xfrm>
+            <a:off x="640080" y="1371600"/>
+            <a:ext cx="10881360" cy="5120640"/>
+          </a:xfrm>
+          <a:prstGeom prst="rect">
+            <a:avLst/>
+          </a:prstGeom>
+          <a:noFill/>
+        </p:spPr>
+        <p:txBody>
+          <a:bodyPr wrap="square">
+            <a:spAutoFit/>
+          </a:bodyPr>
+          <a:lstStyle/>
+          <a:p>
+            <a:pPr algn="l">
+              <a:spcAft>
+                <a:spcPts val="1000"/>
+              </a:spcAft>
+            </a:pPr>
+            <a:r>
+              <a:rPr sz="1600" b="0">
+                <a:solidFill>
+                  <a:srgbClr val="222222"/>
+                </a:solidFill>
+                <a:latin typeface="맑은 고딕"/>
+              </a:rPr>
+              <a:t>•  Broker는 요약, 원인 숫자와 ORA- 번호는 V$ 뷰와 경고 로그</a:t>
+            </a:r>
+          </a:p>
+          <a:p>
+            <a:pPr algn="l">
+              <a:spcAft>
+                <a:spcPts val="1000"/>
+              </a:spcAft>
+            </a:pPr>
+            <a:r>
+              <a:rPr sz="1600" b="0">
+                <a:solidFill>
+                  <a:srgbClr val="222222"/>
+                </a:solidFill>
+                <a:latin typeface="맑은 고딕"/>
+              </a:rPr>
+              <a:t>•  Primary는 전송, Standby는 수신·적용·지연을 안다</a:t>
+            </a:r>
+          </a:p>
+          <a:p>
+            <a:pPr algn="l">
+              <a:spcAft>
+                <a:spcPts val="1000"/>
+              </a:spcAft>
+            </a:pPr>
+            <a:r>
+              <a:rPr sz="1600" b="0">
+                <a:solidFill>
+                  <a:srgbClr val="222222"/>
+                </a:solidFill>
+                <a:latin typeface="맑은 고딕"/>
+              </a:rPr>
+              <a:t>•  V$ARCHIVE_DEST는 내 전송, _STATUS는 목적지 너머</a:t>
+            </a:r>
+          </a:p>
+          <a:p>
+            <a:pPr algn="l">
+              <a:spcAft>
+                <a:spcPts val="1000"/>
+              </a:spcAft>
+            </a:pPr>
+            <a:r>
+              <a:rPr sz="1600" b="0">
+                <a:solidFill>
+                  <a:srgbClr val="222222"/>
+                </a:solidFill>
+                <a:latin typeface="맑은 고딕"/>
+              </a:rPr>
+              <a:t>•  적용은 managed recovery·ACTION·Apply Rate로 판정</a:t>
+            </a:r>
+          </a:p>
+          <a:p>
+            <a:pPr algn="l">
+              <a:spcAft>
+                <a:spcPts val="1000"/>
+              </a:spcAft>
+            </a:pPr>
+            <a:r>
+              <a:rPr sz="1600" b="0">
+                <a:solidFill>
+                  <a:srgbClr val="222222"/>
+                </a:solidFill>
+                <a:latin typeface="맑은 고딕"/>
+              </a:rPr>
+              <a:t>•  진단: 갈래 정하기 → ERROR 열 → 경고 로그 → 트레이스</a:t>
+            </a:r>
+          </a:p>
+          <a:p>
+            <a:pPr algn="l">
+              <a:spcAft>
+                <a:spcPts val="1000"/>
+              </a:spcAft>
+            </a:pPr>
+            <a:r>
+              <a:rPr sz="1600" b="0">
+                <a:solidFill>
+                  <a:srgbClr val="222222"/>
+                </a:solidFill>
+                <a:latin typeface="맑은 고딕"/>
+              </a:rPr>
+              <a:t>•  점검은 역할 분기·숫자 판정·신선도, Logical은 별도 뷰</a:t>
+            </a:r>
+          </a:p>
+        </p:txBody>
+      </p:sp>
+    </p:spTree>
+  </p:cSld>
+  <p:clrMapOvr>
+    <a:masterClrMapping/>
+  </p:clrMapOvr>
+</p:sld>
+</file>
+
+<file path=ppt/slides/slide52.xml><?xml version="1.0" encoding="utf-8"?>
+<p:sld xmlns:a="http://schemas.openxmlformats.org/drawingml/2006/main" xmlns:p="http://schemas.openxmlformats.org/presentationml/2006/main" xmlns:r="http://schemas.openxmlformats.org/officeDocument/2006/relationships">
+  <p:cSld>
+    <p:spTree>
+      <p:nvGrpSpPr>
+        <p:cNvPr id="1" name=""/>
+        <p:cNvGrpSpPr/>
+        <p:nvPr/>
+      </p:nvGrpSpPr>
+      <p:grpSpPr/>
+      <p:sp>
+        <p:nvSpPr>
+          <p:cNvPr id="2" name="Rectangle 1"/>
+          <p:cNvSpPr/>
+          <p:nvPr/>
+        </p:nvSpPr>
+        <p:spPr>
+          <a:xfrm>
+            <a:off x="0" y="0"/>
+            <a:ext cx="12191695" cy="1005840"/>
+          </a:xfrm>
+          <a:prstGeom prst="rect">
+            <a:avLst/>
+          </a:prstGeom>
+          <a:solidFill>
+            <a:srgbClr val="C0392B"/>
+          </a:solidFill>
+          <a:ln>
+            <a:noFill/>
+          </a:ln>
+          <a:effectLst/>
+        </p:spPr>
+        <p:style>
+          <a:lnRef idx="1">
+            <a:schemeClr val="accent1"/>
+          </a:lnRef>
+          <a:fillRef idx="3">
+            <a:schemeClr val="accent1"/>
+          </a:fillRef>
+          <a:effectRef idx="2">
+            <a:schemeClr val="accent1"/>
+          </a:effectRef>
+          <a:fontRef idx="minor">
+            <a:schemeClr val="lt1"/>
+          </a:fontRef>
+        </p:style>
+        <p:txBody>
+          <a:bodyPr rtlCol="0" anchor="ctr"/>
+          <a:lstStyle/>
+          <a:p>
+            <a:pPr algn="ctr"/>
+          </a:p>
+        </p:txBody>
+      </p:sp>
+      <p:sp>
+        <p:nvSpPr>
+          <p:cNvPr id="3" name="TextBox 2"/>
+          <p:cNvSpPr txBox="1"/>
+          <p:nvPr/>
+        </p:nvSpPr>
+        <p:spPr>
+          <a:xfrm>
+            <a:off x="548640" y="91440"/>
+            <a:ext cx="10972800" cy="777240"/>
+          </a:xfrm>
+          <a:prstGeom prst="rect">
+            <a:avLst/>
+          </a:prstGeom>
+          <a:noFill/>
+        </p:spPr>
+        <p:txBody>
+          <a:bodyPr wrap="square">
+            <a:spAutoFit/>
+          </a:bodyPr>
+          <a:lstStyle/>
+          <a:p>
+            <a:pPr algn="l">
+              <a:spcAft>
+                <a:spcPts val="600"/>
+              </a:spcAft>
+            </a:pPr>
+            <a:r>
+              <a:rPr sz="2600" b="1">
+                <a:solidFill>
+                  <a:srgbClr val="FFFFFF"/>
+                </a:solidFill>
+                <a:latin typeface="맑은 고딕"/>
+              </a:rPr>
+              <a:t>퀴즈 (1/2)</a:t>
+            </a:r>
+          </a:p>
+        </p:txBody>
+      </p:sp>
+      <p:sp>
+        <p:nvSpPr>
+          <p:cNvPr id="4" name="TextBox 3"/>
+          <p:cNvSpPr txBox="1"/>
+          <p:nvPr/>
+        </p:nvSpPr>
+        <p:spPr>
+          <a:xfrm>
+            <a:off x="640080" y="1371600"/>
+            <a:ext cx="10881360" cy="5120640"/>
+          </a:xfrm>
+          <a:prstGeom prst="rect">
+            <a:avLst/>
+          </a:prstGeom>
+          <a:noFill/>
+        </p:spPr>
+        <p:txBody>
+          <a:bodyPr wrap="square">
+            <a:spAutoFit/>
+          </a:bodyPr>
+          <a:lstStyle/>
+          <a:p>
+            <a:pPr algn="l">
+              <a:spcAft>
+                <a:spcPts val="1000"/>
+              </a:spcAft>
+            </a:pPr>
+            <a:r>
+              <a:rPr sz="1600" b="0">
+                <a:solidFill>
+                  <a:srgbClr val="222222"/>
+                </a:solidFill>
+                <a:latin typeface="맑은 고딕"/>
+              </a:rPr>
+              <a:t>•  Q1. Broker 끊김 경고의 원인을 먼저 볼 곳은? → Primary ERROR 열</a:t>
+            </a:r>
+          </a:p>
+          <a:p>
+            <a:pPr algn="l">
+              <a:spcAft>
+                <a:spcPts val="1000"/>
+              </a:spcAft>
+            </a:pPr>
+            <a:r>
+              <a:rPr sz="1600" b="0">
+                <a:solidFill>
+                  <a:srgbClr val="222222"/>
+                </a:solidFill>
+                <a:latin typeface="맑은 고딕"/>
+              </a:rPr>
+              <a:t>•  Q2. 대비용 목적지의 WRONG VALID_ROLE은? → 정상</a:t>
+            </a:r>
+          </a:p>
+          <a:p>
+            <a:pPr algn="l">
+              <a:spcAft>
+                <a:spcPts val="1000"/>
+              </a:spcAft>
+            </a:pPr>
+            <a:r>
+              <a:rPr sz="1600" b="0">
+                <a:solidFill>
+                  <a:srgbClr val="222222"/>
+                </a:solidFill>
+                <a:latin typeface="맑은 고딕"/>
+              </a:rPr>
+              <a:t>•  Q3. APPLIED 최대 순번이 현재보다 1 작으면? → 실시간 적용 정상</a:t>
+            </a:r>
+          </a:p>
+        </p:txBody>
+      </p:sp>
+    </p:spTree>
+  </p:cSld>
+  <p:clrMapOvr>
+    <a:masterClrMapping/>
+  </p:clrMapOvr>
+</p:sld>
+</file>
+
+<file path=ppt/slides/slide53.xml><?xml version="1.0" encoding="utf-8"?>
+<p:sld xmlns:a="http://schemas.openxmlformats.org/drawingml/2006/main" xmlns:p="http://schemas.openxmlformats.org/presentationml/2006/main" xmlns:r="http://schemas.openxmlformats.org/officeDocument/2006/relationships">
+  <p:cSld>
+    <p:spTree>
+      <p:nvGrpSpPr>
+        <p:cNvPr id="1" name=""/>
+        <p:cNvGrpSpPr/>
+        <p:nvPr/>
+      </p:nvGrpSpPr>
+      <p:grpSpPr/>
+      <p:sp>
+        <p:nvSpPr>
+          <p:cNvPr id="2" name="Rectangle 1"/>
+          <p:cNvSpPr/>
+          <p:nvPr/>
+        </p:nvSpPr>
+        <p:spPr>
+          <a:xfrm>
+            <a:off x="0" y="0"/>
+            <a:ext cx="12191695" cy="1005840"/>
+          </a:xfrm>
+          <a:prstGeom prst="rect">
+            <a:avLst/>
+          </a:prstGeom>
+          <a:solidFill>
+            <a:srgbClr val="C0392B"/>
+          </a:solidFill>
+          <a:ln>
+            <a:noFill/>
+          </a:ln>
+          <a:effectLst/>
+        </p:spPr>
+        <p:style>
+          <a:lnRef idx="1">
+            <a:schemeClr val="accent1"/>
+          </a:lnRef>
+          <a:fillRef idx="3">
+            <a:schemeClr val="accent1"/>
+          </a:fillRef>
+          <a:effectRef idx="2">
+            <a:schemeClr val="accent1"/>
+          </a:effectRef>
+          <a:fontRef idx="minor">
+            <a:schemeClr val="lt1"/>
+          </a:fontRef>
+        </p:style>
+        <p:txBody>
+          <a:bodyPr rtlCol="0" anchor="ctr"/>
+          <a:lstStyle/>
+          <a:p>
+            <a:pPr algn="ctr"/>
+          </a:p>
+        </p:txBody>
+      </p:sp>
+      <p:sp>
+        <p:nvSpPr>
+          <p:cNvPr id="3" name="TextBox 2"/>
+          <p:cNvSpPr txBox="1"/>
+          <p:nvPr/>
+        </p:nvSpPr>
+        <p:spPr>
+          <a:xfrm>
+            <a:off x="548640" y="91440"/>
+            <a:ext cx="10972800" cy="777240"/>
+          </a:xfrm>
+          <a:prstGeom prst="rect">
+            <a:avLst/>
+          </a:prstGeom>
+          <a:noFill/>
+        </p:spPr>
+        <p:txBody>
+          <a:bodyPr wrap="square">
+            <a:spAutoFit/>
+          </a:bodyPr>
+          <a:lstStyle/>
+          <a:p>
+            <a:pPr algn="l">
+              <a:spcAft>
+                <a:spcPts val="600"/>
+              </a:spcAft>
+            </a:pPr>
+            <a:r>
+              <a:rPr sz="2600" b="1">
+                <a:solidFill>
+                  <a:srgbClr val="FFFFFF"/>
+                </a:solidFill>
+                <a:latin typeface="맑은 고딕"/>
+              </a:rPr>
+              <a:t>퀴즈 (2/2)</a:t>
+            </a:r>
+          </a:p>
+        </p:txBody>
+      </p:sp>
+      <p:sp>
+        <p:nvSpPr>
+          <p:cNvPr id="4" name="TextBox 3"/>
+          <p:cNvSpPr txBox="1"/>
+          <p:nvPr/>
+        </p:nvSpPr>
+        <p:spPr>
+          <a:xfrm>
+            <a:off x="640080" y="1371600"/>
+            <a:ext cx="10881360" cy="5120640"/>
+          </a:xfrm>
+          <a:prstGeom prst="rect">
+            <a:avLst/>
+          </a:prstGeom>
+          <a:noFill/>
+        </p:spPr>
+        <p:txBody>
+          <a:bodyPr wrap="square">
+            <a:spAutoFit/>
+          </a:bodyPr>
+          <a:lstStyle/>
+          <a:p>
+            <a:pPr algn="l">
+              <a:spcAft>
+                <a:spcPts val="1000"/>
+              </a:spcAft>
+            </a:pPr>
+            <a:r>
+              <a:rPr sz="1600" b="0">
+                <a:solidFill>
+                  <a:srgbClr val="222222"/>
+                </a:solidFill>
+                <a:latin typeface="맑은 고딕"/>
+              </a:rPr>
+              <a:t>•  Q4. 리스너 복구 후에도 ERROR가 남으면? → REOPEN_SECS 대기</a:t>
+            </a:r>
+          </a:p>
+          <a:p>
+            <a:pPr algn="l">
+              <a:spcAft>
+                <a:spcPts val="1000"/>
+              </a:spcAft>
+            </a:pPr>
+            <a:r>
+              <a:rPr sz="1600" b="0">
+                <a:solidFill>
+                  <a:srgbClr val="222222"/>
+                </a:solidFill>
+                <a:latin typeface="맑은 고딕"/>
+              </a:rPr>
+              <a:t>•  Q5. LOG_ARCHIVE_TRACE=6이면? → 수준 2와 4</a:t>
+            </a:r>
+          </a:p>
+          <a:p>
+            <a:pPr algn="l">
+              <a:spcAft>
+                <a:spcPts val="1000"/>
+              </a:spcAft>
+            </a:pPr>
+            <a:r>
+              <a:rPr sz="1600" b="0">
+                <a:solidFill>
+                  <a:srgbClr val="222222"/>
+                </a:solidFill>
+                <a:latin typeface="맑은 고딕"/>
+              </a:rPr>
+              <a:t>•  Q6. Logical에서 물리용 점검이 무경보면? → 뷰가 비어 오판</a:t>
+            </a:r>
+          </a:p>
+        </p:txBody>
+      </p:sp>
+    </p:spTree>
+  </p:cSld>
+  <p:clrMapOvr>
+    <a:masterClrMapping/>
+  </p:clrMapOvr>
+</p:sld>
+</file>
+
+<file path=ppt/slides/slide54.xml><?xml version="1.0" encoding="utf-8"?>
+<p:sld xmlns:a="http://schemas.openxmlformats.org/drawingml/2006/main" xmlns:p="http://schemas.openxmlformats.org/presentationml/2006/main" xmlns:r="http://schemas.openxmlformats.org/officeDocument/2006/relationships">
+  <p:cSld>
+    <p:spTree>
+      <p:nvGrpSpPr>
+        <p:cNvPr id="1" name=""/>
+        <p:cNvGrpSpPr/>
+        <p:nvPr/>
+      </p:nvGrpSpPr>
+      <p:grpSpPr/>
+      <p:sp>
+        <p:nvSpPr>
+          <p:cNvPr id="2" name="Rectangle 1"/>
+          <p:cNvSpPr/>
+          <p:nvPr/>
+        </p:nvSpPr>
+        <p:spPr>
+          <a:xfrm>
+            <a:off x="0" y="0"/>
+            <a:ext cx="12191695" cy="1005840"/>
+          </a:xfrm>
+          <a:prstGeom prst="rect">
+            <a:avLst/>
+          </a:prstGeom>
+          <a:solidFill>
+            <a:srgbClr val="C0392B"/>
+          </a:solidFill>
+          <a:ln>
+            <a:noFill/>
+          </a:ln>
+          <a:effectLst/>
+        </p:spPr>
+        <p:style>
+          <a:lnRef idx="1">
+            <a:schemeClr val="accent1"/>
+          </a:lnRef>
+          <a:fillRef idx="3">
+            <a:schemeClr val="accent1"/>
+          </a:fillRef>
+          <a:effectRef idx="2">
+            <a:schemeClr val="accent1"/>
+          </a:effectRef>
+          <a:fontRef idx="minor">
+            <a:schemeClr val="lt1"/>
+          </a:fontRef>
+        </p:style>
+        <p:txBody>
+          <a:bodyPr rtlCol="0" anchor="ctr"/>
+          <a:lstStyle/>
+          <a:p>
+            <a:pPr algn="ctr"/>
+          </a:p>
+        </p:txBody>
+      </p:sp>
+      <p:sp>
+        <p:nvSpPr>
+          <p:cNvPr id="3" name="TextBox 2"/>
+          <p:cNvSpPr txBox="1"/>
+          <p:nvPr/>
+        </p:nvSpPr>
+        <p:spPr>
+          <a:xfrm>
+            <a:off x="548640" y="91440"/>
+            <a:ext cx="10972800" cy="777240"/>
+          </a:xfrm>
+          <a:prstGeom prst="rect">
+            <a:avLst/>
+          </a:prstGeom>
+          <a:noFill/>
+        </p:spPr>
+        <p:txBody>
+          <a:bodyPr wrap="square">
+            <a:spAutoFit/>
+          </a:bodyPr>
+          <a:lstStyle/>
+          <a:p>
+            <a:pPr algn="l">
+              <a:spcAft>
+                <a:spcPts val="600"/>
+              </a:spcAft>
+            </a:pPr>
+            <a:r>
+              <a:rPr sz="2600" b="1">
+                <a:solidFill>
+                  <a:srgbClr val="FFFFFF"/>
+                </a:solidFill>
+                <a:latin typeface="맑은 고딕"/>
+              </a:rPr>
+              <a:t>실습 개요</a:t>
+            </a:r>
+          </a:p>
+        </p:txBody>
+      </p:sp>
+      <p:sp>
+        <p:nvSpPr>
+          <p:cNvPr id="4" name="TextBox 3"/>
+          <p:cNvSpPr txBox="1"/>
+          <p:nvPr/>
+        </p:nvSpPr>
+        <p:spPr>
+          <a:xfrm>
+            <a:off x="640080" y="1371600"/>
+            <a:ext cx="10881360" cy="5120640"/>
+          </a:xfrm>
+          <a:prstGeom prst="rect">
+            <a:avLst/>
+          </a:prstGeom>
+          <a:noFill/>
+        </p:spPr>
+        <p:txBody>
+          <a:bodyPr wrap="square">
+            <a:spAutoFit/>
+          </a:bodyPr>
+          <a:lstStyle/>
+          <a:p>
+            <a:pPr algn="l">
+              <a:spcAft>
+                <a:spcPts val="1000"/>
+              </a:spcAft>
+            </a:pPr>
+            <a:r>
+              <a:rPr sz="1600" b="0">
+                <a:solidFill>
+                  <a:srgbClr val="222222"/>
+                </a:solidFill>
+                <a:latin typeface="맑은 고딕"/>
+              </a:rPr>
+              <a:t>•  01 로그 파일과 SRL / 02 아카이브 목적지 (15.3, 15.4)</a:t>
+            </a:r>
+          </a:p>
+          <a:p>
+            <a:pPr algn="l">
+              <a:spcAft>
+                <a:spcPts val="1000"/>
+              </a:spcAft>
+            </a:pPr>
+            <a:r>
+              <a:rPr sz="1600" b="0">
+                <a:solidFill>
+                  <a:srgbClr val="222222"/>
+                </a:solidFill>
+                <a:latin typeface="맑은 고딕"/>
+              </a:rPr>
+              <a:t>•  03 전송 중단 재현과 진단 (15.6)</a:t>
+            </a:r>
+          </a:p>
+          <a:p>
+            <a:pPr algn="l">
+              <a:spcAft>
+                <a:spcPts val="1000"/>
+              </a:spcAft>
+            </a:pPr>
+            <a:r>
+              <a:rPr sz="1600" b="0">
+                <a:solidFill>
+                  <a:srgbClr val="222222"/>
+                </a:solidFill>
+                <a:latin typeface="맑은 고딕"/>
+              </a:rPr>
+              <a:t>•  04 적용의 진행과 APPLIED (15.5)</a:t>
+            </a:r>
+          </a:p>
+          <a:p>
+            <a:pPr algn="l">
+              <a:spcAft>
+                <a:spcPts val="1000"/>
+              </a:spcAft>
+            </a:pPr>
+            <a:r>
+              <a:rPr sz="1600" b="0">
+                <a:solidFill>
+                  <a:srgbClr val="222222"/>
+                </a:solidFill>
+                <a:latin typeface="맑은 고딕"/>
+              </a:rPr>
+              <a:t>•  05 LOG_ARCHIVE_TRACE (15.7)</a:t>
+            </a:r>
+          </a:p>
+          <a:p>
+            <a:pPr algn="l">
+              <a:spcAft>
+                <a:spcPts val="1000"/>
+              </a:spcAft>
+            </a:pPr>
+            <a:r>
+              <a:rPr sz="1600" b="0">
+                <a:solidFill>
+                  <a:srgbClr val="222222"/>
+                </a:solidFill>
+                <a:latin typeface="맑은 고딕"/>
+              </a:rPr>
+              <a:t>•  06 상시 점검 스크립트 (15.8)</a:t>
+            </a:r>
+          </a:p>
+          <a:p>
+            <a:pPr algn="l">
+              <a:spcAft>
+                <a:spcPts val="1000"/>
+              </a:spcAft>
+            </a:pPr>
+            <a:r>
+              <a:rPr sz="1600" b="0">
+                <a:solidFill>
+                  <a:srgbClr val="222222"/>
+                </a:solidFill>
+                <a:latin typeface="맑은 고딕"/>
+              </a:rPr>
+              <a:t>•  07 Logical Standby 모니터링 (15.9)</a:t>
             </a:r>
           </a:p>
         </p:txBody>
@@ -15226,7 +18160,7 @@
                 </a:solidFill>
                 <a:latin typeface="맑은 고딕"/>
               </a:rPr>
-              <a:t>세 가지 이유</a:t>
+              <a:t>관찰 지점은 역할마다 다르다</a:t>
             </a:r>
           </a:p>
         </p:txBody>
@@ -15265,7 +18199,7 @@
                 </a:solidFill>
                 <a:latin typeface="맑은 고딕"/>
               </a:rPr>
-              <a:t>아래층이 필요한 까닭</a:t>
+              <a:t>보낸 쪽은 보낸 것만, 받은 쪽은 받은 것만 안다</a:t>
             </a:r>
           </a:p>
         </p:txBody>
@@ -15304,7 +18238,7 @@
                 </a:solidFill>
                 <a:latin typeface="맑은 고딕"/>
               </a:rPr>
-              <a:t>•  **① Broker 를 쓸 수 없는 환경** — JDBC 전용 감시, 운영 정책</a:t>
+              <a:t>•  Primary: 보냈는가, 실패했는가</a:t>
             </a:r>
           </a:p>
           <a:p>
@@ -15320,7 +18254,7 @@
                 </a:solidFill>
                 <a:latin typeface="맑은 고딕"/>
               </a:rPr>
-              <a:t>•  **② 왜 그 값이 나왔는지** 요약은 말해 주지 않는다</a:t>
+              <a:t>•  Standby: 받았는가, 적용했는가, 얼마나 늦었는가</a:t>
             </a:r>
           </a:p>
           <a:p>
@@ -15336,7 +18270,7 @@
                 </a:solidFill>
                 <a:latin typeface="맑은 고딕"/>
               </a:rPr>
-              <a:t>•  **③ 장애의 상세는 아래층에 있다**</a:t>
+              <a:t>•  같은 V$ARCHIVED_LOG도 역할에 따라 내용이 다름</a:t>
             </a:r>
           </a:p>
           <a:p>
@@ -15352,7 +18286,7 @@
                 </a:solidFill>
                 <a:latin typeface="맑은 고딕"/>
               </a:rPr>
-              <a:t>•  Broker 는 `ORA-16857`, V$ 뷰는 **`ORA-12541`**</a:t>
+              <a:t>•  진단 쿼리는 양쪽에서 함께 돌린다</a:t>
             </a:r>
           </a:p>
         </p:txBody>
@@ -15384,7 +18318,7 @@
         <p:spPr>
           <a:xfrm>
             <a:off x="0" y="0"/>
-            <a:ext cx="12191695" cy="6858000"/>
+            <a:ext cx="12191695" cy="1005840"/>
           </a:xfrm>
           <a:prstGeom prst="rect">
             <a:avLst/>
@@ -15427,8 +18361,8 @@
         </p:nvSpPr>
         <p:spPr>
           <a:xfrm>
-            <a:off x="822960" y="2011680"/>
-            <a:ext cx="10515600" cy="1097280"/>
+            <a:off x="548640" y="91440"/>
+            <a:ext cx="10972800" cy="777240"/>
           </a:xfrm>
           <a:prstGeom prst="rect">
             <a:avLst/>
@@ -15447,13 +18381,13 @@
               </a:spcAft>
             </a:pPr>
             <a:r>
-              <a:rPr sz="4000" b="1">
+              <a:rPr sz="2600" b="1">
                 <a:solidFill>
                   <a:srgbClr val="FFFFFF"/>
                 </a:solidFill>
                 <a:latin typeface="맑은 고딕"/>
               </a:rPr>
-              <a:t>15.2</a:t>
+              <a:t>증상, 위치, 원인, 과정</a:t>
             </a:r>
           </a:p>
         </p:txBody>
@@ -15466,8 +18400,8 @@
         </p:nvSpPr>
         <p:spPr>
           <a:xfrm>
-            <a:off x="822960" y="3017520"/>
-            <a:ext cx="10515600" cy="914400"/>
+            <a:off x="640080" y="1078992"/>
+            <a:ext cx="10881360" cy="457200"/>
           </a:xfrm>
           <a:prstGeom prst="rect">
             <a:avLst/>
@@ -15486,71 +18420,27 @@
               </a:spcAft>
             </a:pPr>
             <a:r>
-              <a:rPr sz="2800" b="1">
-                <a:solidFill>
-                  <a:srgbClr val="FFFFFF"/>
-                </a:solidFill>
-                <a:latin typeface="맑은 고딕"/>
-              </a:rPr>
-              <a:t>로그 파일의 상태</a:t>
-            </a:r>
-          </a:p>
-        </p:txBody>
-      </p:sp>
-      <p:sp>
-        <p:nvSpPr>
-          <p:cNvPr id="5" name="Rectangle 4"/>
-          <p:cNvSpPr/>
-          <p:nvPr/>
-        </p:nvSpPr>
-        <p:spPr>
-          <a:xfrm>
-            <a:off x="822960" y="4114800"/>
-            <a:ext cx="5486400" cy="54864"/>
-          </a:xfrm>
-          <a:prstGeom prst="rect">
-            <a:avLst/>
-          </a:prstGeom>
-          <a:solidFill>
-            <a:srgbClr val="FFFFFF"/>
-          </a:solidFill>
-          <a:ln>
-            <a:noFill/>
-          </a:ln>
-          <a:effectLst/>
-        </p:spPr>
-        <p:style>
-          <a:lnRef idx="1">
-            <a:schemeClr val="accent1"/>
-          </a:lnRef>
-          <a:fillRef idx="3">
-            <a:schemeClr val="accent1"/>
-          </a:fillRef>
-          <a:effectRef idx="2">
-            <a:schemeClr val="accent1"/>
-          </a:effectRef>
-          <a:fontRef idx="minor">
-            <a:schemeClr val="lt1"/>
-          </a:fontRef>
-        </p:style>
-        <p:txBody>
-          <a:bodyPr rtlCol="0" anchor="ctr"/>
-          <a:lstStyle/>
-          <a:p>
-            <a:pPr algn="ctr"/>
-          </a:p>
-        </p:txBody>
-      </p:sp>
-      <p:sp>
-        <p:nvSpPr>
-          <p:cNvPr id="6" name="TextBox 5"/>
+              <a:rPr sz="1500" b="0">
+                <a:solidFill>
+                  <a:srgbClr val="5A6672"/>
+                </a:solidFill>
+                <a:latin typeface="맑은 고딕"/>
+              </a:rPr>
+              <a:t>위층에서 끝나면 아래로 내려가지 않는다</a:t>
+            </a:r>
+          </a:p>
+        </p:txBody>
+      </p:sp>
+      <p:sp>
+        <p:nvSpPr>
+          <p:cNvPr id="5" name="TextBox 4"/>
           <p:cNvSpPr txBox="1"/>
           <p:nvPr/>
         </p:nvSpPr>
         <p:spPr>
           <a:xfrm>
-            <a:off x="822960" y="4297680"/>
-            <a:ext cx="10058400" cy="2011680"/>
+            <a:off x="640080" y="1737360"/>
+            <a:ext cx="10881360" cy="4754880"/>
           </a:xfrm>
           <a:prstGeom prst="rect">
             <a:avLst/>
@@ -15565,33 +18455,81 @@
           <a:p>
             <a:pPr algn="l">
               <a:spcAft>
-                <a:spcPts val="800"/>
-              </a:spcAft>
-            </a:pPr>
-            <a:r>
-              <a:rPr sz="1600" b="0">
-                <a:solidFill>
-                  <a:srgbClr val="FFFFFF"/>
-                </a:solidFill>
-                <a:latin typeface="맑은 고딕"/>
-              </a:rPr>
-              <a:t>•  Primary 와 Standby 가 다르다</a:t>
-            </a:r>
-          </a:p>
-          <a:p>
-            <a:pPr algn="l">
-              <a:spcAft>
-                <a:spcPts val="800"/>
-              </a:spcAft>
-            </a:pPr>
-            <a:r>
-              <a:rPr sz="1600" b="0">
-                <a:solidFill>
-                  <a:srgbClr val="FFFFFF"/>
-                </a:solidFill>
-                <a:latin typeface="맑은 고딕"/>
-              </a:rPr>
-              <a:t>•  SRL 이 진짜 정보다</a:t>
+                <a:spcPts val="1000"/>
+              </a:spcAft>
+            </a:pPr>
+            <a:r>
+              <a:rPr sz="1700" b="0">
+                <a:solidFill>
+                  <a:srgbClr val="222222"/>
+                </a:solidFill>
+                <a:latin typeface="맑은 고딕"/>
+              </a:rPr>
+              <a:t>•  증상: SHOW CONFIGURATION, lag</a:t>
+            </a:r>
+          </a:p>
+          <a:p>
+            <a:pPr algn="l">
+              <a:spcAft>
+                <a:spcPts val="1000"/>
+              </a:spcAft>
+            </a:pPr>
+            <a:r>
+              <a:rPr sz="1700" b="0">
+                <a:solidFill>
+                  <a:srgbClr val="222222"/>
+                </a:solidFill>
+                <a:latin typeface="맑은 고딕"/>
+              </a:rPr>
+              <a:t>•  위치: V$ARCHIVE_DEST, V$DATAGUARD_PROCESS</a:t>
+            </a:r>
+          </a:p>
+          <a:p>
+            <a:pPr algn="l">
+              <a:spcAft>
+                <a:spcPts val="1000"/>
+              </a:spcAft>
+            </a:pPr>
+            <a:r>
+              <a:rPr sz="1700" b="0">
+                <a:solidFill>
+                  <a:srgbClr val="222222"/>
+                </a:solidFill>
+                <a:latin typeface="맑은 고딕"/>
+              </a:rPr>
+              <a:t>•  원인: ERROR 열, V$DATAGUARD_STATUS, 경고 로그</a:t>
+            </a:r>
+          </a:p>
+          <a:p>
+            <a:pPr algn="l">
+              <a:spcAft>
+                <a:spcPts val="1000"/>
+              </a:spcAft>
+            </a:pPr>
+            <a:r>
+              <a:rPr sz="1700" b="0">
+                <a:solidFill>
+                  <a:srgbClr val="222222"/>
+                </a:solidFill>
+                <a:latin typeface="맑은 고딕"/>
+              </a:rPr>
+              <a:t>•  과정: LOG_ARCHIVE_TRACE 트레이스</a:t>
+            </a:r>
+          </a:p>
+          <a:p>
+            <a:pPr algn="l">
+              <a:spcAft>
+                <a:spcPts val="1000"/>
+              </a:spcAft>
+            </a:pPr>
+            <a:r>
+              <a:rPr sz="1700" b="0">
+                <a:solidFill>
+                  <a:srgbClr val="222222"/>
+                </a:solidFill>
+                <a:latin typeface="맑은 고딕"/>
+              </a:rPr>
+              <a:t>•  대부분의 장애는 원인 층에서 끝남</a:t>
             </a:r>
           </a:p>
         </p:txBody>
@@ -15623,7 +18561,7 @@
         <p:spPr>
           <a:xfrm>
             <a:off x="0" y="0"/>
-            <a:ext cx="12191695" cy="1005840"/>
+            <a:ext cx="12191695" cy="6858000"/>
           </a:xfrm>
           <a:prstGeom prst="rect">
             <a:avLst/>
@@ -15666,8 +18604,8 @@
         </p:nvSpPr>
         <p:spPr>
           <a:xfrm>
-            <a:off x="548640" y="91440"/>
-            <a:ext cx="10972800" cy="777240"/>
+            <a:off x="822960" y="2011680"/>
+            <a:ext cx="10515600" cy="1097280"/>
           </a:xfrm>
           <a:prstGeom prst="rect">
             <a:avLst/>
@@ -15686,13 +18624,13 @@
               </a:spcAft>
             </a:pPr>
             <a:r>
-              <a:rPr sz="2600" b="1">
+              <a:rPr sz="4000" b="1">
                 <a:solidFill>
                   <a:srgbClr val="FFFFFF"/>
                 </a:solidFill>
                 <a:latin typeface="맑은 고딕"/>
               </a:rPr>
-              <a:t>Primary 의 온라인 리두</a:t>
+              <a:t>15.3</a:t>
             </a:r>
           </a:p>
         </p:txBody>
@@ -15705,8 +18643,8 @@
         </p:nvSpPr>
         <p:spPr>
           <a:xfrm>
-            <a:off x="640080" y="1078992"/>
-            <a:ext cx="10881360" cy="457200"/>
+            <a:off x="822960" y="3017520"/>
+            <a:ext cx="10515600" cy="914400"/>
           </a:xfrm>
           <a:prstGeom prst="rect">
             <a:avLst/>
@@ -15725,27 +18663,71 @@
               </a:spcAft>
             </a:pPr>
             <a:r>
-              <a:rPr sz="1500" b="0">
-                <a:solidFill>
-                  <a:srgbClr val="5A6672"/>
-                </a:solidFill>
-                <a:latin typeface="맑은 고딕"/>
-              </a:rPr>
-              <a:t>기본 판정</a:t>
-            </a:r>
-          </a:p>
-        </p:txBody>
-      </p:sp>
-      <p:sp>
-        <p:nvSpPr>
-          <p:cNvPr id="5" name="TextBox 4"/>
+              <a:rPr sz="2800" b="1">
+                <a:solidFill>
+                  <a:srgbClr val="FFFFFF"/>
+                </a:solidFill>
+                <a:latin typeface="맑은 고딕"/>
+              </a:rPr>
+              <a:t>역할별 뷰 지도</a:t>
+            </a:r>
+          </a:p>
+        </p:txBody>
+      </p:sp>
+      <p:sp>
+        <p:nvSpPr>
+          <p:cNvPr id="5" name="Rectangle 4"/>
+          <p:cNvSpPr/>
+          <p:nvPr/>
+        </p:nvSpPr>
+        <p:spPr>
+          <a:xfrm>
+            <a:off x="822960" y="4114800"/>
+            <a:ext cx="5486400" cy="54864"/>
+          </a:xfrm>
+          <a:prstGeom prst="rect">
+            <a:avLst/>
+          </a:prstGeom>
+          <a:solidFill>
+            <a:srgbClr val="FFFFFF"/>
+          </a:solidFill>
+          <a:ln>
+            <a:noFill/>
+          </a:ln>
+          <a:effectLst/>
+        </p:spPr>
+        <p:style>
+          <a:lnRef idx="1">
+            <a:schemeClr val="accent1"/>
+          </a:lnRef>
+          <a:fillRef idx="3">
+            <a:schemeClr val="accent1"/>
+          </a:fillRef>
+          <a:effectRef idx="2">
+            <a:schemeClr val="accent1"/>
+          </a:effectRef>
+          <a:fontRef idx="minor">
+            <a:schemeClr val="lt1"/>
+          </a:fontRef>
+        </p:style>
+        <p:txBody>
+          <a:bodyPr rtlCol="0" anchor="ctr"/>
+          <a:lstStyle/>
+          <a:p>
+            <a:pPr algn="ctr"/>
+          </a:p>
+        </p:txBody>
+      </p:sp>
+      <p:sp>
+        <p:nvSpPr>
+          <p:cNvPr id="6" name="TextBox 5"/>
           <p:cNvSpPr txBox="1"/>
           <p:nvPr/>
         </p:nvSpPr>
         <p:spPr>
           <a:xfrm>
-            <a:off x="640080" y="1737360"/>
-            <a:ext cx="10881360" cy="4754880"/>
+            <a:off x="822960" y="4297680"/>
+            <a:ext cx="10058400" cy="2011680"/>
           </a:xfrm>
           <a:prstGeom prst="rect">
             <a:avLst/>
@@ -15760,65 +18742,49 @@
           <a:p>
             <a:pPr algn="l">
               <a:spcAft>
-                <a:spcPts val="1000"/>
-              </a:spcAft>
-            </a:pPr>
-            <a:r>
-              <a:rPr sz="1700" b="0">
-                <a:solidFill>
-                  <a:srgbClr val="222222"/>
-                </a:solidFill>
-                <a:latin typeface="맑은 고딕"/>
-              </a:rPr>
-              <a:t>•  `CURRENT` 는 **정확히 하나** (실측 그룹 2, 시퀀스 74)</a:t>
-            </a:r>
-          </a:p>
-          <a:p>
-            <a:pPr algn="l">
-              <a:spcAft>
-                <a:spcPts val="1000"/>
-              </a:spcAft>
-            </a:pPr>
-            <a:r>
-              <a:rPr sz="1700" b="0">
-                <a:solidFill>
-                  <a:srgbClr val="222222"/>
-                </a:solidFill>
-                <a:latin typeface="맑은 고딕"/>
-              </a:rPr>
-              <a:t>•  그 그룹만 `ARCHIVED=NO` — **정상이다**</a:t>
-            </a:r>
-          </a:p>
-          <a:p>
-            <a:pPr algn="l">
-              <a:spcAft>
-                <a:spcPts val="1000"/>
-              </a:spcAft>
-            </a:pPr>
-            <a:r>
-              <a:rPr sz="1700" b="0">
-                <a:solidFill>
-                  <a:srgbClr val="222222"/>
-                </a:solidFill>
-                <a:latin typeface="맑은 고딕"/>
-              </a:rPr>
-              <a:t>•  `ACTIVE` + `ARCHIVED=NO` 가 쌓이면 아카이버가 밀린다</a:t>
-            </a:r>
-          </a:p>
-          <a:p>
-            <a:pPr algn="l">
-              <a:spcAft>
-                <a:spcPts val="1000"/>
-              </a:spcAft>
-            </a:pPr>
-            <a:r>
-              <a:rPr sz="1700" b="0">
-                <a:solidFill>
-                  <a:srgbClr val="222222"/>
-                </a:solidFill>
-                <a:latin typeface="맑은 고딕"/>
-              </a:rPr>
-              <a:t>•  `V$LOGFILE` 의 `STATUS` 는 **비어 있는 것이 정상**</a:t>
+                <a:spcPts val="800"/>
+              </a:spcAft>
+            </a:pPr>
+            <a:r>
+              <a:rPr sz="1600" b="0">
+                <a:solidFill>
+                  <a:srgbClr val="FFFFFF"/>
+                </a:solidFill>
+                <a:latin typeface="맑은 고딕"/>
+              </a:rPr>
+              <a:t>•  출발점은 V$DATABASE</a:t>
+            </a:r>
+          </a:p>
+          <a:p>
+            <a:pPr algn="l">
+              <a:spcAft>
+                <a:spcPts val="800"/>
+              </a:spcAft>
+            </a:pPr>
+            <a:r>
+              <a:rPr sz="1600" b="0">
+                <a:solidFill>
+                  <a:srgbClr val="FFFFFF"/>
+                </a:solidFill>
+                <a:latin typeface="맑은 고딕"/>
+              </a:rPr>
+              <a:t>•  Primary와 Standby의 뷰 묶음</a:t>
+            </a:r>
+          </a:p>
+          <a:p>
+            <a:pPr algn="l">
+              <a:spcAft>
+                <a:spcPts val="800"/>
+              </a:spcAft>
+            </a:pPr>
+            <a:r>
+              <a:rPr sz="1600" b="0">
+                <a:solidFill>
+                  <a:srgbClr val="FFFFFF"/>
+                </a:solidFill>
+                <a:latin typeface="맑은 고딕"/>
+              </a:rPr>
+              <a:t>•  빈 결과를 읽는 법</a:t>
             </a:r>
           </a:p>
         </p:txBody>
@@ -15919,7 +18885,7 @@
                 </a:solidFill>
                 <a:latin typeface="맑은 고딕"/>
               </a:rPr>
-              <a:t>Standby 의 온라인 리두</a:t>
+              <a:t>V$DATABASE에서 시작한다</a:t>
             </a:r>
           </a:p>
         </p:txBody>
@@ -15958,7 +18924,7 @@
                 </a:solidFill>
                 <a:latin typeface="맑은 고딕"/>
               </a:rPr>
-              <a:t>쓰이지 않는다</a:t>
+              <a:t>역할을 모르면 다른 뷰를 잘못 읽는다</a:t>
             </a:r>
           </a:p>
         </p:txBody>
@@ -15997,7 +18963,7 @@
                 </a:solidFill>
                 <a:latin typeface="맑은 고딕"/>
               </a:rPr>
-              <a:t>•  `SEQUENCE#` 가 **전부 0**</a:t>
+              <a:t>•  DATABASE_ROLE, OPEN_MODE로 역할과 상태 확인</a:t>
             </a:r>
           </a:p>
           <a:p>
@@ -16013,7 +18979,7 @@
                 </a:solidFill>
                 <a:latin typeface="맑은 고딕"/>
               </a:rPr>
-              <a:t>•  리두는 Primary 가 만들고 Standby 는 받기만 한다</a:t>
+              <a:t>•  PROTECTION_MODE는 설정, PROTECTION_LEVEL은 실제</a:t>
             </a:r>
           </a:p>
           <a:p>
@@ -16029,7 +18995,7 @@
                 </a:solidFill>
                 <a:latin typeface="맑은 고딕"/>
               </a:rPr>
-              <a:t>•  그러면 왜 있는가 — **역할이 바뀐 뒤에 쓰려고**</a:t>
+              <a:t>•  동기화가 깨지면 LEVEL이 RESYNCHRONIZATION</a:t>
             </a:r>
           </a:p>
           <a:p>
@@ -16045,7 +19011,23 @@
                 </a:solidFill>
                 <a:latin typeface="맑은 고딕"/>
               </a:rPr>
-              <a:t>•  14장 `VERBOSE` 의 `Future` 구성이 계산한 대상</a:t>
+              <a:t>•  SWITCHOVER_STATUS의 GAP 값도 함께</a:t>
+            </a:r>
+          </a:p>
+          <a:p>
+            <a:pPr algn="l">
+              <a:spcAft>
+                <a:spcPts val="1000"/>
+              </a:spcAft>
+            </a:pPr>
+            <a:r>
+              <a:rPr sz="1700" b="0">
+                <a:solidFill>
+                  <a:srgbClr val="222222"/>
+                </a:solidFill>
+                <a:latin typeface="맑은 고딕"/>
+              </a:rPr>
+              <a:t>•  FORCE_LOGGING이 YES인지 확인</a:t>
             </a:r>
           </a:p>
         </p:txBody>
